--- a/GARMENT_OFFICE_FINAL_PRESENTATION/03_PRESENTATION/Garment_Office_Design_Pitch.pptx
+++ b/GARMENT_OFFICE_FINAL_PRESENTATION/03_PRESENTATION/Garment_Office_Design_Pitch.pptx
@@ -3180,8 +3180,8 @@
         </p:nvSpPr>
         <p:spPr>
           <a:xfrm>
-            <a:off x="317500" y="1905000"/>
-            <a:ext cx="6223000" cy="3302000"/>
+            <a:off x="0" y="0"/>
+            <a:ext cx="6604000" cy="6858000"/>
           </a:xfrm>
           <a:prstGeom prst="rect">
             <a:avLst/>
@@ -3217,120 +3217,50 @@
       </p:sp>
       <p:sp>
         <p:nvSpPr>
-          <p:cNvPr id="5" name="TextBox 4"/>
-          <p:cNvSpPr txBox="1"/>
-          <p:nvPr/>
-        </p:nvSpPr>
-        <p:spPr>
-          <a:xfrm>
-            <a:off x="508000" y="2095500"/>
-            <a:ext cx="5715000" cy="254000"/>
-          </a:xfrm>
-          <a:prstGeom prst="rect">
-            <a:avLst/>
-          </a:prstGeom>
-          <a:noFill/>
-        </p:spPr>
-        <p:txBody>
-          <a:bodyPr wrap="square">
-            <a:spAutoFit/>
-          </a:bodyPr>
-          <a:lstStyle/>
-          <a:p>
-            <a:r>
-              <a:rPr sz="1400" b="1">
-                <a:solidFill>
-                  <a:srgbClr val="9FD3B0"/>
-                </a:solidFill>
-                <a:latin typeface="Inter"/>
-              </a:rPr>
-              <a:t>INTERIOR DESIGN PROPOSAL  |  GROUND FLOOR</a:t>
-            </a:r>
-          </a:p>
-        </p:txBody>
-      </p:sp>
-      <p:sp>
-        <p:nvSpPr>
-          <p:cNvPr id="6" name="TextBox 5"/>
-          <p:cNvSpPr txBox="1"/>
-          <p:nvPr/>
-        </p:nvSpPr>
-        <p:spPr>
-          <a:xfrm>
-            <a:off x="508000" y="2349500"/>
-            <a:ext cx="5715000" cy="1397000"/>
-          </a:xfrm>
-          <a:prstGeom prst="rect">
-            <a:avLst/>
-          </a:prstGeom>
-          <a:noFill/>
-        </p:spPr>
-        <p:txBody>
-          <a:bodyPr wrap="square">
-            <a:spAutoFit/>
-          </a:bodyPr>
-          <a:lstStyle/>
-          <a:p>
-            <a:r>
-              <a:rPr sz="4000" b="1">
-                <a:solidFill>
-                  <a:srgbClr val="FFFFFF"/>
-                </a:solidFill>
-                <a:latin typeface="Inter"/>
-              </a:rPr>
-              <a:t>Premium International Fashion Corporate Headquarters &amp; Design Development Centre</a:t>
-            </a:r>
-          </a:p>
-        </p:txBody>
-      </p:sp>
-      <p:sp>
-        <p:nvSpPr>
-          <p:cNvPr id="7" name="TextBox 6"/>
-          <p:cNvSpPr txBox="1"/>
-          <p:nvPr/>
-        </p:nvSpPr>
-        <p:spPr>
-          <a:xfrm>
-            <a:off x="508000" y="4000500"/>
-            <a:ext cx="5715000" cy="762000"/>
-          </a:xfrm>
-          <a:prstGeom prst="rect">
-            <a:avLst/>
-          </a:prstGeom>
-          <a:noFill/>
-        </p:spPr>
-        <p:txBody>
-          <a:bodyPr wrap="square">
-            <a:spAutoFit/>
-          </a:bodyPr>
-          <a:lstStyle/>
-          <a:p>
-            <a:r>
-              <a:rPr sz="1600" b="0">
-                <a:solidFill>
-                  <a:srgbClr val="D9E2DC"/>
-                </a:solidFill>
-                <a:latin typeface="Inter"/>
-              </a:rPr>
-              <a:t>Stage II Knitting Apparel Ltd.  ·  Stage II Knitting Apparel Unit-1  ·  Zara Fashion</a:t>
-            </a:r>
-          </a:p>
-          <a:p>
-            <a:r>
-              <a:rPr sz="1600" b="0">
-                <a:solidFill>
-                  <a:srgbClr val="D9E2DC"/>
-                </a:solidFill>
-                <a:latin typeface="Inter"/>
-              </a:rPr>
-              <a:t>Holding 329/2, Ward 15, Vogra, Bason, Gazipur</a:t>
-            </a:r>
+          <p:cNvPr id="5" name="Rectangle 4"/>
+          <p:cNvSpPr/>
+          <p:nvPr/>
+        </p:nvSpPr>
+        <p:spPr>
+          <a:xfrm>
+            <a:off x="381000" y="381000"/>
+            <a:ext cx="5715000" cy="698500"/>
+          </a:xfrm>
+          <a:prstGeom prst="rect">
+            <a:avLst/>
+          </a:prstGeom>
+          <a:solidFill>
+            <a:srgbClr val="FFFFFF"/>
+          </a:solidFill>
+          <a:ln>
+            <a:noFill/>
+          </a:ln>
+        </p:spPr>
+        <p:style>
+          <a:lnRef idx="1">
+            <a:schemeClr val="accent1"/>
+          </a:lnRef>
+          <a:fillRef idx="3">
+            <a:schemeClr val="accent1"/>
+          </a:fillRef>
+          <a:effectRef idx="2">
+            <a:schemeClr val="accent1"/>
+          </a:effectRef>
+          <a:fontRef idx="minor">
+            <a:schemeClr val="lt1"/>
+          </a:fontRef>
+        </p:style>
+        <p:txBody>
+          <a:bodyPr rtlCol="0" anchor="ctr"/>
+          <a:lstStyle/>
+          <a:p>
+            <a:pPr algn="ctr"/>
           </a:p>
         </p:txBody>
       </p:sp>
       <p:pic>
         <p:nvPicPr>
-          <p:cNvPr id="8" name="Picture 7" descr="logo_zara_fashion_profile.png"/>
+          <p:cNvPr id="6" name="Picture 5" descr="logo_zara_fashion_profile.png"/>
           <p:cNvPicPr>
             <a:picLocks noChangeAspect="1"/>
           </p:cNvPicPr>
@@ -3344,8 +3274,8 @@
         </p:blipFill>
         <p:spPr>
           <a:xfrm>
-            <a:off x="508000" y="508000"/>
-            <a:ext cx="1407886" cy="406400"/>
+            <a:off x="508000" y="495300"/>
+            <a:ext cx="1587500" cy="458247"/>
           </a:xfrm>
           <a:prstGeom prst="rect">
             <a:avLst/>
@@ -3354,7 +3284,7 @@
       </p:pic>
       <p:pic>
         <p:nvPicPr>
-          <p:cNvPr id="9" name="Picture 8" descr="logo_stage2_ltd.png"/>
+          <p:cNvPr id="7" name="Picture 6" descr="logo_stage2_ltd.png"/>
           <p:cNvPicPr>
             <a:picLocks noChangeAspect="1"/>
           </p:cNvPicPr>
@@ -3368,8 +3298,8 @@
         </p:blipFill>
         <p:spPr>
           <a:xfrm>
-            <a:off x="2159000" y="508000"/>
-            <a:ext cx="1449330" cy="406400"/>
+            <a:off x="2349500" y="495300"/>
+            <a:ext cx="1587500" cy="445144"/>
           </a:xfrm>
           <a:prstGeom prst="rect">
             <a:avLst/>
@@ -3378,7 +3308,7 @@
       </p:pic>
       <p:pic>
         <p:nvPicPr>
-          <p:cNvPr id="10" name="Picture 9" descr="logo_stage2_unit1.png"/>
+          <p:cNvPr id="8" name="Picture 7" descr="logo_stage2_unit1.png"/>
           <p:cNvPicPr>
             <a:picLocks noChangeAspect="1"/>
           </p:cNvPicPr>
@@ -3392,8 +3322,8 @@
         </p:blipFill>
         <p:spPr>
           <a:xfrm>
-            <a:off x="3810000" y="508000"/>
-            <a:ext cx="1447800" cy="406400"/>
+            <a:off x="4191000" y="495300"/>
+            <a:ext cx="1587500" cy="445614"/>
           </a:xfrm>
           <a:prstGeom prst="rect">
             <a:avLst/>
@@ -3402,13 +3332,150 @@
       </p:pic>
       <p:sp>
         <p:nvSpPr>
+          <p:cNvPr id="9" name="TextBox 8"/>
+          <p:cNvSpPr txBox="1"/>
+          <p:nvPr/>
+        </p:nvSpPr>
+        <p:spPr>
+          <a:xfrm>
+            <a:off x="508000" y="1905000"/>
+            <a:ext cx="5715000" cy="254000"/>
+          </a:xfrm>
+          <a:prstGeom prst="rect">
+            <a:avLst/>
+          </a:prstGeom>
+          <a:noFill/>
+        </p:spPr>
+        <p:txBody>
+          <a:bodyPr wrap="square">
+            <a:spAutoFit/>
+          </a:bodyPr>
+          <a:lstStyle/>
+          <a:p>
+            <a:r>
+              <a:rPr sz="1300" b="1">
+                <a:solidFill>
+                  <a:srgbClr val="9FD3B0"/>
+                </a:solidFill>
+                <a:latin typeface="Inter"/>
+              </a:rPr>
+              <a:t>INTERIOR DESIGN PROPOSAL  |  GROUND FLOOR</a:t>
+            </a:r>
+          </a:p>
+        </p:txBody>
+      </p:sp>
+      <p:sp>
+        <p:nvSpPr>
+          <p:cNvPr id="10" name="TextBox 9"/>
+          <p:cNvSpPr txBox="1"/>
+          <p:nvPr/>
+        </p:nvSpPr>
+        <p:spPr>
+          <a:xfrm>
+            <a:off x="508000" y="2222500"/>
+            <a:ext cx="5715000" cy="2667000"/>
+          </a:xfrm>
+          <a:prstGeom prst="rect">
+            <a:avLst/>
+          </a:prstGeom>
+          <a:noFill/>
+        </p:spPr>
+        <p:txBody>
+          <a:bodyPr wrap="square">
+            <a:spAutoFit/>
+          </a:bodyPr>
+          <a:lstStyle/>
+          <a:p>
+            <a:r>
+              <a:rPr sz="3600" b="1">
+                <a:solidFill>
+                  <a:srgbClr val="FFFFFF"/>
+                </a:solidFill>
+                <a:latin typeface="Inter"/>
+              </a:rPr>
+              <a:t>Premium International Fashion Corporate Headquarters &amp; Design Development Centre</a:t>
+            </a:r>
+          </a:p>
+        </p:txBody>
+      </p:sp>
+      <p:sp>
+        <p:nvSpPr>
           <p:cNvPr id="11" name="TextBox 10"/>
           <p:cNvSpPr txBox="1"/>
           <p:nvPr/>
         </p:nvSpPr>
         <p:spPr>
           <a:xfrm>
-            <a:off x="508000" y="6604000"/>
+            <a:off x="508000" y="5016500"/>
+            <a:ext cx="5715000" cy="762000"/>
+          </a:xfrm>
+          <a:prstGeom prst="rect">
+            <a:avLst/>
+          </a:prstGeom>
+          <a:noFill/>
+        </p:spPr>
+        <p:txBody>
+          <a:bodyPr wrap="square">
+            <a:spAutoFit/>
+          </a:bodyPr>
+          <a:lstStyle/>
+          <a:p>
+            <a:r>
+              <a:rPr sz="1500" b="0">
+                <a:solidFill>
+                  <a:srgbClr val="D9E2DC"/>
+                </a:solidFill>
+                <a:latin typeface="Inter"/>
+              </a:rPr>
+              <a:t>Stage II Knitting Apparel Ltd.  ·  Stage II Knitting Apparel Unit-1  ·  Zara Fashion</a:t>
+            </a:r>
+          </a:p>
+          <a:p>
+            <a:r>
+              <a:rPr sz="1500" b="0">
+                <a:solidFill>
+                  <a:srgbClr val="D9E2DC"/>
+                </a:solidFill>
+                <a:latin typeface="Inter"/>
+              </a:rPr>
+              <a:t>Holding 329/2, Ward 15, Vogra, Bason, Gazipur</a:t>
+            </a:r>
+          </a:p>
+        </p:txBody>
+      </p:sp>
+      <p:pic>
+        <p:nvPicPr>
+          <p:cNvPr id="12" name="Picture 11" descr="tagline_quality_compliance_commitment.png"/>
+          <p:cNvPicPr>
+            <a:picLocks noChangeAspect="1"/>
+          </p:cNvPicPr>
+          <p:nvPr/>
+        </p:nvPicPr>
+        <p:blipFill>
+          <a:blip r:embed="rId6"/>
+          <a:stretch>
+            <a:fillRect/>
+          </a:stretch>
+        </p:blipFill>
+        <p:spPr>
+          <a:xfrm>
+            <a:off x="508000" y="5905500"/>
+            <a:ext cx="3937000" cy="235212"/>
+          </a:xfrm>
+          <a:prstGeom prst="rect">
+            <a:avLst/>
+          </a:prstGeom>
+        </p:spPr>
+      </p:pic>
+      <p:sp>
+        <p:nvSpPr>
+          <p:cNvPr id="13" name="TextBox 12"/>
+          <p:cNvSpPr txBox="1"/>
+          <p:nvPr/>
+        </p:nvSpPr>
+        <p:spPr>
+          <a:xfrm>
+            <a:off x="508000" y="6578600"/>
             <a:ext cx="8255000" cy="190500"/>
           </a:xfrm>
           <a:prstGeom prst="rect">
@@ -3436,14 +3503,14 @@
       </p:sp>
       <p:sp>
         <p:nvSpPr>
-          <p:cNvPr id="12" name="TextBox 11"/>
-          <p:cNvSpPr txBox="1"/>
-          <p:nvPr/>
-        </p:nvSpPr>
-        <p:spPr>
-          <a:xfrm>
-            <a:off x="11176000" y="6604000"/>
-            <a:ext cx="635000" cy="190500"/>
+          <p:cNvPr id="14" name="TextBox 13"/>
+          <p:cNvSpPr txBox="1"/>
+          <p:nvPr/>
+        </p:nvSpPr>
+        <p:spPr>
+          <a:xfrm>
+            <a:off x="11049000" y="6578600"/>
+            <a:ext cx="762000" cy="190500"/>
           </a:xfrm>
           <a:prstGeom prst="rect">
             <a:avLst/>
@@ -3503,21 +3570,21 @@
         <p:spPr>
           <a:xfrm>
             <a:off x="508000" y="609600"/>
-            <a:ext cx="9525000" cy="254000"/>
-          </a:xfrm>
-          <a:prstGeom prst="rect">
-            <a:avLst/>
-          </a:prstGeom>
-          <a:noFill/>
-        </p:spPr>
-        <p:txBody>
-          <a:bodyPr wrap="square">
-            <a:spAutoFit/>
-          </a:bodyPr>
-          <a:lstStyle/>
-          <a:p>
-            <a:r>
-              <a:rPr sz="1400" b="1">
+            <a:ext cx="3683000" cy="254000"/>
+          </a:xfrm>
+          <a:prstGeom prst="rect">
+            <a:avLst/>
+          </a:prstGeom>
+          <a:noFill/>
+        </p:spPr>
+        <p:txBody>
+          <a:bodyPr wrap="square">
+            <a:spAutoFit/>
+          </a:bodyPr>
+          <a:lstStyle/>
+          <a:p>
+            <a:r>
+              <a:rPr sz="1300" b="1">
                 <a:solidFill>
                   <a:srgbClr val="26673D"/>
                 </a:solidFill>
@@ -3536,22 +3603,22 @@
         </p:nvSpPr>
         <p:spPr>
           <a:xfrm>
-            <a:off x="508000" y="825500"/>
-            <a:ext cx="6985000" cy="889000"/>
-          </a:xfrm>
-          <a:prstGeom prst="rect">
-            <a:avLst/>
-          </a:prstGeom>
-          <a:noFill/>
-        </p:spPr>
-        <p:txBody>
-          <a:bodyPr wrap="square">
-            <a:spAutoFit/>
-          </a:bodyPr>
-          <a:lstStyle/>
-          <a:p>
-            <a:r>
-              <a:rPr sz="3000" b="1">
+            <a:off x="508000" y="863600"/>
+            <a:ext cx="3683000" cy="1270000"/>
+          </a:xfrm>
+          <a:prstGeom prst="rect">
+            <a:avLst/>
+          </a:prstGeom>
+          <a:noFill/>
+        </p:spPr>
+        <p:txBody>
+          <a:bodyPr wrap="square">
+            <a:spAutoFit/>
+          </a:bodyPr>
+          <a:lstStyle/>
+          <a:p>
+            <a:r>
+              <a:rPr sz="2600" b="1">
                 <a:solidFill>
                   <a:srgbClr val="1E1E1C"/>
                 </a:solidFill>
@@ -3570,22 +3637,22 @@
         </p:nvSpPr>
         <p:spPr>
           <a:xfrm>
-            <a:off x="508000" y="1905000"/>
-            <a:ext cx="3556000" cy="4445000"/>
-          </a:xfrm>
-          <a:prstGeom prst="rect">
-            <a:avLst/>
-          </a:prstGeom>
-          <a:noFill/>
-        </p:spPr>
-        <p:txBody>
-          <a:bodyPr wrap="square">
-            <a:spAutoFit/>
-          </a:bodyPr>
-          <a:lstStyle/>
-          <a:p>
-            <a:r>
-              <a:rPr sz="1500" b="0">
+            <a:off x="508000" y="2286000"/>
+            <a:ext cx="3683000" cy="4191000"/>
+          </a:xfrm>
+          <a:prstGeom prst="rect">
+            <a:avLst/>
+          </a:prstGeom>
+          <a:noFill/>
+        </p:spPr>
+        <p:txBody>
+          <a:bodyPr wrap="square">
+            <a:spAutoFit/>
+          </a:bodyPr>
+          <a:lstStyle/>
+          <a:p>
+            <a:r>
+              <a:rPr sz="1400" b="0">
                 <a:solidFill>
                   <a:srgbClr val="5A5750"/>
                 </a:solidFill>
@@ -3596,18 +3663,29 @@
           </a:p>
           <a:p>
             <a:r>
-              <a:rPr sz="1500" b="0">
+              <a:rPr sz="1400" b="0">
                 <a:solidFill>
                   <a:srgbClr val="5A5750"/>
                 </a:solidFill>
                 <a:latin typeface="Inter"/>
               </a:rPr>
+              <a:t/>
+            </a:r>
+          </a:p>
+          <a:p>
+            <a:r>
+              <a:rPr sz="1400" b="0">
+                <a:solidFill>
+                  <a:srgbClr val="5A5750"/>
+                </a:solidFill>
+                <a:latin typeface="Inter"/>
+              </a:rPr>
               <a:t>- 86 in screen on an oak slat media wall</a:t>
             </a:r>
           </a:p>
           <a:p>
             <a:r>
-              <a:rPr sz="1500" b="0">
+              <a:rPr sz="1400" b="0">
                 <a:solidFill>
                   <a:srgbClr val="5A5750"/>
                 </a:solidFill>
@@ -3618,7 +3696,7 @@
           </a:p>
           <a:p>
             <a:r>
-              <a:rPr sz="1500" b="0">
+              <a:rPr sz="1400" b="0">
                 <a:solidFill>
                   <a:srgbClr val="5A5750"/>
                 </a:solidFill>
@@ -3629,7 +3707,7 @@
           </a:p>
           <a:p>
             <a:r>
-              <a:rPr sz="1500" b="0">
+              <a:rPr sz="1400" b="0">
                 <a:solidFill>
                   <a:srgbClr val="5A5750"/>
                 </a:solidFill>
@@ -3766,7 +3844,7 @@
         </p:nvSpPr>
         <p:spPr>
           <a:xfrm>
-            <a:off x="508000" y="6604000"/>
+            <a:off x="508000" y="6578600"/>
             <a:ext cx="8255000" cy="190500"/>
           </a:xfrm>
           <a:prstGeom prst="rect">
@@ -3800,8 +3878,8 @@
         </p:nvSpPr>
         <p:spPr>
           <a:xfrm>
-            <a:off x="11176000" y="6604000"/>
-            <a:ext cx="635000" cy="190500"/>
+            <a:off x="11049000" y="6578600"/>
+            <a:ext cx="762000" cy="190500"/>
           </a:xfrm>
           <a:prstGeom prst="rect">
             <a:avLst/>
@@ -3861,21 +3939,21 @@
         <p:spPr>
           <a:xfrm>
             <a:off x="508000" y="609600"/>
-            <a:ext cx="9525000" cy="254000"/>
-          </a:xfrm>
-          <a:prstGeom prst="rect">
-            <a:avLst/>
-          </a:prstGeom>
-          <a:noFill/>
-        </p:spPr>
-        <p:txBody>
-          <a:bodyPr wrap="square">
-            <a:spAutoFit/>
-          </a:bodyPr>
-          <a:lstStyle/>
-          <a:p>
-            <a:r>
-              <a:rPr sz="1400" b="1">
+            <a:ext cx="3683000" cy="254000"/>
+          </a:xfrm>
+          <a:prstGeom prst="rect">
+            <a:avLst/>
+          </a:prstGeom>
+          <a:noFill/>
+        </p:spPr>
+        <p:txBody>
+          <a:bodyPr wrap="square">
+            <a:spAutoFit/>
+          </a:bodyPr>
+          <a:lstStyle/>
+          <a:p>
+            <a:r>
+              <a:rPr sz="1300" b="1">
                 <a:solidFill>
                   <a:srgbClr val="26673D"/>
                 </a:solidFill>
@@ -3894,22 +3972,22 @@
         </p:nvSpPr>
         <p:spPr>
           <a:xfrm>
-            <a:off x="508000" y="825500"/>
-            <a:ext cx="6985000" cy="889000"/>
-          </a:xfrm>
-          <a:prstGeom prst="rect">
-            <a:avLst/>
-          </a:prstGeom>
-          <a:noFill/>
-        </p:spPr>
-        <p:txBody>
-          <a:bodyPr wrap="square">
-            <a:spAutoFit/>
-          </a:bodyPr>
-          <a:lstStyle/>
-          <a:p>
-            <a:r>
-              <a:rPr sz="3000" b="1">
+            <a:off x="508000" y="863600"/>
+            <a:ext cx="3683000" cy="1270000"/>
+          </a:xfrm>
+          <a:prstGeom prst="rect">
+            <a:avLst/>
+          </a:prstGeom>
+          <a:noFill/>
+        </p:spPr>
+        <p:txBody>
+          <a:bodyPr wrap="square">
+            <a:spAutoFit/>
+          </a:bodyPr>
+          <a:lstStyle/>
+          <a:p>
+            <a:r>
+              <a:rPr sz="2600" b="1">
                 <a:solidFill>
                   <a:srgbClr val="1E1E1C"/>
                 </a:solidFill>
@@ -3928,22 +4006,22 @@
         </p:nvSpPr>
         <p:spPr>
           <a:xfrm>
-            <a:off x="508000" y="1905000"/>
-            <a:ext cx="3556000" cy="4445000"/>
-          </a:xfrm>
-          <a:prstGeom prst="rect">
-            <a:avLst/>
-          </a:prstGeom>
-          <a:noFill/>
-        </p:spPr>
-        <p:txBody>
-          <a:bodyPr wrap="square">
-            <a:spAutoFit/>
-          </a:bodyPr>
-          <a:lstStyle/>
-          <a:p>
-            <a:r>
-              <a:rPr sz="1500" b="0">
+            <a:off x="508000" y="2286000"/>
+            <a:ext cx="3683000" cy="4191000"/>
+          </a:xfrm>
+          <a:prstGeom prst="rect">
+            <a:avLst/>
+          </a:prstGeom>
+          <a:noFill/>
+        </p:spPr>
+        <p:txBody>
+          <a:bodyPr wrap="square">
+            <a:spAutoFit/>
+          </a:bodyPr>
+          <a:lstStyle/>
+          <a:p>
+            <a:r>
+              <a:rPr sz="1400" b="0">
                 <a:solidFill>
                   <a:srgbClr val="5A5750"/>
                 </a:solidFill>
@@ -3954,18 +4032,29 @@
           </a:p>
           <a:p>
             <a:r>
-              <a:rPr sz="1500" b="0">
+              <a:rPr sz="1400" b="0">
                 <a:solidFill>
                   <a:srgbClr val="5A5750"/>
                 </a:solidFill>
                 <a:latin typeface="Inter"/>
               </a:rPr>
+              <a:t/>
+            </a:r>
+          </a:p>
+          <a:p>
+            <a:r>
+              <a:rPr sz="1400" b="0">
+                <a:solidFill>
+                  <a:srgbClr val="5A5750"/>
+                </a:solidFill>
+                <a:latin typeface="Inter"/>
+              </a:rPr>
               <a:t>- 48 dedicated workstations + 6 guest seats (about 50 % growth)</a:t>
             </a:r>
           </a:p>
           <a:p>
             <a:r>
-              <a:rPr sz="1500" b="0">
+              <a:rPr sz="1400" b="0">
                 <a:solidFill>
                   <a:srgbClr val="5A5750"/>
                 </a:solidFill>
@@ -3976,7 +4065,7 @@
           </a:p>
           <a:p>
             <a:r>
-              <a:rPr sz="1500" b="0">
+              <a:rPr sz="1400" b="0">
                 <a:solidFill>
                   <a:srgbClr val="5A5750"/>
                 </a:solidFill>
@@ -3987,7 +4076,7 @@
           </a:p>
           <a:p>
             <a:r>
-              <a:rPr sz="1500" b="0">
+              <a:rPr sz="1400" b="0">
                 <a:solidFill>
                   <a:srgbClr val="5A5750"/>
                 </a:solidFill>
@@ -4183,7 +4272,7 @@
         </p:nvSpPr>
         <p:spPr>
           <a:xfrm>
-            <a:off x="508000" y="6604000"/>
+            <a:off x="508000" y="6578600"/>
             <a:ext cx="8255000" cy="190500"/>
           </a:xfrm>
           <a:prstGeom prst="rect">
@@ -4217,8 +4306,8 @@
         </p:nvSpPr>
         <p:spPr>
           <a:xfrm>
-            <a:off x="11176000" y="6604000"/>
-            <a:ext cx="635000" cy="190500"/>
+            <a:off x="11049000" y="6578600"/>
+            <a:ext cx="762000" cy="190500"/>
           </a:xfrm>
           <a:prstGeom prst="rect">
             <a:avLst/>
@@ -4278,21 +4367,21 @@
         <p:spPr>
           <a:xfrm>
             <a:off x="508000" y="609600"/>
-            <a:ext cx="9525000" cy="254000"/>
-          </a:xfrm>
-          <a:prstGeom prst="rect">
-            <a:avLst/>
-          </a:prstGeom>
-          <a:noFill/>
-        </p:spPr>
-        <p:txBody>
-          <a:bodyPr wrap="square">
-            <a:spAutoFit/>
-          </a:bodyPr>
-          <a:lstStyle/>
-          <a:p>
-            <a:r>
-              <a:rPr sz="1400" b="1">
+            <a:ext cx="3683000" cy="254000"/>
+          </a:xfrm>
+          <a:prstGeom prst="rect">
+            <a:avLst/>
+          </a:prstGeom>
+          <a:noFill/>
+        </p:spPr>
+        <p:txBody>
+          <a:bodyPr wrap="square">
+            <a:spAutoFit/>
+          </a:bodyPr>
+          <a:lstStyle/>
+          <a:p>
+            <a:r>
+              <a:rPr sz="1300" b="1">
                 <a:solidFill>
                   <a:srgbClr val="26673D"/>
                 </a:solidFill>
@@ -4311,22 +4400,22 @@
         </p:nvSpPr>
         <p:spPr>
           <a:xfrm>
-            <a:off x="508000" y="825500"/>
-            <a:ext cx="6985000" cy="889000"/>
-          </a:xfrm>
-          <a:prstGeom prst="rect">
-            <a:avLst/>
-          </a:prstGeom>
-          <a:noFill/>
-        </p:spPr>
-        <p:txBody>
-          <a:bodyPr wrap="square">
-            <a:spAutoFit/>
-          </a:bodyPr>
-          <a:lstStyle/>
-          <a:p>
-            <a:r>
-              <a:rPr sz="3000" b="1">
+            <a:off x="508000" y="863600"/>
+            <a:ext cx="3683000" cy="1270000"/>
+          </a:xfrm>
+          <a:prstGeom prst="rect">
+            <a:avLst/>
+          </a:prstGeom>
+          <a:noFill/>
+        </p:spPr>
+        <p:txBody>
+          <a:bodyPr wrap="square">
+            <a:spAutoFit/>
+          </a:bodyPr>
+          <a:lstStyle/>
+          <a:p>
+            <a:r>
+              <a:rPr sz="2600" b="1">
                 <a:solidFill>
                   <a:srgbClr val="1E1E1C"/>
                 </a:solidFill>
@@ -4345,22 +4434,22 @@
         </p:nvSpPr>
         <p:spPr>
           <a:xfrm>
-            <a:off x="508000" y="1905000"/>
-            <a:ext cx="3556000" cy="4445000"/>
-          </a:xfrm>
-          <a:prstGeom prst="rect">
-            <a:avLst/>
-          </a:prstGeom>
-          <a:noFill/>
-        </p:spPr>
-        <p:txBody>
-          <a:bodyPr wrap="square">
-            <a:spAutoFit/>
-          </a:bodyPr>
-          <a:lstStyle/>
-          <a:p>
-            <a:r>
-              <a:rPr sz="1500" b="0">
+            <a:off x="508000" y="2286000"/>
+            <a:ext cx="3683000" cy="4191000"/>
+          </a:xfrm>
+          <a:prstGeom prst="rect">
+            <a:avLst/>
+          </a:prstGeom>
+          <a:noFill/>
+        </p:spPr>
+        <p:txBody>
+          <a:bodyPr wrap="square">
+            <a:spAutoFit/>
+          </a:bodyPr>
+          <a:lstStyle/>
+          <a:p>
+            <a:r>
+              <a:rPr sz="1400" b="0">
                 <a:solidFill>
                   <a:srgbClr val="5A5750"/>
                 </a:solidFill>
@@ -4371,18 +4460,29 @@
           </a:p>
           <a:p>
             <a:r>
-              <a:rPr sz="1500" b="0">
+              <a:rPr sz="1400" b="0">
                 <a:solidFill>
                   <a:srgbClr val="5A5750"/>
                 </a:solidFill>
                 <a:latin typeface="Inter"/>
               </a:rPr>
+              <a:t/>
+            </a:r>
+          </a:p>
+          <a:p>
+            <a:r>
+              <a:rPr sz="1400" b="0">
+                <a:solidFill>
+                  <a:srgbClr val="5A5750"/>
+                </a:solidFill>
+                <a:latin typeface="Inter"/>
+              </a:rPr>
               <a:t>- Designer desks at the east windows</a:t>
             </a:r>
           </a:p>
           <a:p>
             <a:r>
-              <a:rPr sz="1500" b="0">
+              <a:rPr sz="1400" b="0">
                 <a:solidFill>
                   <a:srgbClr val="5A5750"/>
                 </a:solidFill>
@@ -4393,7 +4493,7 @@
           </a:p>
           <a:p>
             <a:r>
-              <a:rPr sz="1500" b="0">
+              <a:rPr sz="1400" b="0">
                 <a:solidFill>
                   <a:srgbClr val="5A5750"/>
                 </a:solidFill>
@@ -4404,7 +4504,7 @@
           </a:p>
           <a:p>
             <a:r>
-              <a:rPr sz="1500" b="0">
+              <a:rPr sz="1400" b="0">
                 <a:solidFill>
                   <a:srgbClr val="5A5750"/>
                 </a:solidFill>
@@ -4415,7 +4515,7 @@
           </a:p>
           <a:p>
             <a:r>
-              <a:rPr sz="1500" b="0">
+              <a:rPr sz="1400" b="0">
                 <a:solidFill>
                   <a:srgbClr val="5A5750"/>
                 </a:solidFill>
@@ -4611,7 +4711,7 @@
         </p:nvSpPr>
         <p:spPr>
           <a:xfrm>
-            <a:off x="508000" y="6604000"/>
+            <a:off x="508000" y="6578600"/>
             <a:ext cx="8255000" cy="190500"/>
           </a:xfrm>
           <a:prstGeom prst="rect">
@@ -4645,8 +4745,8 @@
         </p:nvSpPr>
         <p:spPr>
           <a:xfrm>
-            <a:off x="11176000" y="6604000"/>
-            <a:ext cx="635000" cy="190500"/>
+            <a:off x="11049000" y="6578600"/>
+            <a:ext cx="762000" cy="190500"/>
           </a:xfrm>
           <a:prstGeom prst="rect">
             <a:avLst/>
@@ -4720,7 +4820,7 @@
           <a:lstStyle/>
           <a:p>
             <a:r>
-              <a:rPr sz="1400" b="1">
+              <a:rPr sz="1300" b="1">
                 <a:solidFill>
                   <a:srgbClr val="26673D"/>
                 </a:solidFill>
@@ -4739,22 +4839,22 @@
         </p:nvSpPr>
         <p:spPr>
           <a:xfrm>
-            <a:off x="508000" y="825500"/>
-            <a:ext cx="6985000" cy="889000"/>
-          </a:xfrm>
-          <a:prstGeom prst="rect">
-            <a:avLst/>
-          </a:prstGeom>
-          <a:noFill/>
-        </p:spPr>
-        <p:txBody>
-          <a:bodyPr wrap="square">
-            <a:spAutoFit/>
-          </a:bodyPr>
-          <a:lstStyle/>
-          <a:p>
-            <a:r>
-              <a:rPr sz="3000" b="1">
+            <a:off x="508000" y="863600"/>
+            <a:ext cx="10795000" cy="762000"/>
+          </a:xfrm>
+          <a:prstGeom prst="rect">
+            <a:avLst/>
+          </a:prstGeom>
+          <a:noFill/>
+        </p:spPr>
+        <p:txBody>
+          <a:bodyPr wrap="square">
+            <a:spAutoFit/>
+          </a:bodyPr>
+          <a:lstStyle/>
+          <a:p>
+            <a:r>
+              <a:rPr sz="2800" b="1">
                 <a:solidFill>
                   <a:srgbClr val="1E1E1C"/>
                 </a:solidFill>
@@ -5127,7 +5227,7 @@
         </p:nvSpPr>
         <p:spPr>
           <a:xfrm>
-            <a:off x="508000" y="6604000"/>
+            <a:off x="508000" y="6578600"/>
             <a:ext cx="8255000" cy="190500"/>
           </a:xfrm>
           <a:prstGeom prst="rect">
@@ -5161,8 +5261,8 @@
         </p:nvSpPr>
         <p:spPr>
           <a:xfrm>
-            <a:off x="11176000" y="6604000"/>
-            <a:ext cx="635000" cy="190500"/>
+            <a:off x="11049000" y="6578600"/>
+            <a:ext cx="762000" cy="190500"/>
           </a:xfrm>
           <a:prstGeom prst="rect">
             <a:avLst/>
@@ -5222,21 +5322,21 @@
         <p:spPr>
           <a:xfrm>
             <a:off x="508000" y="609600"/>
-            <a:ext cx="9525000" cy="254000"/>
-          </a:xfrm>
-          <a:prstGeom prst="rect">
-            <a:avLst/>
-          </a:prstGeom>
-          <a:noFill/>
-        </p:spPr>
-        <p:txBody>
-          <a:bodyPr wrap="square">
-            <a:spAutoFit/>
-          </a:bodyPr>
-          <a:lstStyle/>
-          <a:p>
-            <a:r>
-              <a:rPr sz="1400" b="1">
+            <a:ext cx="4064000" cy="254000"/>
+          </a:xfrm>
+          <a:prstGeom prst="rect">
+            <a:avLst/>
+          </a:prstGeom>
+          <a:noFill/>
+        </p:spPr>
+        <p:txBody>
+          <a:bodyPr wrap="square">
+            <a:spAutoFit/>
+          </a:bodyPr>
+          <a:lstStyle/>
+          <a:p>
+            <a:r>
+              <a:rPr sz="1300" b="1">
                 <a:solidFill>
                   <a:srgbClr val="26673D"/>
                 </a:solidFill>
@@ -5255,22 +5355,22 @@
         </p:nvSpPr>
         <p:spPr>
           <a:xfrm>
-            <a:off x="508000" y="825500"/>
-            <a:ext cx="6985000" cy="889000"/>
-          </a:xfrm>
-          <a:prstGeom prst="rect">
-            <a:avLst/>
-          </a:prstGeom>
-          <a:noFill/>
-        </p:spPr>
-        <p:txBody>
-          <a:bodyPr wrap="square">
-            <a:spAutoFit/>
-          </a:bodyPr>
-          <a:lstStyle/>
-          <a:p>
-            <a:r>
-              <a:rPr sz="3000" b="1">
+            <a:off x="508000" y="863600"/>
+            <a:ext cx="4064000" cy="762000"/>
+          </a:xfrm>
+          <a:prstGeom prst="rect">
+            <a:avLst/>
+          </a:prstGeom>
+          <a:noFill/>
+        </p:spPr>
+        <p:txBody>
+          <a:bodyPr wrap="square">
+            <a:spAutoFit/>
+          </a:bodyPr>
+          <a:lstStyle/>
+          <a:p>
+            <a:r>
+              <a:rPr sz="2800" b="1">
                 <a:solidFill>
                   <a:srgbClr val="1E1E1C"/>
                 </a:solidFill>
@@ -5290,8 +5390,8 @@
           <p:nvPr/>
         </p:nvGraphicFramePr>
         <p:xfrm>
-          <a:off x="508000" y="1905000"/>
-          <a:ext cx="3937000" cy="2743200"/>
+          <a:off x="508000" y="1841500"/>
+          <a:ext cx="4064000" cy="2628900"/>
         </p:xfrm>
         <a:graphic>
           <a:graphicData uri="http://schemas.openxmlformats.org/drawingml/2006/table">
@@ -5300,23 +5400,32 @@
                 <a:tableStyleId>{5C22544A-7EE6-4342-B048-85BDC9FD1C3A}</a:tableStyleId>
               </a:tblPr>
               <a:tblGrid>
-                <a:gridCol w="1312333"/>
-                <a:gridCol w="1312333"/>
-                <a:gridCol w="1312334"/>
+                <a:gridCol w="1354666"/>
+                <a:gridCol w="1354666"/>
+                <a:gridCol w="1354668"/>
               </a:tblGrid>
-              <a:tr h="304800">
+              <a:tr h="292100">
                 <a:tc>
                   <a:txBody>
                     <a:bodyPr/>
                     <a:lstStyle/>
                     <a:p>
                       <a:r>
-                        <a:rPr sz="1200"/>
+                        <a:rPr sz="1000" b="1">
+                          <a:solidFill>
+                            <a:srgbClr val="26673D"/>
+                          </a:solidFill>
+                          <a:latin typeface="Inter"/>
+                        </a:rPr>
                         <a:t>Code</a:t>
                       </a:r>
                     </a:p>
                   </a:txBody>
-                  <a:tcPr/>
+                  <a:tcPr>
+                    <a:solidFill>
+                      <a:srgbClr val="EEEAE2"/>
+                    </a:solidFill>
+                  </a:tcPr>
                 </a:tc>
                 <a:tc>
                   <a:txBody>
@@ -5324,12 +5433,21 @@
                     <a:lstStyle/>
                     <a:p>
                       <a:r>
-                        <a:rPr sz="1200"/>
+                        <a:rPr sz="1000" b="1">
+                          <a:solidFill>
+                            <a:srgbClr val="26673D"/>
+                          </a:solidFill>
+                          <a:latin typeface="Inter"/>
+                        </a:rPr>
                         <a:t>Finish</a:t>
                       </a:r>
                     </a:p>
                   </a:txBody>
-                  <a:tcPr/>
+                  <a:tcPr>
+                    <a:solidFill>
+                      <a:srgbClr val="EEEAE2"/>
+                    </a:solidFill>
+                  </a:tcPr>
                 </a:tc>
                 <a:tc>
                   <a:txBody>
@@ -5337,27 +5455,45 @@
                     <a:lstStyle/>
                     <a:p>
                       <a:r>
-                        <a:rPr sz="1200"/>
+                        <a:rPr sz="1000" b="1">
+                          <a:solidFill>
+                            <a:srgbClr val="26673D"/>
+                          </a:solidFill>
+                          <a:latin typeface="Inter"/>
+                        </a:rPr>
                         <a:t>Where</a:t>
                       </a:r>
                     </a:p>
                   </a:txBody>
-                  <a:tcPr/>
+                  <a:tcPr>
+                    <a:solidFill>
+                      <a:srgbClr val="EEEAE2"/>
+                    </a:solidFill>
+                  </a:tcPr>
                 </a:tc>
               </a:tr>
-              <a:tr h="304800">
+              <a:tr h="292100">
                 <a:tc>
                   <a:txBody>
                     <a:bodyPr/>
                     <a:lstStyle/>
                     <a:p>
                       <a:r>
-                        <a:rPr sz="1200"/>
+                        <a:rPr sz="1200" b="1">
+                          <a:solidFill>
+                            <a:srgbClr val="26673D"/>
+                          </a:solidFill>
+                          <a:latin typeface="Inter"/>
+                        </a:rPr>
                         <a:t>TZ-01</a:t>
                       </a:r>
                     </a:p>
                   </a:txBody>
-                  <a:tcPr/>
+                  <a:tcPr>
+                    <a:solidFill>
+                      <a:srgbClr val="FFFFFF"/>
+                    </a:solidFill>
+                  </a:tcPr>
                 </a:tc>
                 <a:tc>
                   <a:txBody>
@@ -5365,12 +5501,21 @@
                     <a:lstStyle/>
                     <a:p>
                       <a:r>
-                        <a:rPr sz="1200"/>
+                        <a:rPr sz="1200" b="0">
+                          <a:solidFill>
+                            <a:srgbClr val="1E1E1C"/>
+                          </a:solidFill>
+                          <a:latin typeface="Inter"/>
+                        </a:rPr>
                         <a:t>Terrazzo-look porcelain, warm beige</a:t>
                       </a:r>
                     </a:p>
                   </a:txBody>
-                  <a:tcPr/>
+                  <a:tcPr>
+                    <a:solidFill>
+                      <a:srgbClr val="FFFFFF"/>
+                    </a:solidFill>
+                  </a:tcPr>
                 </a:tc>
                 <a:tc>
                   <a:txBody>
@@ -5378,27 +5523,45 @@
                     <a:lstStyle/>
                     <a:p>
                       <a:r>
-                        <a:rPr sz="1200"/>
+                        <a:rPr sz="1200" b="0">
+                          <a:solidFill>
+                            <a:srgbClr val="1E1E1C"/>
+                          </a:solidFill>
+                          <a:latin typeface="Inter"/>
+                        </a:rPr>
                         <a:t>visitor floors</a:t>
                       </a:r>
                     </a:p>
                   </a:txBody>
-                  <a:tcPr/>
+                  <a:tcPr>
+                    <a:solidFill>
+                      <a:srgbClr val="FFFFFF"/>
+                    </a:solidFill>
+                  </a:tcPr>
                 </a:tc>
               </a:tr>
-              <a:tr h="304800">
+              <a:tr h="292100">
                 <a:tc>
                   <a:txBody>
                     <a:bodyPr/>
                     <a:lstStyle/>
                     <a:p>
                       <a:r>
-                        <a:rPr sz="1200"/>
+                        <a:rPr sz="1200" b="1">
+                          <a:solidFill>
+                            <a:srgbClr val="26673D"/>
+                          </a:solidFill>
+                          <a:latin typeface="Inter"/>
+                        </a:rPr>
                         <a:t>WD-01</a:t>
                       </a:r>
                     </a:p>
                   </a:txBody>
-                  <a:tcPr/>
+                  <a:tcPr>
+                    <a:solidFill>
+                      <a:srgbClr val="FFFFFF"/>
+                    </a:solidFill>
+                  </a:tcPr>
                 </a:tc>
                 <a:tc>
                   <a:txBody>
@@ -5406,12 +5569,21 @@
                     <a:lstStyle/>
                     <a:p>
                       <a:r>
-                        <a:rPr sz="1200"/>
+                        <a:rPr sz="1200" b="0">
+                          <a:solidFill>
+                            <a:srgbClr val="1E1E1C"/>
+                          </a:solidFill>
+                          <a:latin typeface="Inter"/>
+                        </a:rPr>
                         <a:t>Oak herringbone</a:t>
                       </a:r>
                     </a:p>
                   </a:txBody>
-                  <a:tcPr/>
+                  <a:tcPr>
+                    <a:solidFill>
+                      <a:srgbClr val="FFFFFF"/>
+                    </a:solidFill>
+                  </a:tcPr>
                 </a:tc>
                 <a:tc>
                   <a:txBody>
@@ -5419,27 +5591,45 @@
                     <a:lstStyle/>
                     <a:p>
                       <a:r>
-                        <a:rPr sz="1200"/>
+                        <a:rPr sz="1200" b="0">
+                          <a:solidFill>
+                            <a:srgbClr val="1E1E1C"/>
+                          </a:solidFill>
+                          <a:latin typeface="Inter"/>
+                        </a:rPr>
                         <a:t>boardroom, executive</a:t>
                       </a:r>
                     </a:p>
                   </a:txBody>
-                  <a:tcPr/>
+                  <a:tcPr>
+                    <a:solidFill>
+                      <a:srgbClr val="FFFFFF"/>
+                    </a:solidFill>
+                  </a:tcPr>
                 </a:tc>
               </a:tr>
-              <a:tr h="304800">
+              <a:tr h="292100">
                 <a:tc>
                   <a:txBody>
                     <a:bodyPr/>
                     <a:lstStyle/>
                     <a:p>
                       <a:r>
-                        <a:rPr sz="1200"/>
+                        <a:rPr sz="1200" b="1">
+                          <a:solidFill>
+                            <a:srgbClr val="26673D"/>
+                          </a:solidFill>
+                          <a:latin typeface="Inter"/>
+                        </a:rPr>
                         <a:t>CP-01</a:t>
                       </a:r>
                     </a:p>
                   </a:txBody>
-                  <a:tcPr/>
+                  <a:tcPr>
+                    <a:solidFill>
+                      <a:srgbClr val="FFFFFF"/>
+                    </a:solidFill>
+                  </a:tcPr>
                 </a:tc>
                 <a:tc>
                   <a:txBody>
@@ -5447,12 +5637,21 @@
                     <a:lstStyle/>
                     <a:p>
                       <a:r>
-                        <a:rPr sz="1200"/>
+                        <a:rPr sz="1200" b="0">
+                          <a:solidFill>
+                            <a:srgbClr val="1E1E1C"/>
+                          </a:solidFill>
+                          <a:latin typeface="Inter"/>
+                        </a:rPr>
                         <a:t>Charcoal carpet tile</a:t>
                       </a:r>
                     </a:p>
                   </a:txBody>
-                  <a:tcPr/>
+                  <a:tcPr>
+                    <a:solidFill>
+                      <a:srgbClr val="FFFFFF"/>
+                    </a:solidFill>
+                  </a:tcPr>
                 </a:tc>
                 <a:tc>
                   <a:txBody>
@@ -5460,27 +5659,45 @@
                     <a:lstStyle/>
                     <a:p>
                       <a:r>
-                        <a:rPr sz="1200"/>
+                        <a:rPr sz="1200" b="0">
+                          <a:solidFill>
+                            <a:srgbClr val="1E1E1C"/>
+                          </a:solidFill>
+                          <a:latin typeface="Inter"/>
+                        </a:rPr>
                         <a:t>offices</a:t>
                       </a:r>
                     </a:p>
                   </a:txBody>
-                  <a:tcPr/>
+                  <a:tcPr>
+                    <a:solidFill>
+                      <a:srgbClr val="FFFFFF"/>
+                    </a:solidFill>
+                  </a:tcPr>
                 </a:tc>
               </a:tr>
-              <a:tr h="304800">
+              <a:tr h="292100">
                 <a:tc>
                   <a:txBody>
                     <a:bodyPr/>
                     <a:lstStyle/>
                     <a:p>
                       <a:r>
-                        <a:rPr sz="1200"/>
+                        <a:rPr sz="1200" b="1">
+                          <a:solidFill>
+                            <a:srgbClr val="26673D"/>
+                          </a:solidFill>
+                          <a:latin typeface="Inter"/>
+                        </a:rPr>
                         <a:t>WO-01</a:t>
                       </a:r>
                     </a:p>
                   </a:txBody>
-                  <a:tcPr/>
+                  <a:tcPr>
+                    <a:solidFill>
+                      <a:srgbClr val="FFFFFF"/>
+                    </a:solidFill>
+                  </a:tcPr>
                 </a:tc>
                 <a:tc>
                   <a:txBody>
@@ -5488,12 +5705,21 @@
                     <a:lstStyle/>
                     <a:p>
                       <a:r>
-                        <a:rPr sz="1200"/>
+                        <a:rPr sz="1200" b="0">
+                          <a:solidFill>
+                            <a:srgbClr val="1E1E1C"/>
+                          </a:solidFill>
+                          <a:latin typeface="Inter"/>
+                        </a:rPr>
                         <a:t>White-oak slats on acoustic felt</a:t>
                       </a:r>
                     </a:p>
                   </a:txBody>
-                  <a:tcPr/>
+                  <a:tcPr>
+                    <a:solidFill>
+                      <a:srgbClr val="FFFFFF"/>
+                    </a:solidFill>
+                  </a:tcPr>
                 </a:tc>
                 <a:tc>
                   <a:txBody>
@@ -5501,27 +5727,45 @@
                     <a:lstStyle/>
                     <a:p>
                       <a:r>
-                        <a:rPr sz="1200"/>
+                        <a:rPr sz="1200" b="0">
+                          <a:solidFill>
+                            <a:srgbClr val="1E1E1C"/>
+                          </a:solidFill>
+                          <a:latin typeface="Inter"/>
+                        </a:rPr>
                         <a:t>feature walls</a:t>
                       </a:r>
                     </a:p>
                   </a:txBody>
-                  <a:tcPr/>
+                  <a:tcPr>
+                    <a:solidFill>
+                      <a:srgbClr val="FFFFFF"/>
+                    </a:solidFill>
+                  </a:tcPr>
                 </a:tc>
               </a:tr>
-              <a:tr h="304800">
+              <a:tr h="292100">
                 <a:tc>
                   <a:txBody>
                     <a:bodyPr/>
                     <a:lstStyle/>
                     <a:p>
                       <a:r>
-                        <a:rPr sz="1200"/>
+                        <a:rPr sz="1200" b="1">
+                          <a:solidFill>
+                            <a:srgbClr val="26673D"/>
+                          </a:solidFill>
+                          <a:latin typeface="Inter"/>
+                        </a:rPr>
                         <a:t>WO-02</a:t>
                       </a:r>
                     </a:p>
                   </a:txBody>
-                  <a:tcPr/>
+                  <a:tcPr>
+                    <a:solidFill>
+                      <a:srgbClr val="FFFFFF"/>
+                    </a:solidFill>
+                  </a:tcPr>
                 </a:tc>
                 <a:tc>
                   <a:txBody>
@@ -5529,12 +5773,21 @@
                     <a:lstStyle/>
                     <a:p>
                       <a:r>
-                        <a:rPr sz="1200"/>
+                        <a:rPr sz="1200" b="0">
+                          <a:solidFill>
+                            <a:srgbClr val="1E1E1C"/>
+                          </a:solidFill>
+                          <a:latin typeface="Inter"/>
+                        </a:rPr>
                         <a:t>Smoked walnut veneer</a:t>
                       </a:r>
                     </a:p>
                   </a:txBody>
-                  <a:tcPr/>
+                  <a:tcPr>
+                    <a:solidFill>
+                      <a:srgbClr val="FFFFFF"/>
+                    </a:solidFill>
+                  </a:tcPr>
                 </a:tc>
                 <a:tc>
                   <a:txBody>
@@ -5542,27 +5795,45 @@
                     <a:lstStyle/>
                     <a:p>
                       <a:r>
-                        <a:rPr sz="1200"/>
+                        <a:rPr sz="1200" b="0">
+                          <a:solidFill>
+                            <a:srgbClr val="1E1E1C"/>
+                          </a:solidFill>
+                          <a:latin typeface="Inter"/>
+                        </a:rPr>
                         <a:t>executive furniture</a:t>
                       </a:r>
                     </a:p>
                   </a:txBody>
-                  <a:tcPr/>
+                  <a:tcPr>
+                    <a:solidFill>
+                      <a:srgbClr val="FFFFFF"/>
+                    </a:solidFill>
+                  </a:tcPr>
                 </a:tc>
               </a:tr>
-              <a:tr h="304800">
+              <a:tr h="292100">
                 <a:tc>
                   <a:txBody>
                     <a:bodyPr/>
                     <a:lstStyle/>
                     <a:p>
                       <a:r>
-                        <a:rPr sz="1200"/>
+                        <a:rPr sz="1200" b="1">
+                          <a:solidFill>
+                            <a:srgbClr val="26673D"/>
+                          </a:solidFill>
+                          <a:latin typeface="Inter"/>
+                        </a:rPr>
                         <a:t>PA-02</a:t>
                       </a:r>
                     </a:p>
                   </a:txBody>
-                  <a:tcPr/>
+                  <a:tcPr>
+                    <a:solidFill>
+                      <a:srgbClr val="FFFFFF"/>
+                    </a:solidFill>
+                  </a:tcPr>
                 </a:tc>
                 <a:tc>
                   <a:txBody>
@@ -5570,12 +5841,21 @@
                     <a:lstStyle/>
                     <a:p>
                       <a:r>
-                        <a:rPr sz="1200"/>
+                        <a:rPr sz="1200" b="0">
+                          <a:solidFill>
+                            <a:srgbClr val="1E1E1C"/>
+                          </a:solidFill>
+                          <a:latin typeface="Inter"/>
+                        </a:rPr>
                         <a:t>Deep green from the logo</a:t>
                       </a:r>
                     </a:p>
                   </a:txBody>
-                  <a:tcPr/>
+                  <a:tcPr>
+                    <a:solidFill>
+                      <a:srgbClr val="FFFFFF"/>
+                    </a:solidFill>
+                  </a:tcPr>
                 </a:tc>
                 <a:tc>
                   <a:txBody>
@@ -5583,27 +5863,45 @@
                     <a:lstStyle/>
                     <a:p>
                       <a:r>
-                        <a:rPr sz="1200"/>
+                        <a:rPr sz="1200" b="0">
+                          <a:solidFill>
+                            <a:srgbClr val="1E1E1C"/>
+                          </a:solidFill>
+                          <a:latin typeface="Inter"/>
+                        </a:rPr>
                         <a:t>accents</a:t>
                       </a:r>
                     </a:p>
                   </a:txBody>
-                  <a:tcPr/>
+                  <a:tcPr>
+                    <a:solidFill>
+                      <a:srgbClr val="FFFFFF"/>
+                    </a:solidFill>
+                  </a:tcPr>
                 </a:tc>
               </a:tr>
-              <a:tr h="304800">
+              <a:tr h="292100">
                 <a:tc>
                   <a:txBody>
                     <a:bodyPr/>
                     <a:lstStyle/>
                     <a:p>
                       <a:r>
-                        <a:rPr sz="1200"/>
+                        <a:rPr sz="1200" b="1">
+                          <a:solidFill>
+                            <a:srgbClr val="26673D"/>
+                          </a:solidFill>
+                          <a:latin typeface="Inter"/>
+                        </a:rPr>
                         <a:t>GL-01</a:t>
                       </a:r>
                     </a:p>
                   </a:txBody>
-                  <a:tcPr/>
+                  <a:tcPr>
+                    <a:solidFill>
+                      <a:srgbClr val="FFFFFF"/>
+                    </a:solidFill>
+                  </a:tcPr>
                 </a:tc>
                 <a:tc>
                   <a:txBody>
@@ -5611,12 +5909,21 @@
                     <a:lstStyle/>
                     <a:p>
                       <a:r>
-                        <a:rPr sz="1200"/>
+                        <a:rPr sz="1200" b="0">
+                          <a:solidFill>
+                            <a:srgbClr val="1E1E1C"/>
+                          </a:solidFill>
+                          <a:latin typeface="Inter"/>
+                        </a:rPr>
                         <a:t>12 mm glass, black aluminium</a:t>
                       </a:r>
                     </a:p>
                   </a:txBody>
-                  <a:tcPr/>
+                  <a:tcPr>
+                    <a:solidFill>
+                      <a:srgbClr val="FFFFFF"/>
+                    </a:solidFill>
+                  </a:tcPr>
                 </a:tc>
                 <a:tc>
                   <a:txBody>
@@ -5624,27 +5931,45 @@
                     <a:lstStyle/>
                     <a:p>
                       <a:r>
-                        <a:rPr sz="1200"/>
+                        <a:rPr sz="1200" b="0">
+                          <a:solidFill>
+                            <a:srgbClr val="1E1E1C"/>
+                          </a:solidFill>
+                          <a:latin typeface="Inter"/>
+                        </a:rPr>
                         <a:t>partitions</a:t>
                       </a:r>
                     </a:p>
                   </a:txBody>
-                  <a:tcPr/>
+                  <a:tcPr>
+                    <a:solidFill>
+                      <a:srgbClr val="FFFFFF"/>
+                    </a:solidFill>
+                  </a:tcPr>
                 </a:tc>
               </a:tr>
-              <a:tr h="304800">
+              <a:tr h="292100">
                 <a:tc>
                   <a:txBody>
                     <a:bodyPr/>
                     <a:lstStyle/>
                     <a:p>
                       <a:r>
-                        <a:rPr sz="1200"/>
+                        <a:rPr sz="1200" b="1">
+                          <a:solidFill>
+                            <a:srgbClr val="26673D"/>
+                          </a:solidFill>
+                          <a:latin typeface="Inter"/>
+                        </a:rPr>
                         <a:t>MT-02</a:t>
                       </a:r>
                     </a:p>
                   </a:txBody>
-                  <a:tcPr/>
+                  <a:tcPr>
+                    <a:solidFill>
+                      <a:srgbClr val="FFFFFF"/>
+                    </a:solidFill>
+                  </a:tcPr>
                 </a:tc>
                 <a:tc>
                   <a:txBody>
@@ -5652,12 +5977,21 @@
                     <a:lstStyle/>
                     <a:p>
                       <a:r>
-                        <a:rPr sz="1200"/>
+                        <a:rPr sz="1200" b="0">
+                          <a:solidFill>
+                            <a:srgbClr val="1E1E1C"/>
+                          </a:solidFill>
+                          <a:latin typeface="Inter"/>
+                        </a:rPr>
                         <a:t>Brushed brass</a:t>
                       </a:r>
                     </a:p>
                   </a:txBody>
-                  <a:tcPr/>
+                  <a:tcPr>
+                    <a:solidFill>
+                      <a:srgbClr val="FFFFFF"/>
+                    </a:solidFill>
+                  </a:tcPr>
                 </a:tc>
                 <a:tc>
                   <a:txBody>
@@ -5665,12 +5999,21 @@
                     <a:lstStyle/>
                     <a:p>
                       <a:r>
-                        <a:rPr sz="1200"/>
+                        <a:rPr sz="1200" b="0">
+                          <a:solidFill>
+                            <a:srgbClr val="1E1E1C"/>
+                          </a:solidFill>
+                          <a:latin typeface="Inter"/>
+                        </a:rPr>
                         <a:t>details</a:t>
                       </a:r>
                     </a:p>
                   </a:txBody>
-                  <a:tcPr/>
+                  <a:tcPr>
+                    <a:solidFill>
+                      <a:srgbClr val="FFFFFF"/>
+                    </a:solidFill>
+                  </a:tcPr>
                 </a:tc>
               </a:tr>
             </a:tbl>
@@ -5685,8 +6028,8 @@
         </p:nvSpPr>
         <p:spPr>
           <a:xfrm>
-            <a:off x="508000" y="6096000"/>
-            <a:ext cx="9525000" cy="317500"/>
+            <a:off x="508000" y="6032500"/>
+            <a:ext cx="4064000" cy="381000"/>
           </a:xfrm>
           <a:prstGeom prst="rect">
             <a:avLst/>
@@ -5778,7 +6121,7 @@
         </p:nvSpPr>
         <p:spPr>
           <a:xfrm>
-            <a:off x="508000" y="6604000"/>
+            <a:off x="508000" y="6578600"/>
             <a:ext cx="8255000" cy="190500"/>
           </a:xfrm>
           <a:prstGeom prst="rect">
@@ -5812,8 +6155,8 @@
         </p:nvSpPr>
         <p:spPr>
           <a:xfrm>
-            <a:off x="11176000" y="6604000"/>
-            <a:ext cx="635000" cy="190500"/>
+            <a:off x="11049000" y="6578600"/>
+            <a:ext cx="762000" cy="190500"/>
           </a:xfrm>
           <a:prstGeom prst="rect">
             <a:avLst/>
@@ -5864,77 +6207,9 @@
         <p:nvPr/>
       </p:nvGrpSpPr>
       <p:grpSpPr/>
-      <p:sp>
-        <p:nvSpPr>
-          <p:cNvPr id="2" name="TextBox 1"/>
-          <p:cNvSpPr txBox="1"/>
-          <p:nvPr/>
-        </p:nvSpPr>
-        <p:spPr>
-          <a:xfrm>
-            <a:off x="508000" y="609600"/>
-            <a:ext cx="9525000" cy="254000"/>
-          </a:xfrm>
-          <a:prstGeom prst="rect">
-            <a:avLst/>
-          </a:prstGeom>
-          <a:noFill/>
-        </p:spPr>
-        <p:txBody>
-          <a:bodyPr wrap="square">
-            <a:spAutoFit/>
-          </a:bodyPr>
-          <a:lstStyle/>
-          <a:p>
-            <a:r>
-              <a:rPr sz="1400" b="1">
-                <a:solidFill>
-                  <a:srgbClr val="26673D"/>
-                </a:solidFill>
-                <a:latin typeface="Inter"/>
-              </a:rPr>
-              <a:t>LIGHTING &amp; CEILING</a:t>
-            </a:r>
-          </a:p>
-        </p:txBody>
-      </p:sp>
-      <p:sp>
-        <p:nvSpPr>
-          <p:cNvPr id="3" name="TextBox 2"/>
-          <p:cNvSpPr txBox="1"/>
-          <p:nvPr/>
-        </p:nvSpPr>
-        <p:spPr>
-          <a:xfrm>
-            <a:off x="508000" y="825500"/>
-            <a:ext cx="6350000" cy="889000"/>
-          </a:xfrm>
-          <a:prstGeom prst="rect">
-            <a:avLst/>
-          </a:prstGeom>
-          <a:noFill/>
-        </p:spPr>
-        <p:txBody>
-          <a:bodyPr wrap="square">
-            <a:spAutoFit/>
-          </a:bodyPr>
-          <a:lstStyle/>
-          <a:p>
-            <a:r>
-              <a:rPr sz="3000" b="1">
-                <a:solidFill>
-                  <a:srgbClr val="1E1E1C"/>
-                </a:solidFill>
-                <a:latin typeface="Inter"/>
-              </a:rPr>
-              <a:t>The beams stay - and do the work</a:t>
-            </a:r>
-          </a:p>
-        </p:txBody>
-      </p:sp>
       <p:pic>
         <p:nvPicPr>
-          <p:cNvPr id="4" name="Picture 3" descr="ID-03_ceiling_lighting_plan.png"/>
+          <p:cNvPr id="2" name="Picture 1" descr="ID-03_ceiling_lighting_plan.png"/>
           <p:cNvPicPr>
             <a:picLocks noChangeAspect="1"/>
           </p:cNvPicPr>
@@ -5959,28 +6234,96 @@
       </p:pic>
       <p:sp>
         <p:nvSpPr>
+          <p:cNvPr id="3" name="TextBox 2"/>
+          <p:cNvSpPr txBox="1"/>
+          <p:nvPr/>
+        </p:nvSpPr>
+        <p:spPr>
+          <a:xfrm>
+            <a:off x="5270500" y="609600"/>
+            <a:ext cx="6413500" cy="254000"/>
+          </a:xfrm>
+          <a:prstGeom prst="rect">
+            <a:avLst/>
+          </a:prstGeom>
+          <a:noFill/>
+        </p:spPr>
+        <p:txBody>
+          <a:bodyPr wrap="square">
+            <a:spAutoFit/>
+          </a:bodyPr>
+          <a:lstStyle/>
+          <a:p>
+            <a:r>
+              <a:rPr sz="1300" b="1">
+                <a:solidFill>
+                  <a:srgbClr val="26673D"/>
+                </a:solidFill>
+                <a:latin typeface="Inter"/>
+              </a:rPr>
+              <a:t>LIGHTING &amp; CEILING</a:t>
+            </a:r>
+          </a:p>
+        </p:txBody>
+      </p:sp>
+      <p:sp>
+        <p:nvSpPr>
+          <p:cNvPr id="4" name="TextBox 3"/>
+          <p:cNvSpPr txBox="1"/>
+          <p:nvPr/>
+        </p:nvSpPr>
+        <p:spPr>
+          <a:xfrm>
+            <a:off x="5270500" y="863600"/>
+            <a:ext cx="6413500" cy="825500"/>
+          </a:xfrm>
+          <a:prstGeom prst="rect">
+            <a:avLst/>
+          </a:prstGeom>
+          <a:noFill/>
+        </p:spPr>
+        <p:txBody>
+          <a:bodyPr wrap="square">
+            <a:spAutoFit/>
+          </a:bodyPr>
+          <a:lstStyle/>
+          <a:p>
+            <a:r>
+              <a:rPr sz="2600" b="1">
+                <a:solidFill>
+                  <a:srgbClr val="1E1E1C"/>
+                </a:solidFill>
+                <a:latin typeface="Inter"/>
+              </a:rPr>
+              <a:t>The beams stay - and do the work</a:t>
+            </a:r>
+          </a:p>
+        </p:txBody>
+      </p:sp>
+      <p:sp>
+        <p:nvSpPr>
           <p:cNvPr id="5" name="TextBox 4"/>
           <p:cNvSpPr txBox="1"/>
           <p:nvPr/>
         </p:nvSpPr>
         <p:spPr>
           <a:xfrm>
-            <a:off x="5270500" y="1905000"/>
-            <a:ext cx="6413500" cy="1905000"/>
-          </a:xfrm>
-          <a:prstGeom prst="rect">
-            <a:avLst/>
-          </a:prstGeom>
-          <a:noFill/>
-        </p:spPr>
-        <p:txBody>
-          <a:bodyPr wrap="square">
-            <a:spAutoFit/>
-          </a:bodyPr>
-          <a:lstStyle/>
-          <a:p>
-            <a:r>
-              <a:rPr sz="1500" b="0">
+            <a:off x="5270500" y="1841500"/>
+            <a:ext cx="6413500" cy="2032000"/>
+          </a:xfrm>
+          <a:prstGeom prst="rect">
+            <a:avLst/>
+          </a:prstGeom>
+          <a:noFill/>
+        </p:spPr>
+        <p:txBody>
+          <a:bodyPr wrap="square">
+            <a:spAutoFit/>
+          </a:bodyPr>
+          <a:lstStyle/>
+          <a:p>
+            <a:r>
+              <a:rPr sz="1400" b="0">
                 <a:solidFill>
                   <a:srgbClr val="5A5750"/>
                 </a:solidFill>
@@ -5991,7 +6334,7 @@
           </a:p>
           <a:p>
             <a:r>
-              <a:rPr sz="1500" b="0">
+              <a:rPr sz="1400" b="0">
                 <a:solidFill>
                   <a:srgbClr val="5A5750"/>
                 </a:solidFill>
@@ -6002,7 +6345,7 @@
           </a:p>
           <a:p>
             <a:r>
-              <a:rPr sz="1500" b="0">
+              <a:rPr sz="1400" b="0">
                 <a:solidFill>
                   <a:srgbClr val="5A5750"/>
                 </a:solidFill>
@@ -6013,7 +6356,7 @@
           </a:p>
           <a:p>
             <a:r>
-              <a:rPr sz="1500" b="0">
+              <a:rPr sz="1400" b="0">
                 <a:solidFill>
                   <a:srgbClr val="5A5750"/>
                 </a:solidFill>
@@ -6024,7 +6367,7 @@
           </a:p>
           <a:p>
             <a:r>
-              <a:rPr sz="1500" b="0">
+              <a:rPr sz="1400" b="0">
                 <a:solidFill>
                   <a:srgbClr val="5A5750"/>
                 </a:solidFill>
@@ -6035,7 +6378,7 @@
           </a:p>
           <a:p>
             <a:r>
-              <a:rPr sz="1500" b="0">
+              <a:rPr sz="1400" b="0">
                 <a:solidFill>
                   <a:srgbClr val="5A5750"/>
                 </a:solidFill>
@@ -6113,7 +6456,7 @@
         </p:nvSpPr>
         <p:spPr>
           <a:xfrm>
-            <a:off x="508000" y="6604000"/>
+            <a:off x="508000" y="6578600"/>
             <a:ext cx="8255000" cy="190500"/>
           </a:xfrm>
           <a:prstGeom prst="rect">
@@ -6147,8 +6490,8 @@
         </p:nvSpPr>
         <p:spPr>
           <a:xfrm>
-            <a:off x="11176000" y="6604000"/>
-            <a:ext cx="635000" cy="190500"/>
+            <a:off x="11049000" y="6578600"/>
+            <a:ext cx="762000" cy="190500"/>
           </a:xfrm>
           <a:prstGeom prst="rect">
             <a:avLst/>
@@ -6222,7 +6565,7 @@
           <a:lstStyle/>
           <a:p>
             <a:r>
-              <a:rPr sz="1400" b="1">
+              <a:rPr sz="1300" b="1">
                 <a:solidFill>
                   <a:srgbClr val="26673D"/>
                 </a:solidFill>
@@ -6241,22 +6584,22 @@
         </p:nvSpPr>
         <p:spPr>
           <a:xfrm>
-            <a:off x="508000" y="825500"/>
-            <a:ext cx="6985000" cy="889000"/>
-          </a:xfrm>
-          <a:prstGeom prst="rect">
-            <a:avLst/>
-          </a:prstGeom>
-          <a:noFill/>
-        </p:spPr>
-        <p:txBody>
-          <a:bodyPr wrap="square">
-            <a:spAutoFit/>
-          </a:bodyPr>
-          <a:lstStyle/>
-          <a:p>
-            <a:r>
-              <a:rPr sz="3000" b="1">
+            <a:off x="508000" y="863600"/>
+            <a:ext cx="9525000" cy="762000"/>
+          </a:xfrm>
+          <a:prstGeom prst="rect">
+            <a:avLst/>
+          </a:prstGeom>
+          <a:noFill/>
+        </p:spPr>
+        <p:txBody>
+          <a:bodyPr wrap="square">
+            <a:spAutoFit/>
+          </a:bodyPr>
+          <a:lstStyle/>
+          <a:p>
+            <a:r>
+              <a:rPr sz="2800" b="1">
                 <a:solidFill>
                   <a:srgbClr val="1E1E1C"/>
                 </a:solidFill>
@@ -6276,7 +6619,7 @@
         <p:spPr>
           <a:xfrm>
             <a:off x="508000" y="2032000"/>
-            <a:ext cx="3556000" cy="1651000"/>
+            <a:ext cx="3556000" cy="1714500"/>
           </a:xfrm>
           <a:prstGeom prst="rect">
             <a:avLst/>
@@ -6318,7 +6661,7 @@
         </p:nvSpPr>
         <p:spPr>
           <a:xfrm>
-            <a:off x="660400" y="2159000"/>
+            <a:off x="660400" y="2171700"/>
             <a:ext cx="3238500" cy="317500"/>
           </a:xfrm>
           <a:prstGeom prst="rect">
@@ -6333,7 +6676,7 @@
           <a:lstStyle/>
           <a:p>
             <a:r>
-              <a:rPr sz="2000" b="1">
+              <a:rPr sz="1900" b="1">
                 <a:solidFill>
                   <a:srgbClr val="26673D"/>
                 </a:solidFill>
@@ -6352,7 +6695,7 @@
         </p:nvSpPr>
         <p:spPr>
           <a:xfrm>
-            <a:off x="660400" y="2540000"/>
+            <a:off x="660400" y="2578100"/>
             <a:ext cx="3238500" cy="1079500"/>
           </a:xfrm>
           <a:prstGeom prst="rect">
@@ -6387,7 +6730,7 @@
         <p:spPr>
           <a:xfrm>
             <a:off x="4318000" y="2032000"/>
-            <a:ext cx="3556000" cy="1651000"/>
+            <a:ext cx="3556000" cy="1714500"/>
           </a:xfrm>
           <a:prstGeom prst="rect">
             <a:avLst/>
@@ -6429,7 +6772,7 @@
         </p:nvSpPr>
         <p:spPr>
           <a:xfrm>
-            <a:off x="4470400" y="2159000"/>
+            <a:off x="4470400" y="2171700"/>
             <a:ext cx="3238500" cy="317500"/>
           </a:xfrm>
           <a:prstGeom prst="rect">
@@ -6444,7 +6787,7 @@
           <a:lstStyle/>
           <a:p>
             <a:r>
-              <a:rPr sz="2000" b="1">
+              <a:rPr sz="1900" b="1">
                 <a:solidFill>
                   <a:srgbClr val="26673D"/>
                 </a:solidFill>
@@ -6463,7 +6806,7 @@
         </p:nvSpPr>
         <p:spPr>
           <a:xfrm>
-            <a:off x="4470400" y="2540000"/>
+            <a:off x="4470400" y="2578100"/>
             <a:ext cx="3238500" cy="1079500"/>
           </a:xfrm>
           <a:prstGeom prst="rect">
@@ -6498,7 +6841,7 @@
         <p:spPr>
           <a:xfrm>
             <a:off x="8128000" y="2032000"/>
-            <a:ext cx="3556000" cy="1651000"/>
+            <a:ext cx="3556000" cy="1714500"/>
           </a:xfrm>
           <a:prstGeom prst="rect">
             <a:avLst/>
@@ -6540,7 +6883,7 @@
         </p:nvSpPr>
         <p:spPr>
           <a:xfrm>
-            <a:off x="8280400" y="2159000"/>
+            <a:off x="8280400" y="2171700"/>
             <a:ext cx="3238500" cy="317500"/>
           </a:xfrm>
           <a:prstGeom prst="rect">
@@ -6555,7 +6898,7 @@
           <a:lstStyle/>
           <a:p>
             <a:r>
-              <a:rPr sz="2000" b="1">
+              <a:rPr sz="1900" b="1">
                 <a:solidFill>
                   <a:srgbClr val="26673D"/>
                 </a:solidFill>
@@ -6574,7 +6917,7 @@
         </p:nvSpPr>
         <p:spPr>
           <a:xfrm>
-            <a:off x="8280400" y="2540000"/>
+            <a:off x="8280400" y="2578100"/>
             <a:ext cx="3238500" cy="1079500"/>
           </a:xfrm>
           <a:prstGeom prst="rect">
@@ -6609,7 +6952,7 @@
         <p:spPr>
           <a:xfrm>
             <a:off x="508000" y="3937000"/>
-            <a:ext cx="3556000" cy="1651000"/>
+            <a:ext cx="3556000" cy="1714500"/>
           </a:xfrm>
           <a:prstGeom prst="rect">
             <a:avLst/>
@@ -6651,7 +6994,7 @@
         </p:nvSpPr>
         <p:spPr>
           <a:xfrm>
-            <a:off x="660400" y="4064000"/>
+            <a:off x="660400" y="4076700"/>
             <a:ext cx="3238500" cy="317500"/>
           </a:xfrm>
           <a:prstGeom prst="rect">
@@ -6666,7 +7009,7 @@
           <a:lstStyle/>
           <a:p>
             <a:r>
-              <a:rPr sz="2000" b="1">
+              <a:rPr sz="1900" b="1">
                 <a:solidFill>
                   <a:srgbClr val="26673D"/>
                 </a:solidFill>
@@ -6685,7 +7028,7 @@
         </p:nvSpPr>
         <p:spPr>
           <a:xfrm>
-            <a:off x="660400" y="4445000"/>
+            <a:off x="660400" y="4483100"/>
             <a:ext cx="3238500" cy="1079500"/>
           </a:xfrm>
           <a:prstGeom prst="rect">
@@ -6720,7 +7063,7 @@
         <p:spPr>
           <a:xfrm>
             <a:off x="4318000" y="3937000"/>
-            <a:ext cx="3556000" cy="1651000"/>
+            <a:ext cx="3556000" cy="1714500"/>
           </a:xfrm>
           <a:prstGeom prst="rect">
             <a:avLst/>
@@ -6762,7 +7105,7 @@
         </p:nvSpPr>
         <p:spPr>
           <a:xfrm>
-            <a:off x="4470400" y="4064000"/>
+            <a:off x="4470400" y="4076700"/>
             <a:ext cx="3238500" cy="317500"/>
           </a:xfrm>
           <a:prstGeom prst="rect">
@@ -6777,7 +7120,7 @@
           <a:lstStyle/>
           <a:p>
             <a:r>
-              <a:rPr sz="2000" b="1">
+              <a:rPr sz="1900" b="1">
                 <a:solidFill>
                   <a:srgbClr val="26673D"/>
                 </a:solidFill>
@@ -6796,7 +7139,7 @@
         </p:nvSpPr>
         <p:spPr>
           <a:xfrm>
-            <a:off x="4470400" y="4445000"/>
+            <a:off x="4470400" y="4483100"/>
             <a:ext cx="3238500" cy="1079500"/>
           </a:xfrm>
           <a:prstGeom prst="rect">
@@ -6832,7 +7175,7 @@
         </p:nvPicPr>
         <p:blipFill>
           <a:blip r:embed="rId2"/>
-          <a:srcRect t="10317" b="10317"/>
+          <a:srcRect t="7143" b="7143"/>
           <a:stretch>
             <a:fillRect/>
           </a:stretch>
@@ -6840,7 +7183,7 @@
         <p:spPr>
           <a:xfrm>
             <a:off x="8128000" y="3937000"/>
-            <a:ext cx="3556000" cy="1587500"/>
+            <a:ext cx="3556000" cy="1714500"/>
           </a:xfrm>
           <a:prstGeom prst="rect">
             <a:avLst/>
@@ -6855,7 +7198,7 @@
         </p:nvSpPr>
         <p:spPr>
           <a:xfrm>
-            <a:off x="8191500" y="5308600"/>
+            <a:off x="8191500" y="5435600"/>
             <a:ext cx="3429000" cy="190500"/>
           </a:xfrm>
           <a:prstGeom prst="rect">
@@ -6889,7 +7232,7 @@
         </p:nvSpPr>
         <p:spPr>
           <a:xfrm>
-            <a:off x="508000" y="6604000"/>
+            <a:off x="508000" y="6578600"/>
             <a:ext cx="8255000" cy="190500"/>
           </a:xfrm>
           <a:prstGeom prst="rect">
@@ -6923,8 +7266,8 @@
         </p:nvSpPr>
         <p:spPr>
           <a:xfrm>
-            <a:off x="11176000" y="6604000"/>
-            <a:ext cx="635000" cy="190500"/>
+            <a:off x="11049000" y="6578600"/>
+            <a:ext cx="762000" cy="190500"/>
           </a:xfrm>
           <a:prstGeom prst="rect">
             <a:avLst/>
@@ -6984,21 +7327,21 @@
         <p:spPr>
           <a:xfrm>
             <a:off x="508000" y="609600"/>
-            <a:ext cx="9525000" cy="254000"/>
-          </a:xfrm>
-          <a:prstGeom prst="rect">
-            <a:avLst/>
-          </a:prstGeom>
-          <a:noFill/>
-        </p:spPr>
-        <p:txBody>
-          <a:bodyPr wrap="square">
-            <a:spAutoFit/>
-          </a:bodyPr>
-          <a:lstStyle/>
-          <a:p>
-            <a:r>
-              <a:rPr sz="1400" b="1">
+            <a:ext cx="11176000" cy="254000"/>
+          </a:xfrm>
+          <a:prstGeom prst="rect">
+            <a:avLst/>
+          </a:prstGeom>
+          <a:noFill/>
+        </p:spPr>
+        <p:txBody>
+          <a:bodyPr wrap="square">
+            <a:spAutoFit/>
+          </a:bodyPr>
+          <a:lstStyle/>
+          <a:p>
+            <a:r>
+              <a:rPr sz="1300" b="1">
                 <a:solidFill>
                   <a:srgbClr val="26673D"/>
                 </a:solidFill>
@@ -7017,22 +7360,22 @@
         </p:nvSpPr>
         <p:spPr>
           <a:xfrm>
-            <a:off x="508000" y="825500"/>
-            <a:ext cx="6985000" cy="889000"/>
-          </a:xfrm>
-          <a:prstGeom prst="rect">
-            <a:avLst/>
-          </a:prstGeom>
-          <a:noFill/>
-        </p:spPr>
-        <p:txBody>
-          <a:bodyPr wrap="square">
-            <a:spAutoFit/>
-          </a:bodyPr>
-          <a:lstStyle/>
-          <a:p>
-            <a:r>
-              <a:rPr sz="3000" b="1">
+            <a:off x="508000" y="863600"/>
+            <a:ext cx="11176000" cy="762000"/>
+          </a:xfrm>
+          <a:prstGeom prst="rect">
+            <a:avLst/>
+          </a:prstGeom>
+          <a:noFill/>
+        </p:spPr>
+        <p:txBody>
+          <a:bodyPr wrap="square">
+            <a:spAutoFit/>
+          </a:bodyPr>
+          <a:lstStyle/>
+          <a:p>
+            <a:r>
+              <a:rPr sz="2800" b="1">
                 <a:solidFill>
                   <a:srgbClr val="1E1E1C"/>
                 </a:solidFill>
@@ -7052,8 +7395,8 @@
           <p:nvPr/>
         </p:nvGraphicFramePr>
         <p:xfrm>
-          <a:off x="508000" y="1905000"/>
-          <a:ext cx="11176000" cy="2133600"/>
+          <a:off x="508000" y="1841500"/>
+          <a:ext cx="11176000" cy="2222500"/>
         </p:xfrm>
         <a:graphic>
           <a:graphicData uri="http://schemas.openxmlformats.org/drawingml/2006/table">
@@ -7065,19 +7408,28 @@
                 <a:gridCol w="5588000"/>
                 <a:gridCol w="5588000"/>
               </a:tblGrid>
-              <a:tr h="304800">
+              <a:tr h="317500">
                 <a:tc>
                   <a:txBody>
                     <a:bodyPr/>
                     <a:lstStyle/>
                     <a:p>
                       <a:r>
-                        <a:rPr sz="1200"/>
+                        <a:rPr sz="1100" b="1">
+                          <a:solidFill>
+                            <a:srgbClr val="26673D"/>
+                          </a:solidFill>
+                          <a:latin typeface="Inter"/>
+                        </a:rPr>
                         <a:t>Item</a:t>
                       </a:r>
                     </a:p>
                   </a:txBody>
-                  <a:tcPr/>
+                  <a:tcPr>
+                    <a:solidFill>
+                      <a:srgbClr val="EEEAE2"/>
+                    </a:solidFill>
+                  </a:tcPr>
                 </a:tc>
                 <a:tc>
                   <a:txBody>
@@ -7085,27 +7437,45 @@
                     <a:lstStyle/>
                     <a:p>
                       <a:r>
-                        <a:rPr sz="1200"/>
+                        <a:rPr sz="1100" b="1">
+                          <a:solidFill>
+                            <a:srgbClr val="26673D"/>
+                          </a:solidFill>
+                          <a:latin typeface="Inter"/>
+                        </a:rPr>
                         <a:t>What has to be confirmed</a:t>
                       </a:r>
                     </a:p>
                   </a:txBody>
-                  <a:tcPr/>
+                  <a:tcPr>
+                    <a:solidFill>
+                      <a:srgbClr val="EEEAE2"/>
+                    </a:solidFill>
+                  </a:tcPr>
                 </a:tc>
               </a:tr>
-              <a:tr h="304800">
+              <a:tr h="317500">
                 <a:tc>
                   <a:txBody>
                     <a:bodyPr/>
                     <a:lstStyle/>
                     <a:p>
                       <a:r>
-                        <a:rPr sz="1200"/>
+                        <a:rPr sz="1300" b="1">
+                          <a:solidFill>
+                            <a:srgbClr val="26673D"/>
+                          </a:solidFill>
+                          <a:latin typeface="Inter"/>
+                        </a:rPr>
                         <a:t>Site measurements</a:t>
                       </a:r>
                     </a:p>
                   </a:txBody>
-                  <a:tcPr/>
+                  <a:tcPr>
+                    <a:solidFill>
+                      <a:srgbClr val="FFFFFF"/>
+                    </a:solidFill>
+                  </a:tcPr>
                 </a:tc>
                 <a:tc>
                   <a:txBody>
@@ -7113,27 +7483,45 @@
                     <a:lstStyle/>
                     <a:p>
                       <a:r>
-                        <a:rPr sz="1200"/>
+                        <a:rPr sz="1300" b="0">
+                          <a:solidFill>
+                            <a:srgbClr val="1E1E1C"/>
+                          </a:solidFill>
+                          <a:latin typeface="Inter"/>
+                        </a:rPr>
                         <a:t>Floor-to-deck height, room 8 width, column positions and beam layout (currently estimated).</a:t>
                       </a:r>
                     </a:p>
                   </a:txBody>
-                  <a:tcPr/>
+                  <a:tcPr>
+                    <a:solidFill>
+                      <a:srgbClr val="FFFFFF"/>
+                    </a:solidFill>
+                  </a:tcPr>
                 </a:tc>
               </a:tr>
-              <a:tr h="304800">
+              <a:tr h="317500">
                 <a:tc>
                   <a:txBody>
                     <a:bodyPr/>
                     <a:lstStyle/>
                     <a:p>
                       <a:r>
-                        <a:rPr sz="1200"/>
+                        <a:rPr sz="1300" b="1">
+                          <a:solidFill>
+                            <a:srgbClr val="26673D"/>
+                          </a:solidFill>
+                          <a:latin typeface="Inter"/>
+                        </a:rPr>
                         <a:t>Structure</a:t>
                       </a:r>
                     </a:p>
                   </a:txBody>
-                  <a:tcPr/>
+                  <a:tcPr>
+                    <a:solidFill>
+                      <a:srgbClr val="FFFFFF"/>
+                    </a:solidFill>
+                  </a:tcPr>
                 </a:tc>
                 <a:tc>
                   <a:txBody>
@@ -7141,27 +7529,45 @@
                     <a:lstStyle/>
                     <a:p>
                       <a:r>
-                        <a:rPr sz="1200"/>
+                        <a:rPr sz="1300" b="0">
+                          <a:solidFill>
+                            <a:srgbClr val="1E1E1C"/>
+                          </a:solidFill>
+                          <a:latin typeface="Inter"/>
+                        </a:rPr>
                         <a:t>Lintels for the new openings D17, D20, D22 and the lobby-reception glass - structural engineer.</a:t>
                       </a:r>
                     </a:p>
                   </a:txBody>
-                  <a:tcPr/>
+                  <a:tcPr>
+                    <a:solidFill>
+                      <a:srgbClr val="FFFFFF"/>
+                    </a:solidFill>
+                  </a:tcPr>
                 </a:tc>
               </a:tr>
-              <a:tr h="304800">
+              <a:tr h="317500">
                 <a:tc>
                   <a:txBody>
                     <a:bodyPr/>
                     <a:lstStyle/>
                     <a:p>
                       <a:r>
-                        <a:rPr sz="1200"/>
+                        <a:rPr sz="1300" b="1">
+                          <a:solidFill>
+                            <a:srgbClr val="26673D"/>
+                          </a:solidFill>
+                          <a:latin typeface="Inter"/>
+                        </a:rPr>
                         <a:t>Fire &amp; escape</a:t>
                       </a:r>
                     </a:p>
                   </a:txBody>
-                  <a:tcPr/>
+                  <a:tcPr>
+                    <a:solidFill>
+                      <a:srgbClr val="FFFFFF"/>
+                    </a:solidFill>
+                  </a:tcPr>
                 </a:tc>
                 <a:tc>
                   <a:txBody>
@@ -7169,27 +7575,45 @@
                     <a:lstStyle/>
                     <a:p>
                       <a:r>
-                        <a:rPr sz="1200"/>
+                        <a:rPr sz="1300" b="0">
+                          <a:solidFill>
+                            <a:srgbClr val="1E1E1C"/>
+                          </a:solidFill>
+                          <a:latin typeface="Inter"/>
+                        </a:rPr>
                         <a:t>Ground-floor exits of the NE / SE stairs; without them the walk to the main gate is about 220 ft from the lounge.</a:t>
                       </a:r>
                     </a:p>
                   </a:txBody>
-                  <a:tcPr/>
+                  <a:tcPr>
+                    <a:solidFill>
+                      <a:srgbClr val="FFFFFF"/>
+                    </a:solidFill>
+                  </a:tcPr>
                 </a:tc>
               </a:tr>
-              <a:tr h="304800">
+              <a:tr h="317500">
                 <a:tc>
                   <a:txBody>
                     <a:bodyPr/>
                     <a:lstStyle/>
                     <a:p>
                       <a:r>
-                        <a:rPr sz="1200"/>
+                        <a:rPr sz="1300" b="1">
+                          <a:solidFill>
+                            <a:srgbClr val="26673D"/>
+                          </a:solidFill>
+                          <a:latin typeface="Inter"/>
+                        </a:rPr>
                         <a:t>MEP</a:t>
                       </a:r>
                     </a:p>
                   </a:txBody>
-                  <a:tcPr/>
+                  <a:tcPr>
+                    <a:solidFill>
+                      <a:srgbClr val="FFFFFF"/>
+                    </a:solidFill>
+                  </a:tcPr>
                 </a:tc>
                 <a:tc>
                   <a:txBody>
@@ -7197,27 +7621,45 @@
                     <a:lstStyle/>
                     <a:p>
                       <a:r>
-                        <a:rPr sz="1200"/>
+                        <a:rPr sz="1300" b="0">
+                          <a:solidFill>
+                            <a:srgbClr val="1E1E1C"/>
+                          </a:solidFill>
+                          <a:latin typeface="Inter"/>
+                        </a:rPr>
                         <a:t>VRF cooling, fresh air for windowless rooms, exhausts (WCs, pantry, 3D lab), power/data, UPS, DB location.</a:t>
                       </a:r>
                     </a:p>
                   </a:txBody>
-                  <a:tcPr/>
+                  <a:tcPr>
+                    <a:solidFill>
+                      <a:srgbClr val="FFFFFF"/>
+                    </a:solidFill>
+                  </a:tcPr>
                 </a:tc>
               </a:tr>
-              <a:tr h="304800">
+              <a:tr h="317500">
                 <a:tc>
                   <a:txBody>
                     <a:bodyPr/>
                     <a:lstStyle/>
                     <a:p>
                       <a:r>
-                        <a:rPr sz="1200"/>
+                        <a:rPr sz="1300" b="1">
+                          <a:solidFill>
+                            <a:srgbClr val="26673D"/>
+                          </a:solidFill>
+                          <a:latin typeface="Inter"/>
+                        </a:rPr>
                         <a:t>Accessibility</a:t>
                       </a:r>
                     </a:p>
                   </a:txBody>
-                  <a:tcPr/>
+                  <a:tcPr>
+                    <a:solidFill>
+                      <a:srgbClr val="FFFFFF"/>
+                    </a:solidFill>
+                  </a:tcPr>
                 </a:tc>
                 <a:tc>
                   <a:txBody>
@@ -7225,27 +7667,45 @@
                     <a:lstStyle/>
                     <a:p>
                       <a:r>
-                        <a:rPr sz="1200"/>
+                        <a:rPr sz="1300" b="0">
+                          <a:solidFill>
+                            <a:srgbClr val="1E1E1C"/>
+                          </a:solidFill>
+                          <a:latin typeface="Inter"/>
+                        </a:rPr>
                         <a:t>Ramp or lift at the two entrance steps; one accessible WC (door at least 36 in).</a:t>
                       </a:r>
                     </a:p>
                   </a:txBody>
-                  <a:tcPr/>
+                  <a:tcPr>
+                    <a:solidFill>
+                      <a:srgbClr val="FFFFFF"/>
+                    </a:solidFill>
+                  </a:tcPr>
                 </a:tc>
               </a:tr>
-              <a:tr h="304800">
+              <a:tr h="317500">
                 <a:tc>
                   <a:txBody>
                     <a:bodyPr/>
                     <a:lstStyle/>
                     <a:p>
                       <a:r>
-                        <a:rPr sz="1200"/>
+                        <a:rPr sz="1300" b="1">
+                          <a:solidFill>
+                            <a:srgbClr val="26673D"/>
+                          </a:solidFill>
+                          <a:latin typeface="Inter"/>
+                        </a:rPr>
                         <a:t>Approvals &amp; branding</a:t>
                       </a:r>
                     </a:p>
                   </a:txBody>
-                  <a:tcPr/>
+                  <a:tcPr>
+                    <a:solidFill>
+                      <a:srgbClr val="FFFFFF"/>
+                    </a:solidFill>
+                  </a:tcPr>
                 </a:tc>
                 <a:tc>
                   <a:txBody>
@@ -7253,12 +7713,21 @@
                     <a:lstStyle/>
                     <a:p>
                       <a:r>
-                        <a:rPr sz="1200"/>
+                        <a:rPr sz="1300" b="0">
+                          <a:solidFill>
+                            <a:srgbClr val="1E1E1C"/>
+                          </a:solidFill>
+                          <a:latin typeface="Inter"/>
+                        </a:rPr>
                         <a:t>Fire / building approvals as applicable; trademark check for 'Global Design Studio'; signage from original vector logos.</a:t>
                       </a:r>
                     </a:p>
                   </a:txBody>
-                  <a:tcPr/>
+                  <a:tcPr>
+                    <a:solidFill>
+                      <a:srgbClr val="FFFFFF"/>
+                    </a:solidFill>
+                  </a:tcPr>
                 </a:tc>
               </a:tr>
             </a:tbl>
@@ -7273,8 +7742,8 @@
         </p:nvSpPr>
         <p:spPr>
           <a:xfrm>
-            <a:off x="508000" y="6096000"/>
-            <a:ext cx="9525000" cy="317500"/>
+            <a:off x="508000" y="6032500"/>
+            <a:ext cx="11176000" cy="381000"/>
           </a:xfrm>
           <a:prstGeom prst="rect">
             <a:avLst/>
@@ -7307,7 +7776,7 @@
         </p:nvSpPr>
         <p:spPr>
           <a:xfrm>
-            <a:off x="508000" y="6604000"/>
+            <a:off x="508000" y="6578600"/>
             <a:ext cx="8255000" cy="190500"/>
           </a:xfrm>
           <a:prstGeom prst="rect">
@@ -7341,8 +7810,8 @@
         </p:nvSpPr>
         <p:spPr>
           <a:xfrm>
-            <a:off x="11176000" y="6604000"/>
-            <a:ext cx="635000" cy="190500"/>
+            <a:off x="11049000" y="6578600"/>
+            <a:ext cx="762000" cy="190500"/>
           </a:xfrm>
           <a:prstGeom prst="rect">
             <a:avLst/>
@@ -7460,8 +7929,8 @@
         </p:nvSpPr>
         <p:spPr>
           <a:xfrm>
-            <a:off x="317500" y="3873500"/>
-            <a:ext cx="6223000" cy="2095500"/>
+            <a:off x="0" y="3810000"/>
+            <a:ext cx="12192000" cy="3048000"/>
           </a:xfrm>
           <a:prstGeom prst="rect">
             <a:avLst/>
@@ -7504,21 +7973,21 @@
         <p:spPr>
           <a:xfrm>
             <a:off x="508000" y="4064000"/>
-            <a:ext cx="5715000" cy="254000"/>
-          </a:xfrm>
-          <a:prstGeom prst="rect">
-            <a:avLst/>
-          </a:prstGeom>
-          <a:noFill/>
-        </p:spPr>
-        <p:txBody>
-          <a:bodyPr wrap="square">
-            <a:spAutoFit/>
-          </a:bodyPr>
-          <a:lstStyle/>
-          <a:p>
-            <a:r>
-              <a:rPr sz="1400" b="1">
+            <a:ext cx="9525000" cy="254000"/>
+          </a:xfrm>
+          <a:prstGeom prst="rect">
+            <a:avLst/>
+          </a:prstGeom>
+          <a:noFill/>
+        </p:spPr>
+        <p:txBody>
+          <a:bodyPr wrap="square">
+            <a:spAutoFit/>
+          </a:bodyPr>
+          <a:lstStyle/>
+          <a:p>
+            <a:r>
+              <a:rPr sz="1300" b="1">
                 <a:solidFill>
                   <a:srgbClr val="9FD3B0"/>
                 </a:solidFill>
@@ -7537,8 +8006,8 @@
         </p:nvSpPr>
         <p:spPr>
           <a:xfrm>
-            <a:off x="508000" y="4318000"/>
-            <a:ext cx="5715000" cy="1397000"/>
+            <a:off x="508000" y="4381500"/>
+            <a:ext cx="10160000" cy="1079500"/>
           </a:xfrm>
           <a:prstGeom prst="rect">
             <a:avLst/>
@@ -7571,24 +8040,24 @@
         </p:nvSpPr>
         <p:spPr>
           <a:xfrm>
-            <a:off x="508000" y="5334000"/>
-            <a:ext cx="5715000" cy="762000"/>
-          </a:xfrm>
-          <a:prstGeom prst="rect">
-            <a:avLst/>
-          </a:prstGeom>
-          <a:noFill/>
-        </p:spPr>
-        <p:txBody>
-          <a:bodyPr wrap="square">
-            <a:spAutoFit/>
-          </a:bodyPr>
-          <a:lstStyle/>
-          <a:p>
-            <a:r>
-              <a:rPr sz="1600" b="0">
-                <a:solidFill>
-                  <a:srgbClr val="FFFFFF"/>
+            <a:off x="508000" y="5524500"/>
+            <a:ext cx="9525000" cy="762000"/>
+          </a:xfrm>
+          <a:prstGeom prst="rect">
+            <a:avLst/>
+          </a:prstGeom>
+          <a:noFill/>
+        </p:spPr>
+        <p:txBody>
+          <a:bodyPr wrap="square">
+            <a:spAutoFit/>
+          </a:bodyPr>
+          <a:lstStyle/>
+          <a:p>
+            <a:r>
+              <a:rPr sz="1500" b="0">
+                <a:solidFill>
+                  <a:srgbClr val="D9E2DC"/>
                 </a:solidFill>
                 <a:latin typeface="Inter"/>
               </a:rPr>
@@ -7605,7 +8074,7 @@
         </p:nvSpPr>
         <p:spPr>
           <a:xfrm>
-            <a:off x="508000" y="6604000"/>
+            <a:off x="508000" y="6578600"/>
             <a:ext cx="8255000" cy="190500"/>
           </a:xfrm>
           <a:prstGeom prst="rect">
@@ -7639,8 +8108,8 @@
         </p:nvSpPr>
         <p:spPr>
           <a:xfrm>
-            <a:off x="11176000" y="6604000"/>
-            <a:ext cx="635000" cy="190500"/>
+            <a:off x="11049000" y="6578600"/>
+            <a:ext cx="762000" cy="190500"/>
           </a:xfrm>
           <a:prstGeom prst="rect">
             <a:avLst/>
@@ -7700,21 +8169,21 @@
         <p:spPr>
           <a:xfrm>
             <a:off x="508000" y="609600"/>
-            <a:ext cx="9525000" cy="254000"/>
-          </a:xfrm>
-          <a:prstGeom prst="rect">
-            <a:avLst/>
-          </a:prstGeom>
-          <a:noFill/>
-        </p:spPr>
-        <p:txBody>
-          <a:bodyPr wrap="square">
-            <a:spAutoFit/>
-          </a:bodyPr>
-          <a:lstStyle/>
-          <a:p>
-            <a:r>
-              <a:rPr sz="1400" b="1">
+            <a:ext cx="3683000" cy="254000"/>
+          </a:xfrm>
+          <a:prstGeom prst="rect">
+            <a:avLst/>
+          </a:prstGeom>
+          <a:noFill/>
+        </p:spPr>
+        <p:txBody>
+          <a:bodyPr wrap="square">
+            <a:spAutoFit/>
+          </a:bodyPr>
+          <a:lstStyle/>
+          <a:p>
+            <a:r>
+              <a:rPr sz="1300" b="1">
                 <a:solidFill>
                   <a:srgbClr val="26673D"/>
                 </a:solidFill>
@@ -7733,22 +8202,22 @@
         </p:nvSpPr>
         <p:spPr>
           <a:xfrm>
-            <a:off x="508000" y="825500"/>
-            <a:ext cx="6985000" cy="889000"/>
-          </a:xfrm>
-          <a:prstGeom prst="rect">
-            <a:avLst/>
-          </a:prstGeom>
-          <a:noFill/>
-        </p:spPr>
-        <p:txBody>
-          <a:bodyPr wrap="square">
-            <a:spAutoFit/>
-          </a:bodyPr>
-          <a:lstStyle/>
-          <a:p>
-            <a:r>
-              <a:rPr sz="3000" b="1">
+            <a:off x="508000" y="863600"/>
+            <a:ext cx="3683000" cy="1270000"/>
+          </a:xfrm>
+          <a:prstGeom prst="rect">
+            <a:avLst/>
+          </a:prstGeom>
+          <a:noFill/>
+        </p:spPr>
+        <p:txBody>
+          <a:bodyPr wrap="square">
+            <a:spAutoFit/>
+          </a:bodyPr>
+          <a:lstStyle/>
+          <a:p>
+            <a:r>
+              <a:rPr sz="2600" b="1">
                 <a:solidFill>
                   <a:srgbClr val="1E1E1C"/>
                 </a:solidFill>
@@ -7767,22 +8236,22 @@
         </p:nvSpPr>
         <p:spPr>
           <a:xfrm>
-            <a:off x="508000" y="1905000"/>
-            <a:ext cx="3556000" cy="4445000"/>
-          </a:xfrm>
-          <a:prstGeom prst="rect">
-            <a:avLst/>
-          </a:prstGeom>
-          <a:noFill/>
-        </p:spPr>
-        <p:txBody>
-          <a:bodyPr wrap="square">
-            <a:spAutoFit/>
-          </a:bodyPr>
-          <a:lstStyle/>
-          <a:p>
-            <a:r>
-              <a:rPr sz="1500" b="0">
+            <a:off x="508000" y="2286000"/>
+            <a:ext cx="3683000" cy="4191000"/>
+          </a:xfrm>
+          <a:prstGeom prst="rect">
+            <a:avLst/>
+          </a:prstGeom>
+          <a:noFill/>
+        </p:spPr>
+        <p:txBody>
+          <a:bodyPr wrap="square">
+            <a:spAutoFit/>
+          </a:bodyPr>
+          <a:lstStyle/>
+          <a:p>
+            <a:r>
+              <a:rPr sz="1400" b="0">
                 <a:solidFill>
                   <a:srgbClr val="5A5750"/>
                 </a:solidFill>
@@ -7793,18 +8262,29 @@
           </a:p>
           <a:p>
             <a:r>
-              <a:rPr sz="1500" b="0">
+              <a:rPr sz="1400" b="0">
                 <a:solidFill>
                   <a:srgbClr val="5A5750"/>
                 </a:solidFill>
                 <a:latin typeface="Inter"/>
               </a:rPr>
+              <a:t/>
+            </a:r>
+          </a:p>
+          <a:p>
+            <a:r>
+              <a:rPr sz="1400" b="0">
+                <a:solidFill>
+                  <a:srgbClr val="5A5750"/>
+                </a:solidFill>
+                <a:latin typeface="Inter"/>
+              </a:rPr>
               <a:t>- Visitor journey: lobby - reception - experience centre - boardroom</a:t>
             </a:r>
           </a:p>
           <a:p>
             <a:r>
-              <a:rPr sz="1500" b="0">
+              <a:rPr sz="1400" b="0">
                 <a:solidFill>
                   <a:srgbClr val="5A5750"/>
                 </a:solidFill>
@@ -7815,7 +8295,7 @@
           </a:p>
           <a:p>
             <a:r>
-              <a:rPr sz="1500" b="0">
+              <a:rPr sz="1400" b="0">
                 <a:solidFill>
                   <a:srgbClr val="5A5750"/>
                 </a:solidFill>
@@ -7826,7 +8306,7 @@
           </a:p>
           <a:p>
             <a:r>
-              <a:rPr sz="1500" b="0">
+              <a:rPr sz="1400" b="0">
                 <a:solidFill>
                   <a:srgbClr val="5A5750"/>
                 </a:solidFill>
@@ -7904,7 +8384,7 @@
         </p:nvSpPr>
         <p:spPr>
           <a:xfrm>
-            <a:off x="508000" y="6604000"/>
+            <a:off x="508000" y="6578600"/>
             <a:ext cx="8255000" cy="190500"/>
           </a:xfrm>
           <a:prstGeom prst="rect">
@@ -7938,8 +8418,8 @@
         </p:nvSpPr>
         <p:spPr>
           <a:xfrm>
-            <a:off x="11176000" y="6604000"/>
-            <a:ext cx="635000" cy="190500"/>
+            <a:off x="11049000" y="6578600"/>
+            <a:ext cx="762000" cy="190500"/>
           </a:xfrm>
           <a:prstGeom prst="rect">
             <a:avLst/>
@@ -8013,7 +8493,7 @@
           <a:lstStyle/>
           <a:p>
             <a:r>
-              <a:rPr sz="1400" b="1">
+              <a:rPr sz="1300" b="1">
                 <a:solidFill>
                   <a:srgbClr val="26673D"/>
                 </a:solidFill>
@@ -8032,22 +8512,22 @@
         </p:nvSpPr>
         <p:spPr>
           <a:xfrm>
-            <a:off x="508000" y="825500"/>
-            <a:ext cx="6985000" cy="889000"/>
-          </a:xfrm>
-          <a:prstGeom prst="rect">
-            <a:avLst/>
-          </a:prstGeom>
-          <a:noFill/>
-        </p:spPr>
-        <p:txBody>
-          <a:bodyPr wrap="square">
-            <a:spAutoFit/>
-          </a:bodyPr>
-          <a:lstStyle/>
-          <a:p>
-            <a:r>
-              <a:rPr sz="3000" b="1">
+            <a:off x="508000" y="863600"/>
+            <a:ext cx="9525000" cy="762000"/>
+          </a:xfrm>
+          <a:prstGeom prst="rect">
+            <a:avLst/>
+          </a:prstGeom>
+          <a:noFill/>
+        </p:spPr>
+        <p:txBody>
+          <a:bodyPr wrap="square">
+            <a:spAutoFit/>
+          </a:bodyPr>
+          <a:lstStyle/>
+          <a:p>
+            <a:r>
+              <a:rPr sz="2800" b="1">
                 <a:solidFill>
                   <a:srgbClr val="1E1E1C"/>
                 </a:solidFill>
@@ -8067,7 +8547,7 @@
         <p:spPr>
           <a:xfrm>
             <a:off x="508000" y="2032000"/>
-            <a:ext cx="3556000" cy="1651000"/>
+            <a:ext cx="3556000" cy="1714500"/>
           </a:xfrm>
           <a:prstGeom prst="rect">
             <a:avLst/>
@@ -8109,7 +8589,7 @@
         </p:nvSpPr>
         <p:spPr>
           <a:xfrm>
-            <a:off x="660400" y="2159000"/>
+            <a:off x="660400" y="2171700"/>
             <a:ext cx="3238500" cy="317500"/>
           </a:xfrm>
           <a:prstGeom prst="rect">
@@ -8124,13 +8604,13 @@
           <a:lstStyle/>
           <a:p>
             <a:r>
-              <a:rPr sz="2000" b="1">
+              <a:rPr sz="1900" b="1">
                 <a:solidFill>
                   <a:srgbClr val="26673D"/>
                 </a:solidFill>
                 <a:latin typeface="Inter"/>
               </a:rPr>
-              <a:t>01  Modernity</a:t>
+              <a:t>01   Modernity</a:t>
             </a:r>
           </a:p>
         </p:txBody>
@@ -8143,7 +8623,7 @@
         </p:nvSpPr>
         <p:spPr>
           <a:xfrm>
-            <a:off x="660400" y="2540000"/>
+            <a:off x="660400" y="2578100"/>
             <a:ext cx="3238500" cy="1079500"/>
           </a:xfrm>
           <a:prstGeom prst="rect">
@@ -8178,7 +8658,7 @@
         <p:spPr>
           <a:xfrm>
             <a:off x="4318000" y="2032000"/>
-            <a:ext cx="3556000" cy="1651000"/>
+            <a:ext cx="3556000" cy="1714500"/>
           </a:xfrm>
           <a:prstGeom prst="rect">
             <a:avLst/>
@@ -8220,7 +8700,7 @@
         </p:nvSpPr>
         <p:spPr>
           <a:xfrm>
-            <a:off x="4470400" y="2159000"/>
+            <a:off x="4470400" y="2171700"/>
             <a:ext cx="3238500" cy="317500"/>
           </a:xfrm>
           <a:prstGeom prst="rect">
@@ -8235,13 +8715,13 @@
           <a:lstStyle/>
           <a:p>
             <a:r>
-              <a:rPr sz="2000" b="1">
+              <a:rPr sz="1900" b="1">
                 <a:solidFill>
                   <a:srgbClr val="26673D"/>
                 </a:solidFill>
                 <a:latin typeface="Inter"/>
               </a:rPr>
-              <a:t>02  Functionality</a:t>
+              <a:t>02   Functionality</a:t>
             </a:r>
           </a:p>
         </p:txBody>
@@ -8254,7 +8734,7 @@
         </p:nvSpPr>
         <p:spPr>
           <a:xfrm>
-            <a:off x="4470400" y="2540000"/>
+            <a:off x="4470400" y="2578100"/>
             <a:ext cx="3238500" cy="1079500"/>
           </a:xfrm>
           <a:prstGeom prst="rect">
@@ -8289,7 +8769,7 @@
         <p:spPr>
           <a:xfrm>
             <a:off x="8128000" y="2032000"/>
-            <a:ext cx="3556000" cy="1651000"/>
+            <a:ext cx="3556000" cy="1714500"/>
           </a:xfrm>
           <a:prstGeom prst="rect">
             <a:avLst/>
@@ -8331,7 +8811,7 @@
         </p:nvSpPr>
         <p:spPr>
           <a:xfrm>
-            <a:off x="8280400" y="2159000"/>
+            <a:off x="8280400" y="2171700"/>
             <a:ext cx="3238500" cy="317500"/>
           </a:xfrm>
           <a:prstGeom prst="rect">
@@ -8346,13 +8826,13 @@
           <a:lstStyle/>
           <a:p>
             <a:r>
-              <a:rPr sz="2000" b="1">
+              <a:rPr sz="1900" b="1">
                 <a:solidFill>
                   <a:srgbClr val="26673D"/>
                 </a:solidFill>
                 <a:latin typeface="Inter"/>
               </a:rPr>
-              <a:t>03  Collaboration</a:t>
+              <a:t>03   Collaboration</a:t>
             </a:r>
           </a:p>
         </p:txBody>
@@ -8365,7 +8845,7 @@
         </p:nvSpPr>
         <p:spPr>
           <a:xfrm>
-            <a:off x="8280400" y="2540000"/>
+            <a:off x="8280400" y="2578100"/>
             <a:ext cx="3238500" cy="1079500"/>
           </a:xfrm>
           <a:prstGeom prst="rect">
@@ -8400,7 +8880,7 @@
         <p:spPr>
           <a:xfrm>
             <a:off x="508000" y="3937000"/>
-            <a:ext cx="3556000" cy="1651000"/>
+            <a:ext cx="3556000" cy="1714500"/>
           </a:xfrm>
           <a:prstGeom prst="rect">
             <a:avLst/>
@@ -8442,7 +8922,7 @@
         </p:nvSpPr>
         <p:spPr>
           <a:xfrm>
-            <a:off x="660400" y="4064000"/>
+            <a:off x="660400" y="4076700"/>
             <a:ext cx="3238500" cy="317500"/>
           </a:xfrm>
           <a:prstGeom prst="rect">
@@ -8457,13 +8937,13 @@
           <a:lstStyle/>
           <a:p>
             <a:r>
-              <a:rPr sz="2000" b="1">
+              <a:rPr sz="1900" b="1">
                 <a:solidFill>
                   <a:srgbClr val="26673D"/>
                 </a:solidFill>
                 <a:latin typeface="Inter"/>
               </a:rPr>
-              <a:t>04  Creativity</a:t>
+              <a:t>04   Creativity</a:t>
             </a:r>
           </a:p>
         </p:txBody>
@@ -8476,7 +8956,7 @@
         </p:nvSpPr>
         <p:spPr>
           <a:xfrm>
-            <a:off x="660400" y="4445000"/>
+            <a:off x="660400" y="4483100"/>
             <a:ext cx="3238500" cy="1079500"/>
           </a:xfrm>
           <a:prstGeom prst="rect">
@@ -8511,7 +8991,7 @@
         <p:spPr>
           <a:xfrm>
             <a:off x="4318000" y="3937000"/>
-            <a:ext cx="3556000" cy="1651000"/>
+            <a:ext cx="3556000" cy="1714500"/>
           </a:xfrm>
           <a:prstGeom prst="rect">
             <a:avLst/>
@@ -8553,7 +9033,7 @@
         </p:nvSpPr>
         <p:spPr>
           <a:xfrm>
-            <a:off x="4470400" y="4064000"/>
+            <a:off x="4470400" y="4076700"/>
             <a:ext cx="3238500" cy="317500"/>
           </a:xfrm>
           <a:prstGeom prst="rect">
@@ -8568,13 +9048,13 @@
           <a:lstStyle/>
           <a:p>
             <a:r>
-              <a:rPr sz="2000" b="1">
+              <a:rPr sz="1900" b="1">
                 <a:solidFill>
                   <a:srgbClr val="26673D"/>
                 </a:solidFill>
                 <a:latin typeface="Inter"/>
               </a:rPr>
-              <a:t>05  Employee comfort</a:t>
+              <a:t>05   Employee comfort</a:t>
             </a:r>
           </a:p>
         </p:txBody>
@@ -8587,7 +9067,7 @@
         </p:nvSpPr>
         <p:spPr>
           <a:xfrm>
-            <a:off x="4470400" y="4445000"/>
+            <a:off x="4470400" y="4483100"/>
             <a:ext cx="3238500" cy="1079500"/>
           </a:xfrm>
           <a:prstGeom prst="rect">
@@ -8622,7 +9102,7 @@
         <p:spPr>
           <a:xfrm>
             <a:off x="8128000" y="3937000"/>
-            <a:ext cx="3556000" cy="1651000"/>
+            <a:ext cx="3556000" cy="1714500"/>
           </a:xfrm>
           <a:prstGeom prst="rect">
             <a:avLst/>
@@ -8664,7 +9144,7 @@
         </p:nvSpPr>
         <p:spPr>
           <a:xfrm>
-            <a:off x="8280400" y="4064000"/>
+            <a:off x="8280400" y="4076700"/>
             <a:ext cx="3238500" cy="317500"/>
           </a:xfrm>
           <a:prstGeom prst="rect">
@@ -8679,13 +9159,13 @@
           <a:lstStyle/>
           <a:p>
             <a:r>
-              <a:rPr sz="2000" b="1">
+              <a:rPr sz="1900" b="1">
                 <a:solidFill>
                   <a:srgbClr val="26673D"/>
                 </a:solidFill>
                 <a:latin typeface="Inter"/>
               </a:rPr>
-              <a:t>06  Professional image</a:t>
+              <a:t>06   Professional image</a:t>
             </a:r>
           </a:p>
         </p:txBody>
@@ -8698,7 +9178,7 @@
         </p:nvSpPr>
         <p:spPr>
           <a:xfrm>
-            <a:off x="8280400" y="4445000"/>
+            <a:off x="8280400" y="4483100"/>
             <a:ext cx="3238500" cy="1079500"/>
           </a:xfrm>
           <a:prstGeom prst="rect">
@@ -8732,7 +9212,7 @@
         </p:nvSpPr>
         <p:spPr>
           <a:xfrm>
-            <a:off x="508000" y="6604000"/>
+            <a:off x="508000" y="6578600"/>
             <a:ext cx="8255000" cy="190500"/>
           </a:xfrm>
           <a:prstGeom prst="rect">
@@ -8766,8 +9246,8 @@
         </p:nvSpPr>
         <p:spPr>
           <a:xfrm>
-            <a:off x="11176000" y="6604000"/>
-            <a:ext cx="635000" cy="190500"/>
+            <a:off x="11049000" y="6578600"/>
+            <a:ext cx="762000" cy="190500"/>
           </a:xfrm>
           <a:prstGeom prst="rect">
             <a:avLst/>
@@ -8818,77 +9298,9 @@
         <p:nvPr/>
       </p:nvGrpSpPr>
       <p:grpSpPr/>
-      <p:sp>
-        <p:nvSpPr>
-          <p:cNvPr id="2" name="TextBox 1"/>
-          <p:cNvSpPr txBox="1"/>
-          <p:nvPr/>
-        </p:nvSpPr>
-        <p:spPr>
-          <a:xfrm>
-            <a:off x="508000" y="609600"/>
-            <a:ext cx="9525000" cy="254000"/>
-          </a:xfrm>
-          <a:prstGeom prst="rect">
-            <a:avLst/>
-          </a:prstGeom>
-          <a:noFill/>
-        </p:spPr>
-        <p:txBody>
-          <a:bodyPr wrap="square">
-            <a:spAutoFit/>
-          </a:bodyPr>
-          <a:lstStyle/>
-          <a:p>
-            <a:r>
-              <a:rPr sz="1400" b="1">
-                <a:solidFill>
-                  <a:srgbClr val="26673D"/>
-                </a:solidFill>
-                <a:latin typeface="Inter"/>
-              </a:rPr>
-              <a:t>FLOOR PLAN</a:t>
-            </a:r>
-          </a:p>
-        </p:txBody>
-      </p:sp>
-      <p:sp>
-        <p:nvSpPr>
-          <p:cNvPr id="3" name="TextBox 2"/>
-          <p:cNvSpPr txBox="1"/>
-          <p:nvPr/>
-        </p:nvSpPr>
-        <p:spPr>
-          <a:xfrm>
-            <a:off x="508000" y="825500"/>
-            <a:ext cx="6350000" cy="889000"/>
-          </a:xfrm>
-          <a:prstGeom prst="rect">
-            <a:avLst/>
-          </a:prstGeom>
-          <a:noFill/>
-        </p:spPr>
-        <p:txBody>
-          <a:bodyPr wrap="square">
-            <a:spAutoFit/>
-          </a:bodyPr>
-          <a:lstStyle/>
-          <a:p>
-            <a:r>
-              <a:rPr sz="3000" b="1">
-                <a:solidFill>
-                  <a:srgbClr val="1E1E1C"/>
-                </a:solidFill>
-                <a:latin typeface="Inter"/>
-              </a:rPr>
-              <a:t>Furnished ground-floor layout</a:t>
-            </a:r>
-          </a:p>
-        </p:txBody>
-      </p:sp>
       <p:pic>
         <p:nvPicPr>
-          <p:cNvPr id="4" name="Picture 3" descr="ID-01_furnished_plan.png"/>
+          <p:cNvPr id="2" name="Picture 1" descr="ID-01_furnished_plan.png"/>
           <p:cNvPicPr>
             <a:picLocks noChangeAspect="1"/>
           </p:cNvPicPr>
@@ -8913,28 +9325,96 @@
       </p:pic>
       <p:sp>
         <p:nvSpPr>
+          <p:cNvPr id="3" name="TextBox 2"/>
+          <p:cNvSpPr txBox="1"/>
+          <p:nvPr/>
+        </p:nvSpPr>
+        <p:spPr>
+          <a:xfrm>
+            <a:off x="5270500" y="609600"/>
+            <a:ext cx="6413500" cy="254000"/>
+          </a:xfrm>
+          <a:prstGeom prst="rect">
+            <a:avLst/>
+          </a:prstGeom>
+          <a:noFill/>
+        </p:spPr>
+        <p:txBody>
+          <a:bodyPr wrap="square">
+            <a:spAutoFit/>
+          </a:bodyPr>
+          <a:lstStyle/>
+          <a:p>
+            <a:r>
+              <a:rPr sz="1300" b="1">
+                <a:solidFill>
+                  <a:srgbClr val="26673D"/>
+                </a:solidFill>
+                <a:latin typeface="Inter"/>
+              </a:rPr>
+              <a:t>FLOOR PLAN</a:t>
+            </a:r>
+          </a:p>
+        </p:txBody>
+      </p:sp>
+      <p:sp>
+        <p:nvSpPr>
+          <p:cNvPr id="4" name="TextBox 3"/>
+          <p:cNvSpPr txBox="1"/>
+          <p:nvPr/>
+        </p:nvSpPr>
+        <p:spPr>
+          <a:xfrm>
+            <a:off x="5270500" y="863600"/>
+            <a:ext cx="6413500" cy="825500"/>
+          </a:xfrm>
+          <a:prstGeom prst="rect">
+            <a:avLst/>
+          </a:prstGeom>
+          <a:noFill/>
+        </p:spPr>
+        <p:txBody>
+          <a:bodyPr wrap="square">
+            <a:spAutoFit/>
+          </a:bodyPr>
+          <a:lstStyle/>
+          <a:p>
+            <a:r>
+              <a:rPr sz="2600" b="1">
+                <a:solidFill>
+                  <a:srgbClr val="1E1E1C"/>
+                </a:solidFill>
+                <a:latin typeface="Inter"/>
+              </a:rPr>
+              <a:t>Furnished ground-floor layout</a:t>
+            </a:r>
+          </a:p>
+        </p:txBody>
+      </p:sp>
+      <p:sp>
+        <p:nvSpPr>
           <p:cNvPr id="5" name="TextBox 4"/>
           <p:cNvSpPr txBox="1"/>
           <p:nvPr/>
         </p:nvSpPr>
         <p:spPr>
           <a:xfrm>
-            <a:off x="5270500" y="1905000"/>
-            <a:ext cx="6413500" cy="762000"/>
-          </a:xfrm>
-          <a:prstGeom prst="rect">
-            <a:avLst/>
-          </a:prstGeom>
-          <a:noFill/>
-        </p:spPr>
-        <p:txBody>
-          <a:bodyPr wrap="square">
-            <a:spAutoFit/>
-          </a:bodyPr>
-          <a:lstStyle/>
-          <a:p>
-            <a:r>
-              <a:rPr sz="1500" b="0">
+            <a:off x="5270500" y="1841500"/>
+            <a:ext cx="6413500" cy="698500"/>
+          </a:xfrm>
+          <a:prstGeom prst="rect">
+            <a:avLst/>
+          </a:prstGeom>
+          <a:noFill/>
+        </p:spPr>
+        <p:txBody>
+          <a:bodyPr wrap="square">
+            <a:spAutoFit/>
+          </a:bodyPr>
+          <a:lstStyle/>
+          <a:p>
+            <a:r>
+              <a:rPr sz="1400" b="0">
                 <a:solidFill>
                   <a:srgbClr val="5A5750"/>
                 </a:solidFill>
@@ -8954,8 +9434,8 @@
           <p:nvPr/>
         </p:nvGraphicFramePr>
         <p:xfrm>
-          <a:off x="5270500" y="2667000"/>
-          <a:ext cx="6413500" cy="1524000"/>
+          <a:off x="5270500" y="2603500"/>
+          <a:ext cx="6413500" cy="1752600"/>
         </p:xfrm>
         <a:graphic>
           <a:graphicData uri="http://schemas.openxmlformats.org/drawingml/2006/table">
@@ -8968,19 +9448,28 @@
                 <a:gridCol w="2137833"/>
                 <a:gridCol w="2137834"/>
               </a:tblGrid>
-              <a:tr h="254000">
+              <a:tr h="292100">
                 <a:tc>
                   <a:txBody>
                     <a:bodyPr/>
                     <a:lstStyle/>
                     <a:p>
                       <a:r>
-                        <a:rPr sz="1200"/>
+                        <a:rPr sz="1000" b="1">
+                          <a:solidFill>
+                            <a:srgbClr val="26673D"/>
+                          </a:solidFill>
+                          <a:latin typeface="Inter"/>
+                        </a:rPr>
                         <a:t>Key dimension</a:t>
                       </a:r>
                     </a:p>
                   </a:txBody>
-                  <a:tcPr/>
+                  <a:tcPr>
+                    <a:solidFill>
+                      <a:srgbClr val="EEEAE2"/>
+                    </a:solidFill>
+                  </a:tcPr>
                 </a:tc>
                 <a:tc>
                   <a:txBody>
@@ -8988,12 +9477,21 @@
                     <a:lstStyle/>
                     <a:p>
                       <a:r>
-                        <a:rPr sz="1200"/>
+                        <a:rPr sz="1000" b="1">
+                          <a:solidFill>
+                            <a:srgbClr val="26673D"/>
+                          </a:solidFill>
+                          <a:latin typeface="Inter"/>
+                        </a:rPr>
                         <a:t>Value</a:t>
                       </a:r>
                     </a:p>
                   </a:txBody>
-                  <a:tcPr/>
+                  <a:tcPr>
+                    <a:solidFill>
+                      <a:srgbClr val="EEEAE2"/>
+                    </a:solidFill>
+                  </a:tcPr>
                 </a:tc>
                 <a:tc>
                   <a:txBody>
@@ -9001,27 +9499,45 @@
                     <a:lstStyle/>
                     <a:p>
                       <a:r>
-                        <a:rPr sz="1200"/>
+                        <a:rPr sz="1000" b="1">
+                          <a:solidFill>
+                            <a:srgbClr val="26673D"/>
+                          </a:solidFill>
+                          <a:latin typeface="Inter"/>
+                        </a:rPr>
                         <a:t>Status</a:t>
                       </a:r>
                     </a:p>
                   </a:txBody>
-                  <a:tcPr/>
+                  <a:tcPr>
+                    <a:solidFill>
+                      <a:srgbClr val="EEEAE2"/>
+                    </a:solidFill>
+                  </a:tcPr>
                 </a:tc>
               </a:tr>
-              <a:tr h="254000">
+              <a:tr h="292100">
                 <a:tc>
                   <a:txBody>
                     <a:bodyPr/>
                     <a:lstStyle/>
                     <a:p>
                       <a:r>
-                        <a:rPr sz="1200"/>
+                        <a:rPr sz="1200" b="1">
+                          <a:solidFill>
+                            <a:srgbClr val="26673D"/>
+                          </a:solidFill>
+                          <a:latin typeface="Inter"/>
+                        </a:rPr>
                         <a:t>Rooms 1 / 3 / 4 widths</a:t>
                       </a:r>
                     </a:p>
                   </a:txBody>
-                  <a:tcPr/>
+                  <a:tcPr>
+                    <a:solidFill>
+                      <a:srgbClr val="FFFFFF"/>
+                    </a:solidFill>
+                  </a:tcPr>
                 </a:tc>
                 <a:tc>
                   <a:txBody>
@@ -9029,12 +9545,21 @@
                     <a:lstStyle/>
                     <a:p>
                       <a:r>
-                        <a:rPr sz="1200"/>
+                        <a:rPr sz="1200" b="0">
+                          <a:solidFill>
+                            <a:srgbClr val="1E1E1C"/>
+                          </a:solidFill>
+                          <a:latin typeface="Inter"/>
+                        </a:rPr>
                         <a:t>25'-0" / 21'-8" / 43'-2"</a:t>
                       </a:r>
                     </a:p>
                   </a:txBody>
-                  <a:tcPr/>
+                  <a:tcPr>
+                    <a:solidFill>
+                      <a:srgbClr val="FFFFFF"/>
+                    </a:solidFill>
+                  </a:tcPr>
                 </a:tc>
                 <a:tc>
                   <a:txBody>
@@ -9042,27 +9567,45 @@
                     <a:lstStyle/>
                     <a:p>
                       <a:r>
-                        <a:rPr sz="1200"/>
+                        <a:rPr sz="1200" b="0">
+                          <a:solidFill>
+                            <a:srgbClr val="1E1E1C"/>
+                          </a:solidFill>
+                          <a:latin typeface="Inter"/>
+                        </a:rPr>
                         <a:t>measured</a:t>
                       </a:r>
                     </a:p>
                   </a:txBody>
-                  <a:tcPr/>
+                  <a:tcPr>
+                    <a:solidFill>
+                      <a:srgbClr val="FFFFFF"/>
+                    </a:solidFill>
+                  </a:tcPr>
                 </a:tc>
               </a:tr>
-              <a:tr h="254000">
+              <a:tr h="292100">
                 <a:tc>
                   <a:txBody>
                     <a:bodyPr/>
                     <a:lstStyle/>
                     <a:p>
                       <a:r>
-                        <a:rPr sz="1200"/>
+                        <a:rPr sz="1200" b="1">
+                          <a:solidFill>
+                            <a:srgbClr val="26673D"/>
+                          </a:solidFill>
+                          <a:latin typeface="Inter"/>
+                        </a:rPr>
                         <a:t>Middle block depth</a:t>
                       </a:r>
                     </a:p>
                   </a:txBody>
-                  <a:tcPr/>
+                  <a:tcPr>
+                    <a:solidFill>
+                      <a:srgbClr val="FFFFFF"/>
+                    </a:solidFill>
+                  </a:tcPr>
                 </a:tc>
                 <a:tc>
                   <a:txBody>
@@ -9070,12 +9613,21 @@
                     <a:lstStyle/>
                     <a:p>
                       <a:r>
-                        <a:rPr sz="1200"/>
+                        <a:rPr sz="1200" b="0">
+                          <a:solidFill>
+                            <a:srgbClr val="1E1E1C"/>
+                          </a:solidFill>
+                          <a:latin typeface="Inter"/>
+                        </a:rPr>
                         <a:t>73'-5"</a:t>
                       </a:r>
                     </a:p>
                   </a:txBody>
-                  <a:tcPr/>
+                  <a:tcPr>
+                    <a:solidFill>
+                      <a:srgbClr val="FFFFFF"/>
+                    </a:solidFill>
+                  </a:tcPr>
                 </a:tc>
                 <a:tc>
                   <a:txBody>
@@ -9083,27 +9635,45 @@
                     <a:lstStyle/>
                     <a:p>
                       <a:r>
-                        <a:rPr sz="1200"/>
+                        <a:rPr sz="1200" b="0">
+                          <a:solidFill>
+                            <a:srgbClr val="1E1E1C"/>
+                          </a:solidFill>
+                          <a:latin typeface="Inter"/>
+                        </a:rPr>
                         <a:t>derived</a:t>
                       </a:r>
                     </a:p>
                   </a:txBody>
-                  <a:tcPr/>
+                  <a:tcPr>
+                    <a:solidFill>
+                      <a:srgbClr val="FFFFFF"/>
+                    </a:solidFill>
+                  </a:tcPr>
                 </a:tc>
               </a:tr>
-              <a:tr h="254000">
+              <a:tr h="292100">
                 <a:tc>
                   <a:txBody>
                     <a:bodyPr/>
                     <a:lstStyle/>
                     <a:p>
                       <a:r>
-                        <a:rPr sz="1200"/>
+                        <a:rPr sz="1200" b="1">
+                          <a:solidFill>
+                            <a:srgbClr val="26673D"/>
+                          </a:solidFill>
+                          <a:latin typeface="Inter"/>
+                        </a:rPr>
                         <a:t>Rooms 5 + 6 width</a:t>
                       </a:r>
                     </a:p>
                   </a:txBody>
-                  <a:tcPr/>
+                  <a:tcPr>
+                    <a:solidFill>
+                      <a:srgbClr val="FFFFFF"/>
+                    </a:solidFill>
+                  </a:tcPr>
                 </a:tc>
                 <a:tc>
                   <a:txBody>
@@ -9111,12 +9681,21 @@
                     <a:lstStyle/>
                     <a:p>
                       <a:r>
-                        <a:rPr sz="1200"/>
+                        <a:rPr sz="1200" b="0">
+                          <a:solidFill>
+                            <a:srgbClr val="1E1E1C"/>
+                          </a:solidFill>
+                          <a:latin typeface="Inter"/>
+                        </a:rPr>
                         <a:t>41'-7"</a:t>
                       </a:r>
                     </a:p>
                   </a:txBody>
-                  <a:tcPr/>
+                  <a:tcPr>
+                    <a:solidFill>
+                      <a:srgbClr val="FFFFFF"/>
+                    </a:solidFill>
+                  </a:tcPr>
                 </a:tc>
                 <a:tc>
                   <a:txBody>
@@ -9124,27 +9703,45 @@
                     <a:lstStyle/>
                     <a:p>
                       <a:r>
-                        <a:rPr sz="1200"/>
+                        <a:rPr sz="1200" b="0">
+                          <a:solidFill>
+                            <a:srgbClr val="1E1E1C"/>
+                          </a:solidFill>
+                          <a:latin typeface="Inter"/>
+                        </a:rPr>
                         <a:t>measured</a:t>
                       </a:r>
                     </a:p>
                   </a:txBody>
-                  <a:tcPr/>
+                  <a:tcPr>
+                    <a:solidFill>
+                      <a:srgbClr val="FFFFFF"/>
+                    </a:solidFill>
+                  </a:tcPr>
                 </a:tc>
               </a:tr>
-              <a:tr h="254000">
+              <a:tr h="292100">
                 <a:tc>
                   <a:txBody>
                     <a:bodyPr/>
                     <a:lstStyle/>
                     <a:p>
                       <a:r>
-                        <a:rPr sz="1200"/>
+                        <a:rPr sz="1200" b="1">
+                          <a:solidFill>
+                            <a:srgbClr val="26673D"/>
+                          </a:solidFill>
+                          <a:latin typeface="Inter"/>
+                        </a:rPr>
                         <a:t>Room 8 length / width</a:t>
                       </a:r>
                     </a:p>
                   </a:txBody>
-                  <a:tcPr/>
+                  <a:tcPr>
+                    <a:solidFill>
+                      <a:srgbClr val="FFFFFF"/>
+                    </a:solidFill>
+                  </a:tcPr>
                 </a:tc>
                 <a:tc>
                   <a:txBody>
@@ -9152,12 +9749,21 @@
                     <a:lstStyle/>
                     <a:p>
                       <a:r>
-                        <a:rPr sz="1200"/>
+                        <a:rPr sz="1200" b="0">
+                          <a:solidFill>
+                            <a:srgbClr val="1E1E1C"/>
+                          </a:solidFill>
+                          <a:latin typeface="Inter"/>
+                        </a:rPr>
                         <a:t>128'-2" / 37'-6"</a:t>
                       </a:r>
                     </a:p>
                   </a:txBody>
-                  <a:tcPr/>
+                  <a:tcPr>
+                    <a:solidFill>
+                      <a:srgbClr val="FFFFFF"/>
+                    </a:solidFill>
+                  </a:tcPr>
                 </a:tc>
                 <a:tc>
                   <a:txBody>
@@ -9165,27 +9771,45 @@
                     <a:lstStyle/>
                     <a:p>
                       <a:r>
-                        <a:rPr sz="1200"/>
+                        <a:rPr sz="1200" b="0">
+                          <a:solidFill>
+                            <a:srgbClr val="1E1E1C"/>
+                          </a:solidFill>
+                          <a:latin typeface="Inter"/>
+                        </a:rPr>
                         <a:t>measured / assumed</a:t>
                       </a:r>
                     </a:p>
                   </a:txBody>
-                  <a:tcPr/>
+                  <a:tcPr>
+                    <a:solidFill>
+                      <a:srgbClr val="FFFFFF"/>
+                    </a:solidFill>
+                  </a:tcPr>
                 </a:tc>
               </a:tr>
-              <a:tr h="254000">
+              <a:tr h="292100">
                 <a:tc>
                   <a:txBody>
                     <a:bodyPr/>
                     <a:lstStyle/>
                     <a:p>
                       <a:r>
-                        <a:rPr sz="1200"/>
+                        <a:rPr sz="1200" b="1">
+                          <a:solidFill>
+                            <a:srgbClr val="26673D"/>
+                          </a:solidFill>
+                          <a:latin typeface="Inter"/>
+                        </a:rPr>
                         <a:t>Floor to deck</a:t>
                       </a:r>
                     </a:p>
                   </a:txBody>
-                  <a:tcPr/>
+                  <a:tcPr>
+                    <a:solidFill>
+                      <a:srgbClr val="FFFFFF"/>
+                    </a:solidFill>
+                  </a:tcPr>
                 </a:tc>
                 <a:tc>
                   <a:txBody>
@@ -9193,12 +9817,21 @@
                     <a:lstStyle/>
                     <a:p>
                       <a:r>
-                        <a:rPr sz="1200"/>
+                        <a:rPr sz="1200" b="0">
+                          <a:solidFill>
+                            <a:srgbClr val="1E1E1C"/>
+                          </a:solidFill>
+                          <a:latin typeface="Inter"/>
+                        </a:rPr>
                         <a:t>9'-6"</a:t>
                       </a:r>
                     </a:p>
                   </a:txBody>
-                  <a:tcPr/>
+                  <a:tcPr>
+                    <a:solidFill>
+                      <a:srgbClr val="FFFFFF"/>
+                    </a:solidFill>
+                  </a:tcPr>
                 </a:tc>
                 <a:tc>
                   <a:txBody>
@@ -9206,12 +9839,21 @@
                     <a:lstStyle/>
                     <a:p>
                       <a:r>
-                        <a:rPr sz="1200"/>
+                        <a:rPr sz="1200" b="0">
+                          <a:solidFill>
+                            <a:srgbClr val="1E1E1C"/>
+                          </a:solidFill>
+                          <a:latin typeface="Inter"/>
+                        </a:rPr>
                         <a:t>photo estimate</a:t>
                       </a:r>
                     </a:p>
                   </a:txBody>
-                  <a:tcPr/>
+                  <a:tcPr>
+                    <a:solidFill>
+                      <a:srgbClr val="FFFFFF"/>
+                    </a:solidFill>
+                  </a:tcPr>
                 </a:tc>
               </a:tr>
             </a:tbl>
@@ -9226,8 +9868,8 @@
         </p:nvSpPr>
         <p:spPr>
           <a:xfrm>
-            <a:off x="5270500" y="5905500"/>
-            <a:ext cx="6413500" cy="508000"/>
+            <a:off x="5270500" y="5969000"/>
+            <a:ext cx="6413500" cy="444500"/>
           </a:xfrm>
           <a:prstGeom prst="rect">
             <a:avLst/>
@@ -9260,7 +9902,7 @@
         </p:nvSpPr>
         <p:spPr>
           <a:xfrm>
-            <a:off x="508000" y="6604000"/>
+            <a:off x="508000" y="6578600"/>
             <a:ext cx="8255000" cy="190500"/>
           </a:xfrm>
           <a:prstGeom prst="rect">
@@ -9294,8 +9936,8 @@
         </p:nvSpPr>
         <p:spPr>
           <a:xfrm>
-            <a:off x="11176000" y="6604000"/>
-            <a:ext cx="635000" cy="190500"/>
+            <a:off x="11049000" y="6578600"/>
+            <a:ext cx="762000" cy="190500"/>
           </a:xfrm>
           <a:prstGeom prst="rect">
             <a:avLst/>
@@ -9346,77 +9988,9 @@
         <p:nvPr/>
       </p:nvGrpSpPr>
       <p:grpSpPr/>
-      <p:sp>
-        <p:nvSpPr>
-          <p:cNvPr id="2" name="TextBox 1"/>
-          <p:cNvSpPr txBox="1"/>
-          <p:nvPr/>
-        </p:nvSpPr>
-        <p:spPr>
-          <a:xfrm>
-            <a:off x="508000" y="609600"/>
-            <a:ext cx="9525000" cy="254000"/>
-          </a:xfrm>
-          <a:prstGeom prst="rect">
-            <a:avLst/>
-          </a:prstGeom>
-          <a:noFill/>
-        </p:spPr>
-        <p:txBody>
-          <a:bodyPr wrap="square">
-            <a:spAutoFit/>
-          </a:bodyPr>
-          <a:lstStyle/>
-          <a:p>
-            <a:r>
-              <a:rPr sz="1400" b="1">
-                <a:solidFill>
-                  <a:srgbClr val="26673D"/>
-                </a:solidFill>
-                <a:latin typeface="Inter"/>
-              </a:rPr>
-              <a:t>SPACE ZONING</a:t>
-            </a:r>
-          </a:p>
-        </p:txBody>
-      </p:sp>
-      <p:sp>
-        <p:nvSpPr>
-          <p:cNvPr id="3" name="TextBox 2"/>
-          <p:cNvSpPr txBox="1"/>
-          <p:nvPr/>
-        </p:nvSpPr>
-        <p:spPr>
-          <a:xfrm>
-            <a:off x="508000" y="825500"/>
-            <a:ext cx="6350000" cy="889000"/>
-          </a:xfrm>
-          <a:prstGeom prst="rect">
-            <a:avLst/>
-          </a:prstGeom>
-          <a:noFill/>
-        </p:spPr>
-        <p:txBody>
-          <a:bodyPr wrap="square">
-            <a:spAutoFit/>
-          </a:bodyPr>
-          <a:lstStyle/>
-          <a:p>
-            <a:r>
-              <a:rPr sz="3000" b="1">
-                <a:solidFill>
-                  <a:srgbClr val="1E1E1C"/>
-                </a:solidFill>
-                <a:latin typeface="Inter"/>
-              </a:rPr>
-              <a:t>Visitors in front, work in the middle, creation and care at the back</a:t>
-            </a:r>
-          </a:p>
-        </p:txBody>
-      </p:sp>
       <p:pic>
         <p:nvPicPr>
-          <p:cNvPr id="4" name="Picture 3" descr="ID-02_zoning_plan.png"/>
+          <p:cNvPr id="2" name="Picture 1" descr="ID-02_zoning_plan.png"/>
           <p:cNvPicPr>
             <a:picLocks noChangeAspect="1"/>
           </p:cNvPicPr>
@@ -9441,28 +10015,96 @@
       </p:pic>
       <p:sp>
         <p:nvSpPr>
+          <p:cNvPr id="3" name="TextBox 2"/>
+          <p:cNvSpPr txBox="1"/>
+          <p:nvPr/>
+        </p:nvSpPr>
+        <p:spPr>
+          <a:xfrm>
+            <a:off x="5270500" y="609600"/>
+            <a:ext cx="6413500" cy="254000"/>
+          </a:xfrm>
+          <a:prstGeom prst="rect">
+            <a:avLst/>
+          </a:prstGeom>
+          <a:noFill/>
+        </p:spPr>
+        <p:txBody>
+          <a:bodyPr wrap="square">
+            <a:spAutoFit/>
+          </a:bodyPr>
+          <a:lstStyle/>
+          <a:p>
+            <a:r>
+              <a:rPr sz="1300" b="1">
+                <a:solidFill>
+                  <a:srgbClr val="26673D"/>
+                </a:solidFill>
+                <a:latin typeface="Inter"/>
+              </a:rPr>
+              <a:t>SPACE ZONING</a:t>
+            </a:r>
+          </a:p>
+        </p:txBody>
+      </p:sp>
+      <p:sp>
+        <p:nvSpPr>
+          <p:cNvPr id="4" name="TextBox 3"/>
+          <p:cNvSpPr txBox="1"/>
+          <p:nvPr/>
+        </p:nvSpPr>
+        <p:spPr>
+          <a:xfrm>
+            <a:off x="5270500" y="863600"/>
+            <a:ext cx="6413500" cy="825500"/>
+          </a:xfrm>
+          <a:prstGeom prst="rect">
+            <a:avLst/>
+          </a:prstGeom>
+          <a:noFill/>
+        </p:spPr>
+        <p:txBody>
+          <a:bodyPr wrap="square">
+            <a:spAutoFit/>
+          </a:bodyPr>
+          <a:lstStyle/>
+          <a:p>
+            <a:r>
+              <a:rPr sz="2600" b="1">
+                <a:solidFill>
+                  <a:srgbClr val="1E1E1C"/>
+                </a:solidFill>
+                <a:latin typeface="Inter"/>
+              </a:rPr>
+              <a:t>Visitors in front, work in the middle, creation and care at the back</a:t>
+            </a:r>
+          </a:p>
+        </p:txBody>
+      </p:sp>
+      <p:sp>
+        <p:nvSpPr>
           <p:cNvPr id="5" name="TextBox 4"/>
           <p:cNvSpPr txBox="1"/>
           <p:nvPr/>
         </p:nvSpPr>
         <p:spPr>
           <a:xfrm>
-            <a:off x="5270500" y="1905000"/>
-            <a:ext cx="6413500" cy="762000"/>
-          </a:xfrm>
-          <a:prstGeom prst="rect">
-            <a:avLst/>
-          </a:prstGeom>
-          <a:noFill/>
-        </p:spPr>
-        <p:txBody>
-          <a:bodyPr wrap="square">
-            <a:spAutoFit/>
-          </a:bodyPr>
-          <a:lstStyle/>
-          <a:p>
-            <a:r>
-              <a:rPr sz="1500" b="0">
+            <a:off x="5270500" y="1841500"/>
+            <a:ext cx="6413500" cy="698500"/>
+          </a:xfrm>
+          <a:prstGeom prst="rect">
+            <a:avLst/>
+          </a:prstGeom>
+          <a:noFill/>
+        </p:spPr>
+        <p:txBody>
+          <a:bodyPr wrap="square">
+            <a:spAutoFit/>
+          </a:bodyPr>
+          <a:lstStyle/>
+          <a:p>
+            <a:r>
+              <a:rPr sz="1400" b="0">
                 <a:solidFill>
                   <a:srgbClr val="5A5750"/>
                 </a:solidFill>
@@ -9482,8 +10124,8 @@
           <p:nvPr/>
         </p:nvGraphicFramePr>
         <p:xfrm>
-          <a:off x="5270500" y="2667000"/>
-          <a:ext cx="6413500" cy="2540000"/>
+          <a:off x="5270500" y="2603500"/>
+          <a:ext cx="6413500" cy="2921000"/>
         </p:xfrm>
         <a:graphic>
           <a:graphicData uri="http://schemas.openxmlformats.org/drawingml/2006/table">
@@ -9496,19 +10138,28 @@
                 <a:gridCol w="2137833"/>
                 <a:gridCol w="2137834"/>
               </a:tblGrid>
-              <a:tr h="254000">
+              <a:tr h="292100">
                 <a:tc>
                   <a:txBody>
                     <a:bodyPr/>
                     <a:lstStyle/>
                     <a:p>
                       <a:r>
-                        <a:rPr sz="1200"/>
+                        <a:rPr sz="1000" b="1">
+                          <a:solidFill>
+                            <a:srgbClr val="26673D"/>
+                          </a:solidFill>
+                          <a:latin typeface="Inter"/>
+                        </a:rPr>
                         <a:t>Zone</a:t>
                       </a:r>
                     </a:p>
                   </a:txBody>
-                  <a:tcPr/>
+                  <a:tcPr>
+                    <a:solidFill>
+                      <a:srgbClr val="EEEAE2"/>
+                    </a:solidFill>
+                  </a:tcPr>
                 </a:tc>
                 <a:tc>
                   <a:txBody>
@@ -9516,12 +10167,21 @@
                     <a:lstStyle/>
                     <a:p>
                       <a:r>
-                        <a:rPr sz="1200"/>
+                        <a:rPr sz="1000" b="1">
+                          <a:solidFill>
+                            <a:srgbClr val="26673D"/>
+                          </a:solidFill>
+                          <a:latin typeface="Inter"/>
+                        </a:rPr>
                         <a:t>Net area</a:t>
                       </a:r>
                     </a:p>
                   </a:txBody>
-                  <a:tcPr/>
+                  <a:tcPr>
+                    <a:solidFill>
+                      <a:srgbClr val="EEEAE2"/>
+                    </a:solidFill>
+                  </a:tcPr>
                 </a:tc>
                 <a:tc>
                   <a:txBody>
@@ -9529,22 +10189,35 @@
                     <a:lstStyle/>
                     <a:p/>
                   </a:txBody>
-                  <a:tcPr/>
+                  <a:tcPr>
+                    <a:solidFill>
+                      <a:srgbClr val="EEEAE2"/>
+                    </a:solidFill>
+                  </a:tcPr>
                 </a:tc>
               </a:tr>
-              <a:tr h="254000">
+              <a:tr h="292100">
                 <a:tc>
                   <a:txBody>
                     <a:bodyPr/>
                     <a:lstStyle/>
                     <a:p>
                       <a:r>
-                        <a:rPr sz="1200"/>
+                        <a:rPr sz="1200" b="1">
+                          <a:solidFill>
+                            <a:srgbClr val="26673D"/>
+                          </a:solidFill>
+                          <a:latin typeface="Inter"/>
+                        </a:rPr>
                         <a:t>Visitor &amp; reception</a:t>
                       </a:r>
                     </a:p>
                   </a:txBody>
-                  <a:tcPr/>
+                  <a:tcPr>
+                    <a:solidFill>
+                      <a:srgbClr val="FFFFFF"/>
+                    </a:solidFill>
+                  </a:tcPr>
                 </a:tc>
                 <a:tc>
                   <a:txBody>
@@ -9552,12 +10225,21 @@
                     <a:lstStyle/>
                     <a:p>
                       <a:r>
-                        <a:rPr sz="1200"/>
+                        <a:rPr sz="1200" b="0">
+                          <a:solidFill>
+                            <a:srgbClr val="1E1E1C"/>
+                          </a:solidFill>
+                          <a:latin typeface="Inter"/>
+                        </a:rPr>
                         <a:t>1,036 sft</a:t>
                       </a:r>
                     </a:p>
                   </a:txBody>
-                  <a:tcPr/>
+                  <a:tcPr>
+                    <a:solidFill>
+                      <a:srgbClr val="FFFFFF"/>
+                    </a:solidFill>
+                  </a:tcPr>
                 </a:tc>
                 <a:tc>
                   <a:txBody>
@@ -9565,22 +10247,35 @@
                     <a:lstStyle/>
                     <a:p/>
                   </a:txBody>
-                  <a:tcPr/>
+                  <a:tcPr>
+                    <a:solidFill>
+                      <a:srgbClr val="FFFFFF"/>
+                    </a:solidFill>
+                  </a:tcPr>
                 </a:tc>
               </a:tr>
-              <a:tr h="254000">
+              <a:tr h="292100">
                 <a:tc>
                   <a:txBody>
                     <a:bodyPr/>
                     <a:lstStyle/>
                     <a:p>
                       <a:r>
-                        <a:rPr sz="1200"/>
+                        <a:rPr sz="1200" b="1">
+                          <a:solidFill>
+                            <a:srgbClr val="26673D"/>
+                          </a:solidFill>
+                          <a:latin typeface="Inter"/>
+                        </a:rPr>
                         <a:t>Experience centre</a:t>
                       </a:r>
                     </a:p>
                   </a:txBody>
-                  <a:tcPr/>
+                  <a:tcPr>
+                    <a:solidFill>
+                      <a:srgbClr val="FFFFFF"/>
+                    </a:solidFill>
+                  </a:tcPr>
                 </a:tc>
                 <a:tc>
                   <a:txBody>
@@ -9588,12 +10283,21 @@
                     <a:lstStyle/>
                     <a:p>
                       <a:r>
-                        <a:rPr sz="1200"/>
+                        <a:rPr sz="1200" b="0">
+                          <a:solidFill>
+                            <a:srgbClr val="1E1E1C"/>
+                          </a:solidFill>
+                          <a:latin typeface="Inter"/>
+                        </a:rPr>
                         <a:t>707 sft</a:t>
                       </a:r>
                     </a:p>
                   </a:txBody>
-                  <a:tcPr/>
+                  <a:tcPr>
+                    <a:solidFill>
+                      <a:srgbClr val="FFFFFF"/>
+                    </a:solidFill>
+                  </a:tcPr>
                 </a:tc>
                 <a:tc>
                   <a:txBody>
@@ -9601,22 +10305,35 @@
                     <a:lstStyle/>
                     <a:p/>
                   </a:txBody>
-                  <a:tcPr/>
+                  <a:tcPr>
+                    <a:solidFill>
+                      <a:srgbClr val="FFFFFF"/>
+                    </a:solidFill>
+                  </a:tcPr>
                 </a:tc>
               </a:tr>
-              <a:tr h="254000">
+              <a:tr h="292100">
                 <a:tc>
                   <a:txBody>
                     <a:bodyPr/>
                     <a:lstStyle/>
                     <a:p>
                       <a:r>
-                        <a:rPr sz="1200"/>
+                        <a:rPr sz="1200" b="1">
+                          <a:solidFill>
+                            <a:srgbClr val="26673D"/>
+                          </a:solidFill>
+                          <a:latin typeface="Inter"/>
+                        </a:rPr>
                         <a:t>Meeting</a:t>
                       </a:r>
                     </a:p>
                   </a:txBody>
-                  <a:tcPr/>
+                  <a:tcPr>
+                    <a:solidFill>
+                      <a:srgbClr val="FFFFFF"/>
+                    </a:solidFill>
+                  </a:tcPr>
                 </a:tc>
                 <a:tc>
                   <a:txBody>
@@ -9624,12 +10341,21 @@
                     <a:lstStyle/>
                     <a:p>
                       <a:r>
-                        <a:rPr sz="1200"/>
+                        <a:rPr sz="1200" b="0">
+                          <a:solidFill>
+                            <a:srgbClr val="1E1E1C"/>
+                          </a:solidFill>
+                          <a:latin typeface="Inter"/>
+                        </a:rPr>
                         <a:t>693 sft</a:t>
                       </a:r>
                     </a:p>
                   </a:txBody>
-                  <a:tcPr/>
+                  <a:tcPr>
+                    <a:solidFill>
+                      <a:srgbClr val="FFFFFF"/>
+                    </a:solidFill>
+                  </a:tcPr>
                 </a:tc>
                 <a:tc>
                   <a:txBody>
@@ -9637,22 +10363,35 @@
                     <a:lstStyle/>
                     <a:p/>
                   </a:txBody>
-                  <a:tcPr/>
+                  <a:tcPr>
+                    <a:solidFill>
+                      <a:srgbClr val="FFFFFF"/>
+                    </a:solidFill>
+                  </a:tcPr>
                 </a:tc>
               </a:tr>
-              <a:tr h="254000">
+              <a:tr h="292100">
                 <a:tc>
                   <a:txBody>
                     <a:bodyPr/>
                     <a:lstStyle/>
                     <a:p>
                       <a:r>
-                        <a:rPr sz="1200"/>
+                        <a:rPr sz="1200" b="1">
+                          <a:solidFill>
+                            <a:srgbClr val="26673D"/>
+                          </a:solidFill>
+                          <a:latin typeface="Inter"/>
+                        </a:rPr>
                         <a:t>Executive</a:t>
                       </a:r>
                     </a:p>
                   </a:txBody>
-                  <a:tcPr/>
+                  <a:tcPr>
+                    <a:solidFill>
+                      <a:srgbClr val="FFFFFF"/>
+                    </a:solidFill>
+                  </a:tcPr>
                 </a:tc>
                 <a:tc>
                   <a:txBody>
@@ -9660,12 +10399,21 @@
                     <a:lstStyle/>
                     <a:p>
                       <a:r>
-                        <a:rPr sz="1200"/>
+                        <a:rPr sz="1200" b="0">
+                          <a:solidFill>
+                            <a:srgbClr val="1E1E1C"/>
+                          </a:solidFill>
+                          <a:latin typeface="Inter"/>
+                        </a:rPr>
                         <a:t>873 sft</a:t>
                       </a:r>
                     </a:p>
                   </a:txBody>
-                  <a:tcPr/>
+                  <a:tcPr>
+                    <a:solidFill>
+                      <a:srgbClr val="FFFFFF"/>
+                    </a:solidFill>
+                  </a:tcPr>
                 </a:tc>
                 <a:tc>
                   <a:txBody>
@@ -9673,22 +10421,35 @@
                     <a:lstStyle/>
                     <a:p/>
                   </a:txBody>
-                  <a:tcPr/>
+                  <a:tcPr>
+                    <a:solidFill>
+                      <a:srgbClr val="FFFFFF"/>
+                    </a:solidFill>
+                  </a:tcPr>
                 </a:tc>
               </a:tr>
-              <a:tr h="254000">
+              <a:tr h="292100">
                 <a:tc>
                   <a:txBody>
                     <a:bodyPr/>
                     <a:lstStyle/>
                     <a:p>
                       <a:r>
-                        <a:rPr sz="1200"/>
+                        <a:rPr sz="1200" b="1">
+                          <a:solidFill>
+                            <a:srgbClr val="26673D"/>
+                          </a:solidFill>
+                          <a:latin typeface="Inter"/>
+                        </a:rPr>
                         <a:t>Administration &amp; workspaces</a:t>
                       </a:r>
                     </a:p>
                   </a:txBody>
-                  <a:tcPr/>
+                  <a:tcPr>
+                    <a:solidFill>
+                      <a:srgbClr val="FFFFFF"/>
+                    </a:solidFill>
+                  </a:tcPr>
                 </a:tc>
                 <a:tc>
                   <a:txBody>
@@ -9696,12 +10457,21 @@
                     <a:lstStyle/>
                     <a:p>
                       <a:r>
-                        <a:rPr sz="1200"/>
+                        <a:rPr sz="1200" b="0">
+                          <a:solidFill>
+                            <a:srgbClr val="1E1E1C"/>
+                          </a:solidFill>
+                          <a:latin typeface="Inter"/>
+                        </a:rPr>
                         <a:t>3,265 sft</a:t>
                       </a:r>
                     </a:p>
                   </a:txBody>
-                  <a:tcPr/>
+                  <a:tcPr>
+                    <a:solidFill>
+                      <a:srgbClr val="FFFFFF"/>
+                    </a:solidFill>
+                  </a:tcPr>
                 </a:tc>
                 <a:tc>
                   <a:txBody>
@@ -9709,22 +10479,35 @@
                     <a:lstStyle/>
                     <a:p/>
                   </a:txBody>
-                  <a:tcPr/>
+                  <a:tcPr>
+                    <a:solidFill>
+                      <a:srgbClr val="FFFFFF"/>
+                    </a:solidFill>
+                  </a:tcPr>
                 </a:tc>
               </a:tr>
-              <a:tr h="254000">
+              <a:tr h="292100">
                 <a:tc>
                   <a:txBody>
                     <a:bodyPr/>
                     <a:lstStyle/>
                     <a:p>
                       <a:r>
-                        <a:rPr sz="1200"/>
+                        <a:rPr sz="1200" b="1">
+                          <a:solidFill>
+                            <a:srgbClr val="26673D"/>
+                          </a:solidFill>
+                          <a:latin typeface="Inter"/>
+                        </a:rPr>
                         <a:t>Design &amp; development</a:t>
                       </a:r>
                     </a:p>
                   </a:txBody>
-                  <a:tcPr/>
+                  <a:tcPr>
+                    <a:solidFill>
+                      <a:srgbClr val="FFFFFF"/>
+                    </a:solidFill>
+                  </a:tcPr>
                 </a:tc>
                 <a:tc>
                   <a:txBody>
@@ -9732,12 +10515,21 @@
                     <a:lstStyle/>
                     <a:p>
                       <a:r>
-                        <a:rPr sz="1200"/>
+                        <a:rPr sz="1200" b="0">
+                          <a:solidFill>
+                            <a:srgbClr val="1E1E1C"/>
+                          </a:solidFill>
+                          <a:latin typeface="Inter"/>
+                        </a:rPr>
                         <a:t>1,997 sft</a:t>
                       </a:r>
                     </a:p>
                   </a:txBody>
-                  <a:tcPr/>
+                  <a:tcPr>
+                    <a:solidFill>
+                      <a:srgbClr val="FFFFFF"/>
+                    </a:solidFill>
+                  </a:tcPr>
                 </a:tc>
                 <a:tc>
                   <a:txBody>
@@ -9745,22 +10537,35 @@
                     <a:lstStyle/>
                     <a:p/>
                   </a:txBody>
-                  <a:tcPr/>
+                  <a:tcPr>
+                    <a:solidFill>
+                      <a:srgbClr val="FFFFFF"/>
+                    </a:solidFill>
+                  </a:tcPr>
                 </a:tc>
               </a:tr>
-              <a:tr h="254000">
+              <a:tr h="292100">
                 <a:tc>
                   <a:txBody>
                     <a:bodyPr/>
                     <a:lstStyle/>
                     <a:p>
                       <a:r>
-                        <a:rPr sz="1200"/>
+                        <a:rPr sz="1200" b="1">
+                          <a:solidFill>
+                            <a:srgbClr val="26673D"/>
+                          </a:solidFill>
+                          <a:latin typeface="Inter"/>
+                        </a:rPr>
                         <a:t>Staff support &amp; circulation</a:t>
                       </a:r>
                     </a:p>
                   </a:txBody>
-                  <a:tcPr/>
+                  <a:tcPr>
+                    <a:solidFill>
+                      <a:srgbClr val="FFFFFF"/>
+                    </a:solidFill>
+                  </a:tcPr>
                 </a:tc>
                 <a:tc>
                   <a:txBody>
@@ -9768,12 +10573,21 @@
                     <a:lstStyle/>
                     <a:p>
                       <a:r>
-                        <a:rPr sz="1200"/>
+                        <a:rPr sz="1200" b="0">
+                          <a:solidFill>
+                            <a:srgbClr val="1E1E1C"/>
+                          </a:solidFill>
+                          <a:latin typeface="Inter"/>
+                        </a:rPr>
                         <a:t>1,704 sft</a:t>
                       </a:r>
                     </a:p>
                   </a:txBody>
-                  <a:tcPr/>
+                  <a:tcPr>
+                    <a:solidFill>
+                      <a:srgbClr val="FFFFFF"/>
+                    </a:solidFill>
+                  </a:tcPr>
                 </a:tc>
                 <a:tc>
                   <a:txBody>
@@ -9781,22 +10595,35 @@
                     <a:lstStyle/>
                     <a:p/>
                   </a:txBody>
-                  <a:tcPr/>
+                  <a:tcPr>
+                    <a:solidFill>
+                      <a:srgbClr val="FFFFFF"/>
+                    </a:solidFill>
+                  </a:tcPr>
                 </a:tc>
               </a:tr>
-              <a:tr h="254000">
+              <a:tr h="292100">
                 <a:tc>
                   <a:txBody>
                     <a:bodyPr/>
                     <a:lstStyle/>
                     <a:p>
                       <a:r>
-                        <a:rPr sz="1200"/>
+                        <a:rPr sz="1200" b="1">
+                          <a:solidFill>
+                            <a:srgbClr val="26673D"/>
+                          </a:solidFill>
+                          <a:latin typeface="Inter"/>
+                        </a:rPr>
                         <a:t>Prayer</a:t>
                       </a:r>
                     </a:p>
                   </a:txBody>
-                  <a:tcPr/>
+                  <a:tcPr>
+                    <a:solidFill>
+                      <a:srgbClr val="FFFFFF"/>
+                    </a:solidFill>
+                  </a:tcPr>
                 </a:tc>
                 <a:tc>
                   <a:txBody>
@@ -9804,12 +10631,21 @@
                     <a:lstStyle/>
                     <a:p>
                       <a:r>
-                        <a:rPr sz="1200"/>
+                        <a:rPr sz="1200" b="0">
+                          <a:solidFill>
+                            <a:srgbClr val="1E1E1C"/>
+                          </a:solidFill>
+                          <a:latin typeface="Inter"/>
+                        </a:rPr>
                         <a:t>375 sft</a:t>
                       </a:r>
                     </a:p>
                   </a:txBody>
-                  <a:tcPr/>
+                  <a:tcPr>
+                    <a:solidFill>
+                      <a:srgbClr val="FFFFFF"/>
+                    </a:solidFill>
+                  </a:tcPr>
                 </a:tc>
                 <a:tc>
                   <a:txBody>
@@ -9817,22 +10653,35 @@
                     <a:lstStyle/>
                     <a:p/>
                   </a:txBody>
-                  <a:tcPr/>
+                  <a:tcPr>
+                    <a:solidFill>
+                      <a:srgbClr val="FFFFFF"/>
+                    </a:solidFill>
+                  </a:tcPr>
                 </a:tc>
               </a:tr>
-              <a:tr h="254000">
+              <a:tr h="292100">
                 <a:tc>
                   <a:txBody>
                     <a:bodyPr/>
                     <a:lstStyle/>
                     <a:p>
                       <a:r>
-                        <a:rPr sz="1200"/>
+                        <a:rPr sz="1200" b="1">
+                          <a:solidFill>
+                            <a:srgbClr val="26673D"/>
+                          </a:solidFill>
+                          <a:latin typeface="Inter"/>
+                        </a:rPr>
                         <a:t>Washrooms</a:t>
                       </a:r>
                     </a:p>
                   </a:txBody>
-                  <a:tcPr/>
+                  <a:tcPr>
+                    <a:solidFill>
+                      <a:srgbClr val="FFFFFF"/>
+                    </a:solidFill>
+                  </a:tcPr>
                 </a:tc>
                 <a:tc>
                   <a:txBody>
@@ -9840,12 +10689,21 @@
                     <a:lstStyle/>
                     <a:p>
                       <a:r>
-                        <a:rPr sz="1200"/>
+                        <a:rPr sz="1200" b="0">
+                          <a:solidFill>
+                            <a:srgbClr val="1E1E1C"/>
+                          </a:solidFill>
+                          <a:latin typeface="Inter"/>
+                        </a:rPr>
                         <a:t>444 sft</a:t>
                       </a:r>
                     </a:p>
                   </a:txBody>
-                  <a:tcPr/>
+                  <a:tcPr>
+                    <a:solidFill>
+                      <a:srgbClr val="FFFFFF"/>
+                    </a:solidFill>
+                  </a:tcPr>
                 </a:tc>
                 <a:tc>
                   <a:txBody>
@@ -9853,7 +10711,11 @@
                     <a:lstStyle/>
                     <a:p/>
                   </a:txBody>
-                  <a:tcPr/>
+                  <a:tcPr>
+                    <a:solidFill>
+                      <a:srgbClr val="FFFFFF"/>
+                    </a:solidFill>
+                  </a:tcPr>
                 </a:tc>
               </a:tr>
             </a:tbl>
@@ -9868,7 +10730,7 @@
         </p:nvSpPr>
         <p:spPr>
           <a:xfrm>
-            <a:off x="508000" y="6604000"/>
+            <a:off x="508000" y="6578600"/>
             <a:ext cx="8255000" cy="190500"/>
           </a:xfrm>
           <a:prstGeom prst="rect">
@@ -9902,8 +10764,8 @@
         </p:nvSpPr>
         <p:spPr>
           <a:xfrm>
-            <a:off x="11176000" y="6604000"/>
-            <a:ext cx="635000" cy="190500"/>
+            <a:off x="11049000" y="6578600"/>
+            <a:ext cx="762000" cy="190500"/>
           </a:xfrm>
           <a:prstGeom prst="rect">
             <a:avLst/>
@@ -9954,16 +10816,75 @@
         <p:nvPr/>
       </p:nvGrpSpPr>
       <p:grpSpPr/>
-      <p:sp>
-        <p:nvSpPr>
-          <p:cNvPr id="2" name="Rectangle 1"/>
+      <p:pic>
+        <p:nvPicPr>
+          <p:cNvPr id="2" name="Picture 1" descr="CAM_ISO_SE.jpg"/>
+          <p:cNvPicPr>
+            <a:picLocks noChangeAspect="1"/>
+          </p:cNvPicPr>
+          <p:nvPr/>
+        </p:nvPicPr>
+        <p:blipFill>
+          <a:blip r:embed="rId2"/>
+          <a:srcRect/>
+          <a:stretch>
+            <a:fillRect/>
+          </a:stretch>
+        </p:blipFill>
+        <p:spPr>
+          <a:xfrm>
+            <a:off x="0" y="0"/>
+            <a:ext cx="12192000" cy="6858000"/>
+          </a:xfrm>
+          <a:prstGeom prst="rect">
+            <a:avLst/>
+          </a:prstGeom>
+        </p:spPr>
+      </p:pic>
+      <p:sp>
+        <p:nvSpPr>
+          <p:cNvPr id="3" name="TextBox 2"/>
+          <p:cNvSpPr txBox="1"/>
+          <p:nvPr/>
+        </p:nvSpPr>
+        <p:spPr>
+          <a:xfrm>
+            <a:off x="63500" y="6642100"/>
+            <a:ext cx="12065000" cy="190500"/>
+          </a:xfrm>
+          <a:prstGeom prst="rect">
+            <a:avLst/>
+          </a:prstGeom>
+          <a:noFill/>
+        </p:spPr>
+        <p:txBody>
+          <a:bodyPr wrap="square">
+            <a:spAutoFit/>
+          </a:bodyPr>
+          <a:lstStyle/>
+          <a:p>
+            <a:r>
+              <a:rPr sz="1100" b="0">
+                <a:solidFill>
+                  <a:srgbClr val="FFFFFF"/>
+                </a:solidFill>
+                <a:latin typeface="Inter"/>
+              </a:rPr>
+              <a:t>Overall isometric cut-away of the furnished floor - Blender Cycles render</a:t>
+            </a:r>
+          </a:p>
+        </p:txBody>
+      </p:sp>
+      <p:sp>
+        <p:nvSpPr>
+          <p:cNvPr id="4" name="Rectangle 3"/>
           <p:cNvSpPr/>
           <p:nvPr/>
         </p:nvSpPr>
         <p:spPr>
           <a:xfrm>
-            <a:off x="317500" y="254000"/>
-            <a:ext cx="6223000" cy="2095500"/>
+            <a:off x="317500" y="317500"/>
+            <a:ext cx="4572000" cy="2095500"/>
           </a:xfrm>
           <a:prstGeom prst="rect">
             <a:avLst/>
@@ -9999,28 +10920,28 @@
       </p:sp>
       <p:sp>
         <p:nvSpPr>
-          <p:cNvPr id="3" name="TextBox 2"/>
-          <p:cNvSpPr txBox="1"/>
-          <p:nvPr/>
-        </p:nvSpPr>
-        <p:spPr>
-          <a:xfrm>
-            <a:off x="508000" y="444500"/>
-            <a:ext cx="5715000" cy="254000"/>
-          </a:xfrm>
-          <a:prstGeom prst="rect">
-            <a:avLst/>
-          </a:prstGeom>
-          <a:noFill/>
-        </p:spPr>
-        <p:txBody>
-          <a:bodyPr wrap="square">
-            <a:spAutoFit/>
-          </a:bodyPr>
-          <a:lstStyle/>
-          <a:p>
-            <a:r>
-              <a:rPr sz="1400" b="1">
+          <p:cNvPr id="5" name="TextBox 4"/>
+          <p:cNvSpPr txBox="1"/>
+          <p:nvPr/>
+        </p:nvSpPr>
+        <p:spPr>
+          <a:xfrm>
+            <a:off x="508000" y="482600"/>
+            <a:ext cx="4191000" cy="254000"/>
+          </a:xfrm>
+          <a:prstGeom prst="rect">
+            <a:avLst/>
+          </a:prstGeom>
+          <a:noFill/>
+        </p:spPr>
+        <p:txBody>
+          <a:bodyPr wrap="square">
+            <a:spAutoFit/>
+          </a:bodyPr>
+          <a:lstStyle/>
+          <a:p>
+            <a:r>
+              <a:rPr sz="1300" b="1">
                 <a:solidFill>
                   <a:srgbClr val="26673D"/>
                 </a:solidFill>
@@ -10033,28 +10954,28 @@
       </p:sp>
       <p:sp>
         <p:nvSpPr>
-          <p:cNvPr id="4" name="TextBox 3"/>
-          <p:cNvSpPr txBox="1"/>
-          <p:nvPr/>
-        </p:nvSpPr>
-        <p:spPr>
-          <a:xfrm>
-            <a:off x="508000" y="698500"/>
-            <a:ext cx="5715000" cy="1397000"/>
-          </a:xfrm>
-          <a:prstGeom prst="rect">
-            <a:avLst/>
-          </a:prstGeom>
-          <a:noFill/>
-        </p:spPr>
-        <p:txBody>
-          <a:bodyPr wrap="square">
-            <a:spAutoFit/>
-          </a:bodyPr>
-          <a:lstStyle/>
-          <a:p>
-            <a:r>
-              <a:rPr sz="3200" b="1">
+          <p:cNvPr id="6" name="TextBox 5"/>
+          <p:cNvSpPr txBox="1"/>
+          <p:nvPr/>
+        </p:nvSpPr>
+        <p:spPr>
+          <a:xfrm>
+            <a:off x="508000" y="762000"/>
+            <a:ext cx="4191000" cy="825500"/>
+          </a:xfrm>
+          <a:prstGeom prst="rect">
+            <a:avLst/>
+          </a:prstGeom>
+          <a:noFill/>
+        </p:spPr>
+        <p:txBody>
+          <a:bodyPr wrap="square">
+            <a:spAutoFit/>
+          </a:bodyPr>
+          <a:lstStyle/>
+          <a:p>
+            <a:r>
+              <a:rPr sz="2600" b="1">
                 <a:solidFill>
                   <a:srgbClr val="1E1E1C"/>
                 </a:solidFill>
@@ -10067,30 +10988,30 @@
       </p:sp>
       <p:sp>
         <p:nvSpPr>
-          <p:cNvPr id="5" name="TextBox 4"/>
-          <p:cNvSpPr txBox="1"/>
-          <p:nvPr/>
-        </p:nvSpPr>
-        <p:spPr>
-          <a:xfrm>
-            <a:off x="508000" y="1714500"/>
-            <a:ext cx="5715000" cy="762000"/>
-          </a:xfrm>
-          <a:prstGeom prst="rect">
-            <a:avLst/>
-          </a:prstGeom>
-          <a:noFill/>
-        </p:spPr>
-        <p:txBody>
-          <a:bodyPr wrap="square">
-            <a:spAutoFit/>
-          </a:bodyPr>
-          <a:lstStyle/>
-          <a:p>
-            <a:r>
-              <a:rPr sz="1600" b="0">
-                <a:solidFill>
-                  <a:srgbClr val="1E1E1C"/>
+          <p:cNvPr id="7" name="TextBox 6"/>
+          <p:cNvSpPr txBox="1"/>
+          <p:nvPr/>
+        </p:nvSpPr>
+        <p:spPr>
+          <a:xfrm>
+            <a:off x="508000" y="1651000"/>
+            <a:ext cx="4191000" cy="698500"/>
+          </a:xfrm>
+          <a:prstGeom prst="rect">
+            <a:avLst/>
+          </a:prstGeom>
+          <a:noFill/>
+        </p:spPr>
+        <p:txBody>
+          <a:bodyPr wrap="square">
+            <a:spAutoFit/>
+          </a:bodyPr>
+          <a:lstStyle/>
+          <a:p>
+            <a:r>
+              <a:rPr sz="1300" b="0">
+                <a:solidFill>
+                  <a:srgbClr val="5A5750"/>
                 </a:solidFill>
                 <a:latin typeface="Inter"/>
               </a:rPr>
@@ -10101,13 +11022,13 @@
       </p:sp>
       <p:sp>
         <p:nvSpPr>
-          <p:cNvPr id="6" name="TextBox 5"/>
-          <p:cNvSpPr txBox="1"/>
-          <p:nvPr/>
-        </p:nvSpPr>
-        <p:spPr>
-          <a:xfrm>
-            <a:off x="508000" y="6604000"/>
+          <p:cNvPr id="8" name="TextBox 7"/>
+          <p:cNvSpPr txBox="1"/>
+          <p:nvPr/>
+        </p:nvSpPr>
+        <p:spPr>
+          <a:xfrm>
+            <a:off x="508000" y="6578600"/>
             <a:ext cx="8255000" cy="190500"/>
           </a:xfrm>
           <a:prstGeom prst="rect">
@@ -10135,14 +11056,14 @@
       </p:sp>
       <p:sp>
         <p:nvSpPr>
-          <p:cNvPr id="7" name="TextBox 6"/>
-          <p:cNvSpPr txBox="1"/>
-          <p:nvPr/>
-        </p:nvSpPr>
-        <p:spPr>
-          <a:xfrm>
-            <a:off x="11176000" y="6604000"/>
-            <a:ext cx="635000" cy="190500"/>
+          <p:cNvPr id="9" name="TextBox 8"/>
+          <p:cNvSpPr txBox="1"/>
+          <p:nvPr/>
+        </p:nvSpPr>
+        <p:spPr>
+          <a:xfrm>
+            <a:off x="11049000" y="6578600"/>
+            <a:ext cx="762000" cy="190500"/>
           </a:xfrm>
           <a:prstGeom prst="rect">
             <a:avLst/>
@@ -10202,21 +11123,21 @@
         <p:spPr>
           <a:xfrm>
             <a:off x="508000" y="609600"/>
-            <a:ext cx="9525000" cy="254000"/>
-          </a:xfrm>
-          <a:prstGeom prst="rect">
-            <a:avLst/>
-          </a:prstGeom>
-          <a:noFill/>
-        </p:spPr>
-        <p:txBody>
-          <a:bodyPr wrap="square">
-            <a:spAutoFit/>
-          </a:bodyPr>
-          <a:lstStyle/>
-          <a:p>
-            <a:r>
-              <a:rPr sz="1400" b="1">
+            <a:ext cx="3683000" cy="254000"/>
+          </a:xfrm>
+          <a:prstGeom prst="rect">
+            <a:avLst/>
+          </a:prstGeom>
+          <a:noFill/>
+        </p:spPr>
+        <p:txBody>
+          <a:bodyPr wrap="square">
+            <a:spAutoFit/>
+          </a:bodyPr>
+          <a:lstStyle/>
+          <a:p>
+            <a:r>
+              <a:rPr sz="1300" b="1">
                 <a:solidFill>
                   <a:srgbClr val="26673D"/>
                 </a:solidFill>
@@ -10235,22 +11156,22 @@
         </p:nvSpPr>
         <p:spPr>
           <a:xfrm>
-            <a:off x="508000" y="825500"/>
-            <a:ext cx="6985000" cy="889000"/>
-          </a:xfrm>
-          <a:prstGeom prst="rect">
-            <a:avLst/>
-          </a:prstGeom>
-          <a:noFill/>
-        </p:spPr>
-        <p:txBody>
-          <a:bodyPr wrap="square">
-            <a:spAutoFit/>
-          </a:bodyPr>
-          <a:lstStyle/>
-          <a:p>
-            <a:r>
-              <a:rPr sz="3000" b="1">
+            <a:off x="508000" y="863600"/>
+            <a:ext cx="3683000" cy="1270000"/>
+          </a:xfrm>
+          <a:prstGeom prst="rect">
+            <a:avLst/>
+          </a:prstGeom>
+          <a:noFill/>
+        </p:spPr>
+        <p:txBody>
+          <a:bodyPr wrap="square">
+            <a:spAutoFit/>
+          </a:bodyPr>
+          <a:lstStyle/>
+          <a:p>
+            <a:r>
+              <a:rPr sz="2600" b="1">
                 <a:solidFill>
                   <a:srgbClr val="1E1E1C"/>
                 </a:solidFill>
@@ -10269,22 +11190,22 @@
         </p:nvSpPr>
         <p:spPr>
           <a:xfrm>
-            <a:off x="508000" y="1905000"/>
-            <a:ext cx="3556000" cy="4445000"/>
-          </a:xfrm>
-          <a:prstGeom prst="rect">
-            <a:avLst/>
-          </a:prstGeom>
-          <a:noFill/>
-        </p:spPr>
-        <p:txBody>
-          <a:bodyPr wrap="square">
-            <a:spAutoFit/>
-          </a:bodyPr>
-          <a:lstStyle/>
-          <a:p>
-            <a:r>
-              <a:rPr sz="1500" b="0">
+            <a:off x="508000" y="2286000"/>
+            <a:ext cx="3683000" cy="4191000"/>
+          </a:xfrm>
+          <a:prstGeom prst="rect">
+            <a:avLst/>
+          </a:prstGeom>
+          <a:noFill/>
+        </p:spPr>
+        <p:txBody>
+          <a:bodyPr wrap="square">
+            <a:spAutoFit/>
+          </a:bodyPr>
+          <a:lstStyle/>
+          <a:p>
+            <a:r>
+              <a:rPr sz="1400" b="0">
                 <a:solidFill>
                   <a:srgbClr val="5A5750"/>
                 </a:solidFill>
@@ -10295,18 +11216,29 @@
           </a:p>
           <a:p>
             <a:r>
-              <a:rPr sz="1500" b="0">
+              <a:rPr sz="1400" b="0">
                 <a:solidFill>
                   <a:srgbClr val="5A5750"/>
                 </a:solidFill>
                 <a:latin typeface="Inter"/>
               </a:rPr>
+              <a:t/>
+            </a:r>
+          </a:p>
+          <a:p>
+            <a:r>
+              <a:rPr sz="1400" b="0">
+                <a:solidFill>
+                  <a:srgbClr val="5A5750"/>
+                </a:solidFill>
+                <a:latin typeface="Inter"/>
+              </a:rPr>
               <a:t>- Fluted white-oak counter, terrazzo ledge, accessible 760 mm section</a:t>
             </a:r>
           </a:p>
           <a:p>
             <a:r>
-              <a:rPr sz="1500" b="0">
+              <a:rPr sz="1400" b="0">
                 <a:solidFill>
                   <a:srgbClr val="5A5750"/>
                 </a:solidFill>
@@ -10317,7 +11249,7 @@
           </a:p>
           <a:p>
             <a:r>
-              <a:rPr sz="1500" b="0">
+              <a:rPr sz="1400" b="0">
                 <a:solidFill>
                   <a:srgbClr val="5A5750"/>
                 </a:solidFill>
@@ -10328,7 +11260,7 @@
           </a:p>
           <a:p>
             <a:r>
-              <a:rPr sz="1500" b="0">
+              <a:rPr sz="1400" b="0">
                 <a:solidFill>
                   <a:srgbClr val="5A5750"/>
                 </a:solidFill>
@@ -10524,7 +11456,7 @@
         </p:nvSpPr>
         <p:spPr>
           <a:xfrm>
-            <a:off x="508000" y="6604000"/>
+            <a:off x="508000" y="6578600"/>
             <a:ext cx="8255000" cy="190500"/>
           </a:xfrm>
           <a:prstGeom prst="rect">
@@ -10558,8 +11490,8 @@
         </p:nvSpPr>
         <p:spPr>
           <a:xfrm>
-            <a:off x="11176000" y="6604000"/>
-            <a:ext cx="635000" cy="190500"/>
+            <a:off x="11049000" y="6578600"/>
+            <a:ext cx="762000" cy="190500"/>
           </a:xfrm>
           <a:prstGeom prst="rect">
             <a:avLst/>
@@ -10619,21 +11551,21 @@
         <p:spPr>
           <a:xfrm>
             <a:off x="508000" y="609600"/>
-            <a:ext cx="9525000" cy="254000"/>
-          </a:xfrm>
-          <a:prstGeom prst="rect">
-            <a:avLst/>
-          </a:prstGeom>
-          <a:noFill/>
-        </p:spPr>
-        <p:txBody>
-          <a:bodyPr wrap="square">
-            <a:spAutoFit/>
-          </a:bodyPr>
-          <a:lstStyle/>
-          <a:p>
-            <a:r>
-              <a:rPr sz="1400" b="1">
+            <a:ext cx="3683000" cy="254000"/>
+          </a:xfrm>
+          <a:prstGeom prst="rect">
+            <a:avLst/>
+          </a:prstGeom>
+          <a:noFill/>
+        </p:spPr>
+        <p:txBody>
+          <a:bodyPr wrap="square">
+            <a:spAutoFit/>
+          </a:bodyPr>
+          <a:lstStyle/>
+          <a:p>
+            <a:r>
+              <a:rPr sz="1300" b="1">
                 <a:solidFill>
                   <a:srgbClr val="26673D"/>
                 </a:solidFill>
@@ -10652,22 +11584,22 @@
         </p:nvSpPr>
         <p:spPr>
           <a:xfrm>
-            <a:off x="508000" y="825500"/>
-            <a:ext cx="6985000" cy="889000"/>
-          </a:xfrm>
-          <a:prstGeom prst="rect">
-            <a:avLst/>
-          </a:prstGeom>
-          <a:noFill/>
-        </p:spPr>
-        <p:txBody>
-          <a:bodyPr wrap="square">
-            <a:spAutoFit/>
-          </a:bodyPr>
-          <a:lstStyle/>
-          <a:p>
-            <a:r>
-              <a:rPr sz="3000" b="1">
+            <a:off x="508000" y="863600"/>
+            <a:ext cx="3683000" cy="1270000"/>
+          </a:xfrm>
+          <a:prstGeom prst="rect">
+            <a:avLst/>
+          </a:prstGeom>
+          <a:noFill/>
+        </p:spPr>
+        <p:txBody>
+          <a:bodyPr wrap="square">
+            <a:spAutoFit/>
+          </a:bodyPr>
+          <a:lstStyle/>
+          <a:p>
+            <a:r>
+              <a:rPr sz="2600" b="1">
                 <a:solidFill>
                   <a:srgbClr val="1E1E1C"/>
                 </a:solidFill>
@@ -10686,22 +11618,22 @@
         </p:nvSpPr>
         <p:spPr>
           <a:xfrm>
-            <a:off x="508000" y="1905000"/>
-            <a:ext cx="3556000" cy="4445000"/>
-          </a:xfrm>
-          <a:prstGeom prst="rect">
-            <a:avLst/>
-          </a:prstGeom>
-          <a:noFill/>
-        </p:spPr>
-        <p:txBody>
-          <a:bodyPr wrap="square">
-            <a:spAutoFit/>
-          </a:bodyPr>
-          <a:lstStyle/>
-          <a:p>
-            <a:r>
-              <a:rPr sz="1500" b="0">
+            <a:off x="508000" y="2286000"/>
+            <a:ext cx="3683000" cy="4191000"/>
+          </a:xfrm>
+          <a:prstGeom prst="rect">
+            <a:avLst/>
+          </a:prstGeom>
+          <a:noFill/>
+        </p:spPr>
+        <p:txBody>
+          <a:bodyPr wrap="square">
+            <a:spAutoFit/>
+          </a:bodyPr>
+          <a:lstStyle/>
+          <a:p>
+            <a:r>
+              <a:rPr sz="1400" b="0">
                 <a:solidFill>
                   <a:srgbClr val="5A5750"/>
                 </a:solidFill>
@@ -10712,18 +11644,29 @@
           </a:p>
           <a:p>
             <a:r>
-              <a:rPr sz="1500" b="0">
+              <a:rPr sz="1400" b="0">
                 <a:solidFill>
                   <a:srgbClr val="5A5750"/>
                 </a:solidFill>
                 <a:latin typeface="Inter"/>
               </a:rPr>
+              <a:t/>
+            </a:r>
+          </a:p>
+          <a:p>
+            <a:r>
+              <a:rPr sz="1400" b="0">
+                <a:solidFill>
+                  <a:srgbClr val="5A5750"/>
+                </a:solidFill>
+                <a:latin typeface="Inter"/>
+              </a:rPr>
               <a:t>- Brand-story wall with the client's logos and tagline</a:t>
             </a:r>
           </a:p>
           <a:p>
             <a:r>
-              <a:rPr sz="1500" b="0">
+              <a:rPr sz="1400" b="0">
                 <a:solidFill>
                   <a:srgbClr val="5A5750"/>
                 </a:solidFill>
@@ -10734,7 +11677,7 @@
           </a:p>
           <a:p>
             <a:r>
-              <a:rPr sz="1500" b="0">
+              <a:rPr sz="1400" b="0">
                 <a:solidFill>
                   <a:srgbClr val="5A5750"/>
                 </a:solidFill>
@@ -10745,7 +11688,7 @@
           </a:p>
           <a:p>
             <a:r>
-              <a:rPr sz="1500" b="0">
+              <a:rPr sz="1400" b="0">
                 <a:solidFill>
                   <a:srgbClr val="5A5750"/>
                 </a:solidFill>
@@ -10756,7 +11699,7 @@
           </a:p>
           <a:p>
             <a:r>
-              <a:rPr sz="1500" b="0">
+              <a:rPr sz="1400" b="0">
                 <a:solidFill>
                   <a:srgbClr val="5A5750"/>
                 </a:solidFill>
@@ -10952,7 +11895,7 @@
         </p:nvSpPr>
         <p:spPr>
           <a:xfrm>
-            <a:off x="508000" y="6604000"/>
+            <a:off x="508000" y="6578600"/>
             <a:ext cx="8255000" cy="190500"/>
           </a:xfrm>
           <a:prstGeom prst="rect">
@@ -10986,8 +11929,8 @@
         </p:nvSpPr>
         <p:spPr>
           <a:xfrm>
-            <a:off x="11176000" y="6604000"/>
-            <a:ext cx="635000" cy="190500"/>
+            <a:off x="11049000" y="6578600"/>
+            <a:ext cx="762000" cy="190500"/>
           </a:xfrm>
           <a:prstGeom prst="rect">
             <a:avLst/>
@@ -11047,21 +11990,21 @@
         <p:spPr>
           <a:xfrm>
             <a:off x="508000" y="609600"/>
-            <a:ext cx="9525000" cy="254000"/>
-          </a:xfrm>
-          <a:prstGeom prst="rect">
-            <a:avLst/>
-          </a:prstGeom>
-          <a:noFill/>
-        </p:spPr>
-        <p:txBody>
-          <a:bodyPr wrap="square">
-            <a:spAutoFit/>
-          </a:bodyPr>
-          <a:lstStyle/>
-          <a:p>
-            <a:r>
-              <a:rPr sz="1400" b="1">
+            <a:ext cx="3683000" cy="254000"/>
+          </a:xfrm>
+          <a:prstGeom prst="rect">
+            <a:avLst/>
+          </a:prstGeom>
+          <a:noFill/>
+        </p:spPr>
+        <p:txBody>
+          <a:bodyPr wrap="square">
+            <a:spAutoFit/>
+          </a:bodyPr>
+          <a:lstStyle/>
+          <a:p>
+            <a:r>
+              <a:rPr sz="1300" b="1">
                 <a:solidFill>
                   <a:srgbClr val="26673D"/>
                 </a:solidFill>
@@ -11080,22 +12023,22 @@
         </p:nvSpPr>
         <p:spPr>
           <a:xfrm>
-            <a:off x="508000" y="825500"/>
-            <a:ext cx="6985000" cy="889000"/>
-          </a:xfrm>
-          <a:prstGeom prst="rect">
-            <a:avLst/>
-          </a:prstGeom>
-          <a:noFill/>
-        </p:spPr>
-        <p:txBody>
-          <a:bodyPr wrap="square">
-            <a:spAutoFit/>
-          </a:bodyPr>
-          <a:lstStyle/>
-          <a:p>
-            <a:r>
-              <a:rPr sz="3000" b="1">
+            <a:off x="508000" y="863600"/>
+            <a:ext cx="3683000" cy="1270000"/>
+          </a:xfrm>
+          <a:prstGeom prst="rect">
+            <a:avLst/>
+          </a:prstGeom>
+          <a:noFill/>
+        </p:spPr>
+        <p:txBody>
+          <a:bodyPr wrap="square">
+            <a:spAutoFit/>
+          </a:bodyPr>
+          <a:lstStyle/>
+          <a:p>
+            <a:r>
+              <a:rPr sz="2600" b="1">
                 <a:solidFill>
                   <a:srgbClr val="1E1E1C"/>
                 </a:solidFill>
@@ -11114,22 +12057,22 @@
         </p:nvSpPr>
         <p:spPr>
           <a:xfrm>
-            <a:off x="508000" y="1905000"/>
-            <a:ext cx="3556000" cy="4445000"/>
-          </a:xfrm>
-          <a:prstGeom prst="rect">
-            <a:avLst/>
-          </a:prstGeom>
-          <a:noFill/>
-        </p:spPr>
-        <p:txBody>
-          <a:bodyPr wrap="square">
-            <a:spAutoFit/>
-          </a:bodyPr>
-          <a:lstStyle/>
-          <a:p>
-            <a:r>
-              <a:rPr sz="1500" b="0">
+            <a:off x="508000" y="2286000"/>
+            <a:ext cx="3683000" cy="4191000"/>
+          </a:xfrm>
+          <a:prstGeom prst="rect">
+            <a:avLst/>
+          </a:prstGeom>
+          <a:noFill/>
+        </p:spPr>
+        <p:txBody>
+          <a:bodyPr wrap="square">
+            <a:spAutoFit/>
+          </a:bodyPr>
+          <a:lstStyle/>
+          <a:p>
+            <a:r>
+              <a:rPr sz="1400" b="0">
                 <a:solidFill>
                   <a:srgbClr val="5A5750"/>
                 </a:solidFill>
@@ -11140,18 +12083,29 @@
           </a:p>
           <a:p>
             <a:r>
-              <a:rPr sz="1500" b="0">
+              <a:rPr sz="1400" b="0">
                 <a:solidFill>
                   <a:srgbClr val="5A5750"/>
                 </a:solidFill>
                 <a:latin typeface="Inter"/>
               </a:rPr>
+              <a:t/>
+            </a:r>
+          </a:p>
+          <a:p>
+            <a:r>
+              <a:rPr sz="1400" b="0">
+                <a:solidFill>
+                  <a:srgbClr val="5A5750"/>
+                </a:solidFill>
+                <a:latin typeface="Inter"/>
+              </a:rPr>
               <a:t>- 2.1 m smoked-walnut desk, cognac leather chair</a:t>
             </a:r>
           </a:p>
           <a:p>
             <a:r>
-              <a:rPr sz="1500" b="0">
+              <a:rPr sz="1400" b="0">
                 <a:solidFill>
                   <a:srgbClr val="5A5750"/>
                 </a:solidFill>
@@ -11162,7 +12116,7 @@
           </a:p>
           <a:p>
             <a:r>
-              <a:rPr sz="1500" b="0">
+              <a:rPr sz="1400" b="0">
                 <a:solidFill>
                   <a:srgbClr val="5A5750"/>
                 </a:solidFill>
@@ -11173,7 +12127,7 @@
           </a:p>
           <a:p>
             <a:r>
-              <a:rPr sz="1500" b="0">
+              <a:rPr sz="1400" b="0">
                 <a:solidFill>
                   <a:srgbClr val="5A5750"/>
                 </a:solidFill>
@@ -11184,7 +12138,7 @@
           </a:p>
           <a:p>
             <a:r>
-              <a:rPr sz="1500" b="0">
+              <a:rPr sz="1400" b="0">
                 <a:solidFill>
                   <a:srgbClr val="5A5750"/>
                 </a:solidFill>
@@ -11380,7 +12334,7 @@
         </p:nvSpPr>
         <p:spPr>
           <a:xfrm>
-            <a:off x="508000" y="6604000"/>
+            <a:off x="508000" y="6578600"/>
             <a:ext cx="8255000" cy="190500"/>
           </a:xfrm>
           <a:prstGeom prst="rect">
@@ -11414,8 +12368,8 @@
         </p:nvSpPr>
         <p:spPr>
           <a:xfrm>
-            <a:off x="11176000" y="6604000"/>
-            <a:ext cx="635000" cy="190500"/>
+            <a:off x="11049000" y="6578600"/>
+            <a:ext cx="762000" cy="190500"/>
           </a:xfrm>
           <a:prstGeom prst="rect">
             <a:avLst/>

--- a/GARMENT_OFFICE_FINAL_PRESENTATION/03_PRESENTATION/Garment_Office_Design_Pitch.pptx
+++ b/GARMENT_OFFICE_FINAL_PRESENTATION/03_PRESENTATION/Garment_Office_Design_Pitch.pptx
@@ -3167,7 +3167,7 @@
                 </a:solidFill>
                 <a:latin typeface="Inter"/>
               </a:rPr>
-              <a:t>Experience centre - Blender Cycles render of the project model (preview render)</a:t>
+              <a:t>Experience centre - Blender Cycles render of the project model</a:t>
             </a:r>
           </a:p>
         </p:txBody>
@@ -3604,21 +3604,21 @@
         <p:spPr>
           <a:xfrm>
             <a:off x="508000" y="863600"/>
-            <a:ext cx="3683000" cy="1270000"/>
-          </a:xfrm>
-          <a:prstGeom prst="rect">
-            <a:avLst/>
-          </a:prstGeom>
-          <a:noFill/>
-        </p:spPr>
-        <p:txBody>
-          <a:bodyPr wrap="square">
-            <a:spAutoFit/>
-          </a:bodyPr>
-          <a:lstStyle/>
-          <a:p>
-            <a:r>
-              <a:rPr sz="2600" b="1">
+            <a:ext cx="3683000" cy="1524000"/>
+          </a:xfrm>
+          <a:prstGeom prst="rect">
+            <a:avLst/>
+          </a:prstGeom>
+          <a:noFill/>
+        </p:spPr>
+        <p:txBody>
+          <a:bodyPr wrap="square">
+            <a:spAutoFit/>
+          </a:bodyPr>
+          <a:lstStyle/>
+          <a:p>
+            <a:r>
+              <a:rPr sz="2400" b="1">
                 <a:solidFill>
                   <a:srgbClr val="1E1E1C"/>
                 </a:solidFill>
@@ -3637,8 +3637,8 @@
         </p:nvSpPr>
         <p:spPr>
           <a:xfrm>
-            <a:off x="508000" y="2286000"/>
-            <a:ext cx="3683000" cy="4191000"/>
+            <a:off x="508000" y="2540000"/>
+            <a:ext cx="3683000" cy="2349500"/>
           </a:xfrm>
           <a:prstGeom prst="rect">
             <a:avLst/>
@@ -3714,13 +3714,47 @@
                 <a:latin typeface="Inter"/>
               </a:rPr>
               <a:t>- Power/data trough in the table; privacy curtains recommended on the glass</a:t>
+            </a:r>
+          </a:p>
+        </p:txBody>
+      </p:sp>
+      <p:sp>
+        <p:nvSpPr>
+          <p:cNvPr id="5" name="TextBox 4"/>
+          <p:cNvSpPr txBox="1"/>
+          <p:nvPr/>
+        </p:nvSpPr>
+        <p:spPr>
+          <a:xfrm>
+            <a:off x="508000" y="5016500"/>
+            <a:ext cx="3683000" cy="190500"/>
+          </a:xfrm>
+          <a:prstGeom prst="rect">
+            <a:avLst/>
+          </a:prstGeom>
+          <a:noFill/>
+        </p:spPr>
+        <p:txBody>
+          <a:bodyPr wrap="square">
+            <a:spAutoFit/>
+          </a:bodyPr>
+          <a:lstStyle/>
+          <a:p>
+            <a:r>
+              <a:rPr sz="1000" b="1">
+                <a:solidFill>
+                  <a:srgbClr val="26673D"/>
+                </a:solidFill>
+                <a:latin typeface="Inter"/>
+              </a:rPr>
+              <a:t>KEY FINISHES</a:t>
             </a:r>
           </a:p>
         </p:txBody>
       </p:sp>
       <p:pic>
         <p:nvPicPr>
-          <p:cNvPr id="5" name="Picture 4" descr="CAM_09_Boardroom_A.jpg"/>
+          <p:cNvPr id="6" name="Picture 5" descr="swatch_WD-01.jpg"/>
           <p:cNvPicPr>
             <a:picLocks noChangeAspect="1"/>
           </p:cNvPicPr>
@@ -3728,6 +3762,374 @@
         </p:nvPicPr>
         <p:blipFill>
           <a:blip r:embed="rId2"/>
+          <a:stretch>
+            <a:fillRect/>
+          </a:stretch>
+        </p:blipFill>
+        <p:spPr>
+          <a:xfrm>
+            <a:off x="508000" y="5245100"/>
+            <a:ext cx="793750" cy="660400"/>
+          </a:xfrm>
+          <a:prstGeom prst="rect">
+            <a:avLst/>
+          </a:prstGeom>
+        </p:spPr>
+      </p:pic>
+      <p:sp>
+        <p:nvSpPr>
+          <p:cNvPr id="7" name="TextBox 6"/>
+          <p:cNvSpPr txBox="1"/>
+          <p:nvPr/>
+        </p:nvSpPr>
+        <p:spPr>
+          <a:xfrm>
+            <a:off x="469900" y="5930900"/>
+            <a:ext cx="889000" cy="190500"/>
+          </a:xfrm>
+          <a:prstGeom prst="rect">
+            <a:avLst/>
+          </a:prstGeom>
+          <a:noFill/>
+        </p:spPr>
+        <p:txBody>
+          <a:bodyPr wrap="square">
+            <a:spAutoFit/>
+          </a:bodyPr>
+          <a:lstStyle/>
+          <a:p>
+            <a:r>
+              <a:rPr sz="1000" b="1">
+                <a:solidFill>
+                  <a:srgbClr val="26673D"/>
+                </a:solidFill>
+                <a:latin typeface="Inter"/>
+              </a:rPr>
+              <a:t>WD-01</a:t>
+            </a:r>
+          </a:p>
+        </p:txBody>
+      </p:sp>
+      <p:sp>
+        <p:nvSpPr>
+          <p:cNvPr id="8" name="TextBox 7"/>
+          <p:cNvSpPr txBox="1"/>
+          <p:nvPr/>
+        </p:nvSpPr>
+        <p:spPr>
+          <a:xfrm>
+            <a:off x="469900" y="6096000"/>
+            <a:ext cx="889000" cy="317500"/>
+          </a:xfrm>
+          <a:prstGeom prst="rect">
+            <a:avLst/>
+          </a:prstGeom>
+          <a:noFill/>
+        </p:spPr>
+        <p:txBody>
+          <a:bodyPr wrap="square">
+            <a:spAutoFit/>
+          </a:bodyPr>
+          <a:lstStyle/>
+          <a:p>
+            <a:r>
+              <a:rPr sz="900" b="0">
+                <a:solidFill>
+                  <a:srgbClr val="5A5750"/>
+                </a:solidFill>
+                <a:latin typeface="Inter"/>
+              </a:rPr>
+              <a:t>Oak herringbone</a:t>
+            </a:r>
+          </a:p>
+        </p:txBody>
+      </p:sp>
+      <p:pic>
+        <p:nvPicPr>
+          <p:cNvPr id="9" name="Picture 8" descr="swatch_WO-02.jpg"/>
+          <p:cNvPicPr>
+            <a:picLocks noChangeAspect="1"/>
+          </p:cNvPicPr>
+          <p:nvPr/>
+        </p:nvPicPr>
+        <p:blipFill>
+          <a:blip r:embed="rId3"/>
+          <a:stretch>
+            <a:fillRect/>
+          </a:stretch>
+        </p:blipFill>
+        <p:spPr>
+          <a:xfrm>
+            <a:off x="1428750" y="5245100"/>
+            <a:ext cx="793750" cy="660400"/>
+          </a:xfrm>
+          <a:prstGeom prst="rect">
+            <a:avLst/>
+          </a:prstGeom>
+        </p:spPr>
+      </p:pic>
+      <p:sp>
+        <p:nvSpPr>
+          <p:cNvPr id="10" name="TextBox 9"/>
+          <p:cNvSpPr txBox="1"/>
+          <p:nvPr/>
+        </p:nvSpPr>
+        <p:spPr>
+          <a:xfrm>
+            <a:off x="1390650" y="5930900"/>
+            <a:ext cx="889000" cy="190500"/>
+          </a:xfrm>
+          <a:prstGeom prst="rect">
+            <a:avLst/>
+          </a:prstGeom>
+          <a:noFill/>
+        </p:spPr>
+        <p:txBody>
+          <a:bodyPr wrap="square">
+            <a:spAutoFit/>
+          </a:bodyPr>
+          <a:lstStyle/>
+          <a:p>
+            <a:r>
+              <a:rPr sz="1000" b="1">
+                <a:solidFill>
+                  <a:srgbClr val="26673D"/>
+                </a:solidFill>
+                <a:latin typeface="Inter"/>
+              </a:rPr>
+              <a:t>WO-02</a:t>
+            </a:r>
+          </a:p>
+        </p:txBody>
+      </p:sp>
+      <p:sp>
+        <p:nvSpPr>
+          <p:cNvPr id="11" name="TextBox 10"/>
+          <p:cNvSpPr txBox="1"/>
+          <p:nvPr/>
+        </p:nvSpPr>
+        <p:spPr>
+          <a:xfrm>
+            <a:off x="1390650" y="6096000"/>
+            <a:ext cx="889000" cy="317500"/>
+          </a:xfrm>
+          <a:prstGeom prst="rect">
+            <a:avLst/>
+          </a:prstGeom>
+          <a:noFill/>
+        </p:spPr>
+        <p:txBody>
+          <a:bodyPr wrap="square">
+            <a:spAutoFit/>
+          </a:bodyPr>
+          <a:lstStyle/>
+          <a:p>
+            <a:r>
+              <a:rPr sz="900" b="0">
+                <a:solidFill>
+                  <a:srgbClr val="5A5750"/>
+                </a:solidFill>
+                <a:latin typeface="Inter"/>
+              </a:rPr>
+              <a:t>Smoked walnut</a:t>
+            </a:r>
+          </a:p>
+        </p:txBody>
+      </p:sp>
+      <p:pic>
+        <p:nvPicPr>
+          <p:cNvPr id="12" name="Picture 11" descr="swatch_AC-01.jpg"/>
+          <p:cNvPicPr>
+            <a:picLocks noChangeAspect="1"/>
+          </p:cNvPicPr>
+          <p:nvPr/>
+        </p:nvPicPr>
+        <p:blipFill>
+          <a:blip r:embed="rId4"/>
+          <a:stretch>
+            <a:fillRect/>
+          </a:stretch>
+        </p:blipFill>
+        <p:spPr>
+          <a:xfrm>
+            <a:off x="2349500" y="5245100"/>
+            <a:ext cx="793750" cy="660400"/>
+          </a:xfrm>
+          <a:prstGeom prst="rect">
+            <a:avLst/>
+          </a:prstGeom>
+        </p:spPr>
+      </p:pic>
+      <p:sp>
+        <p:nvSpPr>
+          <p:cNvPr id="13" name="TextBox 12"/>
+          <p:cNvSpPr txBox="1"/>
+          <p:nvPr/>
+        </p:nvSpPr>
+        <p:spPr>
+          <a:xfrm>
+            <a:off x="2311400" y="5930900"/>
+            <a:ext cx="889000" cy="190500"/>
+          </a:xfrm>
+          <a:prstGeom prst="rect">
+            <a:avLst/>
+          </a:prstGeom>
+          <a:noFill/>
+        </p:spPr>
+        <p:txBody>
+          <a:bodyPr wrap="square">
+            <a:spAutoFit/>
+          </a:bodyPr>
+          <a:lstStyle/>
+          <a:p>
+            <a:r>
+              <a:rPr sz="1000" b="1">
+                <a:solidFill>
+                  <a:srgbClr val="26673D"/>
+                </a:solidFill>
+                <a:latin typeface="Inter"/>
+              </a:rPr>
+              <a:t>AC-01</a:t>
+            </a:r>
+          </a:p>
+        </p:txBody>
+      </p:sp>
+      <p:sp>
+        <p:nvSpPr>
+          <p:cNvPr id="14" name="TextBox 13"/>
+          <p:cNvSpPr txBox="1"/>
+          <p:nvPr/>
+        </p:nvSpPr>
+        <p:spPr>
+          <a:xfrm>
+            <a:off x="2311400" y="6096000"/>
+            <a:ext cx="889000" cy="317500"/>
+          </a:xfrm>
+          <a:prstGeom prst="rect">
+            <a:avLst/>
+          </a:prstGeom>
+          <a:noFill/>
+        </p:spPr>
+        <p:txBody>
+          <a:bodyPr wrap="square">
+            <a:spAutoFit/>
+          </a:bodyPr>
+          <a:lstStyle/>
+          <a:p>
+            <a:r>
+              <a:rPr sz="900" b="0">
+                <a:solidFill>
+                  <a:srgbClr val="5A5750"/>
+                </a:solidFill>
+                <a:latin typeface="Inter"/>
+              </a:rPr>
+              <a:t>Acoustic felt</a:t>
+            </a:r>
+          </a:p>
+        </p:txBody>
+      </p:sp>
+      <p:pic>
+        <p:nvPicPr>
+          <p:cNvPr id="15" name="Picture 14" descr="swatch_WO-01.jpg"/>
+          <p:cNvPicPr>
+            <a:picLocks noChangeAspect="1"/>
+          </p:cNvPicPr>
+          <p:nvPr/>
+        </p:nvPicPr>
+        <p:blipFill>
+          <a:blip r:embed="rId5"/>
+          <a:stretch>
+            <a:fillRect/>
+          </a:stretch>
+        </p:blipFill>
+        <p:spPr>
+          <a:xfrm>
+            <a:off x="3270250" y="5245100"/>
+            <a:ext cx="793750" cy="660400"/>
+          </a:xfrm>
+          <a:prstGeom prst="rect">
+            <a:avLst/>
+          </a:prstGeom>
+        </p:spPr>
+      </p:pic>
+      <p:sp>
+        <p:nvSpPr>
+          <p:cNvPr id="16" name="TextBox 15"/>
+          <p:cNvSpPr txBox="1"/>
+          <p:nvPr/>
+        </p:nvSpPr>
+        <p:spPr>
+          <a:xfrm>
+            <a:off x="3232150" y="5930900"/>
+            <a:ext cx="889000" cy="190500"/>
+          </a:xfrm>
+          <a:prstGeom prst="rect">
+            <a:avLst/>
+          </a:prstGeom>
+          <a:noFill/>
+        </p:spPr>
+        <p:txBody>
+          <a:bodyPr wrap="square">
+            <a:spAutoFit/>
+          </a:bodyPr>
+          <a:lstStyle/>
+          <a:p>
+            <a:r>
+              <a:rPr sz="1000" b="1">
+                <a:solidFill>
+                  <a:srgbClr val="26673D"/>
+                </a:solidFill>
+                <a:latin typeface="Inter"/>
+              </a:rPr>
+              <a:t>WO-01</a:t>
+            </a:r>
+          </a:p>
+        </p:txBody>
+      </p:sp>
+      <p:sp>
+        <p:nvSpPr>
+          <p:cNvPr id="17" name="TextBox 16"/>
+          <p:cNvSpPr txBox="1"/>
+          <p:nvPr/>
+        </p:nvSpPr>
+        <p:spPr>
+          <a:xfrm>
+            <a:off x="3232150" y="6096000"/>
+            <a:ext cx="889000" cy="317500"/>
+          </a:xfrm>
+          <a:prstGeom prst="rect">
+            <a:avLst/>
+          </a:prstGeom>
+          <a:noFill/>
+        </p:spPr>
+        <p:txBody>
+          <a:bodyPr wrap="square">
+            <a:spAutoFit/>
+          </a:bodyPr>
+          <a:lstStyle/>
+          <a:p>
+            <a:r>
+              <a:rPr sz="900" b="0">
+                <a:solidFill>
+                  <a:srgbClr val="5A5750"/>
+                </a:solidFill>
+                <a:latin typeface="Inter"/>
+              </a:rPr>
+              <a:t>White-oak slats</a:t>
+            </a:r>
+          </a:p>
+        </p:txBody>
+      </p:sp>
+      <p:pic>
+        <p:nvPicPr>
+          <p:cNvPr id="18" name="Picture 17" descr="CAM_09_Boardroom_A.jpg"/>
+          <p:cNvPicPr>
+            <a:picLocks noChangeAspect="1"/>
+          </p:cNvPicPr>
+          <p:nvPr/>
+        </p:nvPicPr>
+        <p:blipFill>
+          <a:blip r:embed="rId6"/>
           <a:srcRect t="15692" b="15692"/>
           <a:stretch>
             <a:fillRect/>
@@ -3745,7 +4147,7 @@
       </p:pic>
       <p:sp>
         <p:nvSpPr>
-          <p:cNvPr id="6" name="TextBox 5"/>
+          <p:cNvPr id="19" name="TextBox 18"/>
           <p:cNvSpPr txBox="1"/>
           <p:nvPr/>
         </p:nvSpPr>
@@ -3772,21 +4174,21 @@
                 </a:solidFill>
                 <a:latin typeface="Inter"/>
               </a:rPr>
-              <a:t>Boardroom (preview render)</a:t>
+              <a:t>Boardroom</a:t>
             </a:r>
           </a:p>
         </p:txBody>
       </p:sp>
       <p:pic>
         <p:nvPicPr>
-          <p:cNvPr id="7" name="Picture 6" descr="CAM_10_Boardroom_B.jpg"/>
+          <p:cNvPr id="20" name="Picture 19" descr="CAM_10_Boardroom_B.jpg"/>
           <p:cNvPicPr>
             <a:picLocks noChangeAspect="1"/>
           </p:cNvPicPr>
           <p:nvPr/>
         </p:nvPicPr>
         <p:blipFill>
-          <a:blip r:embed="rId3"/>
+          <a:blip r:embed="rId7"/>
           <a:srcRect t="15692" b="15692"/>
           <a:stretch>
             <a:fillRect/>
@@ -3804,7 +4206,7 @@
       </p:pic>
       <p:sp>
         <p:nvSpPr>
-          <p:cNvPr id="8" name="TextBox 7"/>
+          <p:cNvPr id="21" name="TextBox 20"/>
           <p:cNvSpPr txBox="1"/>
           <p:nvPr/>
         </p:nvSpPr>
@@ -3838,7 +4240,7 @@
       </p:sp>
       <p:sp>
         <p:nvSpPr>
-          <p:cNvPr id="9" name="TextBox 8"/>
+          <p:cNvPr id="22" name="TextBox 21"/>
           <p:cNvSpPr txBox="1"/>
           <p:nvPr/>
         </p:nvSpPr>
@@ -3872,7 +4274,7 @@
       </p:sp>
       <p:sp>
         <p:nvSpPr>
-          <p:cNvPr id="10" name="TextBox 9"/>
+          <p:cNvPr id="23" name="TextBox 22"/>
           <p:cNvSpPr txBox="1"/>
           <p:nvPr/>
         </p:nvSpPr>
@@ -3973,21 +4375,21 @@
         <p:spPr>
           <a:xfrm>
             <a:off x="508000" y="863600"/>
-            <a:ext cx="3683000" cy="1270000"/>
-          </a:xfrm>
-          <a:prstGeom prst="rect">
-            <a:avLst/>
-          </a:prstGeom>
-          <a:noFill/>
-        </p:spPr>
-        <p:txBody>
-          <a:bodyPr wrap="square">
-            <a:spAutoFit/>
-          </a:bodyPr>
-          <a:lstStyle/>
-          <a:p>
-            <a:r>
-              <a:rPr sz="2600" b="1">
+            <a:ext cx="3683000" cy="1524000"/>
+          </a:xfrm>
+          <a:prstGeom prst="rect">
+            <a:avLst/>
+          </a:prstGeom>
+          <a:noFill/>
+        </p:spPr>
+        <p:txBody>
+          <a:bodyPr wrap="square">
+            <a:spAutoFit/>
+          </a:bodyPr>
+          <a:lstStyle/>
+          <a:p>
+            <a:r>
+              <a:rPr sz="2400" b="1">
                 <a:solidFill>
                   <a:srgbClr val="1E1E1C"/>
                 </a:solidFill>
@@ -4006,8 +4408,8 @@
         </p:nvSpPr>
         <p:spPr>
           <a:xfrm>
-            <a:off x="508000" y="2286000"/>
-            <a:ext cx="3683000" cy="4191000"/>
+            <a:off x="508000" y="2540000"/>
+            <a:ext cx="3683000" cy="2349500"/>
           </a:xfrm>
           <a:prstGeom prst="rect">
             <a:avLst/>
@@ -4083,13 +4485,47 @@
                 <a:latin typeface="Inter"/>
               </a:rPr>
               <a:t>- Felt baffles between the beams, 4000 K linear light</a:t>
+            </a:r>
+          </a:p>
+        </p:txBody>
+      </p:sp>
+      <p:sp>
+        <p:nvSpPr>
+          <p:cNvPr id="5" name="TextBox 4"/>
+          <p:cNvSpPr txBox="1"/>
+          <p:nvPr/>
+        </p:nvSpPr>
+        <p:spPr>
+          <a:xfrm>
+            <a:off x="508000" y="5016500"/>
+            <a:ext cx="3683000" cy="190500"/>
+          </a:xfrm>
+          <a:prstGeom prst="rect">
+            <a:avLst/>
+          </a:prstGeom>
+          <a:noFill/>
+        </p:spPr>
+        <p:txBody>
+          <a:bodyPr wrap="square">
+            <a:spAutoFit/>
+          </a:bodyPr>
+          <a:lstStyle/>
+          <a:p>
+            <a:r>
+              <a:rPr sz="1000" b="1">
+                <a:solidFill>
+                  <a:srgbClr val="26673D"/>
+                </a:solidFill>
+                <a:latin typeface="Inter"/>
+              </a:rPr>
+              <a:t>KEY FINISHES</a:t>
             </a:r>
           </a:p>
         </p:txBody>
       </p:sp>
       <p:pic>
         <p:nvPicPr>
-          <p:cNvPr id="5" name="Picture 4" descr="CAM_11_Merchandising_A.jpg"/>
+          <p:cNvPr id="6" name="Picture 5" descr="swatch_CP-01.jpg"/>
           <p:cNvPicPr>
             <a:picLocks noChangeAspect="1"/>
           </p:cNvPicPr>
@@ -4097,6 +4533,374 @@
         </p:nvPicPr>
         <p:blipFill>
           <a:blip r:embed="rId2"/>
+          <a:stretch>
+            <a:fillRect/>
+          </a:stretch>
+        </p:blipFill>
+        <p:spPr>
+          <a:xfrm>
+            <a:off x="508000" y="5245100"/>
+            <a:ext cx="793750" cy="660400"/>
+          </a:xfrm>
+          <a:prstGeom prst="rect">
+            <a:avLst/>
+          </a:prstGeom>
+        </p:spPr>
+      </p:pic>
+      <p:sp>
+        <p:nvSpPr>
+          <p:cNvPr id="7" name="TextBox 6"/>
+          <p:cNvSpPr txBox="1"/>
+          <p:nvPr/>
+        </p:nvSpPr>
+        <p:spPr>
+          <a:xfrm>
+            <a:off x="469900" y="5930900"/>
+            <a:ext cx="889000" cy="190500"/>
+          </a:xfrm>
+          <a:prstGeom prst="rect">
+            <a:avLst/>
+          </a:prstGeom>
+          <a:noFill/>
+        </p:spPr>
+        <p:txBody>
+          <a:bodyPr wrap="square">
+            <a:spAutoFit/>
+          </a:bodyPr>
+          <a:lstStyle/>
+          <a:p>
+            <a:r>
+              <a:rPr sz="1000" b="1">
+                <a:solidFill>
+                  <a:srgbClr val="26673D"/>
+                </a:solidFill>
+                <a:latin typeface="Inter"/>
+              </a:rPr>
+              <a:t>CP-01</a:t>
+            </a:r>
+          </a:p>
+        </p:txBody>
+      </p:sp>
+      <p:sp>
+        <p:nvSpPr>
+          <p:cNvPr id="8" name="TextBox 7"/>
+          <p:cNvSpPr txBox="1"/>
+          <p:nvPr/>
+        </p:nvSpPr>
+        <p:spPr>
+          <a:xfrm>
+            <a:off x="469900" y="6096000"/>
+            <a:ext cx="889000" cy="317500"/>
+          </a:xfrm>
+          <a:prstGeom prst="rect">
+            <a:avLst/>
+          </a:prstGeom>
+          <a:noFill/>
+        </p:spPr>
+        <p:txBody>
+          <a:bodyPr wrap="square">
+            <a:spAutoFit/>
+          </a:bodyPr>
+          <a:lstStyle/>
+          <a:p>
+            <a:r>
+              <a:rPr sz="900" b="0">
+                <a:solidFill>
+                  <a:srgbClr val="5A5750"/>
+                </a:solidFill>
+                <a:latin typeface="Inter"/>
+              </a:rPr>
+              <a:t>Carpet tile</a:t>
+            </a:r>
+          </a:p>
+        </p:txBody>
+      </p:sp>
+      <p:pic>
+        <p:nvPicPr>
+          <p:cNvPr id="9" name="Picture 8" descr="swatch_AC-01.jpg"/>
+          <p:cNvPicPr>
+            <a:picLocks noChangeAspect="1"/>
+          </p:cNvPicPr>
+          <p:nvPr/>
+        </p:nvPicPr>
+        <p:blipFill>
+          <a:blip r:embed="rId3"/>
+          <a:stretch>
+            <a:fillRect/>
+          </a:stretch>
+        </p:blipFill>
+        <p:spPr>
+          <a:xfrm>
+            <a:off x="1428750" y="5245100"/>
+            <a:ext cx="793750" cy="660400"/>
+          </a:xfrm>
+          <a:prstGeom prst="rect">
+            <a:avLst/>
+          </a:prstGeom>
+        </p:spPr>
+      </p:pic>
+      <p:sp>
+        <p:nvSpPr>
+          <p:cNvPr id="10" name="TextBox 9"/>
+          <p:cNvSpPr txBox="1"/>
+          <p:nvPr/>
+        </p:nvSpPr>
+        <p:spPr>
+          <a:xfrm>
+            <a:off x="1390650" y="5930900"/>
+            <a:ext cx="889000" cy="190500"/>
+          </a:xfrm>
+          <a:prstGeom prst="rect">
+            <a:avLst/>
+          </a:prstGeom>
+          <a:noFill/>
+        </p:spPr>
+        <p:txBody>
+          <a:bodyPr wrap="square">
+            <a:spAutoFit/>
+          </a:bodyPr>
+          <a:lstStyle/>
+          <a:p>
+            <a:r>
+              <a:rPr sz="1000" b="1">
+                <a:solidFill>
+                  <a:srgbClr val="26673D"/>
+                </a:solidFill>
+                <a:latin typeface="Inter"/>
+              </a:rPr>
+              <a:t>AC-01</a:t>
+            </a:r>
+          </a:p>
+        </p:txBody>
+      </p:sp>
+      <p:sp>
+        <p:nvSpPr>
+          <p:cNvPr id="11" name="TextBox 10"/>
+          <p:cNvSpPr txBox="1"/>
+          <p:nvPr/>
+        </p:nvSpPr>
+        <p:spPr>
+          <a:xfrm>
+            <a:off x="1390650" y="6096000"/>
+            <a:ext cx="889000" cy="317500"/>
+          </a:xfrm>
+          <a:prstGeom prst="rect">
+            <a:avLst/>
+          </a:prstGeom>
+          <a:noFill/>
+        </p:spPr>
+        <p:txBody>
+          <a:bodyPr wrap="square">
+            <a:spAutoFit/>
+          </a:bodyPr>
+          <a:lstStyle/>
+          <a:p>
+            <a:r>
+              <a:rPr sz="900" b="0">
+                <a:solidFill>
+                  <a:srgbClr val="5A5750"/>
+                </a:solidFill>
+                <a:latin typeface="Inter"/>
+              </a:rPr>
+              <a:t>Acoustic felt</a:t>
+            </a:r>
+          </a:p>
+        </p:txBody>
+      </p:sp>
+      <p:pic>
+        <p:nvPicPr>
+          <p:cNvPr id="12" name="Picture 11" descr="swatch_UP-01g.jpg"/>
+          <p:cNvPicPr>
+            <a:picLocks noChangeAspect="1"/>
+          </p:cNvPicPr>
+          <p:nvPr/>
+        </p:nvPicPr>
+        <p:blipFill>
+          <a:blip r:embed="rId4"/>
+          <a:stretch>
+            <a:fillRect/>
+          </a:stretch>
+        </p:blipFill>
+        <p:spPr>
+          <a:xfrm>
+            <a:off x="2349500" y="5245100"/>
+            <a:ext cx="793750" cy="660400"/>
+          </a:xfrm>
+          <a:prstGeom prst="rect">
+            <a:avLst/>
+          </a:prstGeom>
+        </p:spPr>
+      </p:pic>
+      <p:sp>
+        <p:nvSpPr>
+          <p:cNvPr id="13" name="TextBox 12"/>
+          <p:cNvSpPr txBox="1"/>
+          <p:nvPr/>
+        </p:nvSpPr>
+        <p:spPr>
+          <a:xfrm>
+            <a:off x="2311400" y="5930900"/>
+            <a:ext cx="889000" cy="190500"/>
+          </a:xfrm>
+          <a:prstGeom prst="rect">
+            <a:avLst/>
+          </a:prstGeom>
+          <a:noFill/>
+        </p:spPr>
+        <p:txBody>
+          <a:bodyPr wrap="square">
+            <a:spAutoFit/>
+          </a:bodyPr>
+          <a:lstStyle/>
+          <a:p>
+            <a:r>
+              <a:rPr sz="1000" b="1">
+                <a:solidFill>
+                  <a:srgbClr val="26673D"/>
+                </a:solidFill>
+                <a:latin typeface="Inter"/>
+              </a:rPr>
+              <a:t>UP-01</a:t>
+            </a:r>
+          </a:p>
+        </p:txBody>
+      </p:sp>
+      <p:sp>
+        <p:nvSpPr>
+          <p:cNvPr id="14" name="TextBox 13"/>
+          <p:cNvSpPr txBox="1"/>
+          <p:nvPr/>
+        </p:nvSpPr>
+        <p:spPr>
+          <a:xfrm>
+            <a:off x="2311400" y="6096000"/>
+            <a:ext cx="889000" cy="317500"/>
+          </a:xfrm>
+          <a:prstGeom prst="rect">
+            <a:avLst/>
+          </a:prstGeom>
+          <a:noFill/>
+        </p:spPr>
+        <p:txBody>
+          <a:bodyPr wrap="square">
+            <a:spAutoFit/>
+          </a:bodyPr>
+          <a:lstStyle/>
+          <a:p>
+            <a:r>
+              <a:rPr sz="900" b="0">
+                <a:solidFill>
+                  <a:srgbClr val="5A5750"/>
+                </a:solidFill>
+                <a:latin typeface="Inter"/>
+              </a:rPr>
+              <a:t>Green fabric</a:t>
+            </a:r>
+          </a:p>
+        </p:txBody>
+      </p:sp>
+      <p:pic>
+        <p:nvPicPr>
+          <p:cNvPr id="15" name="Picture 14" descr="swatch_PA-01.jpg"/>
+          <p:cNvPicPr>
+            <a:picLocks noChangeAspect="1"/>
+          </p:cNvPicPr>
+          <p:nvPr/>
+        </p:nvPicPr>
+        <p:blipFill>
+          <a:blip r:embed="rId5"/>
+          <a:stretch>
+            <a:fillRect/>
+          </a:stretch>
+        </p:blipFill>
+        <p:spPr>
+          <a:xfrm>
+            <a:off x="3270250" y="5245100"/>
+            <a:ext cx="793750" cy="660400"/>
+          </a:xfrm>
+          <a:prstGeom prst="rect">
+            <a:avLst/>
+          </a:prstGeom>
+        </p:spPr>
+      </p:pic>
+      <p:sp>
+        <p:nvSpPr>
+          <p:cNvPr id="16" name="TextBox 15"/>
+          <p:cNvSpPr txBox="1"/>
+          <p:nvPr/>
+        </p:nvSpPr>
+        <p:spPr>
+          <a:xfrm>
+            <a:off x="3232150" y="5930900"/>
+            <a:ext cx="889000" cy="190500"/>
+          </a:xfrm>
+          <a:prstGeom prst="rect">
+            <a:avLst/>
+          </a:prstGeom>
+          <a:noFill/>
+        </p:spPr>
+        <p:txBody>
+          <a:bodyPr wrap="square">
+            <a:spAutoFit/>
+          </a:bodyPr>
+          <a:lstStyle/>
+          <a:p>
+            <a:r>
+              <a:rPr sz="1000" b="1">
+                <a:solidFill>
+                  <a:srgbClr val="26673D"/>
+                </a:solidFill>
+                <a:latin typeface="Inter"/>
+              </a:rPr>
+              <a:t>PA-01</a:t>
+            </a:r>
+          </a:p>
+        </p:txBody>
+      </p:sp>
+      <p:sp>
+        <p:nvSpPr>
+          <p:cNvPr id="17" name="TextBox 16"/>
+          <p:cNvSpPr txBox="1"/>
+          <p:nvPr/>
+        </p:nvSpPr>
+        <p:spPr>
+          <a:xfrm>
+            <a:off x="3232150" y="6096000"/>
+            <a:ext cx="889000" cy="317500"/>
+          </a:xfrm>
+          <a:prstGeom prst="rect">
+            <a:avLst/>
+          </a:prstGeom>
+          <a:noFill/>
+        </p:spPr>
+        <p:txBody>
+          <a:bodyPr wrap="square">
+            <a:spAutoFit/>
+          </a:bodyPr>
+          <a:lstStyle/>
+          <a:p>
+            <a:r>
+              <a:rPr sz="900" b="0">
+                <a:solidFill>
+                  <a:srgbClr val="5A5750"/>
+                </a:solidFill>
+                <a:latin typeface="Inter"/>
+              </a:rPr>
+              <a:t>Warm white paint</a:t>
+            </a:r>
+          </a:p>
+        </p:txBody>
+      </p:sp>
+      <p:pic>
+        <p:nvPicPr>
+          <p:cNvPr id="18" name="Picture 17" descr="CAM_11_Merchandising_A.jpg"/>
+          <p:cNvPicPr>
+            <a:picLocks noChangeAspect="1"/>
+          </p:cNvPicPr>
+          <p:nvPr/>
+        </p:nvPicPr>
+        <p:blipFill>
+          <a:blip r:embed="rId6"/>
           <a:srcRect t="6335" b="6335"/>
           <a:stretch>
             <a:fillRect/>
@@ -4114,7 +4918,7 @@
       </p:pic>
       <p:sp>
         <p:nvSpPr>
-          <p:cNvPr id="6" name="TextBox 5"/>
+          <p:cNvPr id="19" name="TextBox 18"/>
           <p:cNvSpPr txBox="1"/>
           <p:nvPr/>
         </p:nvSpPr>
@@ -4141,21 +4945,21 @@
                 </a:solidFill>
                 <a:latin typeface="Inter"/>
               </a:rPr>
-              <a:t>Merchandising open office (preview render)</a:t>
+              <a:t>Merchandising open office</a:t>
             </a:r>
           </a:p>
         </p:txBody>
       </p:sp>
       <p:pic>
         <p:nvPicPr>
-          <p:cNvPr id="7" name="Picture 6" descr="CAM_12_Merchandising_B.jpg"/>
+          <p:cNvPr id="20" name="Picture 19" descr="CAM_12_Merchandising_B.jpg"/>
           <p:cNvPicPr>
             <a:picLocks noChangeAspect="1"/>
           </p:cNvPicPr>
           <p:nvPr/>
         </p:nvPicPr>
         <p:blipFill>
-          <a:blip r:embed="rId3"/>
+          <a:blip r:embed="rId7"/>
           <a:srcRect l="605" r="605"/>
           <a:stretch>
             <a:fillRect/>
@@ -4173,7 +4977,7 @@
       </p:pic>
       <p:sp>
         <p:nvSpPr>
-          <p:cNvPr id="8" name="TextBox 7"/>
+          <p:cNvPr id="21" name="TextBox 20"/>
           <p:cNvSpPr txBox="1"/>
           <p:nvPr/>
         </p:nvSpPr>
@@ -4207,14 +5011,14 @@
       </p:sp>
       <p:pic>
         <p:nvPicPr>
-          <p:cNvPr id="9" name="Picture 8" descr="CAM_16_Commercial_Accounts.jpg"/>
+          <p:cNvPr id="22" name="Picture 21" descr="CAM_16_Commercial_Accounts.jpg"/>
           <p:cNvPicPr>
             <a:picLocks noChangeAspect="1"/>
           </p:cNvPicPr>
           <p:nvPr/>
         </p:nvPicPr>
         <p:blipFill>
-          <a:blip r:embed="rId4"/>
+          <a:blip r:embed="rId8"/>
           <a:srcRect l="605" r="605"/>
           <a:stretch>
             <a:fillRect/>
@@ -4232,7 +5036,7 @@
       </p:pic>
       <p:sp>
         <p:nvSpPr>
-          <p:cNvPr id="10" name="TextBox 9"/>
+          <p:cNvPr id="23" name="TextBox 22"/>
           <p:cNvSpPr txBox="1"/>
           <p:nvPr/>
         </p:nvSpPr>
@@ -4266,7 +5070,7 @@
       </p:sp>
       <p:sp>
         <p:nvSpPr>
-          <p:cNvPr id="11" name="TextBox 10"/>
+          <p:cNvPr id="24" name="TextBox 23"/>
           <p:cNvSpPr txBox="1"/>
           <p:nvPr/>
         </p:nvSpPr>
@@ -4300,7 +5104,7 @@
       </p:sp>
       <p:sp>
         <p:nvSpPr>
-          <p:cNvPr id="12" name="TextBox 11"/>
+          <p:cNvPr id="25" name="TextBox 24"/>
           <p:cNvSpPr txBox="1"/>
           <p:nvPr/>
         </p:nvSpPr>
@@ -4401,21 +5205,21 @@
         <p:spPr>
           <a:xfrm>
             <a:off x="508000" y="863600"/>
-            <a:ext cx="3683000" cy="1270000"/>
-          </a:xfrm>
-          <a:prstGeom prst="rect">
-            <a:avLst/>
-          </a:prstGeom>
-          <a:noFill/>
-        </p:spPr>
-        <p:txBody>
-          <a:bodyPr wrap="square">
-            <a:spAutoFit/>
-          </a:bodyPr>
-          <a:lstStyle/>
-          <a:p>
-            <a:r>
-              <a:rPr sz="2600" b="1">
+            <a:ext cx="3683000" cy="1524000"/>
+          </a:xfrm>
+          <a:prstGeom prst="rect">
+            <a:avLst/>
+          </a:prstGeom>
+          <a:noFill/>
+        </p:spPr>
+        <p:txBody>
+          <a:bodyPr wrap="square">
+            <a:spAutoFit/>
+          </a:bodyPr>
+          <a:lstStyle/>
+          <a:p>
+            <a:r>
+              <a:rPr sz="2400" b="1">
                 <a:solidFill>
                   <a:srgbClr val="1E1E1C"/>
                 </a:solidFill>
@@ -4434,8 +5238,8 @@
         </p:nvSpPr>
         <p:spPr>
           <a:xfrm>
-            <a:off x="508000" y="2286000"/>
-            <a:ext cx="3683000" cy="4191000"/>
+            <a:off x="508000" y="2540000"/>
+            <a:ext cx="3683000" cy="2349500"/>
           </a:xfrm>
           <a:prstGeom prst="rect">
             <a:avLst/>
@@ -4522,13 +5326,47 @@
                 <a:latin typeface="Inter"/>
               </a:rPr>
               <a:t>- 3D printing lab and sample room as office-grade support</a:t>
+            </a:r>
+          </a:p>
+        </p:txBody>
+      </p:sp>
+      <p:sp>
+        <p:nvSpPr>
+          <p:cNvPr id="5" name="TextBox 4"/>
+          <p:cNvSpPr txBox="1"/>
+          <p:nvPr/>
+        </p:nvSpPr>
+        <p:spPr>
+          <a:xfrm>
+            <a:off x="508000" y="5016500"/>
+            <a:ext cx="3683000" cy="190500"/>
+          </a:xfrm>
+          <a:prstGeom prst="rect">
+            <a:avLst/>
+          </a:prstGeom>
+          <a:noFill/>
+        </p:spPr>
+        <p:txBody>
+          <a:bodyPr wrap="square">
+            <a:spAutoFit/>
+          </a:bodyPr>
+          <a:lstStyle/>
+          <a:p>
+            <a:r>
+              <a:rPr sz="1000" b="1">
+                <a:solidFill>
+                  <a:srgbClr val="26673D"/>
+                </a:solidFill>
+                <a:latin typeface="Inter"/>
+              </a:rPr>
+              <a:t>KEY FINISHES</a:t>
             </a:r>
           </a:p>
         </p:txBody>
       </p:sp>
       <p:pic>
         <p:nvPicPr>
-          <p:cNvPr id="5" name="Picture 4" descr="CAM_13_Design_Studio_A.jpg"/>
+          <p:cNvPr id="6" name="Picture 5" descr="swatch_WD-02.jpg"/>
           <p:cNvPicPr>
             <a:picLocks noChangeAspect="1"/>
           </p:cNvPicPr>
@@ -4536,6 +5374,374 @@
         </p:nvPicPr>
         <p:blipFill>
           <a:blip r:embed="rId2"/>
+          <a:stretch>
+            <a:fillRect/>
+          </a:stretch>
+        </p:blipFill>
+        <p:spPr>
+          <a:xfrm>
+            <a:off x="508000" y="5245100"/>
+            <a:ext cx="793750" cy="660400"/>
+          </a:xfrm>
+          <a:prstGeom prst="rect">
+            <a:avLst/>
+          </a:prstGeom>
+        </p:spPr>
+      </p:pic>
+      <p:sp>
+        <p:nvSpPr>
+          <p:cNvPr id="7" name="TextBox 6"/>
+          <p:cNvSpPr txBox="1"/>
+          <p:nvPr/>
+        </p:nvSpPr>
+        <p:spPr>
+          <a:xfrm>
+            <a:off x="469900" y="5930900"/>
+            <a:ext cx="889000" cy="190500"/>
+          </a:xfrm>
+          <a:prstGeom prst="rect">
+            <a:avLst/>
+          </a:prstGeom>
+          <a:noFill/>
+        </p:spPr>
+        <p:txBody>
+          <a:bodyPr wrap="square">
+            <a:spAutoFit/>
+          </a:bodyPr>
+          <a:lstStyle/>
+          <a:p>
+            <a:r>
+              <a:rPr sz="1000" b="1">
+                <a:solidFill>
+                  <a:srgbClr val="26673D"/>
+                </a:solidFill>
+                <a:latin typeface="Inter"/>
+              </a:rPr>
+              <a:t>WD-02</a:t>
+            </a:r>
+          </a:p>
+        </p:txBody>
+      </p:sp>
+      <p:sp>
+        <p:nvSpPr>
+          <p:cNvPr id="8" name="TextBox 7"/>
+          <p:cNvSpPr txBox="1"/>
+          <p:nvPr/>
+        </p:nvSpPr>
+        <p:spPr>
+          <a:xfrm>
+            <a:off x="469900" y="6096000"/>
+            <a:ext cx="889000" cy="317500"/>
+          </a:xfrm>
+          <a:prstGeom prst="rect">
+            <a:avLst/>
+          </a:prstGeom>
+          <a:noFill/>
+        </p:spPr>
+        <p:txBody>
+          <a:bodyPr wrap="square">
+            <a:spAutoFit/>
+          </a:bodyPr>
+          <a:lstStyle/>
+          <a:p>
+            <a:r>
+              <a:rPr sz="900" b="0">
+                <a:solidFill>
+                  <a:srgbClr val="5A5750"/>
+                </a:solidFill>
+                <a:latin typeface="Inter"/>
+              </a:rPr>
+              <a:t>Oak-look plank</a:t>
+            </a:r>
+          </a:p>
+        </p:txBody>
+      </p:sp>
+      <p:pic>
+        <p:nvPicPr>
+          <p:cNvPr id="9" name="Picture 8" descr="swatch_UP-01g.jpg"/>
+          <p:cNvPicPr>
+            <a:picLocks noChangeAspect="1"/>
+          </p:cNvPicPr>
+          <p:nvPr/>
+        </p:nvPicPr>
+        <p:blipFill>
+          <a:blip r:embed="rId3"/>
+          <a:stretch>
+            <a:fillRect/>
+          </a:stretch>
+        </p:blipFill>
+        <p:spPr>
+          <a:xfrm>
+            <a:off x="1428750" y="5245100"/>
+            <a:ext cx="793750" cy="660400"/>
+          </a:xfrm>
+          <a:prstGeom prst="rect">
+            <a:avLst/>
+          </a:prstGeom>
+        </p:spPr>
+      </p:pic>
+      <p:sp>
+        <p:nvSpPr>
+          <p:cNvPr id="10" name="TextBox 9"/>
+          <p:cNvSpPr txBox="1"/>
+          <p:nvPr/>
+        </p:nvSpPr>
+        <p:spPr>
+          <a:xfrm>
+            <a:off x="1390650" y="5930900"/>
+            <a:ext cx="889000" cy="190500"/>
+          </a:xfrm>
+          <a:prstGeom prst="rect">
+            <a:avLst/>
+          </a:prstGeom>
+          <a:noFill/>
+        </p:spPr>
+        <p:txBody>
+          <a:bodyPr wrap="square">
+            <a:spAutoFit/>
+          </a:bodyPr>
+          <a:lstStyle/>
+          <a:p>
+            <a:r>
+              <a:rPr sz="1000" b="1">
+                <a:solidFill>
+                  <a:srgbClr val="26673D"/>
+                </a:solidFill>
+                <a:latin typeface="Inter"/>
+              </a:rPr>
+              <a:t>UP-01</a:t>
+            </a:r>
+          </a:p>
+        </p:txBody>
+      </p:sp>
+      <p:sp>
+        <p:nvSpPr>
+          <p:cNvPr id="11" name="TextBox 10"/>
+          <p:cNvSpPr txBox="1"/>
+          <p:nvPr/>
+        </p:nvSpPr>
+        <p:spPr>
+          <a:xfrm>
+            <a:off x="1390650" y="6096000"/>
+            <a:ext cx="889000" cy="317500"/>
+          </a:xfrm>
+          <a:prstGeom prst="rect">
+            <a:avLst/>
+          </a:prstGeom>
+          <a:noFill/>
+        </p:spPr>
+        <p:txBody>
+          <a:bodyPr wrap="square">
+            <a:spAutoFit/>
+          </a:bodyPr>
+          <a:lstStyle/>
+          <a:p>
+            <a:r>
+              <a:rPr sz="900" b="0">
+                <a:solidFill>
+                  <a:srgbClr val="5A5750"/>
+                </a:solidFill>
+                <a:latin typeface="Inter"/>
+              </a:rPr>
+              <a:t>Green fabric</a:t>
+            </a:r>
+          </a:p>
+        </p:txBody>
+      </p:sp>
+      <p:pic>
+        <p:nvPicPr>
+          <p:cNvPr id="12" name="Picture 11" descr="swatch_WO-02.jpg"/>
+          <p:cNvPicPr>
+            <a:picLocks noChangeAspect="1"/>
+          </p:cNvPicPr>
+          <p:nvPr/>
+        </p:nvPicPr>
+        <p:blipFill>
+          <a:blip r:embed="rId4"/>
+          <a:stretch>
+            <a:fillRect/>
+          </a:stretch>
+        </p:blipFill>
+        <p:spPr>
+          <a:xfrm>
+            <a:off x="2349500" y="5245100"/>
+            <a:ext cx="793750" cy="660400"/>
+          </a:xfrm>
+          <a:prstGeom prst="rect">
+            <a:avLst/>
+          </a:prstGeom>
+        </p:spPr>
+      </p:pic>
+      <p:sp>
+        <p:nvSpPr>
+          <p:cNvPr id="13" name="TextBox 12"/>
+          <p:cNvSpPr txBox="1"/>
+          <p:nvPr/>
+        </p:nvSpPr>
+        <p:spPr>
+          <a:xfrm>
+            <a:off x="2311400" y="5930900"/>
+            <a:ext cx="889000" cy="190500"/>
+          </a:xfrm>
+          <a:prstGeom prst="rect">
+            <a:avLst/>
+          </a:prstGeom>
+          <a:noFill/>
+        </p:spPr>
+        <p:txBody>
+          <a:bodyPr wrap="square">
+            <a:spAutoFit/>
+          </a:bodyPr>
+          <a:lstStyle/>
+          <a:p>
+            <a:r>
+              <a:rPr sz="1000" b="1">
+                <a:solidFill>
+                  <a:srgbClr val="26673D"/>
+                </a:solidFill>
+                <a:latin typeface="Inter"/>
+              </a:rPr>
+              <a:t>WO-02</a:t>
+            </a:r>
+          </a:p>
+        </p:txBody>
+      </p:sp>
+      <p:sp>
+        <p:nvSpPr>
+          <p:cNvPr id="14" name="TextBox 13"/>
+          <p:cNvSpPr txBox="1"/>
+          <p:nvPr/>
+        </p:nvSpPr>
+        <p:spPr>
+          <a:xfrm>
+            <a:off x="2311400" y="6096000"/>
+            <a:ext cx="889000" cy="317500"/>
+          </a:xfrm>
+          <a:prstGeom prst="rect">
+            <a:avLst/>
+          </a:prstGeom>
+          <a:noFill/>
+        </p:spPr>
+        <p:txBody>
+          <a:bodyPr wrap="square">
+            <a:spAutoFit/>
+          </a:bodyPr>
+          <a:lstStyle/>
+          <a:p>
+            <a:r>
+              <a:rPr sz="900" b="0">
+                <a:solidFill>
+                  <a:srgbClr val="5A5750"/>
+                </a:solidFill>
+                <a:latin typeface="Inter"/>
+              </a:rPr>
+              <a:t>Smoked walnut</a:t>
+            </a:r>
+          </a:p>
+        </p:txBody>
+      </p:sp>
+      <p:pic>
+        <p:nvPicPr>
+          <p:cNvPr id="15" name="Picture 14" descr="swatch_PA-01.jpg"/>
+          <p:cNvPicPr>
+            <a:picLocks noChangeAspect="1"/>
+          </p:cNvPicPr>
+          <p:nvPr/>
+        </p:nvPicPr>
+        <p:blipFill>
+          <a:blip r:embed="rId5"/>
+          <a:stretch>
+            <a:fillRect/>
+          </a:stretch>
+        </p:blipFill>
+        <p:spPr>
+          <a:xfrm>
+            <a:off x="3270250" y="5245100"/>
+            <a:ext cx="793750" cy="660400"/>
+          </a:xfrm>
+          <a:prstGeom prst="rect">
+            <a:avLst/>
+          </a:prstGeom>
+        </p:spPr>
+      </p:pic>
+      <p:sp>
+        <p:nvSpPr>
+          <p:cNvPr id="16" name="TextBox 15"/>
+          <p:cNvSpPr txBox="1"/>
+          <p:nvPr/>
+        </p:nvSpPr>
+        <p:spPr>
+          <a:xfrm>
+            <a:off x="3232150" y="5930900"/>
+            <a:ext cx="889000" cy="190500"/>
+          </a:xfrm>
+          <a:prstGeom prst="rect">
+            <a:avLst/>
+          </a:prstGeom>
+          <a:noFill/>
+        </p:spPr>
+        <p:txBody>
+          <a:bodyPr wrap="square">
+            <a:spAutoFit/>
+          </a:bodyPr>
+          <a:lstStyle/>
+          <a:p>
+            <a:r>
+              <a:rPr sz="1000" b="1">
+                <a:solidFill>
+                  <a:srgbClr val="26673D"/>
+                </a:solidFill>
+                <a:latin typeface="Inter"/>
+              </a:rPr>
+              <a:t>PA-01</a:t>
+            </a:r>
+          </a:p>
+        </p:txBody>
+      </p:sp>
+      <p:sp>
+        <p:nvSpPr>
+          <p:cNvPr id="17" name="TextBox 16"/>
+          <p:cNvSpPr txBox="1"/>
+          <p:nvPr/>
+        </p:nvSpPr>
+        <p:spPr>
+          <a:xfrm>
+            <a:off x="3232150" y="6096000"/>
+            <a:ext cx="889000" cy="317500"/>
+          </a:xfrm>
+          <a:prstGeom prst="rect">
+            <a:avLst/>
+          </a:prstGeom>
+          <a:noFill/>
+        </p:spPr>
+        <p:txBody>
+          <a:bodyPr wrap="square">
+            <a:spAutoFit/>
+          </a:bodyPr>
+          <a:lstStyle/>
+          <a:p>
+            <a:r>
+              <a:rPr sz="900" b="0">
+                <a:solidFill>
+                  <a:srgbClr val="5A5750"/>
+                </a:solidFill>
+                <a:latin typeface="Inter"/>
+              </a:rPr>
+              <a:t>Warm white paint</a:t>
+            </a:r>
+          </a:p>
+        </p:txBody>
+      </p:sp>
+      <p:pic>
+        <p:nvPicPr>
+          <p:cNvPr id="18" name="Picture 17" descr="CAM_13_Design_Studio_A.jpg"/>
+          <p:cNvPicPr>
+            <a:picLocks noChangeAspect="1"/>
+          </p:cNvPicPr>
+          <p:nvPr/>
+        </p:nvPicPr>
+        <p:blipFill>
+          <a:blip r:embed="rId6"/>
           <a:srcRect t="6335" b="6335"/>
           <a:stretch>
             <a:fillRect/>
@@ -4553,7 +5759,7 @@
       </p:pic>
       <p:sp>
         <p:nvSpPr>
-          <p:cNvPr id="6" name="TextBox 5"/>
+          <p:cNvPr id="19" name="TextBox 18"/>
           <p:cNvSpPr txBox="1"/>
           <p:nvPr/>
         </p:nvSpPr>
@@ -4587,14 +5793,14 @@
       </p:sp>
       <p:pic>
         <p:nvPicPr>
-          <p:cNvPr id="7" name="Picture 6" descr="CAM_14_Design_Studio_B.jpg"/>
+          <p:cNvPr id="20" name="Picture 19" descr="CAM_14_Design_Studio_B.jpg"/>
           <p:cNvPicPr>
             <a:picLocks noChangeAspect="1"/>
           </p:cNvPicPr>
           <p:nvPr/>
         </p:nvPicPr>
         <p:blipFill>
-          <a:blip r:embed="rId3"/>
+          <a:blip r:embed="rId7"/>
           <a:srcRect l="605" r="605"/>
           <a:stretch>
             <a:fillRect/>
@@ -4612,7 +5818,7 @@
       </p:pic>
       <p:sp>
         <p:nvSpPr>
-          <p:cNvPr id="8" name="TextBox 7"/>
+          <p:cNvPr id="21" name="TextBox 20"/>
           <p:cNvSpPr txBox="1"/>
           <p:nvPr/>
         </p:nvSpPr>
@@ -4646,14 +5852,14 @@
       </p:sp>
       <p:pic>
         <p:nvPicPr>
-          <p:cNvPr id="9" name="Picture 8" descr="CAM_15_CAD_Room.jpg"/>
+          <p:cNvPr id="22" name="Picture 21" descr="CAM_15_CAD_Room.jpg"/>
           <p:cNvPicPr>
             <a:picLocks noChangeAspect="1"/>
           </p:cNvPicPr>
           <p:nvPr/>
         </p:nvPicPr>
         <p:blipFill>
-          <a:blip r:embed="rId4"/>
+          <a:blip r:embed="rId8"/>
           <a:srcRect l="605" r="605"/>
           <a:stretch>
             <a:fillRect/>
@@ -4671,7 +5877,7 @@
       </p:pic>
       <p:sp>
         <p:nvSpPr>
-          <p:cNvPr id="10" name="TextBox 9"/>
+          <p:cNvPr id="23" name="TextBox 22"/>
           <p:cNvSpPr txBox="1"/>
           <p:nvPr/>
         </p:nvSpPr>
@@ -4705,7 +5911,7 @@
       </p:sp>
       <p:sp>
         <p:nvSpPr>
-          <p:cNvPr id="11" name="TextBox 10"/>
+          <p:cNvPr id="24" name="TextBox 23"/>
           <p:cNvSpPr txBox="1"/>
           <p:nvPr/>
         </p:nvSpPr>
@@ -4739,7 +5945,7 @@
       </p:sp>
       <p:sp>
         <p:nvSpPr>
-          <p:cNvPr id="12" name="TextBox 11"/>
+          <p:cNvPr id="25" name="TextBox 24"/>
           <p:cNvSpPr txBox="1"/>
           <p:nvPr/>
         </p:nvSpPr>
@@ -6443,7 +7649,7 @@
                 </a:solidFill>
                 <a:latin typeface="Inter"/>
               </a:rPr>
-              <a:t>Felt rafts between the beams - boardroom (preview render)</a:t>
+              <a:t>Felt rafts between the beams - boardroom</a:t>
             </a:r>
           </a:p>
         </p:txBody>
@@ -8203,21 +9409,21 @@
         <p:spPr>
           <a:xfrm>
             <a:off x="508000" y="863600"/>
-            <a:ext cx="3683000" cy="1270000"/>
-          </a:xfrm>
-          <a:prstGeom prst="rect">
-            <a:avLst/>
-          </a:prstGeom>
-          <a:noFill/>
-        </p:spPr>
-        <p:txBody>
-          <a:bodyPr wrap="square">
-            <a:spAutoFit/>
-          </a:bodyPr>
-          <a:lstStyle/>
-          <a:p>
-            <a:r>
-              <a:rPr sz="2600" b="1">
+            <a:ext cx="3683000" cy="1524000"/>
+          </a:xfrm>
+          <a:prstGeom prst="rect">
+            <a:avLst/>
+          </a:prstGeom>
+          <a:noFill/>
+        </p:spPr>
+        <p:txBody>
+          <a:bodyPr wrap="square">
+            <a:spAutoFit/>
+          </a:bodyPr>
+          <a:lstStyle/>
+          <a:p>
+            <a:r>
+              <a:rPr sz="2400" b="1">
                 <a:solidFill>
                   <a:srgbClr val="1E1E1C"/>
                 </a:solidFill>
@@ -8236,8 +9442,8 @@
         </p:nvSpPr>
         <p:spPr>
           <a:xfrm>
-            <a:off x="508000" y="2286000"/>
-            <a:ext cx="3683000" cy="4191000"/>
+            <a:off x="508000" y="2540000"/>
+            <a:ext cx="3683000" cy="3937000"/>
           </a:xfrm>
           <a:prstGeom prst="rect">
             <a:avLst/>
@@ -8257,7 +9463,7 @@
                 </a:solidFill>
                 <a:latin typeface="Inter"/>
               </a:rPr>
-              <a:t>The ground floor becomes the face of the company: a calm, premium headquarters where international buyers meet the brand, management works in comfort and the Global Design Studio turns trends into production-ready products - with no production on this floor.</a:t>
+              <a:t>The face of the company: a calm, premium headquarters where buyers meet the brand, management works in comfort and the design team turns trends into products - with no production on this floor.</a:t>
             </a:r>
           </a:p>
           <a:p>
@@ -8301,25 +9507,286 @@
                 </a:solidFill>
                 <a:latin typeface="Inter"/>
               </a:rPr>
-              <a:t>- Design-development wing: studio, CAD, fabric library, 3D lab, sample room</a:t>
-            </a:r>
-          </a:p>
-          <a:p>
-            <a:r>
-              <a:rPr sz="1400" b="0">
+              <a:t>- Design wing, staff cafe, lounge / training and prayer rooms behind</a:t>
+            </a:r>
+          </a:p>
+        </p:txBody>
+      </p:sp>
+      <p:sp>
+        <p:nvSpPr>
+          <p:cNvPr id="5" name="TextBox 4"/>
+          <p:cNvSpPr txBox="1"/>
+          <p:nvPr/>
+        </p:nvSpPr>
+        <p:spPr>
+          <a:xfrm>
+            <a:off x="508000" y="5016500"/>
+            <a:ext cx="1778000" cy="317500"/>
+          </a:xfrm>
+          <a:prstGeom prst="rect">
+            <a:avLst/>
+          </a:prstGeom>
+          <a:noFill/>
+        </p:spPr>
+        <p:txBody>
+          <a:bodyPr wrap="square">
+            <a:spAutoFit/>
+          </a:bodyPr>
+          <a:lstStyle/>
+          <a:p>
+            <a:r>
+              <a:rPr sz="2400" b="1">
+                <a:solidFill>
+                  <a:srgbClr val="26673D"/>
+                </a:solidFill>
+                <a:latin typeface="Inter"/>
+              </a:rPr>
+              <a:t>34</a:t>
+            </a:r>
+          </a:p>
+        </p:txBody>
+      </p:sp>
+      <p:sp>
+        <p:nvSpPr>
+          <p:cNvPr id="6" name="TextBox 5"/>
+          <p:cNvSpPr txBox="1"/>
+          <p:nvPr/>
+        </p:nvSpPr>
+        <p:spPr>
+          <a:xfrm>
+            <a:off x="508000" y="5334000"/>
+            <a:ext cx="1778000" cy="317500"/>
+          </a:xfrm>
+          <a:prstGeom prst="rect">
+            <a:avLst/>
+          </a:prstGeom>
+          <a:noFill/>
+        </p:spPr>
+        <p:txBody>
+          <a:bodyPr wrap="square">
+            <a:spAutoFit/>
+          </a:bodyPr>
+          <a:lstStyle/>
+          <a:p>
+            <a:r>
+              <a:rPr sz="1100" b="0">
                 <a:solidFill>
                   <a:srgbClr val="5A5750"/>
                 </a:solidFill>
                 <a:latin typeface="Inter"/>
               </a:rPr>
-              <a:t>- Staff cafe, lounge / training, prayer rooms and washrooms</a:t>
+              <a:t>rooms and zones designed</a:t>
+            </a:r>
+          </a:p>
+        </p:txBody>
+      </p:sp>
+      <p:sp>
+        <p:nvSpPr>
+          <p:cNvPr id="7" name="TextBox 6"/>
+          <p:cNvSpPr txBox="1"/>
+          <p:nvPr/>
+        </p:nvSpPr>
+        <p:spPr>
+          <a:xfrm>
+            <a:off x="2349500" y="5016500"/>
+            <a:ext cx="1778000" cy="317500"/>
+          </a:xfrm>
+          <a:prstGeom prst="rect">
+            <a:avLst/>
+          </a:prstGeom>
+          <a:noFill/>
+        </p:spPr>
+        <p:txBody>
+          <a:bodyPr wrap="square">
+            <a:spAutoFit/>
+          </a:bodyPr>
+          <a:lstStyle/>
+          <a:p>
+            <a:r>
+              <a:rPr sz="2400" b="1">
+                <a:solidFill>
+                  <a:srgbClr val="26673D"/>
+                </a:solidFill>
+                <a:latin typeface="Inter"/>
+              </a:rPr>
+              <a:t>54</a:t>
+            </a:r>
+          </a:p>
+        </p:txBody>
+      </p:sp>
+      <p:sp>
+        <p:nvSpPr>
+          <p:cNvPr id="8" name="TextBox 7"/>
+          <p:cNvSpPr txBox="1"/>
+          <p:nvPr/>
+        </p:nvSpPr>
+        <p:spPr>
+          <a:xfrm>
+            <a:off x="2349500" y="5334000"/>
+            <a:ext cx="1778000" cy="317500"/>
+          </a:xfrm>
+          <a:prstGeom prst="rect">
+            <a:avLst/>
+          </a:prstGeom>
+          <a:noFill/>
+        </p:spPr>
+        <p:txBody>
+          <a:bodyPr wrap="square">
+            <a:spAutoFit/>
+          </a:bodyPr>
+          <a:lstStyle/>
+          <a:p>
+            <a:r>
+              <a:rPr sz="1100" b="0">
+                <a:solidFill>
+                  <a:srgbClr val="5A5750"/>
+                </a:solidFill>
+                <a:latin typeface="Inter"/>
+              </a:rPr>
+              <a:t>work seats incl. growth and guests</a:t>
+            </a:r>
+          </a:p>
+        </p:txBody>
+      </p:sp>
+      <p:sp>
+        <p:nvSpPr>
+          <p:cNvPr id="9" name="TextBox 8"/>
+          <p:cNvSpPr txBox="1"/>
+          <p:nvPr/>
+        </p:nvSpPr>
+        <p:spPr>
+          <a:xfrm>
+            <a:off x="508000" y="5715000"/>
+            <a:ext cx="1778000" cy="317500"/>
+          </a:xfrm>
+          <a:prstGeom prst="rect">
+            <a:avLst/>
+          </a:prstGeom>
+          <a:noFill/>
+        </p:spPr>
+        <p:txBody>
+          <a:bodyPr wrap="square">
+            <a:spAutoFit/>
+          </a:bodyPr>
+          <a:lstStyle/>
+          <a:p>
+            <a:r>
+              <a:rPr sz="2400" b="1">
+                <a:solidFill>
+                  <a:srgbClr val="26673D"/>
+                </a:solidFill>
+                <a:latin typeface="Inter"/>
+              </a:rPr>
+              <a:t>707 sft</a:t>
+            </a:r>
+          </a:p>
+        </p:txBody>
+      </p:sp>
+      <p:sp>
+        <p:nvSpPr>
+          <p:cNvPr id="10" name="TextBox 9"/>
+          <p:cNvSpPr txBox="1"/>
+          <p:nvPr/>
+        </p:nvSpPr>
+        <p:spPr>
+          <a:xfrm>
+            <a:off x="508000" y="6032500"/>
+            <a:ext cx="1778000" cy="317500"/>
+          </a:xfrm>
+          <a:prstGeom prst="rect">
+            <a:avLst/>
+          </a:prstGeom>
+          <a:noFill/>
+        </p:spPr>
+        <p:txBody>
+          <a:bodyPr wrap="square">
+            <a:spAutoFit/>
+          </a:bodyPr>
+          <a:lstStyle/>
+          <a:p>
+            <a:r>
+              <a:rPr sz="1100" b="0">
+                <a:solidFill>
+                  <a:srgbClr val="5A5750"/>
+                </a:solidFill>
+                <a:latin typeface="Inter"/>
+              </a:rPr>
+              <a:t>experience centre at the heart</a:t>
+            </a:r>
+          </a:p>
+        </p:txBody>
+      </p:sp>
+      <p:sp>
+        <p:nvSpPr>
+          <p:cNvPr id="11" name="TextBox 10"/>
+          <p:cNvSpPr txBox="1"/>
+          <p:nvPr/>
+        </p:nvSpPr>
+        <p:spPr>
+          <a:xfrm>
+            <a:off x="2349500" y="5715000"/>
+            <a:ext cx="1778000" cy="317500"/>
+          </a:xfrm>
+          <a:prstGeom prst="rect">
+            <a:avLst/>
+          </a:prstGeom>
+          <a:noFill/>
+        </p:spPr>
+        <p:txBody>
+          <a:bodyPr wrap="square">
+            <a:spAutoFit/>
+          </a:bodyPr>
+          <a:lstStyle/>
+          <a:p>
+            <a:r>
+              <a:rPr sz="2400" b="1">
+                <a:solidFill>
+                  <a:srgbClr val="26673D"/>
+                </a:solidFill>
+                <a:latin typeface="Inter"/>
+              </a:rPr>
+              <a:t>75 / 75</a:t>
+            </a:r>
+          </a:p>
+        </p:txBody>
+      </p:sp>
+      <p:sp>
+        <p:nvSpPr>
+          <p:cNvPr id="12" name="TextBox 11"/>
+          <p:cNvSpPr txBox="1"/>
+          <p:nvPr/>
+        </p:nvSpPr>
+        <p:spPr>
+          <a:xfrm>
+            <a:off x="2349500" y="6032500"/>
+            <a:ext cx="1778000" cy="317500"/>
+          </a:xfrm>
+          <a:prstGeom prst="rect">
+            <a:avLst/>
+          </a:prstGeom>
+          <a:noFill/>
+        </p:spPr>
+        <p:txBody>
+          <a:bodyPr wrap="square">
+            <a:spAutoFit/>
+          </a:bodyPr>
+          <a:lstStyle/>
+          <a:p>
+            <a:r>
+              <a:rPr sz="1100" b="0">
+                <a:solidFill>
+                  <a:srgbClr val="5A5750"/>
+                </a:solidFill>
+                <a:latin typeface="Inter"/>
+              </a:rPr>
+              <a:t>survey dimension checks passed</a:t>
             </a:r>
           </a:p>
         </p:txBody>
       </p:sp>
       <p:pic>
         <p:nvPicPr>
-          <p:cNvPr id="5" name="Picture 4" descr="CAM_02_Reception_B.jpg"/>
+          <p:cNvPr id="13" name="Picture 12" descr="CAM_02_Reception_B.jpg"/>
           <p:cNvPicPr>
             <a:picLocks noChangeAspect="1"/>
           </p:cNvPicPr>
@@ -8344,7 +9811,7 @@
       </p:pic>
       <p:sp>
         <p:nvSpPr>
-          <p:cNvPr id="6" name="TextBox 5"/>
+          <p:cNvPr id="14" name="TextBox 13"/>
           <p:cNvSpPr txBox="1"/>
           <p:nvPr/>
         </p:nvSpPr>
@@ -8378,7 +9845,7 @@
       </p:sp>
       <p:sp>
         <p:nvSpPr>
-          <p:cNvPr id="7" name="TextBox 6"/>
+          <p:cNvPr id="15" name="TextBox 14"/>
           <p:cNvSpPr txBox="1"/>
           <p:nvPr/>
         </p:nvSpPr>
@@ -8412,7 +9879,7 @@
       </p:sp>
       <p:sp>
         <p:nvSpPr>
-          <p:cNvPr id="8" name="TextBox 7"/>
+          <p:cNvPr id="16" name="TextBox 15"/>
           <p:cNvSpPr txBox="1"/>
           <p:nvPr/>
         </p:nvSpPr>
@@ -11157,21 +12624,21 @@
         <p:spPr>
           <a:xfrm>
             <a:off x="508000" y="863600"/>
-            <a:ext cx="3683000" cy="1270000"/>
-          </a:xfrm>
-          <a:prstGeom prst="rect">
-            <a:avLst/>
-          </a:prstGeom>
-          <a:noFill/>
-        </p:spPr>
-        <p:txBody>
-          <a:bodyPr wrap="square">
-            <a:spAutoFit/>
-          </a:bodyPr>
-          <a:lstStyle/>
-          <a:p>
-            <a:r>
-              <a:rPr sz="2600" b="1">
+            <a:ext cx="3683000" cy="1524000"/>
+          </a:xfrm>
+          <a:prstGeom prst="rect">
+            <a:avLst/>
+          </a:prstGeom>
+          <a:noFill/>
+        </p:spPr>
+        <p:txBody>
+          <a:bodyPr wrap="square">
+            <a:spAutoFit/>
+          </a:bodyPr>
+          <a:lstStyle/>
+          <a:p>
+            <a:r>
+              <a:rPr sz="2400" b="1">
                 <a:solidFill>
                   <a:srgbClr val="1E1E1C"/>
                 </a:solidFill>
@@ -11190,8 +12657,8 @@
         </p:nvSpPr>
         <p:spPr>
           <a:xfrm>
-            <a:off x="508000" y="2286000"/>
-            <a:ext cx="3683000" cy="4191000"/>
+            <a:off x="508000" y="2540000"/>
+            <a:ext cx="3683000" cy="2349500"/>
           </a:xfrm>
           <a:prstGeom prst="rect">
             <a:avLst/>
@@ -11267,13 +12734,47 @@
                 <a:latin typeface="Inter"/>
               </a:rPr>
               <a:t>- Glass between lobby and reception</a:t>
+            </a:r>
+          </a:p>
+        </p:txBody>
+      </p:sp>
+      <p:sp>
+        <p:nvSpPr>
+          <p:cNvPr id="5" name="TextBox 4"/>
+          <p:cNvSpPr txBox="1"/>
+          <p:nvPr/>
+        </p:nvSpPr>
+        <p:spPr>
+          <a:xfrm>
+            <a:off x="508000" y="5016500"/>
+            <a:ext cx="3683000" cy="190500"/>
+          </a:xfrm>
+          <a:prstGeom prst="rect">
+            <a:avLst/>
+          </a:prstGeom>
+          <a:noFill/>
+        </p:spPr>
+        <p:txBody>
+          <a:bodyPr wrap="square">
+            <a:spAutoFit/>
+          </a:bodyPr>
+          <a:lstStyle/>
+          <a:p>
+            <a:r>
+              <a:rPr sz="1000" b="1">
+                <a:solidFill>
+                  <a:srgbClr val="26673D"/>
+                </a:solidFill>
+                <a:latin typeface="Inter"/>
+              </a:rPr>
+              <a:t>KEY FINISHES</a:t>
             </a:r>
           </a:p>
         </p:txBody>
       </p:sp>
       <p:pic>
         <p:nvPicPr>
-          <p:cNvPr id="5" name="Picture 4" descr="CAM_01_Reception_A.jpg"/>
+          <p:cNvPr id="6" name="Picture 5" descr="swatch_TZ-01.jpg"/>
           <p:cNvPicPr>
             <a:picLocks noChangeAspect="1"/>
           </p:cNvPicPr>
@@ -11281,6 +12782,374 @@
         </p:nvPicPr>
         <p:blipFill>
           <a:blip r:embed="rId2"/>
+          <a:stretch>
+            <a:fillRect/>
+          </a:stretch>
+        </p:blipFill>
+        <p:spPr>
+          <a:xfrm>
+            <a:off x="508000" y="5245100"/>
+            <a:ext cx="793750" cy="660400"/>
+          </a:xfrm>
+          <a:prstGeom prst="rect">
+            <a:avLst/>
+          </a:prstGeom>
+        </p:spPr>
+      </p:pic>
+      <p:sp>
+        <p:nvSpPr>
+          <p:cNvPr id="7" name="TextBox 6"/>
+          <p:cNvSpPr txBox="1"/>
+          <p:nvPr/>
+        </p:nvSpPr>
+        <p:spPr>
+          <a:xfrm>
+            <a:off x="469900" y="5930900"/>
+            <a:ext cx="889000" cy="190500"/>
+          </a:xfrm>
+          <a:prstGeom prst="rect">
+            <a:avLst/>
+          </a:prstGeom>
+          <a:noFill/>
+        </p:spPr>
+        <p:txBody>
+          <a:bodyPr wrap="square">
+            <a:spAutoFit/>
+          </a:bodyPr>
+          <a:lstStyle/>
+          <a:p>
+            <a:r>
+              <a:rPr sz="1000" b="1">
+                <a:solidFill>
+                  <a:srgbClr val="26673D"/>
+                </a:solidFill>
+                <a:latin typeface="Inter"/>
+              </a:rPr>
+              <a:t>TZ-01</a:t>
+            </a:r>
+          </a:p>
+        </p:txBody>
+      </p:sp>
+      <p:sp>
+        <p:nvSpPr>
+          <p:cNvPr id="8" name="TextBox 7"/>
+          <p:cNvSpPr txBox="1"/>
+          <p:nvPr/>
+        </p:nvSpPr>
+        <p:spPr>
+          <a:xfrm>
+            <a:off x="469900" y="6096000"/>
+            <a:ext cx="889000" cy="317500"/>
+          </a:xfrm>
+          <a:prstGeom prst="rect">
+            <a:avLst/>
+          </a:prstGeom>
+          <a:noFill/>
+        </p:spPr>
+        <p:txBody>
+          <a:bodyPr wrap="square">
+            <a:spAutoFit/>
+          </a:bodyPr>
+          <a:lstStyle/>
+          <a:p>
+            <a:r>
+              <a:rPr sz="900" b="0">
+                <a:solidFill>
+                  <a:srgbClr val="5A5750"/>
+                </a:solidFill>
+                <a:latin typeface="Inter"/>
+              </a:rPr>
+              <a:t>Terrazzo floor</a:t>
+            </a:r>
+          </a:p>
+        </p:txBody>
+      </p:sp>
+      <p:pic>
+        <p:nvPicPr>
+          <p:cNvPr id="9" name="Picture 8" descr="swatch_WO-01.jpg"/>
+          <p:cNvPicPr>
+            <a:picLocks noChangeAspect="1"/>
+          </p:cNvPicPr>
+          <p:nvPr/>
+        </p:nvPicPr>
+        <p:blipFill>
+          <a:blip r:embed="rId3"/>
+          <a:stretch>
+            <a:fillRect/>
+          </a:stretch>
+        </p:blipFill>
+        <p:spPr>
+          <a:xfrm>
+            <a:off x="1428750" y="5245100"/>
+            <a:ext cx="793750" cy="660400"/>
+          </a:xfrm>
+          <a:prstGeom prst="rect">
+            <a:avLst/>
+          </a:prstGeom>
+        </p:spPr>
+      </p:pic>
+      <p:sp>
+        <p:nvSpPr>
+          <p:cNvPr id="10" name="TextBox 9"/>
+          <p:cNvSpPr txBox="1"/>
+          <p:nvPr/>
+        </p:nvSpPr>
+        <p:spPr>
+          <a:xfrm>
+            <a:off x="1390650" y="5930900"/>
+            <a:ext cx="889000" cy="190500"/>
+          </a:xfrm>
+          <a:prstGeom prst="rect">
+            <a:avLst/>
+          </a:prstGeom>
+          <a:noFill/>
+        </p:spPr>
+        <p:txBody>
+          <a:bodyPr wrap="square">
+            <a:spAutoFit/>
+          </a:bodyPr>
+          <a:lstStyle/>
+          <a:p>
+            <a:r>
+              <a:rPr sz="1000" b="1">
+                <a:solidFill>
+                  <a:srgbClr val="26673D"/>
+                </a:solidFill>
+                <a:latin typeface="Inter"/>
+              </a:rPr>
+              <a:t>WO-01</a:t>
+            </a:r>
+          </a:p>
+        </p:txBody>
+      </p:sp>
+      <p:sp>
+        <p:nvSpPr>
+          <p:cNvPr id="11" name="TextBox 10"/>
+          <p:cNvSpPr txBox="1"/>
+          <p:nvPr/>
+        </p:nvSpPr>
+        <p:spPr>
+          <a:xfrm>
+            <a:off x="1390650" y="6096000"/>
+            <a:ext cx="889000" cy="317500"/>
+          </a:xfrm>
+          <a:prstGeom prst="rect">
+            <a:avLst/>
+          </a:prstGeom>
+          <a:noFill/>
+        </p:spPr>
+        <p:txBody>
+          <a:bodyPr wrap="square">
+            <a:spAutoFit/>
+          </a:bodyPr>
+          <a:lstStyle/>
+          <a:p>
+            <a:r>
+              <a:rPr sz="900" b="0">
+                <a:solidFill>
+                  <a:srgbClr val="5A5750"/>
+                </a:solidFill>
+                <a:latin typeface="Inter"/>
+              </a:rPr>
+              <a:t>White-oak slats</a:t>
+            </a:r>
+          </a:p>
+        </p:txBody>
+      </p:sp>
+      <p:pic>
+        <p:nvPicPr>
+          <p:cNvPr id="12" name="Picture 11" descr="swatch_SS-01.jpg"/>
+          <p:cNvPicPr>
+            <a:picLocks noChangeAspect="1"/>
+          </p:cNvPicPr>
+          <p:nvPr/>
+        </p:nvPicPr>
+        <p:blipFill>
+          <a:blip r:embed="rId4"/>
+          <a:stretch>
+            <a:fillRect/>
+          </a:stretch>
+        </p:blipFill>
+        <p:spPr>
+          <a:xfrm>
+            <a:off x="2349500" y="5245100"/>
+            <a:ext cx="793750" cy="660400"/>
+          </a:xfrm>
+          <a:prstGeom prst="rect">
+            <a:avLst/>
+          </a:prstGeom>
+        </p:spPr>
+      </p:pic>
+      <p:sp>
+        <p:nvSpPr>
+          <p:cNvPr id="13" name="TextBox 12"/>
+          <p:cNvSpPr txBox="1"/>
+          <p:nvPr/>
+        </p:nvSpPr>
+        <p:spPr>
+          <a:xfrm>
+            <a:off x="2311400" y="5930900"/>
+            <a:ext cx="889000" cy="190500"/>
+          </a:xfrm>
+          <a:prstGeom prst="rect">
+            <a:avLst/>
+          </a:prstGeom>
+          <a:noFill/>
+        </p:spPr>
+        <p:txBody>
+          <a:bodyPr wrap="square">
+            <a:spAutoFit/>
+          </a:bodyPr>
+          <a:lstStyle/>
+          <a:p>
+            <a:r>
+              <a:rPr sz="1000" b="1">
+                <a:solidFill>
+                  <a:srgbClr val="26673D"/>
+                </a:solidFill>
+                <a:latin typeface="Inter"/>
+              </a:rPr>
+              <a:t>SS-01</a:t>
+            </a:r>
+          </a:p>
+        </p:txBody>
+      </p:sp>
+      <p:sp>
+        <p:nvSpPr>
+          <p:cNvPr id="14" name="TextBox 13"/>
+          <p:cNvSpPr txBox="1"/>
+          <p:nvPr/>
+        </p:nvSpPr>
+        <p:spPr>
+          <a:xfrm>
+            <a:off x="2311400" y="6096000"/>
+            <a:ext cx="889000" cy="317500"/>
+          </a:xfrm>
+          <a:prstGeom prst="rect">
+            <a:avLst/>
+          </a:prstGeom>
+          <a:noFill/>
+        </p:spPr>
+        <p:txBody>
+          <a:bodyPr wrap="square">
+            <a:spAutoFit/>
+          </a:bodyPr>
+          <a:lstStyle/>
+          <a:p>
+            <a:r>
+              <a:rPr sz="900" b="0">
+                <a:solidFill>
+                  <a:srgbClr val="5A5750"/>
+                </a:solidFill>
+                <a:latin typeface="Inter"/>
+              </a:rPr>
+              <a:t>Quartz / terrazzo top</a:t>
+            </a:r>
+          </a:p>
+        </p:txBody>
+      </p:sp>
+      <p:pic>
+        <p:nvPicPr>
+          <p:cNvPr id="15" name="Picture 14" descr="swatch_MT-02.jpg"/>
+          <p:cNvPicPr>
+            <a:picLocks noChangeAspect="1"/>
+          </p:cNvPicPr>
+          <p:nvPr/>
+        </p:nvPicPr>
+        <p:blipFill>
+          <a:blip r:embed="rId5"/>
+          <a:stretch>
+            <a:fillRect/>
+          </a:stretch>
+        </p:blipFill>
+        <p:spPr>
+          <a:xfrm>
+            <a:off x="3270250" y="5245100"/>
+            <a:ext cx="793750" cy="660400"/>
+          </a:xfrm>
+          <a:prstGeom prst="rect">
+            <a:avLst/>
+          </a:prstGeom>
+        </p:spPr>
+      </p:pic>
+      <p:sp>
+        <p:nvSpPr>
+          <p:cNvPr id="16" name="TextBox 15"/>
+          <p:cNvSpPr txBox="1"/>
+          <p:nvPr/>
+        </p:nvSpPr>
+        <p:spPr>
+          <a:xfrm>
+            <a:off x="3232150" y="5930900"/>
+            <a:ext cx="889000" cy="190500"/>
+          </a:xfrm>
+          <a:prstGeom prst="rect">
+            <a:avLst/>
+          </a:prstGeom>
+          <a:noFill/>
+        </p:spPr>
+        <p:txBody>
+          <a:bodyPr wrap="square">
+            <a:spAutoFit/>
+          </a:bodyPr>
+          <a:lstStyle/>
+          <a:p>
+            <a:r>
+              <a:rPr sz="1000" b="1">
+                <a:solidFill>
+                  <a:srgbClr val="26673D"/>
+                </a:solidFill>
+                <a:latin typeface="Inter"/>
+              </a:rPr>
+              <a:t>MT-02</a:t>
+            </a:r>
+          </a:p>
+        </p:txBody>
+      </p:sp>
+      <p:sp>
+        <p:nvSpPr>
+          <p:cNvPr id="17" name="TextBox 16"/>
+          <p:cNvSpPr txBox="1"/>
+          <p:nvPr/>
+        </p:nvSpPr>
+        <p:spPr>
+          <a:xfrm>
+            <a:off x="3232150" y="6096000"/>
+            <a:ext cx="889000" cy="317500"/>
+          </a:xfrm>
+          <a:prstGeom prst="rect">
+            <a:avLst/>
+          </a:prstGeom>
+          <a:noFill/>
+        </p:spPr>
+        <p:txBody>
+          <a:bodyPr wrap="square">
+            <a:spAutoFit/>
+          </a:bodyPr>
+          <a:lstStyle/>
+          <a:p>
+            <a:r>
+              <a:rPr sz="900" b="0">
+                <a:solidFill>
+                  <a:srgbClr val="5A5750"/>
+                </a:solidFill>
+                <a:latin typeface="Inter"/>
+              </a:rPr>
+              <a:t>Brushed brass</a:t>
+            </a:r>
+          </a:p>
+        </p:txBody>
+      </p:sp>
+      <p:pic>
+        <p:nvPicPr>
+          <p:cNvPr id="18" name="Picture 17" descr="CAM_01_Reception_A.jpg"/>
+          <p:cNvPicPr>
+            <a:picLocks noChangeAspect="1"/>
+          </p:cNvPicPr>
+          <p:nvPr/>
+        </p:nvPicPr>
+        <p:blipFill>
+          <a:blip r:embed="rId6"/>
           <a:srcRect t="6335" b="6335"/>
           <a:stretch>
             <a:fillRect/>
@@ -11298,7 +13167,7 @@
       </p:pic>
       <p:sp>
         <p:nvSpPr>
-          <p:cNvPr id="6" name="TextBox 5"/>
+          <p:cNvPr id="19" name="TextBox 18"/>
           <p:cNvSpPr txBox="1"/>
           <p:nvPr/>
         </p:nvSpPr>
@@ -11325,21 +13194,21 @@
                 </a:solidFill>
                 <a:latin typeface="Inter"/>
               </a:rPr>
-              <a:t>Reception (preview render)</a:t>
+              <a:t>Reception</a:t>
             </a:r>
           </a:p>
         </p:txBody>
       </p:sp>
       <p:pic>
         <p:nvPicPr>
-          <p:cNvPr id="7" name="Picture 6" descr="CAM_02_Reception_B.jpg"/>
+          <p:cNvPr id="20" name="Picture 19" descr="CAM_02_Reception_B.jpg"/>
           <p:cNvPicPr>
             <a:picLocks noChangeAspect="1"/>
           </p:cNvPicPr>
           <p:nvPr/>
         </p:nvPicPr>
         <p:blipFill>
-          <a:blip r:embed="rId3"/>
+          <a:blip r:embed="rId7"/>
           <a:srcRect l="605" r="605"/>
           <a:stretch>
             <a:fillRect/>
@@ -11357,7 +13226,7 @@
       </p:pic>
       <p:sp>
         <p:nvSpPr>
-          <p:cNvPr id="8" name="TextBox 7"/>
+          <p:cNvPr id="21" name="TextBox 20"/>
           <p:cNvSpPr txBox="1"/>
           <p:nvPr/>
         </p:nvSpPr>
@@ -11391,14 +13260,14 @@
       </p:sp>
       <p:pic>
         <p:nvPicPr>
-          <p:cNvPr id="9" name="Picture 8" descr="CAM_03_Entrance_Lobby.jpg"/>
+          <p:cNvPr id="22" name="Picture 21" descr="CAM_03_Entrance_Lobby.jpg"/>
           <p:cNvPicPr>
             <a:picLocks noChangeAspect="1"/>
           </p:cNvPicPr>
           <p:nvPr/>
         </p:nvPicPr>
         <p:blipFill>
-          <a:blip r:embed="rId4"/>
+          <a:blip r:embed="rId8"/>
           <a:srcRect l="605" r="605"/>
           <a:stretch>
             <a:fillRect/>
@@ -11416,7 +13285,7 @@
       </p:pic>
       <p:sp>
         <p:nvSpPr>
-          <p:cNvPr id="10" name="TextBox 9"/>
+          <p:cNvPr id="23" name="TextBox 22"/>
           <p:cNvSpPr txBox="1"/>
           <p:nvPr/>
         </p:nvSpPr>
@@ -11450,7 +13319,7 @@
       </p:sp>
       <p:sp>
         <p:nvSpPr>
-          <p:cNvPr id="11" name="TextBox 10"/>
+          <p:cNvPr id="24" name="TextBox 23"/>
           <p:cNvSpPr txBox="1"/>
           <p:nvPr/>
         </p:nvSpPr>
@@ -11484,7 +13353,7 @@
       </p:sp>
       <p:sp>
         <p:nvSpPr>
-          <p:cNvPr id="12" name="TextBox 11"/>
+          <p:cNvPr id="25" name="TextBox 24"/>
           <p:cNvSpPr txBox="1"/>
           <p:nvPr/>
         </p:nvSpPr>
@@ -11585,21 +13454,21 @@
         <p:spPr>
           <a:xfrm>
             <a:off x="508000" y="863600"/>
-            <a:ext cx="3683000" cy="1270000"/>
-          </a:xfrm>
-          <a:prstGeom prst="rect">
-            <a:avLst/>
-          </a:prstGeom>
-          <a:noFill/>
-        </p:spPr>
-        <p:txBody>
-          <a:bodyPr wrap="square">
-            <a:spAutoFit/>
-          </a:bodyPr>
-          <a:lstStyle/>
-          <a:p>
-            <a:r>
-              <a:rPr sz="2600" b="1">
+            <a:ext cx="3683000" cy="1524000"/>
+          </a:xfrm>
+          <a:prstGeom prst="rect">
+            <a:avLst/>
+          </a:prstGeom>
+          <a:noFill/>
+        </p:spPr>
+        <p:txBody>
+          <a:bodyPr wrap="square">
+            <a:spAutoFit/>
+          </a:bodyPr>
+          <a:lstStyle/>
+          <a:p>
+            <a:r>
+              <a:rPr sz="2400" b="1">
                 <a:solidFill>
                   <a:srgbClr val="1E1E1C"/>
                 </a:solidFill>
@@ -11618,8 +13487,8 @@
         </p:nvSpPr>
         <p:spPr>
           <a:xfrm>
-            <a:off x="508000" y="2286000"/>
-            <a:ext cx="3683000" cy="4191000"/>
+            <a:off x="508000" y="2540000"/>
+            <a:ext cx="3683000" cy="2349500"/>
           </a:xfrm>
           <a:prstGeom prst="rect">
             <a:avLst/>
@@ -11706,13 +13575,47 @@
                 <a:latin typeface="Inter"/>
               </a:rPr>
               <a:t>- Glass views into boardroom and fabric library</a:t>
+            </a:r>
+          </a:p>
+        </p:txBody>
+      </p:sp>
+      <p:sp>
+        <p:nvSpPr>
+          <p:cNvPr id="5" name="TextBox 4"/>
+          <p:cNvSpPr txBox="1"/>
+          <p:nvPr/>
+        </p:nvSpPr>
+        <p:spPr>
+          <a:xfrm>
+            <a:off x="508000" y="5016500"/>
+            <a:ext cx="3683000" cy="190500"/>
+          </a:xfrm>
+          <a:prstGeom prst="rect">
+            <a:avLst/>
+          </a:prstGeom>
+          <a:noFill/>
+        </p:spPr>
+        <p:txBody>
+          <a:bodyPr wrap="square">
+            <a:spAutoFit/>
+          </a:bodyPr>
+          <a:lstStyle/>
+          <a:p>
+            <a:r>
+              <a:rPr sz="1000" b="1">
+                <a:solidFill>
+                  <a:srgbClr val="26673D"/>
+                </a:solidFill>
+                <a:latin typeface="Inter"/>
+              </a:rPr>
+              <a:t>KEY FINISHES</a:t>
             </a:r>
           </a:p>
         </p:txBody>
       </p:sp>
       <p:pic>
         <p:nvPicPr>
-          <p:cNvPr id="5" name="Picture 4" descr="CAM_04_Experience_Centre_A.jpg"/>
+          <p:cNvPr id="6" name="Picture 5" descr="swatch_TZ-01.jpg"/>
           <p:cNvPicPr>
             <a:picLocks noChangeAspect="1"/>
           </p:cNvPicPr>
@@ -11720,6 +13623,374 @@
         </p:nvPicPr>
         <p:blipFill>
           <a:blip r:embed="rId2"/>
+          <a:stretch>
+            <a:fillRect/>
+          </a:stretch>
+        </p:blipFill>
+        <p:spPr>
+          <a:xfrm>
+            <a:off x="508000" y="5245100"/>
+            <a:ext cx="793750" cy="660400"/>
+          </a:xfrm>
+          <a:prstGeom prst="rect">
+            <a:avLst/>
+          </a:prstGeom>
+        </p:spPr>
+      </p:pic>
+      <p:sp>
+        <p:nvSpPr>
+          <p:cNvPr id="7" name="TextBox 6"/>
+          <p:cNvSpPr txBox="1"/>
+          <p:nvPr/>
+        </p:nvSpPr>
+        <p:spPr>
+          <a:xfrm>
+            <a:off x="469900" y="5930900"/>
+            <a:ext cx="889000" cy="190500"/>
+          </a:xfrm>
+          <a:prstGeom prst="rect">
+            <a:avLst/>
+          </a:prstGeom>
+          <a:noFill/>
+        </p:spPr>
+        <p:txBody>
+          <a:bodyPr wrap="square">
+            <a:spAutoFit/>
+          </a:bodyPr>
+          <a:lstStyle/>
+          <a:p>
+            <a:r>
+              <a:rPr sz="1000" b="1">
+                <a:solidFill>
+                  <a:srgbClr val="26673D"/>
+                </a:solidFill>
+                <a:latin typeface="Inter"/>
+              </a:rPr>
+              <a:t>TZ-01</a:t>
+            </a:r>
+          </a:p>
+        </p:txBody>
+      </p:sp>
+      <p:sp>
+        <p:nvSpPr>
+          <p:cNvPr id="8" name="TextBox 7"/>
+          <p:cNvSpPr txBox="1"/>
+          <p:nvPr/>
+        </p:nvSpPr>
+        <p:spPr>
+          <a:xfrm>
+            <a:off x="469900" y="6096000"/>
+            <a:ext cx="889000" cy="317500"/>
+          </a:xfrm>
+          <a:prstGeom prst="rect">
+            <a:avLst/>
+          </a:prstGeom>
+          <a:noFill/>
+        </p:spPr>
+        <p:txBody>
+          <a:bodyPr wrap="square">
+            <a:spAutoFit/>
+          </a:bodyPr>
+          <a:lstStyle/>
+          <a:p>
+            <a:r>
+              <a:rPr sz="900" b="0">
+                <a:solidFill>
+                  <a:srgbClr val="5A5750"/>
+                </a:solidFill>
+                <a:latin typeface="Inter"/>
+              </a:rPr>
+              <a:t>Terrazzo floor</a:t>
+            </a:r>
+          </a:p>
+        </p:txBody>
+      </p:sp>
+      <p:pic>
+        <p:nvPicPr>
+          <p:cNvPr id="9" name="Picture 8" descr="swatch_PA-02.jpg"/>
+          <p:cNvPicPr>
+            <a:picLocks noChangeAspect="1"/>
+          </p:cNvPicPr>
+          <p:nvPr/>
+        </p:nvPicPr>
+        <p:blipFill>
+          <a:blip r:embed="rId3"/>
+          <a:stretch>
+            <a:fillRect/>
+          </a:stretch>
+        </p:blipFill>
+        <p:spPr>
+          <a:xfrm>
+            <a:off x="1428750" y="5245100"/>
+            <a:ext cx="793750" cy="660400"/>
+          </a:xfrm>
+          <a:prstGeom prst="rect">
+            <a:avLst/>
+          </a:prstGeom>
+        </p:spPr>
+      </p:pic>
+      <p:sp>
+        <p:nvSpPr>
+          <p:cNvPr id="10" name="TextBox 9"/>
+          <p:cNvSpPr txBox="1"/>
+          <p:nvPr/>
+        </p:nvSpPr>
+        <p:spPr>
+          <a:xfrm>
+            <a:off x="1390650" y="5930900"/>
+            <a:ext cx="889000" cy="190500"/>
+          </a:xfrm>
+          <a:prstGeom prst="rect">
+            <a:avLst/>
+          </a:prstGeom>
+          <a:noFill/>
+        </p:spPr>
+        <p:txBody>
+          <a:bodyPr wrap="square">
+            <a:spAutoFit/>
+          </a:bodyPr>
+          <a:lstStyle/>
+          <a:p>
+            <a:r>
+              <a:rPr sz="1000" b="1">
+                <a:solidFill>
+                  <a:srgbClr val="26673D"/>
+                </a:solidFill>
+                <a:latin typeface="Inter"/>
+              </a:rPr>
+              <a:t>PA-02</a:t>
+            </a:r>
+          </a:p>
+        </p:txBody>
+      </p:sp>
+      <p:sp>
+        <p:nvSpPr>
+          <p:cNvPr id="11" name="TextBox 10"/>
+          <p:cNvSpPr txBox="1"/>
+          <p:nvPr/>
+        </p:nvSpPr>
+        <p:spPr>
+          <a:xfrm>
+            <a:off x="1390650" y="6096000"/>
+            <a:ext cx="889000" cy="317500"/>
+          </a:xfrm>
+          <a:prstGeom prst="rect">
+            <a:avLst/>
+          </a:prstGeom>
+          <a:noFill/>
+        </p:spPr>
+        <p:txBody>
+          <a:bodyPr wrap="square">
+            <a:spAutoFit/>
+          </a:bodyPr>
+          <a:lstStyle/>
+          <a:p>
+            <a:r>
+              <a:rPr sz="900" b="0">
+                <a:solidFill>
+                  <a:srgbClr val="5A5750"/>
+                </a:solidFill>
+                <a:latin typeface="Inter"/>
+              </a:rPr>
+              <a:t>Brand green</a:t>
+            </a:r>
+          </a:p>
+        </p:txBody>
+      </p:sp>
+      <p:pic>
+        <p:nvPicPr>
+          <p:cNvPr id="12" name="Picture 11" descr="swatch_WO-01.jpg"/>
+          <p:cNvPicPr>
+            <a:picLocks noChangeAspect="1"/>
+          </p:cNvPicPr>
+          <p:nvPr/>
+        </p:nvPicPr>
+        <p:blipFill>
+          <a:blip r:embed="rId4"/>
+          <a:stretch>
+            <a:fillRect/>
+          </a:stretch>
+        </p:blipFill>
+        <p:spPr>
+          <a:xfrm>
+            <a:off x="2349500" y="5245100"/>
+            <a:ext cx="793750" cy="660400"/>
+          </a:xfrm>
+          <a:prstGeom prst="rect">
+            <a:avLst/>
+          </a:prstGeom>
+        </p:spPr>
+      </p:pic>
+      <p:sp>
+        <p:nvSpPr>
+          <p:cNvPr id="13" name="TextBox 12"/>
+          <p:cNvSpPr txBox="1"/>
+          <p:nvPr/>
+        </p:nvSpPr>
+        <p:spPr>
+          <a:xfrm>
+            <a:off x="2311400" y="5930900"/>
+            <a:ext cx="889000" cy="190500"/>
+          </a:xfrm>
+          <a:prstGeom prst="rect">
+            <a:avLst/>
+          </a:prstGeom>
+          <a:noFill/>
+        </p:spPr>
+        <p:txBody>
+          <a:bodyPr wrap="square">
+            <a:spAutoFit/>
+          </a:bodyPr>
+          <a:lstStyle/>
+          <a:p>
+            <a:r>
+              <a:rPr sz="1000" b="1">
+                <a:solidFill>
+                  <a:srgbClr val="26673D"/>
+                </a:solidFill>
+                <a:latin typeface="Inter"/>
+              </a:rPr>
+              <a:t>WO-01</a:t>
+            </a:r>
+          </a:p>
+        </p:txBody>
+      </p:sp>
+      <p:sp>
+        <p:nvSpPr>
+          <p:cNvPr id="14" name="TextBox 13"/>
+          <p:cNvSpPr txBox="1"/>
+          <p:nvPr/>
+        </p:nvSpPr>
+        <p:spPr>
+          <a:xfrm>
+            <a:off x="2311400" y="6096000"/>
+            <a:ext cx="889000" cy="317500"/>
+          </a:xfrm>
+          <a:prstGeom prst="rect">
+            <a:avLst/>
+          </a:prstGeom>
+          <a:noFill/>
+        </p:spPr>
+        <p:txBody>
+          <a:bodyPr wrap="square">
+            <a:spAutoFit/>
+          </a:bodyPr>
+          <a:lstStyle/>
+          <a:p>
+            <a:r>
+              <a:rPr sz="900" b="0">
+                <a:solidFill>
+                  <a:srgbClr val="5A5750"/>
+                </a:solidFill>
+                <a:latin typeface="Inter"/>
+              </a:rPr>
+              <a:t>White-oak slats</a:t>
+            </a:r>
+          </a:p>
+        </p:txBody>
+      </p:sp>
+      <p:pic>
+        <p:nvPicPr>
+          <p:cNvPr id="15" name="Picture 14" descr="swatch_MT-02.jpg"/>
+          <p:cNvPicPr>
+            <a:picLocks noChangeAspect="1"/>
+          </p:cNvPicPr>
+          <p:nvPr/>
+        </p:nvPicPr>
+        <p:blipFill>
+          <a:blip r:embed="rId5"/>
+          <a:stretch>
+            <a:fillRect/>
+          </a:stretch>
+        </p:blipFill>
+        <p:spPr>
+          <a:xfrm>
+            <a:off x="3270250" y="5245100"/>
+            <a:ext cx="793750" cy="660400"/>
+          </a:xfrm>
+          <a:prstGeom prst="rect">
+            <a:avLst/>
+          </a:prstGeom>
+        </p:spPr>
+      </p:pic>
+      <p:sp>
+        <p:nvSpPr>
+          <p:cNvPr id="16" name="TextBox 15"/>
+          <p:cNvSpPr txBox="1"/>
+          <p:nvPr/>
+        </p:nvSpPr>
+        <p:spPr>
+          <a:xfrm>
+            <a:off x="3232150" y="5930900"/>
+            <a:ext cx="889000" cy="190500"/>
+          </a:xfrm>
+          <a:prstGeom prst="rect">
+            <a:avLst/>
+          </a:prstGeom>
+          <a:noFill/>
+        </p:spPr>
+        <p:txBody>
+          <a:bodyPr wrap="square">
+            <a:spAutoFit/>
+          </a:bodyPr>
+          <a:lstStyle/>
+          <a:p>
+            <a:r>
+              <a:rPr sz="1000" b="1">
+                <a:solidFill>
+                  <a:srgbClr val="26673D"/>
+                </a:solidFill>
+                <a:latin typeface="Inter"/>
+              </a:rPr>
+              <a:t>MT-02</a:t>
+            </a:r>
+          </a:p>
+        </p:txBody>
+      </p:sp>
+      <p:sp>
+        <p:nvSpPr>
+          <p:cNvPr id="17" name="TextBox 16"/>
+          <p:cNvSpPr txBox="1"/>
+          <p:nvPr/>
+        </p:nvSpPr>
+        <p:spPr>
+          <a:xfrm>
+            <a:off x="3232150" y="6096000"/>
+            <a:ext cx="889000" cy="317500"/>
+          </a:xfrm>
+          <a:prstGeom prst="rect">
+            <a:avLst/>
+          </a:prstGeom>
+          <a:noFill/>
+        </p:spPr>
+        <p:txBody>
+          <a:bodyPr wrap="square">
+            <a:spAutoFit/>
+          </a:bodyPr>
+          <a:lstStyle/>
+          <a:p>
+            <a:r>
+              <a:rPr sz="900" b="0">
+                <a:solidFill>
+                  <a:srgbClr val="5A5750"/>
+                </a:solidFill>
+                <a:latin typeface="Inter"/>
+              </a:rPr>
+              <a:t>Brushed brass</a:t>
+            </a:r>
+          </a:p>
+        </p:txBody>
+      </p:sp>
+      <p:pic>
+        <p:nvPicPr>
+          <p:cNvPr id="18" name="Picture 17" descr="CAM_04_Experience_Centre_A.jpg"/>
+          <p:cNvPicPr>
+            <a:picLocks noChangeAspect="1"/>
+          </p:cNvPicPr>
+          <p:nvPr/>
+        </p:nvPicPr>
+        <p:blipFill>
+          <a:blip r:embed="rId6"/>
           <a:srcRect t="6335" b="6335"/>
           <a:stretch>
             <a:fillRect/>
@@ -11737,7 +14008,7 @@
       </p:pic>
       <p:sp>
         <p:nvSpPr>
-          <p:cNvPr id="6" name="TextBox 5"/>
+          <p:cNvPr id="19" name="TextBox 18"/>
           <p:cNvSpPr txBox="1"/>
           <p:nvPr/>
         </p:nvSpPr>
@@ -11764,21 +14035,21 @@
                 </a:solidFill>
                 <a:latin typeface="Inter"/>
               </a:rPr>
-              <a:t>Experience centre (preview render)</a:t>
+              <a:t>Experience centre</a:t>
             </a:r>
           </a:p>
         </p:txBody>
       </p:sp>
       <p:pic>
         <p:nvPicPr>
-          <p:cNvPr id="7" name="Picture 6" descr="CAM_05_Experience_Centre_B.jpg"/>
+          <p:cNvPr id="20" name="Picture 19" descr="CAM_05_Experience_Centre_B.jpg"/>
           <p:cNvPicPr>
             <a:picLocks noChangeAspect="1"/>
           </p:cNvPicPr>
           <p:nvPr/>
         </p:nvPicPr>
         <p:blipFill>
-          <a:blip r:embed="rId3"/>
+          <a:blip r:embed="rId7"/>
           <a:srcRect l="605" r="605"/>
           <a:stretch>
             <a:fillRect/>
@@ -11796,7 +14067,7 @@
       </p:pic>
       <p:sp>
         <p:nvSpPr>
-          <p:cNvPr id="8" name="TextBox 7"/>
+          <p:cNvPr id="21" name="TextBox 20"/>
           <p:cNvSpPr txBox="1"/>
           <p:nvPr/>
         </p:nvSpPr>
@@ -11830,14 +14101,14 @@
       </p:sp>
       <p:pic>
         <p:nvPicPr>
-          <p:cNvPr id="9" name="Picture 8" descr="CAM_06_Experience_Centre_Detail.jpg"/>
+          <p:cNvPr id="22" name="Picture 21" descr="CAM_06_Experience_Centre_Detail.jpg"/>
           <p:cNvPicPr>
             <a:picLocks noChangeAspect="1"/>
           </p:cNvPicPr>
           <p:nvPr/>
         </p:nvPicPr>
         <p:blipFill>
-          <a:blip r:embed="rId4"/>
+          <a:blip r:embed="rId8"/>
           <a:srcRect l="605" r="605"/>
           <a:stretch>
             <a:fillRect/>
@@ -11855,7 +14126,7 @@
       </p:pic>
       <p:sp>
         <p:nvSpPr>
-          <p:cNvPr id="10" name="TextBox 9"/>
+          <p:cNvPr id="23" name="TextBox 22"/>
           <p:cNvSpPr txBox="1"/>
           <p:nvPr/>
         </p:nvSpPr>
@@ -11889,7 +14160,7 @@
       </p:sp>
       <p:sp>
         <p:nvSpPr>
-          <p:cNvPr id="11" name="TextBox 10"/>
+          <p:cNvPr id="24" name="TextBox 23"/>
           <p:cNvSpPr txBox="1"/>
           <p:nvPr/>
         </p:nvSpPr>
@@ -11923,7 +14194,7 @@
       </p:sp>
       <p:sp>
         <p:nvSpPr>
-          <p:cNvPr id="12" name="TextBox 11"/>
+          <p:cNvPr id="25" name="TextBox 24"/>
           <p:cNvSpPr txBox="1"/>
           <p:nvPr/>
         </p:nvSpPr>
@@ -12024,21 +14295,21 @@
         <p:spPr>
           <a:xfrm>
             <a:off x="508000" y="863600"/>
-            <a:ext cx="3683000" cy="1270000"/>
-          </a:xfrm>
-          <a:prstGeom prst="rect">
-            <a:avLst/>
-          </a:prstGeom>
-          <a:noFill/>
-        </p:spPr>
-        <p:txBody>
-          <a:bodyPr wrap="square">
-            <a:spAutoFit/>
-          </a:bodyPr>
-          <a:lstStyle/>
-          <a:p>
-            <a:r>
-              <a:rPr sz="2600" b="1">
+            <a:ext cx="3683000" cy="1524000"/>
+          </a:xfrm>
+          <a:prstGeom prst="rect">
+            <a:avLst/>
+          </a:prstGeom>
+          <a:noFill/>
+        </p:spPr>
+        <p:txBody>
+          <a:bodyPr wrap="square">
+            <a:spAutoFit/>
+          </a:bodyPr>
+          <a:lstStyle/>
+          <a:p>
+            <a:r>
+              <a:rPr sz="2400" b="1">
                 <a:solidFill>
                   <a:srgbClr val="1E1E1C"/>
                 </a:solidFill>
@@ -12057,8 +14328,8 @@
         </p:nvSpPr>
         <p:spPr>
           <a:xfrm>
-            <a:off x="508000" y="2286000"/>
-            <a:ext cx="3683000" cy="4191000"/>
+            <a:off x="508000" y="2540000"/>
+            <a:ext cx="3683000" cy="2349500"/>
           </a:xfrm>
           <a:prstGeom prst="rect">
             <a:avLst/>
@@ -12145,13 +14416,47 @@
                 <a:latin typeface="Inter"/>
               </a:rPr>
               <a:t>- Direct link from the executive suite to the boardroom</a:t>
+            </a:r>
+          </a:p>
+        </p:txBody>
+      </p:sp>
+      <p:sp>
+        <p:nvSpPr>
+          <p:cNvPr id="5" name="TextBox 4"/>
+          <p:cNvSpPr txBox="1"/>
+          <p:nvPr/>
+        </p:nvSpPr>
+        <p:spPr>
+          <a:xfrm>
+            <a:off x="508000" y="5016500"/>
+            <a:ext cx="3683000" cy="190500"/>
+          </a:xfrm>
+          <a:prstGeom prst="rect">
+            <a:avLst/>
+          </a:prstGeom>
+          <a:noFill/>
+        </p:spPr>
+        <p:txBody>
+          <a:bodyPr wrap="square">
+            <a:spAutoFit/>
+          </a:bodyPr>
+          <a:lstStyle/>
+          <a:p>
+            <a:r>
+              <a:rPr sz="1000" b="1">
+                <a:solidFill>
+                  <a:srgbClr val="26673D"/>
+                </a:solidFill>
+                <a:latin typeface="Inter"/>
+              </a:rPr>
+              <a:t>KEY FINISHES</a:t>
             </a:r>
           </a:p>
         </p:txBody>
       </p:sp>
       <p:pic>
         <p:nvPicPr>
-          <p:cNvPr id="5" name="Picture 4" descr="CAM_07_MD_Office_A.jpg"/>
+          <p:cNvPr id="6" name="Picture 5" descr="swatch_WD-01.jpg"/>
           <p:cNvPicPr>
             <a:picLocks noChangeAspect="1"/>
           </p:cNvPicPr>
@@ -12159,6 +14464,374 @@
         </p:nvPicPr>
         <p:blipFill>
           <a:blip r:embed="rId2"/>
+          <a:stretch>
+            <a:fillRect/>
+          </a:stretch>
+        </p:blipFill>
+        <p:spPr>
+          <a:xfrm>
+            <a:off x="508000" y="5245100"/>
+            <a:ext cx="793750" cy="660400"/>
+          </a:xfrm>
+          <a:prstGeom prst="rect">
+            <a:avLst/>
+          </a:prstGeom>
+        </p:spPr>
+      </p:pic>
+      <p:sp>
+        <p:nvSpPr>
+          <p:cNvPr id="7" name="TextBox 6"/>
+          <p:cNvSpPr txBox="1"/>
+          <p:nvPr/>
+        </p:nvSpPr>
+        <p:spPr>
+          <a:xfrm>
+            <a:off x="469900" y="5930900"/>
+            <a:ext cx="889000" cy="190500"/>
+          </a:xfrm>
+          <a:prstGeom prst="rect">
+            <a:avLst/>
+          </a:prstGeom>
+          <a:noFill/>
+        </p:spPr>
+        <p:txBody>
+          <a:bodyPr wrap="square">
+            <a:spAutoFit/>
+          </a:bodyPr>
+          <a:lstStyle/>
+          <a:p>
+            <a:r>
+              <a:rPr sz="1000" b="1">
+                <a:solidFill>
+                  <a:srgbClr val="26673D"/>
+                </a:solidFill>
+                <a:latin typeface="Inter"/>
+              </a:rPr>
+              <a:t>WD-01</a:t>
+            </a:r>
+          </a:p>
+        </p:txBody>
+      </p:sp>
+      <p:sp>
+        <p:nvSpPr>
+          <p:cNvPr id="8" name="TextBox 7"/>
+          <p:cNvSpPr txBox="1"/>
+          <p:nvPr/>
+        </p:nvSpPr>
+        <p:spPr>
+          <a:xfrm>
+            <a:off x="469900" y="6096000"/>
+            <a:ext cx="889000" cy="317500"/>
+          </a:xfrm>
+          <a:prstGeom prst="rect">
+            <a:avLst/>
+          </a:prstGeom>
+          <a:noFill/>
+        </p:spPr>
+        <p:txBody>
+          <a:bodyPr wrap="square">
+            <a:spAutoFit/>
+          </a:bodyPr>
+          <a:lstStyle/>
+          <a:p>
+            <a:r>
+              <a:rPr sz="900" b="0">
+                <a:solidFill>
+                  <a:srgbClr val="5A5750"/>
+                </a:solidFill>
+                <a:latin typeface="Inter"/>
+              </a:rPr>
+              <a:t>Oak herringbone</a:t>
+            </a:r>
+          </a:p>
+        </p:txBody>
+      </p:sp>
+      <p:pic>
+        <p:nvPicPr>
+          <p:cNvPr id="9" name="Picture 8" descr="swatch_WO-02.jpg"/>
+          <p:cNvPicPr>
+            <a:picLocks noChangeAspect="1"/>
+          </p:cNvPicPr>
+          <p:nvPr/>
+        </p:nvPicPr>
+        <p:blipFill>
+          <a:blip r:embed="rId3"/>
+          <a:stretch>
+            <a:fillRect/>
+          </a:stretch>
+        </p:blipFill>
+        <p:spPr>
+          <a:xfrm>
+            <a:off x="1428750" y="5245100"/>
+            <a:ext cx="793750" cy="660400"/>
+          </a:xfrm>
+          <a:prstGeom prst="rect">
+            <a:avLst/>
+          </a:prstGeom>
+        </p:spPr>
+      </p:pic>
+      <p:sp>
+        <p:nvSpPr>
+          <p:cNvPr id="10" name="TextBox 9"/>
+          <p:cNvSpPr txBox="1"/>
+          <p:nvPr/>
+        </p:nvSpPr>
+        <p:spPr>
+          <a:xfrm>
+            <a:off x="1390650" y="5930900"/>
+            <a:ext cx="889000" cy="190500"/>
+          </a:xfrm>
+          <a:prstGeom prst="rect">
+            <a:avLst/>
+          </a:prstGeom>
+          <a:noFill/>
+        </p:spPr>
+        <p:txBody>
+          <a:bodyPr wrap="square">
+            <a:spAutoFit/>
+          </a:bodyPr>
+          <a:lstStyle/>
+          <a:p>
+            <a:r>
+              <a:rPr sz="1000" b="1">
+                <a:solidFill>
+                  <a:srgbClr val="26673D"/>
+                </a:solidFill>
+                <a:latin typeface="Inter"/>
+              </a:rPr>
+              <a:t>WO-02</a:t>
+            </a:r>
+          </a:p>
+        </p:txBody>
+      </p:sp>
+      <p:sp>
+        <p:nvSpPr>
+          <p:cNvPr id="11" name="TextBox 10"/>
+          <p:cNvSpPr txBox="1"/>
+          <p:nvPr/>
+        </p:nvSpPr>
+        <p:spPr>
+          <a:xfrm>
+            <a:off x="1390650" y="6096000"/>
+            <a:ext cx="889000" cy="317500"/>
+          </a:xfrm>
+          <a:prstGeom prst="rect">
+            <a:avLst/>
+          </a:prstGeom>
+          <a:noFill/>
+        </p:spPr>
+        <p:txBody>
+          <a:bodyPr wrap="square">
+            <a:spAutoFit/>
+          </a:bodyPr>
+          <a:lstStyle/>
+          <a:p>
+            <a:r>
+              <a:rPr sz="900" b="0">
+                <a:solidFill>
+                  <a:srgbClr val="5A5750"/>
+                </a:solidFill>
+                <a:latin typeface="Inter"/>
+              </a:rPr>
+              <a:t>Smoked walnut</a:t>
+            </a:r>
+          </a:p>
+        </p:txBody>
+      </p:sp>
+      <p:pic>
+        <p:nvPicPr>
+          <p:cNvPr id="12" name="Picture 11" descr="swatch_UP-02.jpg"/>
+          <p:cNvPicPr>
+            <a:picLocks noChangeAspect="1"/>
+          </p:cNvPicPr>
+          <p:nvPr/>
+        </p:nvPicPr>
+        <p:blipFill>
+          <a:blip r:embed="rId4"/>
+          <a:stretch>
+            <a:fillRect/>
+          </a:stretch>
+        </p:blipFill>
+        <p:spPr>
+          <a:xfrm>
+            <a:off x="2349500" y="5245100"/>
+            <a:ext cx="793750" cy="660400"/>
+          </a:xfrm>
+          <a:prstGeom prst="rect">
+            <a:avLst/>
+          </a:prstGeom>
+        </p:spPr>
+      </p:pic>
+      <p:sp>
+        <p:nvSpPr>
+          <p:cNvPr id="13" name="TextBox 12"/>
+          <p:cNvSpPr txBox="1"/>
+          <p:nvPr/>
+        </p:nvSpPr>
+        <p:spPr>
+          <a:xfrm>
+            <a:off x="2311400" y="5930900"/>
+            <a:ext cx="889000" cy="190500"/>
+          </a:xfrm>
+          <a:prstGeom prst="rect">
+            <a:avLst/>
+          </a:prstGeom>
+          <a:noFill/>
+        </p:spPr>
+        <p:txBody>
+          <a:bodyPr wrap="square">
+            <a:spAutoFit/>
+          </a:bodyPr>
+          <a:lstStyle/>
+          <a:p>
+            <a:r>
+              <a:rPr sz="1000" b="1">
+                <a:solidFill>
+                  <a:srgbClr val="26673D"/>
+                </a:solidFill>
+                <a:latin typeface="Inter"/>
+              </a:rPr>
+              <a:t>UP-02</a:t>
+            </a:r>
+          </a:p>
+        </p:txBody>
+      </p:sp>
+      <p:sp>
+        <p:nvSpPr>
+          <p:cNvPr id="14" name="TextBox 13"/>
+          <p:cNvSpPr txBox="1"/>
+          <p:nvPr/>
+        </p:nvSpPr>
+        <p:spPr>
+          <a:xfrm>
+            <a:off x="2311400" y="6096000"/>
+            <a:ext cx="889000" cy="317500"/>
+          </a:xfrm>
+          <a:prstGeom prst="rect">
+            <a:avLst/>
+          </a:prstGeom>
+          <a:noFill/>
+        </p:spPr>
+        <p:txBody>
+          <a:bodyPr wrap="square">
+            <a:spAutoFit/>
+          </a:bodyPr>
+          <a:lstStyle/>
+          <a:p>
+            <a:r>
+              <a:rPr sz="900" b="0">
+                <a:solidFill>
+                  <a:srgbClr val="5A5750"/>
+                </a:solidFill>
+                <a:latin typeface="Inter"/>
+              </a:rPr>
+              <a:t>Cognac leather</a:t>
+            </a:r>
+          </a:p>
+        </p:txBody>
+      </p:sp>
+      <p:pic>
+        <p:nvPicPr>
+          <p:cNvPr id="15" name="Picture 14" descr="swatch_UP-01s.jpg"/>
+          <p:cNvPicPr>
+            <a:picLocks noChangeAspect="1"/>
+          </p:cNvPicPr>
+          <p:nvPr/>
+        </p:nvPicPr>
+        <p:blipFill>
+          <a:blip r:embed="rId5"/>
+          <a:stretch>
+            <a:fillRect/>
+          </a:stretch>
+        </p:blipFill>
+        <p:spPr>
+          <a:xfrm>
+            <a:off x="3270250" y="5245100"/>
+            <a:ext cx="793750" cy="660400"/>
+          </a:xfrm>
+          <a:prstGeom prst="rect">
+            <a:avLst/>
+          </a:prstGeom>
+        </p:spPr>
+      </p:pic>
+      <p:sp>
+        <p:nvSpPr>
+          <p:cNvPr id="16" name="TextBox 15"/>
+          <p:cNvSpPr txBox="1"/>
+          <p:nvPr/>
+        </p:nvSpPr>
+        <p:spPr>
+          <a:xfrm>
+            <a:off x="3232150" y="5930900"/>
+            <a:ext cx="889000" cy="190500"/>
+          </a:xfrm>
+          <a:prstGeom prst="rect">
+            <a:avLst/>
+          </a:prstGeom>
+          <a:noFill/>
+        </p:spPr>
+        <p:txBody>
+          <a:bodyPr wrap="square">
+            <a:spAutoFit/>
+          </a:bodyPr>
+          <a:lstStyle/>
+          <a:p>
+            <a:r>
+              <a:rPr sz="1000" b="1">
+                <a:solidFill>
+                  <a:srgbClr val="26673D"/>
+                </a:solidFill>
+                <a:latin typeface="Inter"/>
+              </a:rPr>
+              <a:t>UP-01</a:t>
+            </a:r>
+          </a:p>
+        </p:txBody>
+      </p:sp>
+      <p:sp>
+        <p:nvSpPr>
+          <p:cNvPr id="17" name="TextBox 16"/>
+          <p:cNvSpPr txBox="1"/>
+          <p:nvPr/>
+        </p:nvSpPr>
+        <p:spPr>
+          <a:xfrm>
+            <a:off x="3232150" y="6096000"/>
+            <a:ext cx="889000" cy="317500"/>
+          </a:xfrm>
+          <a:prstGeom prst="rect">
+            <a:avLst/>
+          </a:prstGeom>
+          <a:noFill/>
+        </p:spPr>
+        <p:txBody>
+          <a:bodyPr wrap="square">
+            <a:spAutoFit/>
+          </a:bodyPr>
+          <a:lstStyle/>
+          <a:p>
+            <a:r>
+              <a:rPr sz="900" b="0">
+                <a:solidFill>
+                  <a:srgbClr val="5A5750"/>
+                </a:solidFill>
+                <a:latin typeface="Inter"/>
+              </a:rPr>
+              <a:t>Sand fabric</a:t>
+            </a:r>
+          </a:p>
+        </p:txBody>
+      </p:sp>
+      <p:pic>
+        <p:nvPicPr>
+          <p:cNvPr id="18" name="Picture 17" descr="CAM_07_MD_Office_A.jpg"/>
+          <p:cNvPicPr>
+            <a:picLocks noChangeAspect="1"/>
+          </p:cNvPicPr>
+          <p:nvPr/>
+        </p:nvPicPr>
+        <p:blipFill>
+          <a:blip r:embed="rId6"/>
           <a:srcRect t="6335" b="6335"/>
           <a:stretch>
             <a:fillRect/>
@@ -12176,7 +14849,7 @@
       </p:pic>
       <p:sp>
         <p:nvSpPr>
-          <p:cNvPr id="6" name="TextBox 5"/>
+          <p:cNvPr id="19" name="TextBox 18"/>
           <p:cNvSpPr txBox="1"/>
           <p:nvPr/>
         </p:nvSpPr>
@@ -12203,21 +14876,21 @@
                 </a:solidFill>
                 <a:latin typeface="Inter"/>
               </a:rPr>
-              <a:t>MD office (preview render)</a:t>
+              <a:t>MD office</a:t>
             </a:r>
           </a:p>
         </p:txBody>
       </p:sp>
       <p:pic>
         <p:nvPicPr>
-          <p:cNvPr id="7" name="Picture 6" descr="CAM_08_MD_Office_B.jpg"/>
+          <p:cNvPr id="20" name="Picture 19" descr="CAM_08_MD_Office_B.jpg"/>
           <p:cNvPicPr>
             <a:picLocks noChangeAspect="1"/>
           </p:cNvPicPr>
           <p:nvPr/>
         </p:nvPicPr>
         <p:blipFill>
-          <a:blip r:embed="rId3"/>
+          <a:blip r:embed="rId7"/>
           <a:srcRect l="605" r="605"/>
           <a:stretch>
             <a:fillRect/>
@@ -12235,7 +14908,7 @@
       </p:pic>
       <p:sp>
         <p:nvSpPr>
-          <p:cNvPr id="8" name="TextBox 7"/>
+          <p:cNvPr id="21" name="TextBox 20"/>
           <p:cNvSpPr txBox="1"/>
           <p:nvPr/>
         </p:nvSpPr>
@@ -12269,14 +14942,14 @@
       </p:sp>
       <p:pic>
         <p:nvPicPr>
-          <p:cNvPr id="9" name="Picture 8" descr="CAM_17_Executive_Reception.jpg"/>
+          <p:cNvPr id="22" name="Picture 21" descr="CAM_17_Executive_Reception.jpg"/>
           <p:cNvPicPr>
             <a:picLocks noChangeAspect="1"/>
           </p:cNvPicPr>
           <p:nvPr/>
         </p:nvPicPr>
         <p:blipFill>
-          <a:blip r:embed="rId4"/>
+          <a:blip r:embed="rId8"/>
           <a:srcRect l="605" r="605"/>
           <a:stretch>
             <a:fillRect/>
@@ -12294,7 +14967,7 @@
       </p:pic>
       <p:sp>
         <p:nvSpPr>
-          <p:cNvPr id="10" name="TextBox 9"/>
+          <p:cNvPr id="23" name="TextBox 22"/>
           <p:cNvSpPr txBox="1"/>
           <p:nvPr/>
         </p:nvSpPr>
@@ -12328,7 +15001,7 @@
       </p:sp>
       <p:sp>
         <p:nvSpPr>
-          <p:cNvPr id="11" name="TextBox 10"/>
+          <p:cNvPr id="24" name="TextBox 23"/>
           <p:cNvSpPr txBox="1"/>
           <p:nvPr/>
         </p:nvSpPr>
@@ -12362,7 +15035,7 @@
       </p:sp>
       <p:sp>
         <p:nvSpPr>
-          <p:cNvPr id="12" name="TextBox 11"/>
+          <p:cNvPr id="25" name="TextBox 24"/>
           <p:cNvSpPr txBox="1"/>
           <p:nvPr/>
         </p:nvSpPr>

--- a/GARMENT_OFFICE_FINAL_PRESENTATION/03_PRESENTATION/Garment_Office_Design_Pitch.pptx
+++ b/GARMENT_OFFICE_FINAL_PRESENTATION/03_PRESENTATION/Garment_Office_Design_Pitch.pptx
@@ -3140,41 +3140,7 @@
       </p:pic>
       <p:sp>
         <p:nvSpPr>
-          <p:cNvPr id="3" name="TextBox 2"/>
-          <p:cNvSpPr txBox="1"/>
-          <p:nvPr/>
-        </p:nvSpPr>
-        <p:spPr>
-          <a:xfrm>
-            <a:off x="63500" y="6642100"/>
-            <a:ext cx="12065000" cy="190500"/>
-          </a:xfrm>
-          <a:prstGeom prst="rect">
-            <a:avLst/>
-          </a:prstGeom>
-          <a:noFill/>
-        </p:spPr>
-        <p:txBody>
-          <a:bodyPr wrap="square">
-            <a:spAutoFit/>
-          </a:bodyPr>
-          <a:lstStyle/>
-          <a:p>
-            <a:r>
-              <a:rPr sz="1100" b="0">
-                <a:solidFill>
-                  <a:srgbClr val="FFFFFF"/>
-                </a:solidFill>
-                <a:latin typeface="Inter"/>
-              </a:rPr>
-              <a:t>Experience centre - Blender Cycles render of the project model</a:t>
-            </a:r>
-          </a:p>
-        </p:txBody>
-      </p:sp>
-      <p:sp>
-        <p:nvSpPr>
-          <p:cNvPr id="4" name="Rectangle 3"/>
+          <p:cNvPr id="3" name="Rectangle 2"/>
           <p:cNvSpPr/>
           <p:nvPr/>
         </p:nvSpPr>
@@ -3217,7 +3183,7 @@
       </p:sp>
       <p:sp>
         <p:nvSpPr>
-          <p:cNvPr id="5" name="Rectangle 4"/>
+          <p:cNvPr id="4" name="Rectangle 3"/>
           <p:cNvSpPr/>
           <p:nvPr/>
         </p:nvSpPr>
@@ -3260,7 +3226,7 @@
       </p:sp>
       <p:pic>
         <p:nvPicPr>
-          <p:cNvPr id="6" name="Picture 5" descr="logo_zara_fashion_profile.png"/>
+          <p:cNvPr id="5" name="Picture 4" descr="logo_zara_fashion_profile.png"/>
           <p:cNvPicPr>
             <a:picLocks noChangeAspect="1"/>
           </p:cNvPicPr>
@@ -3284,7 +3250,7 @@
       </p:pic>
       <p:pic>
         <p:nvPicPr>
-          <p:cNvPr id="7" name="Picture 6" descr="logo_stage2_ltd.png"/>
+          <p:cNvPr id="6" name="Picture 5" descr="logo_stage2_ltd.png"/>
           <p:cNvPicPr>
             <a:picLocks noChangeAspect="1"/>
           </p:cNvPicPr>
@@ -3308,7 +3274,7 @@
       </p:pic>
       <p:pic>
         <p:nvPicPr>
-          <p:cNvPr id="8" name="Picture 7" descr="logo_stage2_unit1.png"/>
+          <p:cNvPr id="7" name="Picture 6" descr="logo_stage2_unit1.png"/>
           <p:cNvPicPr>
             <a:picLocks noChangeAspect="1"/>
           </p:cNvPicPr>
@@ -3332,7 +3298,7 @@
       </p:pic>
       <p:sp>
         <p:nvSpPr>
-          <p:cNvPr id="9" name="TextBox 8"/>
+          <p:cNvPr id="8" name="TextBox 7"/>
           <p:cNvSpPr txBox="1"/>
           <p:nvPr/>
         </p:nvSpPr>
@@ -3366,7 +3332,7 @@
       </p:sp>
       <p:sp>
         <p:nvSpPr>
-          <p:cNvPr id="10" name="TextBox 9"/>
+          <p:cNvPr id="9" name="TextBox 8"/>
           <p:cNvSpPr txBox="1"/>
           <p:nvPr/>
         </p:nvSpPr>
@@ -3400,7 +3366,7 @@
       </p:sp>
       <p:sp>
         <p:nvSpPr>
-          <p:cNvPr id="11" name="TextBox 10"/>
+          <p:cNvPr id="10" name="TextBox 9"/>
           <p:cNvSpPr txBox="1"/>
           <p:nvPr/>
         </p:nvSpPr>
@@ -3445,7 +3411,7 @@
       </p:sp>
       <p:pic>
         <p:nvPicPr>
-          <p:cNvPr id="12" name="Picture 11" descr="tagline_quality_compliance_commitment.png"/>
+          <p:cNvPr id="11" name="Picture 10" descr="tagline_quality_compliance_commitment.png"/>
           <p:cNvPicPr>
             <a:picLocks noChangeAspect="1"/>
           </p:cNvPicPr>
@@ -3469,6 +3435,41 @@
       </p:pic>
       <p:sp>
         <p:nvSpPr>
+          <p:cNvPr id="12" name="TextBox 11"/>
+          <p:cNvSpPr txBox="1"/>
+          <p:nvPr/>
+        </p:nvSpPr>
+        <p:spPr>
+          <a:xfrm>
+            <a:off x="5715000" y="6248400"/>
+            <a:ext cx="5969000" cy="190500"/>
+          </a:xfrm>
+          <a:prstGeom prst="rect">
+            <a:avLst/>
+          </a:prstGeom>
+          <a:noFill/>
+        </p:spPr>
+        <p:txBody>
+          <a:bodyPr wrap="square">
+            <a:spAutoFit/>
+          </a:bodyPr>
+          <a:lstStyle/>
+          <a:p>
+            <a:pPr algn="r"/>
+            <a:r>
+              <a:rPr sz="900" b="0">
+                <a:solidFill>
+                  <a:srgbClr val="C9D3CC"/>
+                </a:solidFill>
+                <a:latin typeface="Inter"/>
+              </a:rPr>
+              <a:t>Experience centre - Blender Cycles render of the project model</a:t>
+            </a:r>
+          </a:p>
+        </p:txBody>
+      </p:sp>
+      <p:sp>
+        <p:nvSpPr>
           <p:cNvPr id="13" name="TextBox 12"/>
           <p:cNvSpPr txBox="1"/>
           <p:nvPr/>
@@ -3492,7 +3493,7 @@
             <a:r>
               <a:rPr sz="900" b="0">
                 <a:solidFill>
-                  <a:srgbClr val="5A5750"/>
+                  <a:srgbClr val="A7B3AB"/>
                 </a:solidFill>
                 <a:latin typeface="Inter"/>
               </a:rPr>
@@ -3526,7 +3527,7 @@
             <a:r>
               <a:rPr sz="900" b="0">
                 <a:solidFill>
-                  <a:srgbClr val="5A5750"/>
+                  <a:srgbClr val="A7B3AB"/>
                 </a:solidFill>
                 <a:latin typeface="Inter"/>
               </a:rPr>
@@ -3604,7 +3605,7 @@
         <p:spPr>
           <a:xfrm>
             <a:off x="508000" y="863600"/>
-            <a:ext cx="3683000" cy="1524000"/>
+            <a:ext cx="3683000" cy="952500"/>
           </a:xfrm>
           <a:prstGeom prst="rect">
             <a:avLst/>
@@ -3637,22 +3638,22 @@
         </p:nvSpPr>
         <p:spPr>
           <a:xfrm>
-            <a:off x="508000" y="2540000"/>
-            <a:ext cx="3683000" cy="2349500"/>
-          </a:xfrm>
-          <a:prstGeom prst="rect">
-            <a:avLst/>
-          </a:prstGeom>
-          <a:noFill/>
-        </p:spPr>
-        <p:txBody>
-          <a:bodyPr wrap="square">
-            <a:spAutoFit/>
-          </a:bodyPr>
-          <a:lstStyle/>
-          <a:p>
-            <a:r>
-              <a:rPr sz="1400" b="0">
+            <a:off x="508000" y="1841500"/>
+            <a:ext cx="3683000" cy="3048000"/>
+          </a:xfrm>
+          <a:prstGeom prst="rect">
+            <a:avLst/>
+          </a:prstGeom>
+          <a:noFill/>
+        </p:spPr>
+        <p:txBody>
+          <a:bodyPr wrap="square">
+            <a:spAutoFit/>
+          </a:bodyPr>
+          <a:lstStyle/>
+          <a:p>
+            <a:r>
+              <a:rPr sz="1300" b="0">
                 <a:solidFill>
                   <a:srgbClr val="5A5750"/>
                 </a:solidFill>
@@ -3663,7 +3664,7 @@
           </a:p>
           <a:p>
             <a:r>
-              <a:rPr sz="1400" b="0">
+              <a:rPr sz="1300" b="0">
                 <a:solidFill>
                   <a:srgbClr val="5A5750"/>
                 </a:solidFill>
@@ -3674,7 +3675,7 @@
           </a:p>
           <a:p>
             <a:r>
-              <a:rPr sz="1400" b="0">
+              <a:rPr sz="1300" b="0">
                 <a:solidFill>
                   <a:srgbClr val="5A5750"/>
                 </a:solidFill>
@@ -3685,7 +3686,7 @@
           </a:p>
           <a:p>
             <a:r>
-              <a:rPr sz="1400" b="0">
+              <a:rPr sz="1300" b="0">
                 <a:solidFill>
                   <a:srgbClr val="5A5750"/>
                 </a:solidFill>
@@ -3696,7 +3697,7 @@
           </a:p>
           <a:p>
             <a:r>
-              <a:rPr sz="1400" b="0">
+              <a:rPr sz="1300" b="0">
                 <a:solidFill>
                   <a:srgbClr val="5A5750"/>
                 </a:solidFill>
@@ -3707,7 +3708,7 @@
           </a:p>
           <a:p>
             <a:r>
-              <a:rPr sz="1400" b="0">
+              <a:rPr sz="1300" b="0">
                 <a:solidFill>
                   <a:srgbClr val="5A5750"/>
                 </a:solidFill>
@@ -4147,14 +4148,59 @@
       </p:pic>
       <p:sp>
         <p:nvSpPr>
-          <p:cNvPr id="19" name="TextBox 18"/>
-          <p:cNvSpPr txBox="1"/>
-          <p:nvPr/>
-        </p:nvSpPr>
-        <p:spPr>
-          <a:xfrm>
-            <a:off x="4508500" y="3238500"/>
-            <a:ext cx="7112000" cy="190500"/>
+          <p:cNvPr id="19" name="Rectangle 18"/>
+          <p:cNvSpPr/>
+          <p:nvPr/>
+        </p:nvSpPr>
+        <p:spPr>
+          <a:xfrm>
+            <a:off x="4445000" y="3200400"/>
+            <a:ext cx="806450" cy="254000"/>
+          </a:xfrm>
+          <a:prstGeom prst="rect">
+            <a:avLst/>
+          </a:prstGeom>
+          <a:solidFill>
+            <a:srgbClr val="141412">
+              <a:alpha val="62000"/>
+            </a:srgbClr>
+          </a:solidFill>
+          <a:ln>
+            <a:noFill/>
+          </a:ln>
+        </p:spPr>
+        <p:style>
+          <a:lnRef idx="1">
+            <a:schemeClr val="accent1"/>
+          </a:lnRef>
+          <a:fillRef idx="3">
+            <a:schemeClr val="accent1"/>
+          </a:fillRef>
+          <a:effectRef idx="2">
+            <a:schemeClr val="accent1"/>
+          </a:effectRef>
+          <a:fontRef idx="minor">
+            <a:schemeClr val="lt1"/>
+          </a:fontRef>
+        </p:style>
+        <p:txBody>
+          <a:bodyPr rtlCol="0" anchor="ctr"/>
+          <a:lstStyle/>
+          <a:p>
+            <a:pPr algn="ctr"/>
+          </a:p>
+        </p:txBody>
+      </p:sp>
+      <p:sp>
+        <p:nvSpPr>
+          <p:cNvPr id="20" name="TextBox 19"/>
+          <p:cNvSpPr txBox="1"/>
+          <p:nvPr/>
+        </p:nvSpPr>
+        <p:spPr>
+          <a:xfrm>
+            <a:off x="4495800" y="3213100"/>
+            <a:ext cx="7137400" cy="215900"/>
           </a:xfrm>
           <a:prstGeom prst="rect">
             <a:avLst/>
@@ -4181,7 +4227,7 @@
       </p:sp>
       <p:pic>
         <p:nvPicPr>
-          <p:cNvPr id="20" name="Picture 19" descr="CAM_10_Boardroom_B.jpg"/>
+          <p:cNvPr id="21" name="Picture 20" descr="CAM_10_Boardroom_B.jpg"/>
           <p:cNvPicPr>
             <a:picLocks noChangeAspect="1"/>
           </p:cNvPicPr>
@@ -4206,14 +4252,59 @@
       </p:pic>
       <p:sp>
         <p:nvSpPr>
-          <p:cNvPr id="21" name="TextBox 20"/>
-          <p:cNvSpPr txBox="1"/>
-          <p:nvPr/>
-        </p:nvSpPr>
-        <p:spPr>
-          <a:xfrm>
-            <a:off x="4508500" y="6134100"/>
-            <a:ext cx="7112000" cy="190500"/>
+          <p:cNvPr id="22" name="Rectangle 21"/>
+          <p:cNvSpPr/>
+          <p:nvPr/>
+        </p:nvSpPr>
+        <p:spPr>
+          <a:xfrm>
+            <a:off x="4445000" y="6096000"/>
+            <a:ext cx="4165600" cy="254000"/>
+          </a:xfrm>
+          <a:prstGeom prst="rect">
+            <a:avLst/>
+          </a:prstGeom>
+          <a:solidFill>
+            <a:srgbClr val="141412">
+              <a:alpha val="62000"/>
+            </a:srgbClr>
+          </a:solidFill>
+          <a:ln>
+            <a:noFill/>
+          </a:ln>
+        </p:spPr>
+        <p:style>
+          <a:lnRef idx="1">
+            <a:schemeClr val="accent1"/>
+          </a:lnRef>
+          <a:fillRef idx="3">
+            <a:schemeClr val="accent1"/>
+          </a:fillRef>
+          <a:effectRef idx="2">
+            <a:schemeClr val="accent1"/>
+          </a:effectRef>
+          <a:fontRef idx="minor">
+            <a:schemeClr val="lt1"/>
+          </a:fontRef>
+        </p:style>
+        <p:txBody>
+          <a:bodyPr rtlCol="0" anchor="ctr"/>
+          <a:lstStyle/>
+          <a:p>
+            <a:pPr algn="ctr"/>
+          </a:p>
+        </p:txBody>
+      </p:sp>
+      <p:sp>
+        <p:nvSpPr>
+          <p:cNvPr id="23" name="TextBox 22"/>
+          <p:cNvSpPr txBox="1"/>
+          <p:nvPr/>
+        </p:nvSpPr>
+        <p:spPr>
+          <a:xfrm>
+            <a:off x="4495800" y="6108700"/>
+            <a:ext cx="7137400" cy="215900"/>
           </a:xfrm>
           <a:prstGeom prst="rect">
             <a:avLst/>
@@ -4240,7 +4331,7 @@
       </p:sp>
       <p:sp>
         <p:nvSpPr>
-          <p:cNvPr id="22" name="TextBox 21"/>
+          <p:cNvPr id="24" name="TextBox 23"/>
           <p:cNvSpPr txBox="1"/>
           <p:nvPr/>
         </p:nvSpPr>
@@ -4274,7 +4365,7 @@
       </p:sp>
       <p:sp>
         <p:nvSpPr>
-          <p:cNvPr id="23" name="TextBox 22"/>
+          <p:cNvPr id="25" name="TextBox 24"/>
           <p:cNvSpPr txBox="1"/>
           <p:nvPr/>
         </p:nvSpPr>
@@ -4375,7 +4466,7 @@
         <p:spPr>
           <a:xfrm>
             <a:off x="508000" y="863600"/>
-            <a:ext cx="3683000" cy="1524000"/>
+            <a:ext cx="3683000" cy="952500"/>
           </a:xfrm>
           <a:prstGeom prst="rect">
             <a:avLst/>
@@ -4408,22 +4499,22 @@
         </p:nvSpPr>
         <p:spPr>
           <a:xfrm>
-            <a:off x="508000" y="2540000"/>
-            <a:ext cx="3683000" cy="2349500"/>
-          </a:xfrm>
-          <a:prstGeom prst="rect">
-            <a:avLst/>
-          </a:prstGeom>
-          <a:noFill/>
-        </p:spPr>
-        <p:txBody>
-          <a:bodyPr wrap="square">
-            <a:spAutoFit/>
-          </a:bodyPr>
-          <a:lstStyle/>
-          <a:p>
-            <a:r>
-              <a:rPr sz="1400" b="0">
+            <a:off x="508000" y="1841500"/>
+            <a:ext cx="3683000" cy="3048000"/>
+          </a:xfrm>
+          <a:prstGeom prst="rect">
+            <a:avLst/>
+          </a:prstGeom>
+          <a:noFill/>
+        </p:spPr>
+        <p:txBody>
+          <a:bodyPr wrap="square">
+            <a:spAutoFit/>
+          </a:bodyPr>
+          <a:lstStyle/>
+          <a:p>
+            <a:r>
+              <a:rPr sz="1300" b="0">
                 <a:solidFill>
                   <a:srgbClr val="5A5750"/>
                 </a:solidFill>
@@ -4434,7 +4525,7 @@
           </a:p>
           <a:p>
             <a:r>
-              <a:rPr sz="1400" b="0">
+              <a:rPr sz="1300" b="0">
                 <a:solidFill>
                   <a:srgbClr val="5A5750"/>
                 </a:solidFill>
@@ -4445,7 +4536,7 @@
           </a:p>
           <a:p>
             <a:r>
-              <a:rPr sz="1400" b="0">
+              <a:rPr sz="1300" b="0">
                 <a:solidFill>
                   <a:srgbClr val="5A5750"/>
                 </a:solidFill>
@@ -4456,7 +4547,7 @@
           </a:p>
           <a:p>
             <a:r>
-              <a:rPr sz="1400" b="0">
+              <a:rPr sz="1300" b="0">
                 <a:solidFill>
                   <a:srgbClr val="5A5750"/>
                 </a:solidFill>
@@ -4467,7 +4558,7 @@
           </a:p>
           <a:p>
             <a:r>
-              <a:rPr sz="1400" b="0">
+              <a:rPr sz="1300" b="0">
                 <a:solidFill>
                   <a:srgbClr val="5A5750"/>
                 </a:solidFill>
@@ -4478,7 +4569,7 @@
           </a:p>
           <a:p>
             <a:r>
-              <a:rPr sz="1400" b="0">
+              <a:rPr sz="1300" b="0">
                 <a:solidFill>
                   <a:srgbClr val="5A5750"/>
                 </a:solidFill>
@@ -4918,14 +5009,59 @@
       </p:pic>
       <p:sp>
         <p:nvSpPr>
-          <p:cNvPr id="19" name="TextBox 18"/>
-          <p:cNvSpPr txBox="1"/>
-          <p:nvPr/>
-        </p:nvSpPr>
-        <p:spPr>
-          <a:xfrm>
-            <a:off x="4508500" y="4000500"/>
-            <a:ext cx="7112000" cy="190500"/>
+          <p:cNvPr id="19" name="Rectangle 18"/>
+          <p:cNvSpPr/>
+          <p:nvPr/>
+        </p:nvSpPr>
+        <p:spPr>
+          <a:xfrm>
+            <a:off x="4445000" y="3962400"/>
+            <a:ext cx="1905000" cy="254000"/>
+          </a:xfrm>
+          <a:prstGeom prst="rect">
+            <a:avLst/>
+          </a:prstGeom>
+          <a:solidFill>
+            <a:srgbClr val="141412">
+              <a:alpha val="62000"/>
+            </a:srgbClr>
+          </a:solidFill>
+          <a:ln>
+            <a:noFill/>
+          </a:ln>
+        </p:spPr>
+        <p:style>
+          <a:lnRef idx="1">
+            <a:schemeClr val="accent1"/>
+          </a:lnRef>
+          <a:fillRef idx="3">
+            <a:schemeClr val="accent1"/>
+          </a:fillRef>
+          <a:effectRef idx="2">
+            <a:schemeClr val="accent1"/>
+          </a:effectRef>
+          <a:fontRef idx="minor">
+            <a:schemeClr val="lt1"/>
+          </a:fontRef>
+        </p:style>
+        <p:txBody>
+          <a:bodyPr rtlCol="0" anchor="ctr"/>
+          <a:lstStyle/>
+          <a:p>
+            <a:pPr algn="ctr"/>
+          </a:p>
+        </p:txBody>
+      </p:sp>
+      <p:sp>
+        <p:nvSpPr>
+          <p:cNvPr id="20" name="TextBox 19"/>
+          <p:cNvSpPr txBox="1"/>
+          <p:nvPr/>
+        </p:nvSpPr>
+        <p:spPr>
+          <a:xfrm>
+            <a:off x="4495800" y="3975100"/>
+            <a:ext cx="7137400" cy="215900"/>
           </a:xfrm>
           <a:prstGeom prst="rect">
             <a:avLst/>
@@ -4952,7 +5088,7 @@
       </p:sp>
       <p:pic>
         <p:nvPicPr>
-          <p:cNvPr id="20" name="Picture 19" descr="CAM_12_Merchandising_B.jpg"/>
+          <p:cNvPr id="21" name="Picture 20" descr="CAM_12_Merchandising_B.jpg"/>
           <p:cNvPicPr>
             <a:picLocks noChangeAspect="1"/>
           </p:cNvPicPr>
@@ -4977,14 +5113,59 @@
       </p:pic>
       <p:sp>
         <p:nvSpPr>
-          <p:cNvPr id="21" name="TextBox 20"/>
-          <p:cNvSpPr txBox="1"/>
-          <p:nvPr/>
-        </p:nvSpPr>
-        <p:spPr>
-          <a:xfrm>
-            <a:off x="4508500" y="6134100"/>
-            <a:ext cx="3441700" cy="190500"/>
+          <p:cNvPr id="22" name="Rectangle 21"/>
+          <p:cNvSpPr/>
+          <p:nvPr/>
+        </p:nvSpPr>
+        <p:spPr>
+          <a:xfrm>
+            <a:off x="4445000" y="6096000"/>
+            <a:ext cx="3136900" cy="254000"/>
+          </a:xfrm>
+          <a:prstGeom prst="rect">
+            <a:avLst/>
+          </a:prstGeom>
+          <a:solidFill>
+            <a:srgbClr val="141412">
+              <a:alpha val="62000"/>
+            </a:srgbClr>
+          </a:solidFill>
+          <a:ln>
+            <a:noFill/>
+          </a:ln>
+        </p:spPr>
+        <p:style>
+          <a:lnRef idx="1">
+            <a:schemeClr val="accent1"/>
+          </a:lnRef>
+          <a:fillRef idx="3">
+            <a:schemeClr val="accent1"/>
+          </a:fillRef>
+          <a:effectRef idx="2">
+            <a:schemeClr val="accent1"/>
+          </a:effectRef>
+          <a:fontRef idx="minor">
+            <a:schemeClr val="lt1"/>
+          </a:fontRef>
+        </p:style>
+        <p:txBody>
+          <a:bodyPr rtlCol="0" anchor="ctr"/>
+          <a:lstStyle/>
+          <a:p>
+            <a:pPr algn="ctr"/>
+          </a:p>
+        </p:txBody>
+      </p:sp>
+      <p:sp>
+        <p:nvSpPr>
+          <p:cNvPr id="23" name="TextBox 22"/>
+          <p:cNvSpPr txBox="1"/>
+          <p:nvPr/>
+        </p:nvSpPr>
+        <p:spPr>
+          <a:xfrm>
+            <a:off x="4495800" y="6108700"/>
+            <a:ext cx="3467100" cy="215900"/>
           </a:xfrm>
           <a:prstGeom prst="rect">
             <a:avLst/>
@@ -5011,7 +5192,7 @@
       </p:sp>
       <p:pic>
         <p:nvPicPr>
-          <p:cNvPr id="22" name="Picture 21" descr="CAM_16_Commercial_Accounts.jpg"/>
+          <p:cNvPr id="24" name="Picture 23" descr="CAM_16_Commercial_Accounts.jpg"/>
           <p:cNvPicPr>
             <a:picLocks noChangeAspect="1"/>
           </p:cNvPicPr>
@@ -5036,14 +5217,59 @@
       </p:pic>
       <p:sp>
         <p:nvSpPr>
-          <p:cNvPr id="23" name="TextBox 22"/>
-          <p:cNvSpPr txBox="1"/>
-          <p:nvPr/>
-        </p:nvSpPr>
-        <p:spPr>
-          <a:xfrm>
-            <a:off x="8178800" y="6134100"/>
-            <a:ext cx="3441700" cy="190500"/>
+          <p:cNvPr id="25" name="Rectangle 24"/>
+          <p:cNvSpPr/>
+          <p:nvPr/>
+        </p:nvSpPr>
+        <p:spPr>
+          <a:xfrm>
+            <a:off x="8115300" y="6096000"/>
+            <a:ext cx="2794000" cy="254000"/>
+          </a:xfrm>
+          <a:prstGeom prst="rect">
+            <a:avLst/>
+          </a:prstGeom>
+          <a:solidFill>
+            <a:srgbClr val="141412">
+              <a:alpha val="62000"/>
+            </a:srgbClr>
+          </a:solidFill>
+          <a:ln>
+            <a:noFill/>
+          </a:ln>
+        </p:spPr>
+        <p:style>
+          <a:lnRef idx="1">
+            <a:schemeClr val="accent1"/>
+          </a:lnRef>
+          <a:fillRef idx="3">
+            <a:schemeClr val="accent1"/>
+          </a:fillRef>
+          <a:effectRef idx="2">
+            <a:schemeClr val="accent1"/>
+          </a:effectRef>
+          <a:fontRef idx="minor">
+            <a:schemeClr val="lt1"/>
+          </a:fontRef>
+        </p:style>
+        <p:txBody>
+          <a:bodyPr rtlCol="0" anchor="ctr"/>
+          <a:lstStyle/>
+          <a:p>
+            <a:pPr algn="ctr"/>
+          </a:p>
+        </p:txBody>
+      </p:sp>
+      <p:sp>
+        <p:nvSpPr>
+          <p:cNvPr id="26" name="TextBox 25"/>
+          <p:cNvSpPr txBox="1"/>
+          <p:nvPr/>
+        </p:nvSpPr>
+        <p:spPr>
+          <a:xfrm>
+            <a:off x="8166100" y="6108700"/>
+            <a:ext cx="3467100" cy="215900"/>
           </a:xfrm>
           <a:prstGeom prst="rect">
             <a:avLst/>
@@ -5070,7 +5296,7 @@
       </p:sp>
       <p:sp>
         <p:nvSpPr>
-          <p:cNvPr id="24" name="TextBox 23"/>
+          <p:cNvPr id="27" name="TextBox 26"/>
           <p:cNvSpPr txBox="1"/>
           <p:nvPr/>
         </p:nvSpPr>
@@ -5104,7 +5330,7 @@
       </p:sp>
       <p:sp>
         <p:nvSpPr>
-          <p:cNvPr id="25" name="TextBox 24"/>
+          <p:cNvPr id="28" name="TextBox 27"/>
           <p:cNvSpPr txBox="1"/>
           <p:nvPr/>
         </p:nvSpPr>
@@ -5205,7 +5431,7 @@
         <p:spPr>
           <a:xfrm>
             <a:off x="508000" y="863600"/>
-            <a:ext cx="3683000" cy="1524000"/>
+            <a:ext cx="3683000" cy="952500"/>
           </a:xfrm>
           <a:prstGeom prst="rect">
             <a:avLst/>
@@ -5238,22 +5464,22 @@
         </p:nvSpPr>
         <p:spPr>
           <a:xfrm>
-            <a:off x="508000" y="2540000"/>
-            <a:ext cx="3683000" cy="2349500"/>
-          </a:xfrm>
-          <a:prstGeom prst="rect">
-            <a:avLst/>
-          </a:prstGeom>
-          <a:noFill/>
-        </p:spPr>
-        <p:txBody>
-          <a:bodyPr wrap="square">
-            <a:spAutoFit/>
-          </a:bodyPr>
-          <a:lstStyle/>
-          <a:p>
-            <a:r>
-              <a:rPr sz="1400" b="0">
+            <a:off x="508000" y="1841500"/>
+            <a:ext cx="3683000" cy="3048000"/>
+          </a:xfrm>
+          <a:prstGeom prst="rect">
+            <a:avLst/>
+          </a:prstGeom>
+          <a:noFill/>
+        </p:spPr>
+        <p:txBody>
+          <a:bodyPr wrap="square">
+            <a:spAutoFit/>
+          </a:bodyPr>
+          <a:lstStyle/>
+          <a:p>
+            <a:r>
+              <a:rPr sz="1300" b="0">
                 <a:solidFill>
                   <a:srgbClr val="5A5750"/>
                 </a:solidFill>
@@ -5264,7 +5490,7 @@
           </a:p>
           <a:p>
             <a:r>
-              <a:rPr sz="1400" b="0">
+              <a:rPr sz="1300" b="0">
                 <a:solidFill>
                   <a:srgbClr val="5A5750"/>
                 </a:solidFill>
@@ -5275,7 +5501,7 @@
           </a:p>
           <a:p>
             <a:r>
-              <a:rPr sz="1400" b="0">
+              <a:rPr sz="1300" b="0">
                 <a:solidFill>
                   <a:srgbClr val="5A5750"/>
                 </a:solidFill>
@@ -5286,7 +5512,7 @@
           </a:p>
           <a:p>
             <a:r>
-              <a:rPr sz="1400" b="0">
+              <a:rPr sz="1300" b="0">
                 <a:solidFill>
                   <a:srgbClr val="5A5750"/>
                 </a:solidFill>
@@ -5297,7 +5523,7 @@
           </a:p>
           <a:p>
             <a:r>
-              <a:rPr sz="1400" b="0">
+              <a:rPr sz="1300" b="0">
                 <a:solidFill>
                   <a:srgbClr val="5A5750"/>
                 </a:solidFill>
@@ -5308,7 +5534,7 @@
           </a:p>
           <a:p>
             <a:r>
-              <a:rPr sz="1400" b="0">
+              <a:rPr sz="1300" b="0">
                 <a:solidFill>
                   <a:srgbClr val="5A5750"/>
                 </a:solidFill>
@@ -5319,7 +5545,7 @@
           </a:p>
           <a:p>
             <a:r>
-              <a:rPr sz="1400" b="0">
+              <a:rPr sz="1300" b="0">
                 <a:solidFill>
                   <a:srgbClr val="5A5750"/>
                 </a:solidFill>
@@ -5759,14 +5985,59 @@
       </p:pic>
       <p:sp>
         <p:nvSpPr>
-          <p:cNvPr id="19" name="TextBox 18"/>
-          <p:cNvSpPr txBox="1"/>
-          <p:nvPr/>
-        </p:nvSpPr>
-        <p:spPr>
-          <a:xfrm>
-            <a:off x="4508500" y="4000500"/>
-            <a:ext cx="7112000" cy="190500"/>
+          <p:cNvPr id="19" name="Rectangle 18"/>
+          <p:cNvSpPr/>
+          <p:nvPr/>
+        </p:nvSpPr>
+        <p:spPr>
+          <a:xfrm>
+            <a:off x="4445000" y="3962400"/>
+            <a:ext cx="1562100" cy="254000"/>
+          </a:xfrm>
+          <a:prstGeom prst="rect">
+            <a:avLst/>
+          </a:prstGeom>
+          <a:solidFill>
+            <a:srgbClr val="141412">
+              <a:alpha val="62000"/>
+            </a:srgbClr>
+          </a:solidFill>
+          <a:ln>
+            <a:noFill/>
+          </a:ln>
+        </p:spPr>
+        <p:style>
+          <a:lnRef idx="1">
+            <a:schemeClr val="accent1"/>
+          </a:lnRef>
+          <a:fillRef idx="3">
+            <a:schemeClr val="accent1"/>
+          </a:fillRef>
+          <a:effectRef idx="2">
+            <a:schemeClr val="accent1"/>
+          </a:effectRef>
+          <a:fontRef idx="minor">
+            <a:schemeClr val="lt1"/>
+          </a:fontRef>
+        </p:style>
+        <p:txBody>
+          <a:bodyPr rtlCol="0" anchor="ctr"/>
+          <a:lstStyle/>
+          <a:p>
+            <a:pPr algn="ctr"/>
+          </a:p>
+        </p:txBody>
+      </p:sp>
+      <p:sp>
+        <p:nvSpPr>
+          <p:cNvPr id="20" name="TextBox 19"/>
+          <p:cNvSpPr txBox="1"/>
+          <p:nvPr/>
+        </p:nvSpPr>
+        <p:spPr>
+          <a:xfrm>
+            <a:off x="4495800" y="3975100"/>
+            <a:ext cx="7137400" cy="215900"/>
           </a:xfrm>
           <a:prstGeom prst="rect">
             <a:avLst/>
@@ -5786,14 +6057,14 @@
                 </a:solidFill>
                 <a:latin typeface="Inter"/>
               </a:rPr>
-              <a:t>Global Design Studio (preview render)</a:t>
+              <a:t>Global Design Studio</a:t>
             </a:r>
           </a:p>
         </p:txBody>
       </p:sp>
       <p:pic>
         <p:nvPicPr>
-          <p:cNvPr id="20" name="Picture 19" descr="CAM_14_Design_Studio_B.jpg"/>
+          <p:cNvPr id="21" name="Picture 20" descr="CAM_14_Design_Studio_B.jpg"/>
           <p:cNvPicPr>
             <a:picLocks noChangeAspect="1"/>
           </p:cNvPicPr>
@@ -5818,14 +6089,59 @@
       </p:pic>
       <p:sp>
         <p:nvSpPr>
-          <p:cNvPr id="21" name="TextBox 20"/>
-          <p:cNvSpPr txBox="1"/>
-          <p:nvPr/>
-        </p:nvSpPr>
-        <p:spPr>
-          <a:xfrm>
-            <a:off x="4508500" y="6134100"/>
-            <a:ext cx="3441700" cy="190500"/>
+          <p:cNvPr id="22" name="Rectangle 21"/>
+          <p:cNvSpPr/>
+          <p:nvPr/>
+        </p:nvSpPr>
+        <p:spPr>
+          <a:xfrm>
+            <a:off x="4445000" y="6096000"/>
+            <a:ext cx="3568700" cy="254000"/>
+          </a:xfrm>
+          <a:prstGeom prst="rect">
+            <a:avLst/>
+          </a:prstGeom>
+          <a:solidFill>
+            <a:srgbClr val="141412">
+              <a:alpha val="62000"/>
+            </a:srgbClr>
+          </a:solidFill>
+          <a:ln>
+            <a:noFill/>
+          </a:ln>
+        </p:spPr>
+        <p:style>
+          <a:lnRef idx="1">
+            <a:schemeClr val="accent1"/>
+          </a:lnRef>
+          <a:fillRef idx="3">
+            <a:schemeClr val="accent1"/>
+          </a:fillRef>
+          <a:effectRef idx="2">
+            <a:schemeClr val="accent1"/>
+          </a:effectRef>
+          <a:fontRef idx="minor">
+            <a:schemeClr val="lt1"/>
+          </a:fontRef>
+        </p:style>
+        <p:txBody>
+          <a:bodyPr rtlCol="0" anchor="ctr"/>
+          <a:lstStyle/>
+          <a:p>
+            <a:pPr algn="ctr"/>
+          </a:p>
+        </p:txBody>
+      </p:sp>
+      <p:sp>
+        <p:nvSpPr>
+          <p:cNvPr id="23" name="TextBox 22"/>
+          <p:cNvSpPr txBox="1"/>
+          <p:nvPr/>
+        </p:nvSpPr>
+        <p:spPr>
+          <a:xfrm>
+            <a:off x="4495800" y="6108700"/>
+            <a:ext cx="3467100" cy="215900"/>
           </a:xfrm>
           <a:prstGeom prst="rect">
             <a:avLst/>
@@ -5852,7 +6168,7 @@
       </p:sp>
       <p:pic>
         <p:nvPicPr>
-          <p:cNvPr id="22" name="Picture 21" descr="CAM_15_CAD_Room.jpg"/>
+          <p:cNvPr id="24" name="Picture 23" descr="CAM_15_CAD_Room.jpg"/>
           <p:cNvPicPr>
             <a:picLocks noChangeAspect="1"/>
           </p:cNvPicPr>
@@ -5877,14 +6193,59 @@
       </p:pic>
       <p:sp>
         <p:nvSpPr>
-          <p:cNvPr id="23" name="TextBox 22"/>
-          <p:cNvSpPr txBox="1"/>
-          <p:nvPr/>
-        </p:nvSpPr>
-        <p:spPr>
-          <a:xfrm>
-            <a:off x="8178800" y="6134100"/>
-            <a:ext cx="3441700" cy="190500"/>
+          <p:cNvPr id="25" name="Rectangle 24"/>
+          <p:cNvSpPr/>
+          <p:nvPr/>
+        </p:nvSpPr>
+        <p:spPr>
+          <a:xfrm>
+            <a:off x="8115300" y="6096000"/>
+            <a:ext cx="2863850" cy="254000"/>
+          </a:xfrm>
+          <a:prstGeom prst="rect">
+            <a:avLst/>
+          </a:prstGeom>
+          <a:solidFill>
+            <a:srgbClr val="141412">
+              <a:alpha val="62000"/>
+            </a:srgbClr>
+          </a:solidFill>
+          <a:ln>
+            <a:noFill/>
+          </a:ln>
+        </p:spPr>
+        <p:style>
+          <a:lnRef idx="1">
+            <a:schemeClr val="accent1"/>
+          </a:lnRef>
+          <a:fillRef idx="3">
+            <a:schemeClr val="accent1"/>
+          </a:fillRef>
+          <a:effectRef idx="2">
+            <a:schemeClr val="accent1"/>
+          </a:effectRef>
+          <a:fontRef idx="minor">
+            <a:schemeClr val="lt1"/>
+          </a:fontRef>
+        </p:style>
+        <p:txBody>
+          <a:bodyPr rtlCol="0" anchor="ctr"/>
+          <a:lstStyle/>
+          <a:p>
+            <a:pPr algn="ctr"/>
+          </a:p>
+        </p:txBody>
+      </p:sp>
+      <p:sp>
+        <p:nvSpPr>
+          <p:cNvPr id="26" name="TextBox 25"/>
+          <p:cNvSpPr txBox="1"/>
+          <p:nvPr/>
+        </p:nvSpPr>
+        <p:spPr>
+          <a:xfrm>
+            <a:off x="8166100" y="6108700"/>
+            <a:ext cx="3467100" cy="215900"/>
           </a:xfrm>
           <a:prstGeom prst="rect">
             <a:avLst/>
@@ -5911,7 +6272,7 @@
       </p:sp>
       <p:sp>
         <p:nvSpPr>
-          <p:cNvPr id="24" name="TextBox 23"/>
+          <p:cNvPr id="27" name="TextBox 26"/>
           <p:cNvSpPr txBox="1"/>
           <p:nvPr/>
         </p:nvSpPr>
@@ -5945,7 +6306,7 @@
       </p:sp>
       <p:sp>
         <p:nvSpPr>
-          <p:cNvPr id="25" name="TextBox 24"/>
+          <p:cNvPr id="28" name="TextBox 27"/>
           <p:cNvSpPr txBox="1"/>
           <p:nvPr/>
         </p:nvSpPr>
@@ -6098,14 +6459,59 @@
       </p:pic>
       <p:sp>
         <p:nvSpPr>
-          <p:cNvPr id="5" name="TextBox 4"/>
-          <p:cNvSpPr txBox="1"/>
-          <p:nvPr/>
-        </p:nvSpPr>
-        <p:spPr>
-          <a:xfrm>
-            <a:off x="571500" y="3733800"/>
-            <a:ext cx="3511550" cy="190500"/>
+          <p:cNvPr id="5" name="Rectangle 4"/>
+          <p:cNvSpPr/>
+          <p:nvPr/>
+        </p:nvSpPr>
+        <p:spPr>
+          <a:xfrm>
+            <a:off x="508000" y="3695700"/>
+            <a:ext cx="2654300" cy="254000"/>
+          </a:xfrm>
+          <a:prstGeom prst="rect">
+            <a:avLst/>
+          </a:prstGeom>
+          <a:solidFill>
+            <a:srgbClr val="141412">
+              <a:alpha val="62000"/>
+            </a:srgbClr>
+          </a:solidFill>
+          <a:ln>
+            <a:noFill/>
+          </a:ln>
+        </p:spPr>
+        <p:style>
+          <a:lnRef idx="1">
+            <a:schemeClr val="accent1"/>
+          </a:lnRef>
+          <a:fillRef idx="3">
+            <a:schemeClr val="accent1"/>
+          </a:fillRef>
+          <a:effectRef idx="2">
+            <a:schemeClr val="accent1"/>
+          </a:effectRef>
+          <a:fontRef idx="minor">
+            <a:schemeClr val="lt1"/>
+          </a:fontRef>
+        </p:style>
+        <p:txBody>
+          <a:bodyPr rtlCol="0" anchor="ctr"/>
+          <a:lstStyle/>
+          <a:p>
+            <a:pPr algn="ctr"/>
+          </a:p>
+        </p:txBody>
+      </p:sp>
+      <p:sp>
+        <p:nvSpPr>
+          <p:cNvPr id="6" name="TextBox 5"/>
+          <p:cNvSpPr txBox="1"/>
+          <p:nvPr/>
+        </p:nvSpPr>
+        <p:spPr>
+          <a:xfrm>
+            <a:off x="558800" y="3708400"/>
+            <a:ext cx="3536950" cy="215900"/>
           </a:xfrm>
           <a:prstGeom prst="rect">
             <a:avLst/>
@@ -6132,7 +6538,7 @@
       </p:sp>
       <p:pic>
         <p:nvPicPr>
-          <p:cNvPr id="6" name="Picture 5" descr="CAM_21_Lounge_Training.jpg"/>
+          <p:cNvPr id="7" name="Picture 6" descr="CAM_21_Lounge_Training.jpg"/>
           <p:cNvPicPr>
             <a:picLocks noChangeAspect="1"/>
           </p:cNvPicPr>
@@ -6157,14 +6563,59 @@
       </p:pic>
       <p:sp>
         <p:nvSpPr>
-          <p:cNvPr id="7" name="TextBox 6"/>
-          <p:cNvSpPr txBox="1"/>
-          <p:nvPr/>
-        </p:nvSpPr>
-        <p:spPr>
-          <a:xfrm>
-            <a:off x="4337050" y="3733800"/>
-            <a:ext cx="3511550" cy="190500"/>
+          <p:cNvPr id="8" name="Rectangle 7"/>
+          <p:cNvSpPr/>
+          <p:nvPr/>
+        </p:nvSpPr>
+        <p:spPr>
+          <a:xfrm>
+            <a:off x="4273550" y="3695700"/>
+            <a:ext cx="3549650" cy="254000"/>
+          </a:xfrm>
+          <a:prstGeom prst="rect">
+            <a:avLst/>
+          </a:prstGeom>
+          <a:solidFill>
+            <a:srgbClr val="141412">
+              <a:alpha val="62000"/>
+            </a:srgbClr>
+          </a:solidFill>
+          <a:ln>
+            <a:noFill/>
+          </a:ln>
+        </p:spPr>
+        <p:style>
+          <a:lnRef idx="1">
+            <a:schemeClr val="accent1"/>
+          </a:lnRef>
+          <a:fillRef idx="3">
+            <a:schemeClr val="accent1"/>
+          </a:fillRef>
+          <a:effectRef idx="2">
+            <a:schemeClr val="accent1"/>
+          </a:effectRef>
+          <a:fontRef idx="minor">
+            <a:schemeClr val="lt1"/>
+          </a:fontRef>
+        </p:style>
+        <p:txBody>
+          <a:bodyPr rtlCol="0" anchor="ctr"/>
+          <a:lstStyle/>
+          <a:p>
+            <a:pPr algn="ctr"/>
+          </a:p>
+        </p:txBody>
+      </p:sp>
+      <p:sp>
+        <p:nvSpPr>
+          <p:cNvPr id="9" name="TextBox 8"/>
+          <p:cNvSpPr txBox="1"/>
+          <p:nvPr/>
+        </p:nvSpPr>
+        <p:spPr>
+          <a:xfrm>
+            <a:off x="4324350" y="3708400"/>
+            <a:ext cx="3536950" cy="215900"/>
           </a:xfrm>
           <a:prstGeom prst="rect">
             <a:avLst/>
@@ -6191,7 +6642,7 @@
       </p:sp>
       <p:pic>
         <p:nvPicPr>
-          <p:cNvPr id="8" name="Picture 7" descr="CAM_22_Prayer_Male.jpg"/>
+          <p:cNvPr id="10" name="Picture 9" descr="CAM_22_Prayer_Male.jpg"/>
           <p:cNvPicPr>
             <a:picLocks noChangeAspect="1"/>
           </p:cNvPicPr>
@@ -6216,14 +6667,59 @@
       </p:pic>
       <p:sp>
         <p:nvSpPr>
-          <p:cNvPr id="9" name="TextBox 8"/>
-          <p:cNvSpPr txBox="1"/>
-          <p:nvPr/>
-        </p:nvSpPr>
-        <p:spPr>
-          <a:xfrm>
-            <a:off x="8102600" y="3733800"/>
-            <a:ext cx="3511550" cy="190500"/>
+          <p:cNvPr id="11" name="Rectangle 10"/>
+          <p:cNvSpPr/>
+          <p:nvPr/>
+        </p:nvSpPr>
+        <p:spPr>
+          <a:xfrm>
+            <a:off x="8039100" y="3695700"/>
+            <a:ext cx="2590800" cy="254000"/>
+          </a:xfrm>
+          <a:prstGeom prst="rect">
+            <a:avLst/>
+          </a:prstGeom>
+          <a:solidFill>
+            <a:srgbClr val="141412">
+              <a:alpha val="62000"/>
+            </a:srgbClr>
+          </a:solidFill>
+          <a:ln>
+            <a:noFill/>
+          </a:ln>
+        </p:spPr>
+        <p:style>
+          <a:lnRef idx="1">
+            <a:schemeClr val="accent1"/>
+          </a:lnRef>
+          <a:fillRef idx="3">
+            <a:schemeClr val="accent1"/>
+          </a:fillRef>
+          <a:effectRef idx="2">
+            <a:schemeClr val="accent1"/>
+          </a:effectRef>
+          <a:fontRef idx="minor">
+            <a:schemeClr val="lt1"/>
+          </a:fontRef>
+        </p:style>
+        <p:txBody>
+          <a:bodyPr rtlCol="0" anchor="ctr"/>
+          <a:lstStyle/>
+          <a:p>
+            <a:pPr algn="ctr"/>
+          </a:p>
+        </p:txBody>
+      </p:sp>
+      <p:sp>
+        <p:nvSpPr>
+          <p:cNvPr id="12" name="TextBox 11"/>
+          <p:cNvSpPr txBox="1"/>
+          <p:nvPr/>
+        </p:nvSpPr>
+        <p:spPr>
+          <a:xfrm>
+            <a:off x="8089900" y="3708400"/>
+            <a:ext cx="3536950" cy="215900"/>
           </a:xfrm>
           <a:prstGeom prst="rect">
             <a:avLst/>
@@ -6250,7 +6746,7 @@
       </p:sp>
       <p:pic>
         <p:nvPicPr>
-          <p:cNvPr id="10" name="Picture 9" descr="CAM_23_Sample_Room.jpg"/>
+          <p:cNvPr id="13" name="Picture 12" descr="CAM_23_Sample_Room.jpg"/>
           <p:cNvPicPr>
             <a:picLocks noChangeAspect="1"/>
           </p:cNvPicPr>
@@ -6275,14 +6771,59 @@
       </p:pic>
       <p:sp>
         <p:nvSpPr>
-          <p:cNvPr id="11" name="TextBox 10"/>
-          <p:cNvSpPr txBox="1"/>
-          <p:nvPr/>
-        </p:nvSpPr>
-        <p:spPr>
-          <a:xfrm>
-            <a:off x="571500" y="6032500"/>
-            <a:ext cx="3511550" cy="190500"/>
+          <p:cNvPr id="14" name="Rectangle 13"/>
+          <p:cNvSpPr/>
+          <p:nvPr/>
+        </p:nvSpPr>
+        <p:spPr>
+          <a:xfrm>
+            <a:off x="508000" y="5994400"/>
+            <a:ext cx="2590800" cy="254000"/>
+          </a:xfrm>
+          <a:prstGeom prst="rect">
+            <a:avLst/>
+          </a:prstGeom>
+          <a:solidFill>
+            <a:srgbClr val="141412">
+              <a:alpha val="62000"/>
+            </a:srgbClr>
+          </a:solidFill>
+          <a:ln>
+            <a:noFill/>
+          </a:ln>
+        </p:spPr>
+        <p:style>
+          <a:lnRef idx="1">
+            <a:schemeClr val="accent1"/>
+          </a:lnRef>
+          <a:fillRef idx="3">
+            <a:schemeClr val="accent1"/>
+          </a:fillRef>
+          <a:effectRef idx="2">
+            <a:schemeClr val="accent1"/>
+          </a:effectRef>
+          <a:fontRef idx="minor">
+            <a:schemeClr val="lt1"/>
+          </a:fontRef>
+        </p:style>
+        <p:txBody>
+          <a:bodyPr rtlCol="0" anchor="ctr"/>
+          <a:lstStyle/>
+          <a:p>
+            <a:pPr algn="ctr"/>
+          </a:p>
+        </p:txBody>
+      </p:sp>
+      <p:sp>
+        <p:nvSpPr>
+          <p:cNvPr id="15" name="TextBox 14"/>
+          <p:cNvSpPr txBox="1"/>
+          <p:nvPr/>
+        </p:nvSpPr>
+        <p:spPr>
+          <a:xfrm>
+            <a:off x="558800" y="6007100"/>
+            <a:ext cx="3536950" cy="215900"/>
           </a:xfrm>
           <a:prstGeom prst="rect">
             <a:avLst/>
@@ -6309,7 +6850,7 @@
       </p:sp>
       <p:pic>
         <p:nvPicPr>
-          <p:cNvPr id="12" name="Picture 11" descr="CAM_25_Fabric_Library.jpg"/>
+          <p:cNvPr id="16" name="Picture 15" descr="CAM_25_Fabric_Library.jpg"/>
           <p:cNvPicPr>
             <a:picLocks noChangeAspect="1"/>
           </p:cNvPicPr>
@@ -6334,14 +6875,59 @@
       </p:pic>
       <p:sp>
         <p:nvSpPr>
-          <p:cNvPr id="13" name="TextBox 12"/>
-          <p:cNvSpPr txBox="1"/>
-          <p:nvPr/>
-        </p:nvSpPr>
-        <p:spPr>
-          <a:xfrm>
-            <a:off x="4337050" y="6032500"/>
-            <a:ext cx="3511550" cy="190500"/>
+          <p:cNvPr id="17" name="Rectangle 16"/>
+          <p:cNvSpPr/>
+          <p:nvPr/>
+        </p:nvSpPr>
+        <p:spPr>
+          <a:xfrm>
+            <a:off x="4273550" y="5994400"/>
+            <a:ext cx="2794000" cy="254000"/>
+          </a:xfrm>
+          <a:prstGeom prst="rect">
+            <a:avLst/>
+          </a:prstGeom>
+          <a:solidFill>
+            <a:srgbClr val="141412">
+              <a:alpha val="62000"/>
+            </a:srgbClr>
+          </a:solidFill>
+          <a:ln>
+            <a:noFill/>
+          </a:ln>
+        </p:spPr>
+        <p:style>
+          <a:lnRef idx="1">
+            <a:schemeClr val="accent1"/>
+          </a:lnRef>
+          <a:fillRef idx="3">
+            <a:schemeClr val="accent1"/>
+          </a:fillRef>
+          <a:effectRef idx="2">
+            <a:schemeClr val="accent1"/>
+          </a:effectRef>
+          <a:fontRef idx="minor">
+            <a:schemeClr val="lt1"/>
+          </a:fontRef>
+        </p:style>
+        <p:txBody>
+          <a:bodyPr rtlCol="0" anchor="ctr"/>
+          <a:lstStyle/>
+          <a:p>
+            <a:pPr algn="ctr"/>
+          </a:p>
+        </p:txBody>
+      </p:sp>
+      <p:sp>
+        <p:nvSpPr>
+          <p:cNvPr id="18" name="TextBox 17"/>
+          <p:cNvSpPr txBox="1"/>
+          <p:nvPr/>
+        </p:nvSpPr>
+        <p:spPr>
+          <a:xfrm>
+            <a:off x="4324350" y="6007100"/>
+            <a:ext cx="3536950" cy="215900"/>
           </a:xfrm>
           <a:prstGeom prst="rect">
             <a:avLst/>
@@ -6368,7 +6954,7 @@
       </p:sp>
       <p:pic>
         <p:nvPicPr>
-          <p:cNvPr id="14" name="Picture 13" descr="CAM_28_Washroom_Male.jpg"/>
+          <p:cNvPr id="19" name="Picture 18" descr="CAM_28_Washroom_Male.jpg"/>
           <p:cNvPicPr>
             <a:picLocks noChangeAspect="1"/>
           </p:cNvPicPr>
@@ -6393,14 +6979,59 @@
       </p:pic>
       <p:sp>
         <p:nvSpPr>
-          <p:cNvPr id="15" name="TextBox 14"/>
-          <p:cNvSpPr txBox="1"/>
-          <p:nvPr/>
-        </p:nvSpPr>
-        <p:spPr>
-          <a:xfrm>
-            <a:off x="8102600" y="6032500"/>
-            <a:ext cx="3511550" cy="190500"/>
+          <p:cNvPr id="20" name="Rectangle 19"/>
+          <p:cNvSpPr/>
+          <p:nvPr/>
+        </p:nvSpPr>
+        <p:spPr>
+          <a:xfrm>
+            <a:off x="8039100" y="5994400"/>
+            <a:ext cx="2311400" cy="254000"/>
+          </a:xfrm>
+          <a:prstGeom prst="rect">
+            <a:avLst/>
+          </a:prstGeom>
+          <a:solidFill>
+            <a:srgbClr val="141412">
+              <a:alpha val="62000"/>
+            </a:srgbClr>
+          </a:solidFill>
+          <a:ln>
+            <a:noFill/>
+          </a:ln>
+        </p:spPr>
+        <p:style>
+          <a:lnRef idx="1">
+            <a:schemeClr val="accent1"/>
+          </a:lnRef>
+          <a:fillRef idx="3">
+            <a:schemeClr val="accent1"/>
+          </a:fillRef>
+          <a:effectRef idx="2">
+            <a:schemeClr val="accent1"/>
+          </a:effectRef>
+          <a:fontRef idx="minor">
+            <a:schemeClr val="lt1"/>
+          </a:fontRef>
+        </p:style>
+        <p:txBody>
+          <a:bodyPr rtlCol="0" anchor="ctr"/>
+          <a:lstStyle/>
+          <a:p>
+            <a:pPr algn="ctr"/>
+          </a:p>
+        </p:txBody>
+      </p:sp>
+      <p:sp>
+        <p:nvSpPr>
+          <p:cNvPr id="21" name="TextBox 20"/>
+          <p:cNvSpPr txBox="1"/>
+          <p:nvPr/>
+        </p:nvSpPr>
+        <p:spPr>
+          <a:xfrm>
+            <a:off x="8089900" y="6007100"/>
+            <a:ext cx="3536950" cy="215900"/>
           </a:xfrm>
           <a:prstGeom prst="rect">
             <a:avLst/>
@@ -6427,7 +7058,7 @@
       </p:sp>
       <p:sp>
         <p:nvSpPr>
-          <p:cNvPr id="16" name="TextBox 15"/>
+          <p:cNvPr id="22" name="TextBox 21"/>
           <p:cNvSpPr txBox="1"/>
           <p:nvPr/>
         </p:nvSpPr>
@@ -6461,7 +7092,7 @@
       </p:sp>
       <p:sp>
         <p:nvSpPr>
-          <p:cNvPr id="17" name="TextBox 16"/>
+          <p:cNvPr id="23" name="TextBox 22"/>
           <p:cNvSpPr txBox="1"/>
           <p:nvPr/>
         </p:nvSpPr>
@@ -7287,14 +7918,59 @@
       </p:pic>
       <p:sp>
         <p:nvSpPr>
-          <p:cNvPr id="7" name="TextBox 6"/>
-          <p:cNvSpPr txBox="1"/>
-          <p:nvPr/>
-        </p:nvSpPr>
-        <p:spPr>
-          <a:xfrm>
-            <a:off x="4889500" y="6134100"/>
-            <a:ext cx="6731000" cy="190500"/>
+          <p:cNvPr id="7" name="Rectangle 6"/>
+          <p:cNvSpPr/>
+          <p:nvPr/>
+        </p:nvSpPr>
+        <p:spPr>
+          <a:xfrm>
+            <a:off x="4826000" y="6096000"/>
+            <a:ext cx="4851400" cy="254000"/>
+          </a:xfrm>
+          <a:prstGeom prst="rect">
+            <a:avLst/>
+          </a:prstGeom>
+          <a:solidFill>
+            <a:srgbClr val="141412">
+              <a:alpha val="62000"/>
+            </a:srgbClr>
+          </a:solidFill>
+          <a:ln>
+            <a:noFill/>
+          </a:ln>
+        </p:spPr>
+        <p:style>
+          <a:lnRef idx="1">
+            <a:schemeClr val="accent1"/>
+          </a:lnRef>
+          <a:fillRef idx="3">
+            <a:schemeClr val="accent1"/>
+          </a:fillRef>
+          <a:effectRef idx="2">
+            <a:schemeClr val="accent1"/>
+          </a:effectRef>
+          <a:fontRef idx="minor">
+            <a:schemeClr val="lt1"/>
+          </a:fontRef>
+        </p:style>
+        <p:txBody>
+          <a:bodyPr rtlCol="0" anchor="ctr"/>
+          <a:lstStyle/>
+          <a:p>
+            <a:pPr algn="ctr"/>
+          </a:p>
+        </p:txBody>
+      </p:sp>
+      <p:sp>
+        <p:nvSpPr>
+          <p:cNvPr id="8" name="TextBox 7"/>
+          <p:cNvSpPr txBox="1"/>
+          <p:nvPr/>
+        </p:nvSpPr>
+        <p:spPr>
+          <a:xfrm>
+            <a:off x="4876800" y="6108700"/>
+            <a:ext cx="6756400" cy="215900"/>
           </a:xfrm>
           <a:prstGeom prst="rect">
             <a:avLst/>
@@ -7321,7 +7997,7 @@
       </p:sp>
       <p:sp>
         <p:nvSpPr>
-          <p:cNvPr id="8" name="TextBox 7"/>
+          <p:cNvPr id="9" name="TextBox 8"/>
           <p:cNvSpPr txBox="1"/>
           <p:nvPr/>
         </p:nvSpPr>
@@ -7355,7 +8031,7 @@
       </p:sp>
       <p:sp>
         <p:nvSpPr>
-          <p:cNvPr id="9" name="TextBox 8"/>
+          <p:cNvPr id="10" name="TextBox 9"/>
           <p:cNvSpPr txBox="1"/>
           <p:nvPr/>
         </p:nvSpPr>
@@ -7622,14 +8298,59 @@
       </p:pic>
       <p:sp>
         <p:nvSpPr>
-          <p:cNvPr id="7" name="TextBox 6"/>
-          <p:cNvSpPr txBox="1"/>
-          <p:nvPr/>
-        </p:nvSpPr>
-        <p:spPr>
-          <a:xfrm>
-            <a:off x="5334000" y="6134100"/>
-            <a:ext cx="6286500" cy="190500"/>
+          <p:cNvPr id="7" name="Rectangle 6"/>
+          <p:cNvSpPr/>
+          <p:nvPr/>
+        </p:nvSpPr>
+        <p:spPr>
+          <a:xfrm>
+            <a:off x="5270500" y="6096000"/>
+            <a:ext cx="2933700" cy="254000"/>
+          </a:xfrm>
+          <a:prstGeom prst="rect">
+            <a:avLst/>
+          </a:prstGeom>
+          <a:solidFill>
+            <a:srgbClr val="141412">
+              <a:alpha val="62000"/>
+            </a:srgbClr>
+          </a:solidFill>
+          <a:ln>
+            <a:noFill/>
+          </a:ln>
+        </p:spPr>
+        <p:style>
+          <a:lnRef idx="1">
+            <a:schemeClr val="accent1"/>
+          </a:lnRef>
+          <a:fillRef idx="3">
+            <a:schemeClr val="accent1"/>
+          </a:fillRef>
+          <a:effectRef idx="2">
+            <a:schemeClr val="accent1"/>
+          </a:effectRef>
+          <a:fontRef idx="minor">
+            <a:schemeClr val="lt1"/>
+          </a:fontRef>
+        </p:style>
+        <p:txBody>
+          <a:bodyPr rtlCol="0" anchor="ctr"/>
+          <a:lstStyle/>
+          <a:p>
+            <a:pPr algn="ctr"/>
+          </a:p>
+        </p:txBody>
+      </p:sp>
+      <p:sp>
+        <p:nvSpPr>
+          <p:cNvPr id="8" name="TextBox 7"/>
+          <p:cNvSpPr txBox="1"/>
+          <p:nvPr/>
+        </p:nvSpPr>
+        <p:spPr>
+          <a:xfrm>
+            <a:off x="5321300" y="6108700"/>
+            <a:ext cx="6311900" cy="215900"/>
           </a:xfrm>
           <a:prstGeom prst="rect">
             <a:avLst/>
@@ -7656,7 +8377,7 @@
       </p:sp>
       <p:sp>
         <p:nvSpPr>
-          <p:cNvPr id="8" name="TextBox 7"/>
+          <p:cNvPr id="9" name="TextBox 8"/>
           <p:cNvSpPr txBox="1"/>
           <p:nvPr/>
         </p:nvSpPr>
@@ -7690,7 +8411,7 @@
       </p:sp>
       <p:sp>
         <p:nvSpPr>
-          <p:cNvPr id="9" name="TextBox 8"/>
+          <p:cNvPr id="10" name="TextBox 9"/>
           <p:cNvSpPr txBox="1"/>
           <p:nvPr/>
         </p:nvSpPr>
@@ -8398,14 +9119,59 @@
       </p:pic>
       <p:sp>
         <p:nvSpPr>
-          <p:cNvPr id="20" name="TextBox 19"/>
-          <p:cNvSpPr txBox="1"/>
-          <p:nvPr/>
-        </p:nvSpPr>
-        <p:spPr>
-          <a:xfrm>
-            <a:off x="8191500" y="5435600"/>
-            <a:ext cx="3429000" cy="190500"/>
+          <p:cNvPr id="20" name="Rectangle 19"/>
+          <p:cNvSpPr/>
+          <p:nvPr/>
+        </p:nvSpPr>
+        <p:spPr>
+          <a:xfrm>
+            <a:off x="8128000" y="5397500"/>
+            <a:ext cx="1562100" cy="254000"/>
+          </a:xfrm>
+          <a:prstGeom prst="rect">
+            <a:avLst/>
+          </a:prstGeom>
+          <a:solidFill>
+            <a:srgbClr val="141412">
+              <a:alpha val="62000"/>
+            </a:srgbClr>
+          </a:solidFill>
+          <a:ln>
+            <a:noFill/>
+          </a:ln>
+        </p:spPr>
+        <p:style>
+          <a:lnRef idx="1">
+            <a:schemeClr val="accent1"/>
+          </a:lnRef>
+          <a:fillRef idx="3">
+            <a:schemeClr val="accent1"/>
+          </a:fillRef>
+          <a:effectRef idx="2">
+            <a:schemeClr val="accent1"/>
+          </a:effectRef>
+          <a:fontRef idx="minor">
+            <a:schemeClr val="lt1"/>
+          </a:fontRef>
+        </p:style>
+        <p:txBody>
+          <a:bodyPr rtlCol="0" anchor="ctr"/>
+          <a:lstStyle/>
+          <a:p>
+            <a:pPr algn="ctr"/>
+          </a:p>
+        </p:txBody>
+      </p:sp>
+      <p:sp>
+        <p:nvSpPr>
+          <p:cNvPr id="21" name="TextBox 20"/>
+          <p:cNvSpPr txBox="1"/>
+          <p:nvPr/>
+        </p:nvSpPr>
+        <p:spPr>
+          <a:xfrm>
+            <a:off x="8178800" y="5410200"/>
+            <a:ext cx="3454400" cy="215900"/>
           </a:xfrm>
           <a:prstGeom prst="rect">
             <a:avLst/>
@@ -8425,14 +9191,14 @@
                 </a:solidFill>
                 <a:latin typeface="Inter"/>
               </a:rPr>
-              <a:t>Global Design Studio (preview render)</a:t>
-            </a:r>
-          </a:p>
-        </p:txBody>
-      </p:sp>
-      <p:sp>
-        <p:nvSpPr>
-          <p:cNvPr id="21" name="TextBox 20"/>
+              <a:t>Global Design Studio</a:t>
+            </a:r>
+          </a:p>
+        </p:txBody>
+      </p:sp>
+      <p:sp>
+        <p:nvSpPr>
+          <p:cNvPr id="22" name="TextBox 21"/>
           <p:cNvSpPr txBox="1"/>
           <p:nvPr/>
         </p:nvSpPr>
@@ -8466,7 +9232,7 @@
       </p:sp>
       <p:sp>
         <p:nvSpPr>
-          <p:cNvPr id="22" name="TextBox 21"/>
+          <p:cNvPr id="23" name="TextBox 22"/>
           <p:cNvSpPr txBox="1"/>
           <p:nvPr/>
         </p:nvSpPr>
@@ -8601,8 +9367,8 @@
           <p:nvPr/>
         </p:nvGraphicFramePr>
         <p:xfrm>
-          <a:off x="508000" y="1841500"/>
-          <a:ext cx="11176000" cy="2222500"/>
+          <a:off x="508000" y="1651000"/>
+          <a:ext cx="11176000" cy="2044700"/>
         </p:xfrm>
         <a:graphic>
           <a:graphicData uri="http://schemas.openxmlformats.org/drawingml/2006/table">
@@ -8611,17 +9377,17 @@
                 <a:tableStyleId>{5C22544A-7EE6-4342-B048-85BDC9FD1C3A}</a:tableStyleId>
               </a:tblPr>
               <a:tblGrid>
-                <a:gridCol w="5588000"/>
-                <a:gridCol w="5588000"/>
+                <a:gridCol w="2159000"/>
+                <a:gridCol w="9017000"/>
               </a:tblGrid>
-              <a:tr h="317500">
+              <a:tr h="292100">
                 <a:tc>
                   <a:txBody>
                     <a:bodyPr/>
                     <a:lstStyle/>
                     <a:p>
                       <a:r>
-                        <a:rPr sz="1100" b="1">
+                        <a:rPr sz="1000" b="1">
                           <a:solidFill>
                             <a:srgbClr val="26673D"/>
                           </a:solidFill>
@@ -8643,7 +9409,7 @@
                     <a:lstStyle/>
                     <a:p>
                       <a:r>
-                        <a:rPr sz="1100" b="1">
+                        <a:rPr sz="1000" b="1">
                           <a:solidFill>
                             <a:srgbClr val="26673D"/>
                           </a:solidFill>
@@ -8660,14 +9426,14 @@
                   </a:tcPr>
                 </a:tc>
               </a:tr>
-              <a:tr h="317500">
+              <a:tr h="292100">
                 <a:tc>
                   <a:txBody>
                     <a:bodyPr/>
                     <a:lstStyle/>
                     <a:p>
                       <a:r>
-                        <a:rPr sz="1300" b="1">
+                        <a:rPr sz="1200" b="1">
                           <a:solidFill>
                             <a:srgbClr val="26673D"/>
                           </a:solidFill>
@@ -8689,7 +9455,7 @@
                     <a:lstStyle/>
                     <a:p>
                       <a:r>
-                        <a:rPr sz="1300" b="0">
+                        <a:rPr sz="1200" b="0">
                           <a:solidFill>
                             <a:srgbClr val="1E1E1C"/>
                           </a:solidFill>
@@ -8706,14 +9472,14 @@
                   </a:tcPr>
                 </a:tc>
               </a:tr>
-              <a:tr h="317500">
+              <a:tr h="292100">
                 <a:tc>
                   <a:txBody>
                     <a:bodyPr/>
                     <a:lstStyle/>
                     <a:p>
                       <a:r>
-                        <a:rPr sz="1300" b="1">
+                        <a:rPr sz="1200" b="1">
                           <a:solidFill>
                             <a:srgbClr val="26673D"/>
                           </a:solidFill>
@@ -8735,7 +9501,7 @@
                     <a:lstStyle/>
                     <a:p>
                       <a:r>
-                        <a:rPr sz="1300" b="0">
+                        <a:rPr sz="1200" b="0">
                           <a:solidFill>
                             <a:srgbClr val="1E1E1C"/>
                           </a:solidFill>
@@ -8752,14 +9518,14 @@
                   </a:tcPr>
                 </a:tc>
               </a:tr>
-              <a:tr h="317500">
+              <a:tr h="292100">
                 <a:tc>
                   <a:txBody>
                     <a:bodyPr/>
                     <a:lstStyle/>
                     <a:p>
                       <a:r>
-                        <a:rPr sz="1300" b="1">
+                        <a:rPr sz="1200" b="1">
                           <a:solidFill>
                             <a:srgbClr val="26673D"/>
                           </a:solidFill>
@@ -8781,7 +9547,7 @@
                     <a:lstStyle/>
                     <a:p>
                       <a:r>
-                        <a:rPr sz="1300" b="0">
+                        <a:rPr sz="1200" b="0">
                           <a:solidFill>
                             <a:srgbClr val="1E1E1C"/>
                           </a:solidFill>
@@ -8798,14 +9564,14 @@
                   </a:tcPr>
                 </a:tc>
               </a:tr>
-              <a:tr h="317500">
+              <a:tr h="292100">
                 <a:tc>
                   <a:txBody>
                     <a:bodyPr/>
                     <a:lstStyle/>
                     <a:p>
                       <a:r>
-                        <a:rPr sz="1300" b="1">
+                        <a:rPr sz="1200" b="1">
                           <a:solidFill>
                             <a:srgbClr val="26673D"/>
                           </a:solidFill>
@@ -8827,7 +9593,7 @@
                     <a:lstStyle/>
                     <a:p>
                       <a:r>
-                        <a:rPr sz="1300" b="0">
+                        <a:rPr sz="1200" b="0">
                           <a:solidFill>
                             <a:srgbClr val="1E1E1C"/>
                           </a:solidFill>
@@ -8844,14 +9610,14 @@
                   </a:tcPr>
                 </a:tc>
               </a:tr>
-              <a:tr h="317500">
+              <a:tr h="292100">
                 <a:tc>
                   <a:txBody>
                     <a:bodyPr/>
                     <a:lstStyle/>
                     <a:p>
                       <a:r>
-                        <a:rPr sz="1300" b="1">
+                        <a:rPr sz="1200" b="1">
                           <a:solidFill>
                             <a:srgbClr val="26673D"/>
                           </a:solidFill>
@@ -8873,7 +9639,7 @@
                     <a:lstStyle/>
                     <a:p>
                       <a:r>
-                        <a:rPr sz="1300" b="0">
+                        <a:rPr sz="1200" b="0">
                           <a:solidFill>
                             <a:srgbClr val="1E1E1C"/>
                           </a:solidFill>
@@ -8890,14 +9656,14 @@
                   </a:tcPr>
                 </a:tc>
               </a:tr>
-              <a:tr h="317500">
+              <a:tr h="292100">
                 <a:tc>
                   <a:txBody>
                     <a:bodyPr/>
                     <a:lstStyle/>
                     <a:p>
                       <a:r>
-                        <a:rPr sz="1300" b="1">
+                        <a:rPr sz="1200" b="1">
                           <a:solidFill>
                             <a:srgbClr val="26673D"/>
                           </a:solidFill>
@@ -8919,7 +9685,7 @@
                     <a:lstStyle/>
                     <a:p>
                       <a:r>
-                        <a:rPr sz="1300" b="0">
+                        <a:rPr sz="1200" b="0">
                           <a:solidFill>
                             <a:srgbClr val="1E1E1C"/>
                           </a:solidFill>
@@ -8948,8 +9714,8 @@
         </p:nvSpPr>
         <p:spPr>
           <a:xfrm>
-            <a:off x="508000" y="6032500"/>
-            <a:ext cx="11176000" cy="381000"/>
+            <a:off x="508000" y="3873500"/>
+            <a:ext cx="11176000" cy="254000"/>
           </a:xfrm>
           <a:prstGeom prst="rect">
             <a:avLst/>
@@ -8977,6 +9743,620 @@
       <p:sp>
         <p:nvSpPr>
           <p:cNvPr id="6" name="TextBox 5"/>
+          <p:cNvSpPr txBox="1"/>
+          <p:nvPr/>
+        </p:nvSpPr>
+        <p:spPr>
+          <a:xfrm>
+            <a:off x="508000" y="4445000"/>
+            <a:ext cx="6350000" cy="190500"/>
+          </a:xfrm>
+          <a:prstGeom prst="rect">
+            <a:avLst/>
+          </a:prstGeom>
+          <a:noFill/>
+        </p:spPr>
+        <p:txBody>
+          <a:bodyPr wrap="square">
+            <a:spAutoFit/>
+          </a:bodyPr>
+          <a:lstStyle/>
+          <a:p>
+            <a:r>
+              <a:rPr sz="1100" b="1">
+                <a:solidFill>
+                  <a:srgbClr val="26673D"/>
+                </a:solidFill>
+                <a:latin typeface="Inter"/>
+              </a:rPr>
+              <a:t>RECOMMENDED NEXT STEPS</a:t>
+            </a:r>
+          </a:p>
+        </p:txBody>
+      </p:sp>
+      <p:sp>
+        <p:nvSpPr>
+          <p:cNvPr id="7" name="Rectangle 6"/>
+          <p:cNvSpPr/>
+          <p:nvPr/>
+        </p:nvSpPr>
+        <p:spPr>
+          <a:xfrm>
+            <a:off x="508000" y="4699000"/>
+            <a:ext cx="2667000" cy="1587500"/>
+          </a:xfrm>
+          <a:prstGeom prst="rect">
+            <a:avLst/>
+          </a:prstGeom>
+          <a:solidFill>
+            <a:srgbClr val="FFFFFF"/>
+          </a:solidFill>
+          <a:ln>
+            <a:noFill/>
+          </a:ln>
+        </p:spPr>
+        <p:style>
+          <a:lnRef idx="1">
+            <a:schemeClr val="accent1"/>
+          </a:lnRef>
+          <a:fillRef idx="3">
+            <a:schemeClr val="accent1"/>
+          </a:fillRef>
+          <a:effectRef idx="2">
+            <a:schemeClr val="accent1"/>
+          </a:effectRef>
+          <a:fontRef idx="minor">
+            <a:schemeClr val="lt1"/>
+          </a:fontRef>
+        </p:style>
+        <p:txBody>
+          <a:bodyPr rtlCol="0" anchor="ctr"/>
+          <a:lstStyle/>
+          <a:p>
+            <a:pPr algn="ctr"/>
+          </a:p>
+        </p:txBody>
+      </p:sp>
+      <p:sp>
+        <p:nvSpPr>
+          <p:cNvPr id="8" name="TextBox 7"/>
+          <p:cNvSpPr txBox="1"/>
+          <p:nvPr/>
+        </p:nvSpPr>
+        <p:spPr>
+          <a:xfrm>
+            <a:off x="647700" y="4800600"/>
+            <a:ext cx="2413000" cy="279400"/>
+          </a:xfrm>
+          <a:prstGeom prst="rect">
+            <a:avLst/>
+          </a:prstGeom>
+          <a:noFill/>
+        </p:spPr>
+        <p:txBody>
+          <a:bodyPr wrap="square">
+            <a:spAutoFit/>
+          </a:bodyPr>
+          <a:lstStyle/>
+          <a:p>
+            <a:r>
+              <a:rPr sz="2000" b="1">
+                <a:solidFill>
+                  <a:srgbClr val="26673D"/>
+                </a:solidFill>
+                <a:latin typeface="Inter"/>
+              </a:rPr>
+              <a:t>01</a:t>
+            </a:r>
+          </a:p>
+        </p:txBody>
+      </p:sp>
+      <p:sp>
+        <p:nvSpPr>
+          <p:cNvPr id="9" name="TextBox 8"/>
+          <p:cNvSpPr txBox="1"/>
+          <p:nvPr/>
+        </p:nvSpPr>
+        <p:spPr>
+          <a:xfrm>
+            <a:off x="647700" y="5143500"/>
+            <a:ext cx="2413000" cy="254000"/>
+          </a:xfrm>
+          <a:prstGeom prst="rect">
+            <a:avLst/>
+          </a:prstGeom>
+          <a:noFill/>
+        </p:spPr>
+        <p:txBody>
+          <a:bodyPr wrap="square">
+            <a:spAutoFit/>
+          </a:bodyPr>
+          <a:lstStyle/>
+          <a:p>
+            <a:r>
+              <a:rPr sz="1400" b="1">
+                <a:solidFill>
+                  <a:srgbClr val="1E1E1C"/>
+                </a:solidFill>
+                <a:latin typeface="Inter"/>
+              </a:rPr>
+              <a:t>Site measurement</a:t>
+            </a:r>
+          </a:p>
+        </p:txBody>
+      </p:sp>
+      <p:sp>
+        <p:nvSpPr>
+          <p:cNvPr id="10" name="TextBox 9"/>
+          <p:cNvSpPr txBox="1"/>
+          <p:nvPr/>
+        </p:nvSpPr>
+        <p:spPr>
+          <a:xfrm>
+            <a:off x="647700" y="5435600"/>
+            <a:ext cx="2413000" cy="762000"/>
+          </a:xfrm>
+          <a:prstGeom prst="rect">
+            <a:avLst/>
+          </a:prstGeom>
+          <a:noFill/>
+        </p:spPr>
+        <p:txBody>
+          <a:bodyPr wrap="square">
+            <a:spAutoFit/>
+          </a:bodyPr>
+          <a:lstStyle/>
+          <a:p>
+            <a:r>
+              <a:rPr sz="1100" b="0">
+                <a:solidFill>
+                  <a:srgbClr val="5A5750"/>
+                </a:solidFill>
+                <a:latin typeface="Inter"/>
+              </a:rPr>
+              <a:t>Floor-to-deck height, room 8 width, columns and beams; then update the survey data, rebuild and re-verify the model.</a:t>
+            </a:r>
+          </a:p>
+        </p:txBody>
+      </p:sp>
+      <p:sp>
+        <p:nvSpPr>
+          <p:cNvPr id="11" name="Rectangle 10"/>
+          <p:cNvSpPr/>
+          <p:nvPr/>
+        </p:nvSpPr>
+        <p:spPr>
+          <a:xfrm>
+            <a:off x="3333750" y="4699000"/>
+            <a:ext cx="2667000" cy="1587500"/>
+          </a:xfrm>
+          <a:prstGeom prst="rect">
+            <a:avLst/>
+          </a:prstGeom>
+          <a:solidFill>
+            <a:srgbClr val="FFFFFF"/>
+          </a:solidFill>
+          <a:ln>
+            <a:noFill/>
+          </a:ln>
+        </p:spPr>
+        <p:style>
+          <a:lnRef idx="1">
+            <a:schemeClr val="accent1"/>
+          </a:lnRef>
+          <a:fillRef idx="3">
+            <a:schemeClr val="accent1"/>
+          </a:fillRef>
+          <a:effectRef idx="2">
+            <a:schemeClr val="accent1"/>
+          </a:effectRef>
+          <a:fontRef idx="minor">
+            <a:schemeClr val="lt1"/>
+          </a:fontRef>
+        </p:style>
+        <p:txBody>
+          <a:bodyPr rtlCol="0" anchor="ctr"/>
+          <a:lstStyle/>
+          <a:p>
+            <a:pPr algn="ctr"/>
+          </a:p>
+        </p:txBody>
+      </p:sp>
+      <p:sp>
+        <p:nvSpPr>
+          <p:cNvPr id="12" name="TextBox 11"/>
+          <p:cNvSpPr txBox="1"/>
+          <p:nvPr/>
+        </p:nvSpPr>
+        <p:spPr>
+          <a:xfrm>
+            <a:off x="3473450" y="4800600"/>
+            <a:ext cx="2413000" cy="279400"/>
+          </a:xfrm>
+          <a:prstGeom prst="rect">
+            <a:avLst/>
+          </a:prstGeom>
+          <a:noFill/>
+        </p:spPr>
+        <p:txBody>
+          <a:bodyPr wrap="square">
+            <a:spAutoFit/>
+          </a:bodyPr>
+          <a:lstStyle/>
+          <a:p>
+            <a:r>
+              <a:rPr sz="2000" b="1">
+                <a:solidFill>
+                  <a:srgbClr val="26673D"/>
+                </a:solidFill>
+                <a:latin typeface="Inter"/>
+              </a:rPr>
+              <a:t>02</a:t>
+            </a:r>
+          </a:p>
+        </p:txBody>
+      </p:sp>
+      <p:sp>
+        <p:nvSpPr>
+          <p:cNvPr id="13" name="TextBox 12"/>
+          <p:cNvSpPr txBox="1"/>
+          <p:nvPr/>
+        </p:nvSpPr>
+        <p:spPr>
+          <a:xfrm>
+            <a:off x="3473450" y="5143500"/>
+            <a:ext cx="2413000" cy="254000"/>
+          </a:xfrm>
+          <a:prstGeom prst="rect">
+            <a:avLst/>
+          </a:prstGeom>
+          <a:noFill/>
+        </p:spPr>
+        <p:txBody>
+          <a:bodyPr wrap="square">
+            <a:spAutoFit/>
+          </a:bodyPr>
+          <a:lstStyle/>
+          <a:p>
+            <a:r>
+              <a:rPr sz="1400" b="1">
+                <a:solidFill>
+                  <a:srgbClr val="1E1E1C"/>
+                </a:solidFill>
+                <a:latin typeface="Inter"/>
+              </a:rPr>
+              <a:t>Engineering reviews</a:t>
+            </a:r>
+          </a:p>
+        </p:txBody>
+      </p:sp>
+      <p:sp>
+        <p:nvSpPr>
+          <p:cNvPr id="14" name="TextBox 13"/>
+          <p:cNvSpPr txBox="1"/>
+          <p:nvPr/>
+        </p:nvSpPr>
+        <p:spPr>
+          <a:xfrm>
+            <a:off x="3473450" y="5435600"/>
+            <a:ext cx="2413000" cy="762000"/>
+          </a:xfrm>
+          <a:prstGeom prst="rect">
+            <a:avLst/>
+          </a:prstGeom>
+          <a:noFill/>
+        </p:spPr>
+        <p:txBody>
+          <a:bodyPr wrap="square">
+            <a:spAutoFit/>
+          </a:bodyPr>
+          <a:lstStyle/>
+          <a:p>
+            <a:r>
+              <a:rPr sz="1100" b="0">
+                <a:solidFill>
+                  <a:srgbClr val="5A5750"/>
+                </a:solidFill>
+                <a:latin typeface="Inter"/>
+              </a:rPr>
+              <a:t>Structural check of the new openings, fire strategy and exits, HVAC, power and data design.</a:t>
+            </a:r>
+          </a:p>
+        </p:txBody>
+      </p:sp>
+      <p:sp>
+        <p:nvSpPr>
+          <p:cNvPr id="15" name="Rectangle 14"/>
+          <p:cNvSpPr/>
+          <p:nvPr/>
+        </p:nvSpPr>
+        <p:spPr>
+          <a:xfrm>
+            <a:off x="6159500" y="4699000"/>
+            <a:ext cx="2667000" cy="1587500"/>
+          </a:xfrm>
+          <a:prstGeom prst="rect">
+            <a:avLst/>
+          </a:prstGeom>
+          <a:solidFill>
+            <a:srgbClr val="FFFFFF"/>
+          </a:solidFill>
+          <a:ln>
+            <a:noFill/>
+          </a:ln>
+        </p:spPr>
+        <p:style>
+          <a:lnRef idx="1">
+            <a:schemeClr val="accent1"/>
+          </a:lnRef>
+          <a:fillRef idx="3">
+            <a:schemeClr val="accent1"/>
+          </a:fillRef>
+          <a:effectRef idx="2">
+            <a:schemeClr val="accent1"/>
+          </a:effectRef>
+          <a:fontRef idx="minor">
+            <a:schemeClr val="lt1"/>
+          </a:fontRef>
+        </p:style>
+        <p:txBody>
+          <a:bodyPr rtlCol="0" anchor="ctr"/>
+          <a:lstStyle/>
+          <a:p>
+            <a:pPr algn="ctr"/>
+          </a:p>
+        </p:txBody>
+      </p:sp>
+      <p:sp>
+        <p:nvSpPr>
+          <p:cNvPr id="16" name="TextBox 15"/>
+          <p:cNvSpPr txBox="1"/>
+          <p:nvPr/>
+        </p:nvSpPr>
+        <p:spPr>
+          <a:xfrm>
+            <a:off x="6299200" y="4800600"/>
+            <a:ext cx="2413000" cy="279400"/>
+          </a:xfrm>
+          <a:prstGeom prst="rect">
+            <a:avLst/>
+          </a:prstGeom>
+          <a:noFill/>
+        </p:spPr>
+        <p:txBody>
+          <a:bodyPr wrap="square">
+            <a:spAutoFit/>
+          </a:bodyPr>
+          <a:lstStyle/>
+          <a:p>
+            <a:r>
+              <a:rPr sz="2000" b="1">
+                <a:solidFill>
+                  <a:srgbClr val="26673D"/>
+                </a:solidFill>
+                <a:latin typeface="Inter"/>
+              </a:rPr>
+              <a:t>03</a:t>
+            </a:r>
+          </a:p>
+        </p:txBody>
+      </p:sp>
+      <p:sp>
+        <p:nvSpPr>
+          <p:cNvPr id="17" name="TextBox 16"/>
+          <p:cNvSpPr txBox="1"/>
+          <p:nvPr/>
+        </p:nvSpPr>
+        <p:spPr>
+          <a:xfrm>
+            <a:off x="6299200" y="5143500"/>
+            <a:ext cx="2413000" cy="254000"/>
+          </a:xfrm>
+          <a:prstGeom prst="rect">
+            <a:avLst/>
+          </a:prstGeom>
+          <a:noFill/>
+        </p:spPr>
+        <p:txBody>
+          <a:bodyPr wrap="square">
+            <a:spAutoFit/>
+          </a:bodyPr>
+          <a:lstStyle/>
+          <a:p>
+            <a:r>
+              <a:rPr sz="1400" b="1">
+                <a:solidFill>
+                  <a:srgbClr val="1E1E1C"/>
+                </a:solidFill>
+                <a:latin typeface="Inter"/>
+              </a:rPr>
+              <a:t>Client decisions</a:t>
+            </a:r>
+          </a:p>
+        </p:txBody>
+      </p:sp>
+      <p:sp>
+        <p:nvSpPr>
+          <p:cNvPr id="18" name="TextBox 17"/>
+          <p:cNvSpPr txBox="1"/>
+          <p:nvPr/>
+        </p:nvSpPr>
+        <p:spPr>
+          <a:xfrm>
+            <a:off x="6299200" y="5435600"/>
+            <a:ext cx="2413000" cy="762000"/>
+          </a:xfrm>
+          <a:prstGeom prst="rect">
+            <a:avLst/>
+          </a:prstGeom>
+          <a:noFill/>
+        </p:spPr>
+        <p:txBody>
+          <a:bodyPr wrap="square">
+            <a:spAutoFit/>
+          </a:bodyPr>
+          <a:lstStyle/>
+          <a:p>
+            <a:r>
+              <a:rPr sz="1100" b="0">
+                <a:solidFill>
+                  <a:srgbClr val="5A5750"/>
+                </a:solidFill>
+                <a:latin typeface="Inter"/>
+              </a:rPr>
+              <a:t>Head count per department, interior budget, experience-centre content and approval of this layout.</a:t>
+            </a:r>
+          </a:p>
+        </p:txBody>
+      </p:sp>
+      <p:sp>
+        <p:nvSpPr>
+          <p:cNvPr id="19" name="Rectangle 18"/>
+          <p:cNvSpPr/>
+          <p:nvPr/>
+        </p:nvSpPr>
+        <p:spPr>
+          <a:xfrm>
+            <a:off x="8985250" y="4699000"/>
+            <a:ext cx="2667000" cy="1587500"/>
+          </a:xfrm>
+          <a:prstGeom prst="rect">
+            <a:avLst/>
+          </a:prstGeom>
+          <a:solidFill>
+            <a:srgbClr val="FFFFFF"/>
+          </a:solidFill>
+          <a:ln>
+            <a:noFill/>
+          </a:ln>
+        </p:spPr>
+        <p:style>
+          <a:lnRef idx="1">
+            <a:schemeClr val="accent1"/>
+          </a:lnRef>
+          <a:fillRef idx="3">
+            <a:schemeClr val="accent1"/>
+          </a:fillRef>
+          <a:effectRef idx="2">
+            <a:schemeClr val="accent1"/>
+          </a:effectRef>
+          <a:fontRef idx="minor">
+            <a:schemeClr val="lt1"/>
+          </a:fontRef>
+        </p:style>
+        <p:txBody>
+          <a:bodyPr rtlCol="0" anchor="ctr"/>
+          <a:lstStyle/>
+          <a:p>
+            <a:pPr algn="ctr"/>
+          </a:p>
+        </p:txBody>
+      </p:sp>
+      <p:sp>
+        <p:nvSpPr>
+          <p:cNvPr id="20" name="TextBox 19"/>
+          <p:cNvSpPr txBox="1"/>
+          <p:nvPr/>
+        </p:nvSpPr>
+        <p:spPr>
+          <a:xfrm>
+            <a:off x="9124950" y="4800600"/>
+            <a:ext cx="2413000" cy="279400"/>
+          </a:xfrm>
+          <a:prstGeom prst="rect">
+            <a:avLst/>
+          </a:prstGeom>
+          <a:noFill/>
+        </p:spPr>
+        <p:txBody>
+          <a:bodyPr wrap="square">
+            <a:spAutoFit/>
+          </a:bodyPr>
+          <a:lstStyle/>
+          <a:p>
+            <a:r>
+              <a:rPr sz="2000" b="1">
+                <a:solidFill>
+                  <a:srgbClr val="26673D"/>
+                </a:solidFill>
+                <a:latin typeface="Inter"/>
+              </a:rPr>
+              <a:t>04</a:t>
+            </a:r>
+          </a:p>
+        </p:txBody>
+      </p:sp>
+      <p:sp>
+        <p:nvSpPr>
+          <p:cNvPr id="21" name="TextBox 20"/>
+          <p:cNvSpPr txBox="1"/>
+          <p:nvPr/>
+        </p:nvSpPr>
+        <p:spPr>
+          <a:xfrm>
+            <a:off x="9124950" y="5143500"/>
+            <a:ext cx="2413000" cy="254000"/>
+          </a:xfrm>
+          <a:prstGeom prst="rect">
+            <a:avLst/>
+          </a:prstGeom>
+          <a:noFill/>
+        </p:spPr>
+        <p:txBody>
+          <a:bodyPr wrap="square">
+            <a:spAutoFit/>
+          </a:bodyPr>
+          <a:lstStyle/>
+          <a:p>
+            <a:r>
+              <a:rPr sz="1400" b="1">
+                <a:solidFill>
+                  <a:srgbClr val="1E1E1C"/>
+                </a:solidFill>
+                <a:latin typeface="Inter"/>
+              </a:rPr>
+              <a:t>Detailed design</a:t>
+            </a:r>
+          </a:p>
+        </p:txBody>
+      </p:sp>
+      <p:sp>
+        <p:nvSpPr>
+          <p:cNvPr id="22" name="TextBox 21"/>
+          <p:cNvSpPr txBox="1"/>
+          <p:nvPr/>
+        </p:nvSpPr>
+        <p:spPr>
+          <a:xfrm>
+            <a:off x="9124950" y="5435600"/>
+            <a:ext cx="2413000" cy="762000"/>
+          </a:xfrm>
+          <a:prstGeom prst="rect">
+            <a:avLst/>
+          </a:prstGeom>
+          <a:noFill/>
+        </p:spPr>
+        <p:txBody>
+          <a:bodyPr wrap="square">
+            <a:spAutoFit/>
+          </a:bodyPr>
+          <a:lstStyle/>
+          <a:p>
+            <a:r>
+              <a:rPr sz="1100" b="0">
+                <a:solidFill>
+                  <a:srgbClr val="5A5750"/>
+                </a:solidFill>
+                <a:latin typeface="Inter"/>
+              </a:rPr>
+              <a:t>Construction drawings, finish samples, furniture selection and bill of quantities after approval.</a:t>
+            </a:r>
+          </a:p>
+        </p:txBody>
+      </p:sp>
+      <p:sp>
+        <p:nvSpPr>
+          <p:cNvPr id="23" name="TextBox 22"/>
           <p:cNvSpPr txBox="1"/>
           <p:nvPr/>
         </p:nvSpPr>
@@ -9010,7 +10390,7 @@
       </p:sp>
       <p:sp>
         <p:nvSpPr>
-          <p:cNvPr id="7" name="TextBox 6"/>
+          <p:cNvPr id="24" name="TextBox 23"/>
           <p:cNvSpPr txBox="1"/>
           <p:nvPr/>
         </p:nvSpPr>
@@ -9095,41 +10475,7 @@
       </p:pic>
       <p:sp>
         <p:nvSpPr>
-          <p:cNvPr id="3" name="TextBox 2"/>
-          <p:cNvSpPr txBox="1"/>
-          <p:nvPr/>
-        </p:nvSpPr>
-        <p:spPr>
-          <a:xfrm>
-            <a:off x="63500" y="6642100"/>
-            <a:ext cx="12065000" cy="190500"/>
-          </a:xfrm>
-          <a:prstGeom prst="rect">
-            <a:avLst/>
-          </a:prstGeom>
-          <a:noFill/>
-        </p:spPr>
-        <p:txBody>
-          <a:bodyPr wrap="square">
-            <a:spAutoFit/>
-          </a:bodyPr>
-          <a:lstStyle/>
-          <a:p>
-            <a:r>
-              <a:rPr sz="1100" b="0">
-                <a:solidFill>
-                  <a:srgbClr val="FFFFFF"/>
-                </a:solidFill>
-                <a:latin typeface="Inter"/>
-              </a:rPr>
-              <a:t>Experience centre towards the brand-story wall - Blender Cycles render (preview render)</a:t>
-            </a:r>
-          </a:p>
-        </p:txBody>
-      </p:sp>
-      <p:sp>
-        <p:nvSpPr>
-          <p:cNvPr id="4" name="Rectangle 3"/>
+          <p:cNvPr id="3" name="Rectangle 2"/>
           <p:cNvSpPr/>
           <p:nvPr/>
         </p:nvSpPr>
@@ -9172,7 +10518,7 @@
       </p:sp>
       <p:sp>
         <p:nvSpPr>
-          <p:cNvPr id="5" name="TextBox 4"/>
+          <p:cNvPr id="4" name="TextBox 3"/>
           <p:cNvSpPr txBox="1"/>
           <p:nvPr/>
         </p:nvSpPr>
@@ -9206,7 +10552,7 @@
       </p:sp>
       <p:sp>
         <p:nvSpPr>
-          <p:cNvPr id="6" name="TextBox 5"/>
+          <p:cNvPr id="5" name="TextBox 4"/>
           <p:cNvSpPr txBox="1"/>
           <p:nvPr/>
         </p:nvSpPr>
@@ -9240,7 +10586,7 @@
       </p:sp>
       <p:sp>
         <p:nvSpPr>
-          <p:cNvPr id="7" name="TextBox 6"/>
+          <p:cNvPr id="6" name="TextBox 5"/>
           <p:cNvSpPr txBox="1"/>
           <p:nvPr/>
         </p:nvSpPr>
@@ -9274,6 +10620,41 @@
       </p:sp>
       <p:sp>
         <p:nvSpPr>
+          <p:cNvPr id="7" name="TextBox 6"/>
+          <p:cNvSpPr txBox="1"/>
+          <p:nvPr/>
+        </p:nvSpPr>
+        <p:spPr>
+          <a:xfrm>
+            <a:off x="5715000" y="6248400"/>
+            <a:ext cx="5969000" cy="190500"/>
+          </a:xfrm>
+          <a:prstGeom prst="rect">
+            <a:avLst/>
+          </a:prstGeom>
+          <a:noFill/>
+        </p:spPr>
+        <p:txBody>
+          <a:bodyPr wrap="square">
+            <a:spAutoFit/>
+          </a:bodyPr>
+          <a:lstStyle/>
+          <a:p>
+            <a:pPr algn="r"/>
+            <a:r>
+              <a:rPr sz="900" b="0">
+                <a:solidFill>
+                  <a:srgbClr val="C9D3CC"/>
+                </a:solidFill>
+                <a:latin typeface="Inter"/>
+              </a:rPr>
+              <a:t>Experience centre towards the brand-story wall - Blender Cycles render</a:t>
+            </a:r>
+          </a:p>
+        </p:txBody>
+      </p:sp>
+      <p:sp>
+        <p:nvSpPr>
           <p:cNvPr id="8" name="TextBox 7"/>
           <p:cNvSpPr txBox="1"/>
           <p:nvPr/>
@@ -9297,7 +10678,7 @@
             <a:r>
               <a:rPr sz="900" b="0">
                 <a:solidFill>
-                  <a:srgbClr val="5A5750"/>
+                  <a:srgbClr val="A7B3AB"/>
                 </a:solidFill>
                 <a:latin typeface="Inter"/>
               </a:rPr>
@@ -9331,7 +10712,7 @@
             <a:r>
               <a:rPr sz="900" b="0">
                 <a:solidFill>
-                  <a:srgbClr val="5A5750"/>
+                  <a:srgbClr val="A7B3AB"/>
                 </a:solidFill>
                 <a:latin typeface="Inter"/>
               </a:rPr>
@@ -9794,7 +11175,7 @@
         </p:nvPicPr>
         <p:blipFill>
           <a:blip r:embed="rId2"/>
-          <a:srcRect l="14216" r="14216"/>
+          <a:srcRect l="22746" r="5686"/>
           <a:stretch>
             <a:fillRect/>
           </a:stretch>
@@ -9811,14 +11192,59 @@
       </p:pic>
       <p:sp>
         <p:nvSpPr>
-          <p:cNvPr id="14" name="TextBox 13"/>
-          <p:cNvSpPr txBox="1"/>
-          <p:nvPr/>
-        </p:nvSpPr>
-        <p:spPr>
-          <a:xfrm>
-            <a:off x="4508500" y="6134100"/>
-            <a:ext cx="7112000" cy="190500"/>
+          <p:cNvPr id="14" name="Rectangle 13"/>
+          <p:cNvSpPr/>
+          <p:nvPr/>
+        </p:nvSpPr>
+        <p:spPr>
+          <a:xfrm>
+            <a:off x="4445000" y="6096000"/>
+            <a:ext cx="2108200" cy="254000"/>
+          </a:xfrm>
+          <a:prstGeom prst="rect">
+            <a:avLst/>
+          </a:prstGeom>
+          <a:solidFill>
+            <a:srgbClr val="141412">
+              <a:alpha val="62000"/>
+            </a:srgbClr>
+          </a:solidFill>
+          <a:ln>
+            <a:noFill/>
+          </a:ln>
+        </p:spPr>
+        <p:style>
+          <a:lnRef idx="1">
+            <a:schemeClr val="accent1"/>
+          </a:lnRef>
+          <a:fillRef idx="3">
+            <a:schemeClr val="accent1"/>
+          </a:fillRef>
+          <a:effectRef idx="2">
+            <a:schemeClr val="accent1"/>
+          </a:effectRef>
+          <a:fontRef idx="minor">
+            <a:schemeClr val="lt1"/>
+          </a:fontRef>
+        </p:style>
+        <p:txBody>
+          <a:bodyPr rtlCol="0" anchor="ctr"/>
+          <a:lstStyle/>
+          <a:p>
+            <a:pPr algn="ctr"/>
+          </a:p>
+        </p:txBody>
+      </p:sp>
+      <p:sp>
+        <p:nvSpPr>
+          <p:cNvPr id="15" name="TextBox 14"/>
+          <p:cNvSpPr txBox="1"/>
+          <p:nvPr/>
+        </p:nvSpPr>
+        <p:spPr>
+          <a:xfrm>
+            <a:off x="4495800" y="6108700"/>
+            <a:ext cx="7137400" cy="215900"/>
           </a:xfrm>
           <a:prstGeom prst="rect">
             <a:avLst/>
@@ -9838,14 +11264,14 @@
                 </a:solidFill>
                 <a:latin typeface="Inter"/>
               </a:rPr>
-              <a:t>Reception and visitor waiting (preview render)</a:t>
-            </a:r>
-          </a:p>
-        </p:txBody>
-      </p:sp>
-      <p:sp>
-        <p:nvSpPr>
-          <p:cNvPr id="15" name="TextBox 14"/>
+              <a:t>Reception desk and logo wall</a:t>
+            </a:r>
+          </a:p>
+        </p:txBody>
+      </p:sp>
+      <p:sp>
+        <p:nvSpPr>
+          <p:cNvPr id="16" name="TextBox 15"/>
           <p:cNvSpPr txBox="1"/>
           <p:nvPr/>
         </p:nvSpPr>
@@ -9879,7 +11305,7 @@
       </p:sp>
       <p:sp>
         <p:nvSpPr>
-          <p:cNvPr id="16" name="TextBox 15"/>
+          <p:cNvPr id="17" name="TextBox 16"/>
           <p:cNvSpPr txBox="1"/>
           <p:nvPr/>
         </p:nvSpPr>
@@ -12310,54 +13736,22 @@
       </p:pic>
       <p:sp>
         <p:nvSpPr>
-          <p:cNvPr id="3" name="TextBox 2"/>
-          <p:cNvSpPr txBox="1"/>
-          <p:nvPr/>
-        </p:nvSpPr>
-        <p:spPr>
-          <a:xfrm>
-            <a:off x="63500" y="6642100"/>
-            <a:ext cx="12065000" cy="190500"/>
-          </a:xfrm>
-          <a:prstGeom prst="rect">
-            <a:avLst/>
-          </a:prstGeom>
-          <a:noFill/>
-        </p:spPr>
-        <p:txBody>
-          <a:bodyPr wrap="square">
-            <a:spAutoFit/>
-          </a:bodyPr>
-          <a:lstStyle/>
-          <a:p>
-            <a:r>
-              <a:rPr sz="1100" b="0">
-                <a:solidFill>
-                  <a:srgbClr val="FFFFFF"/>
-                </a:solidFill>
-                <a:latin typeface="Inter"/>
-              </a:rPr>
-              <a:t>Overall isometric cut-away of the furnished floor - Blender Cycles render</a:t>
-            </a:r>
-          </a:p>
-        </p:txBody>
-      </p:sp>
-      <p:sp>
-        <p:nvSpPr>
-          <p:cNvPr id="4" name="Rectangle 3"/>
+          <p:cNvPr id="3" name="Rectangle 2"/>
           <p:cNvSpPr/>
           <p:nvPr/>
         </p:nvSpPr>
         <p:spPr>
           <a:xfrm>
-            <a:off x="317500" y="317500"/>
-            <a:ext cx="4572000" cy="2095500"/>
+            <a:off x="0" y="6096000"/>
+            <a:ext cx="12192000" cy="762000"/>
           </a:xfrm>
           <a:prstGeom prst="rect">
             <a:avLst/>
           </a:prstGeom>
           <a:solidFill>
-            <a:srgbClr val="F6F3EE"/>
+            <a:srgbClr val="080C0E">
+              <a:alpha val="80000"/>
+            </a:srgbClr>
           </a:solidFill>
           <a:ln>
             <a:noFill/>
@@ -12387,6 +13781,49 @@
       </p:sp>
       <p:sp>
         <p:nvSpPr>
+          <p:cNvPr id="4" name="Rectangle 3"/>
+          <p:cNvSpPr/>
+          <p:nvPr/>
+        </p:nvSpPr>
+        <p:spPr>
+          <a:xfrm>
+            <a:off x="317500" y="317500"/>
+            <a:ext cx="4572000" cy="2095500"/>
+          </a:xfrm>
+          <a:prstGeom prst="rect">
+            <a:avLst/>
+          </a:prstGeom>
+          <a:solidFill>
+            <a:srgbClr val="F6F3EE"/>
+          </a:solidFill>
+          <a:ln>
+            <a:noFill/>
+          </a:ln>
+        </p:spPr>
+        <p:style>
+          <a:lnRef idx="1">
+            <a:schemeClr val="accent1"/>
+          </a:lnRef>
+          <a:fillRef idx="3">
+            <a:schemeClr val="accent1"/>
+          </a:fillRef>
+          <a:effectRef idx="2">
+            <a:schemeClr val="accent1"/>
+          </a:effectRef>
+          <a:fontRef idx="minor">
+            <a:schemeClr val="lt1"/>
+          </a:fontRef>
+        </p:style>
+        <p:txBody>
+          <a:bodyPr rtlCol="0" anchor="ctr"/>
+          <a:lstStyle/>
+          <a:p>
+            <a:pPr algn="ctr"/>
+          </a:p>
+        </p:txBody>
+      </p:sp>
+      <p:sp>
+        <p:nvSpPr>
           <p:cNvPr id="5" name="TextBox 4"/>
           <p:cNvSpPr txBox="1"/>
           <p:nvPr/>
@@ -12495,6 +13932,41 @@
         </p:nvSpPr>
         <p:spPr>
           <a:xfrm>
+            <a:off x="5715000" y="6248400"/>
+            <a:ext cx="5969000" cy="190500"/>
+          </a:xfrm>
+          <a:prstGeom prst="rect">
+            <a:avLst/>
+          </a:prstGeom>
+          <a:noFill/>
+        </p:spPr>
+        <p:txBody>
+          <a:bodyPr wrap="square">
+            <a:spAutoFit/>
+          </a:bodyPr>
+          <a:lstStyle/>
+          <a:p>
+            <a:pPr algn="r"/>
+            <a:r>
+              <a:rPr sz="900" b="0">
+                <a:solidFill>
+                  <a:srgbClr val="C9D3CC"/>
+                </a:solidFill>
+                <a:latin typeface="Inter"/>
+              </a:rPr>
+              <a:t>Overall isometric cut-away of the furnished floor - Blender Cycles render</a:t>
+            </a:r>
+          </a:p>
+        </p:txBody>
+      </p:sp>
+      <p:sp>
+        <p:nvSpPr>
+          <p:cNvPr id="9" name="TextBox 8"/>
+          <p:cNvSpPr txBox="1"/>
+          <p:nvPr/>
+        </p:nvSpPr>
+        <p:spPr>
+          <a:xfrm>
             <a:off x="508000" y="6578600"/>
             <a:ext cx="8255000" cy="190500"/>
           </a:xfrm>
@@ -12512,7 +13984,7 @@
             <a:r>
               <a:rPr sz="900" b="0">
                 <a:solidFill>
-                  <a:srgbClr val="5A5750"/>
+                  <a:srgbClr val="A7B3AB"/>
                 </a:solidFill>
                 <a:latin typeface="Inter"/>
               </a:rPr>
@@ -12523,7 +13995,7 @@
       </p:sp>
       <p:sp>
         <p:nvSpPr>
-          <p:cNvPr id="9" name="TextBox 8"/>
+          <p:cNvPr id="10" name="TextBox 9"/>
           <p:cNvSpPr txBox="1"/>
           <p:nvPr/>
         </p:nvSpPr>
@@ -12546,7 +14018,7 @@
             <a:r>
               <a:rPr sz="900" b="0">
                 <a:solidFill>
-                  <a:srgbClr val="5A5750"/>
+                  <a:srgbClr val="A7B3AB"/>
                 </a:solidFill>
                 <a:latin typeface="Inter"/>
               </a:rPr>
@@ -12624,7 +14096,7 @@
         <p:spPr>
           <a:xfrm>
             <a:off x="508000" y="863600"/>
-            <a:ext cx="3683000" cy="1524000"/>
+            <a:ext cx="3683000" cy="952500"/>
           </a:xfrm>
           <a:prstGeom prst="rect">
             <a:avLst/>
@@ -12657,22 +14129,22 @@
         </p:nvSpPr>
         <p:spPr>
           <a:xfrm>
-            <a:off x="508000" y="2540000"/>
-            <a:ext cx="3683000" cy="2349500"/>
-          </a:xfrm>
-          <a:prstGeom prst="rect">
-            <a:avLst/>
-          </a:prstGeom>
-          <a:noFill/>
-        </p:spPr>
-        <p:txBody>
-          <a:bodyPr wrap="square">
-            <a:spAutoFit/>
-          </a:bodyPr>
-          <a:lstStyle/>
-          <a:p>
-            <a:r>
-              <a:rPr sz="1400" b="0">
+            <a:off x="508000" y="1841500"/>
+            <a:ext cx="3683000" cy="3048000"/>
+          </a:xfrm>
+          <a:prstGeom prst="rect">
+            <a:avLst/>
+          </a:prstGeom>
+          <a:noFill/>
+        </p:spPr>
+        <p:txBody>
+          <a:bodyPr wrap="square">
+            <a:spAutoFit/>
+          </a:bodyPr>
+          <a:lstStyle/>
+          <a:p>
+            <a:r>
+              <a:rPr sz="1300" b="0">
                 <a:solidFill>
                   <a:srgbClr val="5A5750"/>
                 </a:solidFill>
@@ -12683,7 +14155,7 @@
           </a:p>
           <a:p>
             <a:r>
-              <a:rPr sz="1400" b="0">
+              <a:rPr sz="1300" b="0">
                 <a:solidFill>
                   <a:srgbClr val="5A5750"/>
                 </a:solidFill>
@@ -12694,7 +14166,7 @@
           </a:p>
           <a:p>
             <a:r>
-              <a:rPr sz="1400" b="0">
+              <a:rPr sz="1300" b="0">
                 <a:solidFill>
                   <a:srgbClr val="5A5750"/>
                 </a:solidFill>
@@ -12705,7 +14177,7 @@
           </a:p>
           <a:p>
             <a:r>
-              <a:rPr sz="1400" b="0">
+              <a:rPr sz="1300" b="0">
                 <a:solidFill>
                   <a:srgbClr val="5A5750"/>
                 </a:solidFill>
@@ -12716,7 +14188,7 @@
           </a:p>
           <a:p>
             <a:r>
-              <a:rPr sz="1400" b="0">
+              <a:rPr sz="1300" b="0">
                 <a:solidFill>
                   <a:srgbClr val="5A5750"/>
                 </a:solidFill>
@@ -12727,7 +14199,7 @@
           </a:p>
           <a:p>
             <a:r>
-              <a:rPr sz="1400" b="0">
+              <a:rPr sz="1300" b="0">
                 <a:solidFill>
                   <a:srgbClr val="5A5750"/>
                 </a:solidFill>
@@ -13167,14 +14639,59 @@
       </p:pic>
       <p:sp>
         <p:nvSpPr>
-          <p:cNvPr id="19" name="TextBox 18"/>
-          <p:cNvSpPr txBox="1"/>
-          <p:nvPr/>
-        </p:nvSpPr>
-        <p:spPr>
-          <a:xfrm>
-            <a:off x="4508500" y="4000500"/>
-            <a:ext cx="7112000" cy="190500"/>
+          <p:cNvPr id="19" name="Rectangle 18"/>
+          <p:cNvSpPr/>
+          <p:nvPr/>
+        </p:nvSpPr>
+        <p:spPr>
+          <a:xfrm>
+            <a:off x="4445000" y="3962400"/>
+            <a:ext cx="2108200" cy="254000"/>
+          </a:xfrm>
+          <a:prstGeom prst="rect">
+            <a:avLst/>
+          </a:prstGeom>
+          <a:solidFill>
+            <a:srgbClr val="141412">
+              <a:alpha val="62000"/>
+            </a:srgbClr>
+          </a:solidFill>
+          <a:ln>
+            <a:noFill/>
+          </a:ln>
+        </p:spPr>
+        <p:style>
+          <a:lnRef idx="1">
+            <a:schemeClr val="accent1"/>
+          </a:lnRef>
+          <a:fillRef idx="3">
+            <a:schemeClr val="accent1"/>
+          </a:fillRef>
+          <a:effectRef idx="2">
+            <a:schemeClr val="accent1"/>
+          </a:effectRef>
+          <a:fontRef idx="minor">
+            <a:schemeClr val="lt1"/>
+          </a:fontRef>
+        </p:style>
+        <p:txBody>
+          <a:bodyPr rtlCol="0" anchor="ctr"/>
+          <a:lstStyle/>
+          <a:p>
+            <a:pPr algn="ctr"/>
+          </a:p>
+        </p:txBody>
+      </p:sp>
+      <p:sp>
+        <p:nvSpPr>
+          <p:cNvPr id="20" name="TextBox 19"/>
+          <p:cNvSpPr txBox="1"/>
+          <p:nvPr/>
+        </p:nvSpPr>
+        <p:spPr>
+          <a:xfrm>
+            <a:off x="4495800" y="3975100"/>
+            <a:ext cx="7137400" cy="215900"/>
           </a:xfrm>
           <a:prstGeom prst="rect">
             <a:avLst/>
@@ -13194,14 +14711,14 @@
                 </a:solidFill>
                 <a:latin typeface="Inter"/>
               </a:rPr>
-              <a:t>Reception</a:t>
+              <a:t>Reception and visitor lounge</a:t>
             </a:r>
           </a:p>
         </p:txBody>
       </p:sp>
       <p:pic>
         <p:nvPicPr>
-          <p:cNvPr id="20" name="Picture 19" descr="CAM_02_Reception_B.jpg"/>
+          <p:cNvPr id="21" name="Picture 20" descr="CAM_02_Reception_B.jpg"/>
           <p:cNvPicPr>
             <a:picLocks noChangeAspect="1"/>
           </p:cNvPicPr>
@@ -13226,14 +14743,59 @@
       </p:pic>
       <p:sp>
         <p:nvSpPr>
-          <p:cNvPr id="21" name="TextBox 20"/>
-          <p:cNvSpPr txBox="1"/>
-          <p:nvPr/>
-        </p:nvSpPr>
-        <p:spPr>
-          <a:xfrm>
-            <a:off x="4508500" y="6134100"/>
-            <a:ext cx="3441700" cy="190500"/>
+          <p:cNvPr id="22" name="Rectangle 21"/>
+          <p:cNvSpPr/>
+          <p:nvPr/>
+        </p:nvSpPr>
+        <p:spPr>
+          <a:xfrm>
+            <a:off x="4445000" y="6096000"/>
+            <a:ext cx="2108200" cy="254000"/>
+          </a:xfrm>
+          <a:prstGeom prst="rect">
+            <a:avLst/>
+          </a:prstGeom>
+          <a:solidFill>
+            <a:srgbClr val="141412">
+              <a:alpha val="62000"/>
+            </a:srgbClr>
+          </a:solidFill>
+          <a:ln>
+            <a:noFill/>
+          </a:ln>
+        </p:spPr>
+        <p:style>
+          <a:lnRef idx="1">
+            <a:schemeClr val="accent1"/>
+          </a:lnRef>
+          <a:fillRef idx="3">
+            <a:schemeClr val="accent1"/>
+          </a:fillRef>
+          <a:effectRef idx="2">
+            <a:schemeClr val="accent1"/>
+          </a:effectRef>
+          <a:fontRef idx="minor">
+            <a:schemeClr val="lt1"/>
+          </a:fontRef>
+        </p:style>
+        <p:txBody>
+          <a:bodyPr rtlCol="0" anchor="ctr"/>
+          <a:lstStyle/>
+          <a:p>
+            <a:pPr algn="ctr"/>
+          </a:p>
+        </p:txBody>
+      </p:sp>
+      <p:sp>
+        <p:nvSpPr>
+          <p:cNvPr id="23" name="TextBox 22"/>
+          <p:cNvSpPr txBox="1"/>
+          <p:nvPr/>
+        </p:nvSpPr>
+        <p:spPr>
+          <a:xfrm>
+            <a:off x="4495800" y="6108700"/>
+            <a:ext cx="3467100" cy="215900"/>
           </a:xfrm>
           <a:prstGeom prst="rect">
             <a:avLst/>
@@ -13253,14 +14815,14 @@
                 </a:solidFill>
                 <a:latin typeface="Inter"/>
               </a:rPr>
-              <a:t>Reception - waiting (preview render)</a:t>
+              <a:t>Reception desk and logo wall</a:t>
             </a:r>
           </a:p>
         </p:txBody>
       </p:sp>
       <p:pic>
         <p:nvPicPr>
-          <p:cNvPr id="22" name="Picture 21" descr="CAM_03_Entrance_Lobby.jpg"/>
+          <p:cNvPr id="24" name="Picture 23" descr="CAM_03_Entrance_Lobby.jpg"/>
           <p:cNvPicPr>
             <a:picLocks noChangeAspect="1"/>
           </p:cNvPicPr>
@@ -13285,14 +14847,59 @@
       </p:pic>
       <p:sp>
         <p:nvSpPr>
-          <p:cNvPr id="23" name="TextBox 22"/>
-          <p:cNvSpPr txBox="1"/>
-          <p:nvPr/>
-        </p:nvSpPr>
-        <p:spPr>
-          <a:xfrm>
-            <a:off x="8178800" y="6134100"/>
-            <a:ext cx="3441700" cy="190500"/>
+          <p:cNvPr id="25" name="Rectangle 24"/>
+          <p:cNvSpPr/>
+          <p:nvPr/>
+        </p:nvSpPr>
+        <p:spPr>
+          <a:xfrm>
+            <a:off x="8115300" y="6096000"/>
+            <a:ext cx="3206750" cy="254000"/>
+          </a:xfrm>
+          <a:prstGeom prst="rect">
+            <a:avLst/>
+          </a:prstGeom>
+          <a:solidFill>
+            <a:srgbClr val="141412">
+              <a:alpha val="62000"/>
+            </a:srgbClr>
+          </a:solidFill>
+          <a:ln>
+            <a:noFill/>
+          </a:ln>
+        </p:spPr>
+        <p:style>
+          <a:lnRef idx="1">
+            <a:schemeClr val="accent1"/>
+          </a:lnRef>
+          <a:fillRef idx="3">
+            <a:schemeClr val="accent1"/>
+          </a:fillRef>
+          <a:effectRef idx="2">
+            <a:schemeClr val="accent1"/>
+          </a:effectRef>
+          <a:fontRef idx="minor">
+            <a:schemeClr val="lt1"/>
+          </a:fontRef>
+        </p:style>
+        <p:txBody>
+          <a:bodyPr rtlCol="0" anchor="ctr"/>
+          <a:lstStyle/>
+          <a:p>
+            <a:pPr algn="ctr"/>
+          </a:p>
+        </p:txBody>
+      </p:sp>
+      <p:sp>
+        <p:nvSpPr>
+          <p:cNvPr id="26" name="TextBox 25"/>
+          <p:cNvSpPr txBox="1"/>
+          <p:nvPr/>
+        </p:nvSpPr>
+        <p:spPr>
+          <a:xfrm>
+            <a:off x="8166100" y="6108700"/>
+            <a:ext cx="3467100" cy="215900"/>
           </a:xfrm>
           <a:prstGeom prst="rect">
             <a:avLst/>
@@ -13319,7 +14926,7 @@
       </p:sp>
       <p:sp>
         <p:nvSpPr>
-          <p:cNvPr id="24" name="TextBox 23"/>
+          <p:cNvPr id="27" name="TextBox 26"/>
           <p:cNvSpPr txBox="1"/>
           <p:nvPr/>
         </p:nvSpPr>
@@ -13353,7 +14960,7 @@
       </p:sp>
       <p:sp>
         <p:nvSpPr>
-          <p:cNvPr id="25" name="TextBox 24"/>
+          <p:cNvPr id="28" name="TextBox 27"/>
           <p:cNvSpPr txBox="1"/>
           <p:nvPr/>
         </p:nvSpPr>
@@ -13454,7 +15061,7 @@
         <p:spPr>
           <a:xfrm>
             <a:off x="508000" y="863600"/>
-            <a:ext cx="3683000" cy="1524000"/>
+            <a:ext cx="3683000" cy="952500"/>
           </a:xfrm>
           <a:prstGeom prst="rect">
             <a:avLst/>
@@ -13487,22 +15094,22 @@
         </p:nvSpPr>
         <p:spPr>
           <a:xfrm>
-            <a:off x="508000" y="2540000"/>
-            <a:ext cx="3683000" cy="2349500"/>
-          </a:xfrm>
-          <a:prstGeom prst="rect">
-            <a:avLst/>
-          </a:prstGeom>
-          <a:noFill/>
-        </p:spPr>
-        <p:txBody>
-          <a:bodyPr wrap="square">
-            <a:spAutoFit/>
-          </a:bodyPr>
-          <a:lstStyle/>
-          <a:p>
-            <a:r>
-              <a:rPr sz="1400" b="0">
+            <a:off x="508000" y="1841500"/>
+            <a:ext cx="3683000" cy="3048000"/>
+          </a:xfrm>
+          <a:prstGeom prst="rect">
+            <a:avLst/>
+          </a:prstGeom>
+          <a:noFill/>
+        </p:spPr>
+        <p:txBody>
+          <a:bodyPr wrap="square">
+            <a:spAutoFit/>
+          </a:bodyPr>
+          <a:lstStyle/>
+          <a:p>
+            <a:r>
+              <a:rPr sz="1300" b="0">
                 <a:solidFill>
                   <a:srgbClr val="5A5750"/>
                 </a:solidFill>
@@ -13513,7 +15120,7 @@
           </a:p>
           <a:p>
             <a:r>
-              <a:rPr sz="1400" b="0">
+              <a:rPr sz="1300" b="0">
                 <a:solidFill>
                   <a:srgbClr val="5A5750"/>
                 </a:solidFill>
@@ -13524,7 +15131,7 @@
           </a:p>
           <a:p>
             <a:r>
-              <a:rPr sz="1400" b="0">
+              <a:rPr sz="1300" b="0">
                 <a:solidFill>
                   <a:srgbClr val="5A5750"/>
                 </a:solidFill>
@@ -13535,7 +15142,7 @@
           </a:p>
           <a:p>
             <a:r>
-              <a:rPr sz="1400" b="0">
+              <a:rPr sz="1300" b="0">
                 <a:solidFill>
                   <a:srgbClr val="5A5750"/>
                 </a:solidFill>
@@ -13546,7 +15153,7 @@
           </a:p>
           <a:p>
             <a:r>
-              <a:rPr sz="1400" b="0">
+              <a:rPr sz="1300" b="0">
                 <a:solidFill>
                   <a:srgbClr val="5A5750"/>
                 </a:solidFill>
@@ -13557,7 +15164,7 @@
           </a:p>
           <a:p>
             <a:r>
-              <a:rPr sz="1400" b="0">
+              <a:rPr sz="1300" b="0">
                 <a:solidFill>
                   <a:srgbClr val="5A5750"/>
                 </a:solidFill>
@@ -13568,7 +15175,7 @@
           </a:p>
           <a:p>
             <a:r>
-              <a:rPr sz="1400" b="0">
+              <a:rPr sz="1300" b="0">
                 <a:solidFill>
                   <a:srgbClr val="5A5750"/>
                 </a:solidFill>
@@ -14008,14 +15615,59 @@
       </p:pic>
       <p:sp>
         <p:nvSpPr>
-          <p:cNvPr id="19" name="TextBox 18"/>
-          <p:cNvSpPr txBox="1"/>
-          <p:nvPr/>
-        </p:nvSpPr>
-        <p:spPr>
-          <a:xfrm>
-            <a:off x="4508500" y="4000500"/>
-            <a:ext cx="7112000" cy="190500"/>
+          <p:cNvPr id="19" name="Rectangle 18"/>
+          <p:cNvSpPr/>
+          <p:nvPr/>
+        </p:nvSpPr>
+        <p:spPr>
+          <a:xfrm>
+            <a:off x="4445000" y="3962400"/>
+            <a:ext cx="1352550" cy="254000"/>
+          </a:xfrm>
+          <a:prstGeom prst="rect">
+            <a:avLst/>
+          </a:prstGeom>
+          <a:solidFill>
+            <a:srgbClr val="141412">
+              <a:alpha val="62000"/>
+            </a:srgbClr>
+          </a:solidFill>
+          <a:ln>
+            <a:noFill/>
+          </a:ln>
+        </p:spPr>
+        <p:style>
+          <a:lnRef idx="1">
+            <a:schemeClr val="accent1"/>
+          </a:lnRef>
+          <a:fillRef idx="3">
+            <a:schemeClr val="accent1"/>
+          </a:fillRef>
+          <a:effectRef idx="2">
+            <a:schemeClr val="accent1"/>
+          </a:effectRef>
+          <a:fontRef idx="minor">
+            <a:schemeClr val="lt1"/>
+          </a:fontRef>
+        </p:style>
+        <p:txBody>
+          <a:bodyPr rtlCol="0" anchor="ctr"/>
+          <a:lstStyle/>
+          <a:p>
+            <a:pPr algn="ctr"/>
+          </a:p>
+        </p:txBody>
+      </p:sp>
+      <p:sp>
+        <p:nvSpPr>
+          <p:cNvPr id="20" name="TextBox 19"/>
+          <p:cNvSpPr txBox="1"/>
+          <p:nvPr/>
+        </p:nvSpPr>
+        <p:spPr>
+          <a:xfrm>
+            <a:off x="4495800" y="3975100"/>
+            <a:ext cx="7137400" cy="215900"/>
           </a:xfrm>
           <a:prstGeom prst="rect">
             <a:avLst/>
@@ -14042,7 +15694,7 @@
       </p:sp>
       <p:pic>
         <p:nvPicPr>
-          <p:cNvPr id="20" name="Picture 19" descr="CAM_05_Experience_Centre_B.jpg"/>
+          <p:cNvPr id="21" name="Picture 20" descr="CAM_05_Experience_Centre_B.jpg"/>
           <p:cNvPicPr>
             <a:picLocks noChangeAspect="1"/>
           </p:cNvPicPr>
@@ -14067,14 +15719,59 @@
       </p:pic>
       <p:sp>
         <p:nvSpPr>
-          <p:cNvPr id="21" name="TextBox 20"/>
-          <p:cNvSpPr txBox="1"/>
-          <p:nvPr/>
-        </p:nvSpPr>
-        <p:spPr>
-          <a:xfrm>
-            <a:off x="4508500" y="6134100"/>
-            <a:ext cx="3441700" cy="190500"/>
+          <p:cNvPr id="22" name="Rectangle 21"/>
+          <p:cNvSpPr/>
+          <p:nvPr/>
+        </p:nvSpPr>
+        <p:spPr>
+          <a:xfrm>
+            <a:off x="4445000" y="6096000"/>
+            <a:ext cx="2247900" cy="254000"/>
+          </a:xfrm>
+          <a:prstGeom prst="rect">
+            <a:avLst/>
+          </a:prstGeom>
+          <a:solidFill>
+            <a:srgbClr val="141412">
+              <a:alpha val="62000"/>
+            </a:srgbClr>
+          </a:solidFill>
+          <a:ln>
+            <a:noFill/>
+          </a:ln>
+        </p:spPr>
+        <p:style>
+          <a:lnRef idx="1">
+            <a:schemeClr val="accent1"/>
+          </a:lnRef>
+          <a:fillRef idx="3">
+            <a:schemeClr val="accent1"/>
+          </a:fillRef>
+          <a:effectRef idx="2">
+            <a:schemeClr val="accent1"/>
+          </a:effectRef>
+          <a:fontRef idx="minor">
+            <a:schemeClr val="lt1"/>
+          </a:fontRef>
+        </p:style>
+        <p:txBody>
+          <a:bodyPr rtlCol="0" anchor="ctr"/>
+          <a:lstStyle/>
+          <a:p>
+            <a:pPr algn="ctr"/>
+          </a:p>
+        </p:txBody>
+      </p:sp>
+      <p:sp>
+        <p:nvSpPr>
+          <p:cNvPr id="23" name="TextBox 22"/>
+          <p:cNvSpPr txBox="1"/>
+          <p:nvPr/>
+        </p:nvSpPr>
+        <p:spPr>
+          <a:xfrm>
+            <a:off x="4495800" y="6108700"/>
+            <a:ext cx="3467100" cy="215900"/>
           </a:xfrm>
           <a:prstGeom prst="rect">
             <a:avLst/>
@@ -14094,14 +15791,14 @@
                 </a:solidFill>
                 <a:latin typeface="Inter"/>
               </a:rPr>
-              <a:t>Experience centre - story wall (preview render)</a:t>
+              <a:t>Experience centre - story wall</a:t>
             </a:r>
           </a:p>
         </p:txBody>
       </p:sp>
       <p:pic>
         <p:nvPicPr>
-          <p:cNvPr id="22" name="Picture 21" descr="CAM_06_Experience_Centre_Detail.jpg"/>
+          <p:cNvPr id="24" name="Picture 23" descr="CAM_06_Experience_Centre_Detail.jpg"/>
           <p:cNvPicPr>
             <a:picLocks noChangeAspect="1"/>
           </p:cNvPicPr>
@@ -14126,14 +15823,59 @@
       </p:pic>
       <p:sp>
         <p:nvSpPr>
-          <p:cNvPr id="23" name="TextBox 22"/>
-          <p:cNvSpPr txBox="1"/>
-          <p:nvPr/>
-        </p:nvSpPr>
-        <p:spPr>
-          <a:xfrm>
-            <a:off x="8178800" y="6134100"/>
-            <a:ext cx="3441700" cy="190500"/>
+          <p:cNvPr id="25" name="Rectangle 24"/>
+          <p:cNvSpPr/>
+          <p:nvPr/>
+        </p:nvSpPr>
+        <p:spPr>
+          <a:xfrm>
+            <a:off x="8115300" y="6096000"/>
+            <a:ext cx="2311400" cy="254000"/>
+          </a:xfrm>
+          <a:prstGeom prst="rect">
+            <a:avLst/>
+          </a:prstGeom>
+          <a:solidFill>
+            <a:srgbClr val="141412">
+              <a:alpha val="62000"/>
+            </a:srgbClr>
+          </a:solidFill>
+          <a:ln>
+            <a:noFill/>
+          </a:ln>
+        </p:spPr>
+        <p:style>
+          <a:lnRef idx="1">
+            <a:schemeClr val="accent1"/>
+          </a:lnRef>
+          <a:fillRef idx="3">
+            <a:schemeClr val="accent1"/>
+          </a:fillRef>
+          <a:effectRef idx="2">
+            <a:schemeClr val="accent1"/>
+          </a:effectRef>
+          <a:fontRef idx="minor">
+            <a:schemeClr val="lt1"/>
+          </a:fontRef>
+        </p:style>
+        <p:txBody>
+          <a:bodyPr rtlCol="0" anchor="ctr"/>
+          <a:lstStyle/>
+          <a:p>
+            <a:pPr algn="ctr"/>
+          </a:p>
+        </p:txBody>
+      </p:sp>
+      <p:sp>
+        <p:nvSpPr>
+          <p:cNvPr id="26" name="TextBox 25"/>
+          <p:cNvSpPr txBox="1"/>
+          <p:nvPr/>
+        </p:nvSpPr>
+        <p:spPr>
+          <a:xfrm>
+            <a:off x="8166100" y="6108700"/>
+            <a:ext cx="3467100" cy="215900"/>
           </a:xfrm>
           <a:prstGeom prst="rect">
             <a:avLst/>
@@ -14160,7 +15902,7 @@
       </p:sp>
       <p:sp>
         <p:nvSpPr>
-          <p:cNvPr id="24" name="TextBox 23"/>
+          <p:cNvPr id="27" name="TextBox 26"/>
           <p:cNvSpPr txBox="1"/>
           <p:nvPr/>
         </p:nvSpPr>
@@ -14194,7 +15936,7 @@
       </p:sp>
       <p:sp>
         <p:nvSpPr>
-          <p:cNvPr id="25" name="TextBox 24"/>
+          <p:cNvPr id="28" name="TextBox 27"/>
           <p:cNvSpPr txBox="1"/>
           <p:nvPr/>
         </p:nvSpPr>
@@ -14295,7 +16037,7 @@
         <p:spPr>
           <a:xfrm>
             <a:off x="508000" y="863600"/>
-            <a:ext cx="3683000" cy="1524000"/>
+            <a:ext cx="3683000" cy="952500"/>
           </a:xfrm>
           <a:prstGeom prst="rect">
             <a:avLst/>
@@ -14328,22 +16070,22 @@
         </p:nvSpPr>
         <p:spPr>
           <a:xfrm>
-            <a:off x="508000" y="2540000"/>
-            <a:ext cx="3683000" cy="2349500"/>
-          </a:xfrm>
-          <a:prstGeom prst="rect">
-            <a:avLst/>
-          </a:prstGeom>
-          <a:noFill/>
-        </p:spPr>
-        <p:txBody>
-          <a:bodyPr wrap="square">
-            <a:spAutoFit/>
-          </a:bodyPr>
-          <a:lstStyle/>
-          <a:p>
-            <a:r>
-              <a:rPr sz="1400" b="0">
+            <a:off x="508000" y="1841500"/>
+            <a:ext cx="3683000" cy="3048000"/>
+          </a:xfrm>
+          <a:prstGeom prst="rect">
+            <a:avLst/>
+          </a:prstGeom>
+          <a:noFill/>
+        </p:spPr>
+        <p:txBody>
+          <a:bodyPr wrap="square">
+            <a:spAutoFit/>
+          </a:bodyPr>
+          <a:lstStyle/>
+          <a:p>
+            <a:r>
+              <a:rPr sz="1300" b="0">
                 <a:solidFill>
                   <a:srgbClr val="5A5750"/>
                 </a:solidFill>
@@ -14354,7 +16096,7 @@
           </a:p>
           <a:p>
             <a:r>
-              <a:rPr sz="1400" b="0">
+              <a:rPr sz="1300" b="0">
                 <a:solidFill>
                   <a:srgbClr val="5A5750"/>
                 </a:solidFill>
@@ -14365,7 +16107,7 @@
           </a:p>
           <a:p>
             <a:r>
-              <a:rPr sz="1400" b="0">
+              <a:rPr sz="1300" b="0">
                 <a:solidFill>
                   <a:srgbClr val="5A5750"/>
                 </a:solidFill>
@@ -14376,7 +16118,7 @@
           </a:p>
           <a:p>
             <a:r>
-              <a:rPr sz="1400" b="0">
+              <a:rPr sz="1300" b="0">
                 <a:solidFill>
                   <a:srgbClr val="5A5750"/>
                 </a:solidFill>
@@ -14387,7 +16129,7 @@
           </a:p>
           <a:p>
             <a:r>
-              <a:rPr sz="1400" b="0">
+              <a:rPr sz="1300" b="0">
                 <a:solidFill>
                   <a:srgbClr val="5A5750"/>
                 </a:solidFill>
@@ -14398,7 +16140,7 @@
           </a:p>
           <a:p>
             <a:r>
-              <a:rPr sz="1400" b="0">
+              <a:rPr sz="1300" b="0">
                 <a:solidFill>
                   <a:srgbClr val="5A5750"/>
                 </a:solidFill>
@@ -14409,7 +16151,7 @@
           </a:p>
           <a:p>
             <a:r>
-              <a:rPr sz="1400" b="0">
+              <a:rPr sz="1300" b="0">
                 <a:solidFill>
                   <a:srgbClr val="5A5750"/>
                 </a:solidFill>
@@ -14849,14 +16591,59 @@
       </p:pic>
       <p:sp>
         <p:nvSpPr>
-          <p:cNvPr id="19" name="TextBox 18"/>
-          <p:cNvSpPr txBox="1"/>
-          <p:nvPr/>
-        </p:nvSpPr>
-        <p:spPr>
-          <a:xfrm>
-            <a:off x="4508500" y="4000500"/>
-            <a:ext cx="7112000" cy="190500"/>
+          <p:cNvPr id="19" name="Rectangle 18"/>
+          <p:cNvSpPr/>
+          <p:nvPr/>
+        </p:nvSpPr>
+        <p:spPr>
+          <a:xfrm>
+            <a:off x="4445000" y="3962400"/>
+            <a:ext cx="806450" cy="254000"/>
+          </a:xfrm>
+          <a:prstGeom prst="rect">
+            <a:avLst/>
+          </a:prstGeom>
+          <a:solidFill>
+            <a:srgbClr val="141412">
+              <a:alpha val="62000"/>
+            </a:srgbClr>
+          </a:solidFill>
+          <a:ln>
+            <a:noFill/>
+          </a:ln>
+        </p:spPr>
+        <p:style>
+          <a:lnRef idx="1">
+            <a:schemeClr val="accent1"/>
+          </a:lnRef>
+          <a:fillRef idx="3">
+            <a:schemeClr val="accent1"/>
+          </a:fillRef>
+          <a:effectRef idx="2">
+            <a:schemeClr val="accent1"/>
+          </a:effectRef>
+          <a:fontRef idx="minor">
+            <a:schemeClr val="lt1"/>
+          </a:fontRef>
+        </p:style>
+        <p:txBody>
+          <a:bodyPr rtlCol="0" anchor="ctr"/>
+          <a:lstStyle/>
+          <a:p>
+            <a:pPr algn="ctr"/>
+          </a:p>
+        </p:txBody>
+      </p:sp>
+      <p:sp>
+        <p:nvSpPr>
+          <p:cNvPr id="20" name="TextBox 19"/>
+          <p:cNvSpPr txBox="1"/>
+          <p:nvPr/>
+        </p:nvSpPr>
+        <p:spPr>
+          <a:xfrm>
+            <a:off x="4495800" y="3975100"/>
+            <a:ext cx="7137400" cy="215900"/>
           </a:xfrm>
           <a:prstGeom prst="rect">
             <a:avLst/>
@@ -14883,7 +16670,7 @@
       </p:sp>
       <p:pic>
         <p:nvPicPr>
-          <p:cNvPr id="20" name="Picture 19" descr="CAM_08_MD_Office_B.jpg"/>
+          <p:cNvPr id="21" name="Picture 20" descr="CAM_08_MD_Office_B.jpg"/>
           <p:cNvPicPr>
             <a:picLocks noChangeAspect="1"/>
           </p:cNvPicPr>
@@ -14908,14 +16695,59 @@
       </p:pic>
       <p:sp>
         <p:nvSpPr>
-          <p:cNvPr id="21" name="TextBox 20"/>
-          <p:cNvSpPr txBox="1"/>
-          <p:nvPr/>
-        </p:nvSpPr>
-        <p:spPr>
-          <a:xfrm>
-            <a:off x="4508500" y="6134100"/>
-            <a:ext cx="3441700" cy="190500"/>
+          <p:cNvPr id="22" name="Rectangle 21"/>
+          <p:cNvSpPr/>
+          <p:nvPr/>
+        </p:nvSpPr>
+        <p:spPr>
+          <a:xfrm>
+            <a:off x="4445000" y="6096000"/>
+            <a:ext cx="3067050" cy="254000"/>
+          </a:xfrm>
+          <a:prstGeom prst="rect">
+            <a:avLst/>
+          </a:prstGeom>
+          <a:solidFill>
+            <a:srgbClr val="141412">
+              <a:alpha val="62000"/>
+            </a:srgbClr>
+          </a:solidFill>
+          <a:ln>
+            <a:noFill/>
+          </a:ln>
+        </p:spPr>
+        <p:style>
+          <a:lnRef idx="1">
+            <a:schemeClr val="accent1"/>
+          </a:lnRef>
+          <a:fillRef idx="3">
+            <a:schemeClr val="accent1"/>
+          </a:fillRef>
+          <a:effectRef idx="2">
+            <a:schemeClr val="accent1"/>
+          </a:effectRef>
+          <a:fontRef idx="minor">
+            <a:schemeClr val="lt1"/>
+          </a:fontRef>
+        </p:style>
+        <p:txBody>
+          <a:bodyPr rtlCol="0" anchor="ctr"/>
+          <a:lstStyle/>
+          <a:p>
+            <a:pPr algn="ctr"/>
+          </a:p>
+        </p:txBody>
+      </p:sp>
+      <p:sp>
+        <p:nvSpPr>
+          <p:cNvPr id="23" name="TextBox 22"/>
+          <p:cNvSpPr txBox="1"/>
+          <p:nvPr/>
+        </p:nvSpPr>
+        <p:spPr>
+          <a:xfrm>
+            <a:off x="4495800" y="6108700"/>
+            <a:ext cx="3467100" cy="215900"/>
           </a:xfrm>
           <a:prstGeom prst="rect">
             <a:avLst/>
@@ -14942,7 +16774,7 @@
       </p:sp>
       <p:pic>
         <p:nvPicPr>
-          <p:cNvPr id="22" name="Picture 21" descr="CAM_17_Executive_Reception.jpg"/>
+          <p:cNvPr id="24" name="Picture 23" descr="CAM_17_Executive_Reception.jpg"/>
           <p:cNvPicPr>
             <a:picLocks noChangeAspect="1"/>
           </p:cNvPicPr>
@@ -14967,14 +16799,59 @@
       </p:pic>
       <p:sp>
         <p:nvSpPr>
-          <p:cNvPr id="23" name="TextBox 22"/>
-          <p:cNvSpPr txBox="1"/>
-          <p:nvPr/>
-        </p:nvSpPr>
-        <p:spPr>
-          <a:xfrm>
-            <a:off x="8178800" y="6134100"/>
-            <a:ext cx="3441700" cy="190500"/>
+          <p:cNvPr id="25" name="Rectangle 24"/>
+          <p:cNvSpPr/>
+          <p:nvPr/>
+        </p:nvSpPr>
+        <p:spPr>
+          <a:xfrm>
+            <a:off x="8115300" y="6096000"/>
+            <a:ext cx="2997200" cy="254000"/>
+          </a:xfrm>
+          <a:prstGeom prst="rect">
+            <a:avLst/>
+          </a:prstGeom>
+          <a:solidFill>
+            <a:srgbClr val="141412">
+              <a:alpha val="62000"/>
+            </a:srgbClr>
+          </a:solidFill>
+          <a:ln>
+            <a:noFill/>
+          </a:ln>
+        </p:spPr>
+        <p:style>
+          <a:lnRef idx="1">
+            <a:schemeClr val="accent1"/>
+          </a:lnRef>
+          <a:fillRef idx="3">
+            <a:schemeClr val="accent1"/>
+          </a:fillRef>
+          <a:effectRef idx="2">
+            <a:schemeClr val="accent1"/>
+          </a:effectRef>
+          <a:fontRef idx="minor">
+            <a:schemeClr val="lt1"/>
+          </a:fontRef>
+        </p:style>
+        <p:txBody>
+          <a:bodyPr rtlCol="0" anchor="ctr"/>
+          <a:lstStyle/>
+          <a:p>
+            <a:pPr algn="ctr"/>
+          </a:p>
+        </p:txBody>
+      </p:sp>
+      <p:sp>
+        <p:nvSpPr>
+          <p:cNvPr id="26" name="TextBox 25"/>
+          <p:cNvSpPr txBox="1"/>
+          <p:nvPr/>
+        </p:nvSpPr>
+        <p:spPr>
+          <a:xfrm>
+            <a:off x="8166100" y="6108700"/>
+            <a:ext cx="3467100" cy="215900"/>
           </a:xfrm>
           <a:prstGeom prst="rect">
             <a:avLst/>
@@ -15001,7 +16878,7 @@
       </p:sp>
       <p:sp>
         <p:nvSpPr>
-          <p:cNvPr id="24" name="TextBox 23"/>
+          <p:cNvPr id="27" name="TextBox 26"/>
           <p:cNvSpPr txBox="1"/>
           <p:nvPr/>
         </p:nvSpPr>
@@ -15035,7 +16912,7 @@
       </p:sp>
       <p:sp>
         <p:nvSpPr>
-          <p:cNvPr id="25" name="TextBox 24"/>
+          <p:cNvPr id="28" name="TextBox 27"/>
           <p:cNvSpPr txBox="1"/>
           <p:nvPr/>
         </p:nvSpPr>
